--- a/social/pptx/kz-scientists.pptx
+++ b/social/pptx/kz-scientists.pptx
@@ -1758,325 +1758,9 @@
           </a:p>
         </p:txBody>
       </p:sp>
-      <p:sp>
-        <p:nvSpPr>
-          <p:cNvPr id="8" name="text-7"/>
-          <p:cNvSpPr txBox="1"/>
-          <p:nvPr/>
-        </p:nvSpPr>
-        <p:spPr>
-          <a:xfrm>
-            <a:off x="457200" y="3936355"/>
-            <a:ext cx="6300216" cy="508000"/>
-          </a:xfrm>
-          <a:prstGeom prst="rect">
-            <a:avLst/>
-          </a:prstGeom>
-          <a:noFill/>
-          <a:ln/>
-        </p:spPr>
-        <p:txBody>
-          <a:bodyPr wrap="square" lIns="0" tIns="0" rIns="0" bIns="0" rtlCol="0" anchor="t"/>
-          <a:lstStyle/>
-          <a:p>
-            <a:pPr algn="l" indent="0" marL="0">
-              <a:lnSpc>
-                <a:spcPts val="3990"/>
-              </a:lnSpc>
-              <a:buNone/>
-            </a:pPr>
-            <a:r>
-              <a:rPr lang="en-US" sz="3800" i="1" dirty="0">
-                <a:solidFill>
-                  <a:srgbClr val="0A0A0A"/>
-                </a:solidFill>
-                <a:latin typeface="Noto Serif Display Light" pitchFamily="34" charset="0"/>
-                <a:ea typeface="Noto Serif Display Light" pitchFamily="34" charset="-122"/>
-                <a:cs typeface="Noto Serif Display Light" pitchFamily="34" charset="-120"/>
-              </a:rPr>
-              <a:t>Сәтбаев</a:t>
-            </a:r>
-            <a:endParaRPr lang="en-US" sz="3800" dirty="0"/>
-          </a:p>
-        </p:txBody>
-      </p:sp>
-      <p:sp>
-        <p:nvSpPr>
-          <p:cNvPr id="9" name="text-8"/>
-          <p:cNvSpPr txBox="1"/>
-          <p:nvPr/>
-        </p:nvSpPr>
-        <p:spPr>
-          <a:xfrm>
-            <a:off x="1219200" y="4531965"/>
-            <a:ext cx="5492496" cy="508000"/>
-          </a:xfrm>
-          <a:prstGeom prst="rect">
-            <a:avLst/>
-          </a:prstGeom>
-          <a:noFill/>
-          <a:ln/>
-        </p:spPr>
-        <p:txBody>
-          <a:bodyPr wrap="square" lIns="0" tIns="0" rIns="0" bIns="0" rtlCol="0" anchor="t"/>
-          <a:lstStyle/>
-          <a:p>
-            <a:pPr algn="l" indent="0" marL="0">
-              <a:lnSpc>
-                <a:spcPts val="3990"/>
-              </a:lnSpc>
-              <a:buNone/>
-            </a:pPr>
-            <a:r>
-              <a:rPr lang="en-US" sz="3800" i="1" dirty="0">
-                <a:solidFill>
-                  <a:srgbClr val="0A0A0A"/>
-                </a:solidFill>
-                <a:latin typeface="Noto Serif Display Light" pitchFamily="34" charset="0"/>
-                <a:ea typeface="Noto Serif Display Light" pitchFamily="34" charset="-122"/>
-                <a:cs typeface="Noto Serif Display Light" pitchFamily="34" charset="-120"/>
-              </a:rPr>
-              <a:t>Уәлиханов</a:t>
-            </a:r>
-            <a:endParaRPr lang="en-US" sz="3800" dirty="0"/>
-          </a:p>
-        </p:txBody>
-      </p:sp>
-      <p:sp>
-        <p:nvSpPr>
-          <p:cNvPr id="10" name="text-9"/>
-          <p:cNvSpPr txBox="1"/>
-          <p:nvPr/>
-        </p:nvSpPr>
-        <p:spPr>
-          <a:xfrm>
-            <a:off x="457200" y="5127575"/>
-            <a:ext cx="6300216" cy="508000"/>
-          </a:xfrm>
-          <a:prstGeom prst="rect">
-            <a:avLst/>
-          </a:prstGeom>
-          <a:noFill/>
-          <a:ln/>
-        </p:spPr>
-        <p:txBody>
-          <a:bodyPr wrap="square" lIns="0" tIns="0" rIns="0" bIns="0" rtlCol="0" anchor="t"/>
-          <a:lstStyle/>
-          <a:p>
-            <a:pPr algn="l" indent="0" marL="0">
-              <a:lnSpc>
-                <a:spcPts val="3990"/>
-              </a:lnSpc>
-              <a:buNone/>
-            </a:pPr>
-            <a:r>
-              <a:rPr lang="en-US" sz="3800" i="1" dirty="0">
-                <a:solidFill>
-                  <a:srgbClr val="0A0A0A"/>
-                </a:solidFill>
-                <a:latin typeface="Noto Serif Display Light" pitchFamily="34" charset="0"/>
-                <a:ea typeface="Noto Serif Display Light" pitchFamily="34" charset="-122"/>
-                <a:cs typeface="Noto Serif Display Light" pitchFamily="34" charset="-120"/>
-              </a:rPr>
-              <a:t>Бөкетов</a:t>
-            </a:r>
-            <a:endParaRPr lang="en-US" sz="3800" dirty="0"/>
-          </a:p>
-        </p:txBody>
-      </p:sp>
-      <p:sp>
-        <p:nvSpPr>
-          <p:cNvPr id="11" name="text-10"/>
-          <p:cNvSpPr txBox="1"/>
-          <p:nvPr/>
-        </p:nvSpPr>
-        <p:spPr>
-          <a:xfrm>
-            <a:off x="1219200" y="5723186"/>
-            <a:ext cx="5492496" cy="508000"/>
-          </a:xfrm>
-          <a:prstGeom prst="rect">
-            <a:avLst/>
-          </a:prstGeom>
-          <a:noFill/>
-          <a:ln/>
-        </p:spPr>
-        <p:txBody>
-          <a:bodyPr wrap="square" lIns="0" tIns="0" rIns="0" bIns="0" rtlCol="0" anchor="t"/>
-          <a:lstStyle/>
-          <a:p>
-            <a:pPr algn="l" indent="0" marL="0">
-              <a:lnSpc>
-                <a:spcPts val="3990"/>
-              </a:lnSpc>
-              <a:buNone/>
-            </a:pPr>
-            <a:r>
-              <a:rPr lang="en-US" sz="3800" i="1" dirty="0">
-                <a:solidFill>
-                  <a:srgbClr val="0A0A0A"/>
-                </a:solidFill>
-                <a:latin typeface="Noto Serif Display Light" pitchFamily="34" charset="0"/>
-                <a:ea typeface="Noto Serif Display Light" pitchFamily="34" charset="-122"/>
-                <a:cs typeface="Noto Serif Display Light" pitchFamily="34" charset="-120"/>
-              </a:rPr>
-              <a:t>Сұлтанғазин</a:t>
-            </a:r>
-            <a:endParaRPr lang="en-US" sz="3800" dirty="0"/>
-          </a:p>
-        </p:txBody>
-      </p:sp>
-      <p:sp>
-        <p:nvSpPr>
-          <p:cNvPr id="12" name="text-11"/>
-          <p:cNvSpPr txBox="1"/>
-          <p:nvPr/>
-        </p:nvSpPr>
-        <p:spPr>
-          <a:xfrm>
-            <a:off x="457200" y="6318796"/>
-            <a:ext cx="6300216" cy="508000"/>
-          </a:xfrm>
-          <a:prstGeom prst="rect">
-            <a:avLst/>
-          </a:prstGeom>
-          <a:noFill/>
-          <a:ln/>
-        </p:spPr>
-        <p:txBody>
-          <a:bodyPr wrap="square" lIns="0" tIns="0" rIns="0" bIns="0" rtlCol="0" anchor="t"/>
-          <a:lstStyle/>
-          <a:p>
-            <a:pPr algn="l" indent="0" marL="0">
-              <a:lnSpc>
-                <a:spcPts val="3990"/>
-              </a:lnSpc>
-              <a:buNone/>
-            </a:pPr>
-            <a:r>
-              <a:rPr lang="en-US" sz="3800" i="1" dirty="0">
-                <a:solidFill>
-                  <a:srgbClr val="0A0A0A"/>
-                </a:solidFill>
-                <a:latin typeface="Noto Serif Display Light" pitchFamily="34" charset="0"/>
-                <a:ea typeface="Noto Serif Display Light" pitchFamily="34" charset="-122"/>
-                <a:cs typeface="Noto Serif Display Light" pitchFamily="34" charset="-120"/>
-              </a:rPr>
-              <a:t>Айтхожин</a:t>
-            </a:r>
-            <a:endParaRPr lang="en-US" sz="3800" dirty="0"/>
-          </a:p>
-        </p:txBody>
-      </p:sp>
-      <p:sp>
-        <p:nvSpPr>
-          <p:cNvPr id="13" name="text-12"/>
-          <p:cNvSpPr txBox="1"/>
-          <p:nvPr/>
-        </p:nvSpPr>
-        <p:spPr>
-          <a:xfrm>
-            <a:off x="457845" y="7969250"/>
-            <a:ext cx="895223" cy="171450"/>
-          </a:xfrm>
-          <a:prstGeom prst="rect">
-            <a:avLst/>
-          </a:prstGeom>
-          <a:noFill/>
-          <a:ln/>
-        </p:spPr>
-        <p:txBody>
-          <a:bodyPr wrap="square" lIns="0" tIns="0" rIns="0" bIns="0" rtlCol="0" anchor="t"/>
-          <a:lstStyle/>
-          <a:p>
-            <a:pPr algn="l" indent="0" marL="0">
-              <a:lnSpc>
-                <a:spcPts val="1200"/>
-              </a:lnSpc>
-              <a:buNone/>
-            </a:pPr>
-            <a:r>
-              <a:rPr lang="en-US" sz="1000" spc="140" kern="0" dirty="0">
-                <a:solidFill>
-                  <a:srgbClr val="0A0A0A"/>
-                </a:solidFill>
-                <a:latin typeface="IBM Plex Mono" pitchFamily="34" charset="0"/>
-                <a:ea typeface="IBM Plex Mono" pitchFamily="34" charset="-122"/>
-                <a:cs typeface="IBM Plex Mono" pitchFamily="34" charset="-120"/>
-              </a:rPr>
-              <a:t>@NURZYCOM</a:t>
-            </a:r>
-            <a:endParaRPr lang="en-US" sz="1000" dirty="0"/>
-          </a:p>
-        </p:txBody>
-      </p:sp>
-      <p:sp>
-        <p:nvSpPr>
-          <p:cNvPr id="14" name="shape-13"/>
-          <p:cNvSpPr/>
-          <p:nvPr/>
-        </p:nvSpPr>
-        <p:spPr>
-          <a:xfrm>
-            <a:off x="5060305" y="7893050"/>
-            <a:ext cx="1339850" cy="323850"/>
-          </a:xfrm>
-          <a:prstGeom prst="roundRect">
-            <a:avLst>
-              <a:gd name="adj" fmla="val 50000"/>
-            </a:avLst>
-          </a:prstGeom>
-          <a:solidFill>
-            <a:srgbClr val="0A0A0A"/>
-          </a:solidFill>
-          <a:ln/>
-        </p:spPr>
-      </p:sp>
-      <p:sp>
-        <p:nvSpPr>
-          <p:cNvPr id="15" name="text-14"/>
-          <p:cNvSpPr txBox="1"/>
-          <p:nvPr/>
-        </p:nvSpPr>
-        <p:spPr>
-          <a:xfrm>
-            <a:off x="5200005" y="7969250"/>
-            <a:ext cx="895223" cy="171450"/>
-          </a:xfrm>
-          <a:prstGeom prst="rect">
-            <a:avLst/>
-          </a:prstGeom>
-          <a:noFill/>
-          <a:ln/>
-        </p:spPr>
-        <p:txBody>
-          <a:bodyPr wrap="square" lIns="0" tIns="0" rIns="0" bIns="0" rtlCol="0" anchor="t"/>
-          <a:lstStyle/>
-          <a:p>
-            <a:pPr algn="l" indent="0" marL="0">
-              <a:lnSpc>
-                <a:spcPts val="1200"/>
-              </a:lnSpc>
-              <a:buNone/>
-            </a:pPr>
-            <a:r>
-              <a:rPr lang="en-US" sz="1000" spc="140" kern="0" dirty="0">
-                <a:solidFill>
-                  <a:srgbClr val="FAF8F3"/>
-                </a:solidFill>
-                <a:latin typeface="IBM Plex Mono" pitchFamily="34" charset="0"/>
-                <a:ea typeface="IBM Plex Mono" pitchFamily="34" charset="-122"/>
-                <a:cs typeface="IBM Plex Mono" pitchFamily="34" charset="-120"/>
-              </a:rPr>
-              <a:t>ӘРІ ҚАРАЙ</a:t>
-            </a:r>
-            <a:endParaRPr lang="en-US" sz="1000" dirty="0"/>
-          </a:p>
-        </p:txBody>
-      </p:sp>
       <p:pic>
         <p:nvPicPr>
-          <p:cNvPr id="16" name="svg-15" descr="preencoded.png">    </p:cNvPr>
+          <p:cNvPr id="8" name="img-7" descr="preencoded.png">    </p:cNvPr>
           <p:cNvPicPr>
             <a:picLocks noChangeAspect="1"/>
           </p:cNvPicPr>
@@ -2090,6 +1774,442 @@
         </p:blipFill>
         <p:spPr>
           <a:xfrm>
+            <a:off x="457200" y="3556000"/>
+            <a:ext cx="520700" cy="520700"/>
+          </a:xfrm>
+          <a:prstGeom prst="rect">
+            <a:avLst/>
+          </a:prstGeom>
+        </p:spPr>
+      </p:pic>
+      <p:sp>
+        <p:nvSpPr>
+          <p:cNvPr id="9" name="text-8"/>
+          <p:cNvSpPr txBox="1"/>
+          <p:nvPr/>
+        </p:nvSpPr>
+        <p:spPr>
+          <a:xfrm>
+            <a:off x="1880791" y="3581400"/>
+            <a:ext cx="1857756" cy="469900"/>
+          </a:xfrm>
+          <a:prstGeom prst="rect">
+            <a:avLst/>
+          </a:prstGeom>
+          <a:noFill/>
+          <a:ln/>
+        </p:spPr>
+        <p:txBody>
+          <a:bodyPr wrap="square" lIns="0" tIns="0" rIns="0" bIns="0" rtlCol="0" anchor="t"/>
+          <a:lstStyle/>
+          <a:p>
+            <a:pPr algn="l" indent="0" marL="0">
+              <a:lnSpc>
+                <a:spcPts val="3680"/>
+              </a:lnSpc>
+              <a:buNone/>
+            </a:pPr>
+            <a:r>
+              <a:rPr lang="en-US" sz="3500" i="1" dirty="0">
+                <a:solidFill>
+                  <a:srgbClr val="0A0A0A"/>
+                </a:solidFill>
+                <a:latin typeface="Noto Serif Display Light" pitchFamily="34" charset="0"/>
+                <a:ea typeface="Noto Serif Display Light" pitchFamily="34" charset="-122"/>
+                <a:cs typeface="Noto Serif Display Light" pitchFamily="34" charset="-120"/>
+              </a:rPr>
+              <a:t>Сәтбаев</a:t>
+            </a:r>
+            <a:endParaRPr lang="en-US" sz="3500" dirty="0"/>
+          </a:p>
+        </p:txBody>
+      </p:sp>
+      <p:pic>
+        <p:nvPicPr>
+          <p:cNvPr id="10" name="img-9" descr="preencoded.png">    </p:cNvPr>
+          <p:cNvPicPr>
+            <a:picLocks noChangeAspect="1"/>
+          </p:cNvPicPr>
+          <p:nvPr/>
+        </p:nvPicPr>
+        <p:blipFill>
+          <a:blip r:embed="rId4"/>
+          <a:stretch>
+            <a:fillRect/>
+          </a:stretch>
+        </p:blipFill>
+        <p:spPr>
+          <a:xfrm>
+            <a:off x="1219200" y="4152900"/>
+            <a:ext cx="520700" cy="520700"/>
+          </a:xfrm>
+          <a:prstGeom prst="rect">
+            <a:avLst/>
+          </a:prstGeom>
+        </p:spPr>
+      </p:pic>
+      <p:sp>
+        <p:nvSpPr>
+          <p:cNvPr id="11" name="text-10"/>
+          <p:cNvSpPr txBox="1"/>
+          <p:nvPr/>
+        </p:nvSpPr>
+        <p:spPr>
+          <a:xfrm>
+            <a:off x="2641501" y="4178300"/>
+            <a:ext cx="2322195" cy="469900"/>
+          </a:xfrm>
+          <a:prstGeom prst="rect">
+            <a:avLst/>
+          </a:prstGeom>
+          <a:noFill/>
+          <a:ln/>
+        </p:spPr>
+        <p:txBody>
+          <a:bodyPr wrap="square" lIns="0" tIns="0" rIns="0" bIns="0" rtlCol="0" anchor="t"/>
+          <a:lstStyle/>
+          <a:p>
+            <a:pPr algn="l" indent="0" marL="0">
+              <a:lnSpc>
+                <a:spcPts val="3680"/>
+              </a:lnSpc>
+              <a:buNone/>
+            </a:pPr>
+            <a:r>
+              <a:rPr lang="en-US" sz="3500" i="1" dirty="0">
+                <a:solidFill>
+                  <a:srgbClr val="0A0A0A"/>
+                </a:solidFill>
+                <a:latin typeface="Noto Serif Display Light" pitchFamily="34" charset="0"/>
+                <a:ea typeface="Noto Serif Display Light" pitchFamily="34" charset="-122"/>
+                <a:cs typeface="Noto Serif Display Light" pitchFamily="34" charset="-120"/>
+              </a:rPr>
+              <a:t>Уәлиханов</a:t>
+            </a:r>
+            <a:endParaRPr lang="en-US" sz="3500" dirty="0"/>
+          </a:p>
+        </p:txBody>
+      </p:sp>
+      <p:pic>
+        <p:nvPicPr>
+          <p:cNvPr id="12" name="img-11" descr="preencoded.png">    </p:cNvPr>
+          <p:cNvPicPr>
+            <a:picLocks noChangeAspect="1"/>
+          </p:cNvPicPr>
+          <p:nvPr/>
+        </p:nvPicPr>
+        <p:blipFill>
+          <a:blip r:embed="rId5"/>
+          <a:stretch>
+            <a:fillRect/>
+          </a:stretch>
+        </p:blipFill>
+        <p:spPr>
+          <a:xfrm>
+            <a:off x="457200" y="4749800"/>
+            <a:ext cx="520700" cy="520700"/>
+          </a:xfrm>
+          <a:prstGeom prst="rect">
+            <a:avLst/>
+          </a:prstGeom>
+        </p:spPr>
+      </p:pic>
+      <p:sp>
+        <p:nvSpPr>
+          <p:cNvPr id="13" name="text-12"/>
+          <p:cNvSpPr txBox="1"/>
+          <p:nvPr/>
+        </p:nvSpPr>
+        <p:spPr>
+          <a:xfrm>
+            <a:off x="1880939" y="4775200"/>
+            <a:ext cx="1884680" cy="469900"/>
+          </a:xfrm>
+          <a:prstGeom prst="rect">
+            <a:avLst/>
+          </a:prstGeom>
+          <a:noFill/>
+          <a:ln/>
+        </p:spPr>
+        <p:txBody>
+          <a:bodyPr wrap="square" lIns="0" tIns="0" rIns="0" bIns="0" rtlCol="0" anchor="t"/>
+          <a:lstStyle/>
+          <a:p>
+            <a:pPr algn="l" indent="0" marL="0">
+              <a:lnSpc>
+                <a:spcPts val="3680"/>
+              </a:lnSpc>
+              <a:buNone/>
+            </a:pPr>
+            <a:r>
+              <a:rPr lang="en-US" sz="3500" i="1" dirty="0">
+                <a:solidFill>
+                  <a:srgbClr val="0A0A0A"/>
+                </a:solidFill>
+                <a:latin typeface="Noto Serif Display Light" pitchFamily="34" charset="0"/>
+                <a:ea typeface="Noto Serif Display Light" pitchFamily="34" charset="-122"/>
+                <a:cs typeface="Noto Serif Display Light" pitchFamily="34" charset="-120"/>
+              </a:rPr>
+              <a:t>Бөкетов</a:t>
+            </a:r>
+            <a:endParaRPr lang="en-US" sz="3500" dirty="0"/>
+          </a:p>
+        </p:txBody>
+      </p:sp>
+      <p:pic>
+        <p:nvPicPr>
+          <p:cNvPr id="14" name="img-13" descr="preencoded.png">    </p:cNvPr>
+          <p:cNvPicPr>
+            <a:picLocks noChangeAspect="1"/>
+          </p:cNvPicPr>
+          <p:nvPr/>
+        </p:nvPicPr>
+        <p:blipFill>
+          <a:blip r:embed="rId6"/>
+          <a:stretch>
+            <a:fillRect/>
+          </a:stretch>
+        </p:blipFill>
+        <p:spPr>
+          <a:xfrm>
+            <a:off x="1219200" y="5346700"/>
+            <a:ext cx="520700" cy="520700"/>
+          </a:xfrm>
+          <a:prstGeom prst="rect">
+            <a:avLst/>
+          </a:prstGeom>
+        </p:spPr>
+      </p:pic>
+      <p:sp>
+        <p:nvSpPr>
+          <p:cNvPr id="15" name="text-14"/>
+          <p:cNvSpPr txBox="1"/>
+          <p:nvPr/>
+        </p:nvSpPr>
+        <p:spPr>
+          <a:xfrm>
+            <a:off x="2640112" y="5372100"/>
+            <a:ext cx="2941447" cy="469900"/>
+          </a:xfrm>
+          <a:prstGeom prst="rect">
+            <a:avLst/>
+          </a:prstGeom>
+          <a:noFill/>
+          <a:ln/>
+        </p:spPr>
+        <p:txBody>
+          <a:bodyPr wrap="square" lIns="0" tIns="0" rIns="0" bIns="0" rtlCol="0" anchor="t"/>
+          <a:lstStyle/>
+          <a:p>
+            <a:pPr algn="l" indent="0" marL="0">
+              <a:lnSpc>
+                <a:spcPts val="3680"/>
+              </a:lnSpc>
+              <a:buNone/>
+            </a:pPr>
+            <a:r>
+              <a:rPr lang="en-US" sz="3500" i="1" dirty="0">
+                <a:solidFill>
+                  <a:srgbClr val="0A0A0A"/>
+                </a:solidFill>
+                <a:latin typeface="Noto Serif Display Light" pitchFamily="34" charset="0"/>
+                <a:ea typeface="Noto Serif Display Light" pitchFamily="34" charset="-122"/>
+                <a:cs typeface="Noto Serif Display Light" pitchFamily="34" charset="-120"/>
+              </a:rPr>
+              <a:t>Сұлтанғазин</a:t>
+            </a:r>
+            <a:endParaRPr lang="en-US" sz="3500" dirty="0"/>
+          </a:p>
+        </p:txBody>
+      </p:sp>
+      <p:pic>
+        <p:nvPicPr>
+          <p:cNvPr id="16" name="img-15" descr="preencoded.png">    </p:cNvPr>
+          <p:cNvPicPr>
+            <a:picLocks noChangeAspect="1"/>
+          </p:cNvPicPr>
+          <p:nvPr/>
+        </p:nvPicPr>
+        <p:blipFill>
+          <a:blip r:embed="rId7"/>
+          <a:stretch>
+            <a:fillRect/>
+          </a:stretch>
+        </p:blipFill>
+        <p:spPr>
+          <a:xfrm>
+            <a:off x="457200" y="5943600"/>
+            <a:ext cx="520700" cy="520700"/>
+          </a:xfrm>
+          <a:prstGeom prst="rect">
+            <a:avLst/>
+          </a:prstGeom>
+        </p:spPr>
+      </p:pic>
+      <p:sp>
+        <p:nvSpPr>
+          <p:cNvPr id="17" name="text-16"/>
+          <p:cNvSpPr txBox="1"/>
+          <p:nvPr/>
+        </p:nvSpPr>
+        <p:spPr>
+          <a:xfrm>
+            <a:off x="1879749" y="5969000"/>
+            <a:ext cx="2436622" cy="469900"/>
+          </a:xfrm>
+          <a:prstGeom prst="rect">
+            <a:avLst/>
+          </a:prstGeom>
+          <a:noFill/>
+          <a:ln/>
+        </p:spPr>
+        <p:txBody>
+          <a:bodyPr wrap="square" lIns="0" tIns="0" rIns="0" bIns="0" rtlCol="0" anchor="t"/>
+          <a:lstStyle/>
+          <a:p>
+            <a:pPr algn="l" indent="0" marL="0">
+              <a:lnSpc>
+                <a:spcPts val="3680"/>
+              </a:lnSpc>
+              <a:buNone/>
+            </a:pPr>
+            <a:r>
+              <a:rPr lang="en-US" sz="3500" i="1" dirty="0">
+                <a:solidFill>
+                  <a:srgbClr val="0A0A0A"/>
+                </a:solidFill>
+                <a:latin typeface="Noto Serif Display Light" pitchFamily="34" charset="0"/>
+                <a:ea typeface="Noto Serif Display Light" pitchFamily="34" charset="-122"/>
+                <a:cs typeface="Noto Serif Display Light" pitchFamily="34" charset="-120"/>
+              </a:rPr>
+              <a:t>Айтхожин</a:t>
+            </a:r>
+            <a:endParaRPr lang="en-US" sz="3500" dirty="0"/>
+          </a:p>
+        </p:txBody>
+      </p:sp>
+      <p:sp>
+        <p:nvSpPr>
+          <p:cNvPr id="18" name="text-17"/>
+          <p:cNvSpPr txBox="1"/>
+          <p:nvPr/>
+        </p:nvSpPr>
+        <p:spPr>
+          <a:xfrm>
+            <a:off x="457845" y="7969250"/>
+            <a:ext cx="895223" cy="171450"/>
+          </a:xfrm>
+          <a:prstGeom prst="rect">
+            <a:avLst/>
+          </a:prstGeom>
+          <a:noFill/>
+          <a:ln/>
+        </p:spPr>
+        <p:txBody>
+          <a:bodyPr wrap="square" lIns="0" tIns="0" rIns="0" bIns="0" rtlCol="0" anchor="t"/>
+          <a:lstStyle/>
+          <a:p>
+            <a:pPr algn="l" indent="0" marL="0">
+              <a:lnSpc>
+                <a:spcPts val="1200"/>
+              </a:lnSpc>
+              <a:buNone/>
+            </a:pPr>
+            <a:r>
+              <a:rPr lang="en-US" sz="1000" spc="140" kern="0" dirty="0">
+                <a:solidFill>
+                  <a:srgbClr val="0A0A0A"/>
+                </a:solidFill>
+                <a:latin typeface="IBM Plex Mono" pitchFamily="34" charset="0"/>
+                <a:ea typeface="IBM Plex Mono" pitchFamily="34" charset="-122"/>
+                <a:cs typeface="IBM Plex Mono" pitchFamily="34" charset="-120"/>
+              </a:rPr>
+              <a:t>@NURZYCOM</a:t>
+            </a:r>
+            <a:endParaRPr lang="en-US" sz="1000" dirty="0"/>
+          </a:p>
+        </p:txBody>
+      </p:sp>
+      <p:sp>
+        <p:nvSpPr>
+          <p:cNvPr id="19" name="shape-18"/>
+          <p:cNvSpPr/>
+          <p:nvPr/>
+        </p:nvSpPr>
+        <p:spPr>
+          <a:xfrm>
+            <a:off x="5060305" y="7893050"/>
+            <a:ext cx="1339850" cy="323850"/>
+          </a:xfrm>
+          <a:prstGeom prst="roundRect">
+            <a:avLst>
+              <a:gd name="adj" fmla="val 50000"/>
+            </a:avLst>
+          </a:prstGeom>
+          <a:solidFill>
+            <a:srgbClr val="0A0A0A"/>
+          </a:solidFill>
+          <a:ln/>
+        </p:spPr>
+      </p:sp>
+      <p:sp>
+        <p:nvSpPr>
+          <p:cNvPr id="20" name="text-19"/>
+          <p:cNvSpPr txBox="1"/>
+          <p:nvPr/>
+        </p:nvSpPr>
+        <p:spPr>
+          <a:xfrm>
+            <a:off x="5200005" y="7969250"/>
+            <a:ext cx="895223" cy="171450"/>
+          </a:xfrm>
+          <a:prstGeom prst="rect">
+            <a:avLst/>
+          </a:prstGeom>
+          <a:noFill/>
+          <a:ln/>
+        </p:spPr>
+        <p:txBody>
+          <a:bodyPr wrap="square" lIns="0" tIns="0" rIns="0" bIns="0" rtlCol="0" anchor="t"/>
+          <a:lstStyle/>
+          <a:p>
+            <a:pPr algn="l" indent="0" marL="0">
+              <a:lnSpc>
+                <a:spcPts val="1200"/>
+              </a:lnSpc>
+              <a:buNone/>
+            </a:pPr>
+            <a:r>
+              <a:rPr lang="en-US" sz="1000" spc="140" kern="0" dirty="0">
+                <a:solidFill>
+                  <a:srgbClr val="FAF8F3"/>
+                </a:solidFill>
+                <a:latin typeface="IBM Plex Mono" pitchFamily="34" charset="0"/>
+                <a:ea typeface="IBM Plex Mono" pitchFamily="34" charset="-122"/>
+                <a:cs typeface="IBM Plex Mono" pitchFamily="34" charset="-120"/>
+              </a:rPr>
+              <a:t>ӘРІ ҚАРАЙ</a:t>
+            </a:r>
+            <a:endParaRPr lang="en-US" sz="1000" dirty="0"/>
+          </a:p>
+        </p:txBody>
+      </p:sp>
+      <p:pic>
+        <p:nvPicPr>
+          <p:cNvPr id="21" name="svg-20" descr="preencoded.png">    </p:cNvPr>
+          <p:cNvPicPr>
+            <a:picLocks noChangeAspect="1"/>
+          </p:cNvPicPr>
+          <p:nvPr/>
+        </p:nvPicPr>
+        <p:blipFill>
+          <a:blip r:embed="rId8"/>
+          <a:stretch>
+            <a:fillRect/>
+          </a:stretch>
+        </p:blipFill>
+        <p:spPr>
+          <a:xfrm>
             <a:off x="6121400" y="7985125"/>
             <a:ext cx="139700" cy="139700"/>
           </a:xfrm>
@@ -2100,7 +2220,7 @@
       </p:pic>
       <p:sp>
         <p:nvSpPr>
-          <p:cNvPr id="17" name="shape-16"/>
+          <p:cNvPr id="22" name="shape-21"/>
           <p:cNvSpPr/>
           <p:nvPr/>
         </p:nvSpPr>
@@ -2129,7 +2249,7 @@
       </p:sp>
       <p:sp>
         <p:nvSpPr>
-          <p:cNvPr id="18" name="text-17"/>
+          <p:cNvPr id="23" name="text-22"/>
           <p:cNvSpPr txBox="1"/>
           <p:nvPr/>
         </p:nvSpPr>
@@ -2171,7 +2291,7 @@
       </p:sp>
       <p:sp>
         <p:nvSpPr>
-          <p:cNvPr id="19" name="text-18"/>
+          <p:cNvPr id="24" name="text-23"/>
           <p:cNvSpPr txBox="1"/>
           <p:nvPr/>
         </p:nvSpPr>
@@ -3079,8 +3199,8 @@
         </p:nvSpPr>
         <p:spPr>
           <a:xfrm>
-            <a:off x="457200" y="951458"/>
-            <a:ext cx="6300216" cy="673100"/>
+            <a:off x="457200" y="953591"/>
+            <a:ext cx="4092448" cy="1212850"/>
           </a:xfrm>
           <a:prstGeom prst="rect">
             <a:avLst/>
@@ -3138,8 +3258,8 @@
         </p:nvSpPr>
         <p:spPr>
           <a:xfrm rot="-60000">
-            <a:off x="457200" y="2030611"/>
-            <a:ext cx="5943600" cy="1771650"/>
+            <a:off x="457200" y="3174603"/>
+            <a:ext cx="5943600" cy="1651000"/>
           </a:xfrm>
           <a:prstGeom prst="rect">
             <a:avLst/>
@@ -3165,7 +3285,7 @@
         </p:nvSpPr>
         <p:spPr>
           <a:xfrm rot="-240000">
-            <a:off x="2937758" y="1917831"/>
+            <a:off x="2938793" y="3060822"/>
             <a:ext cx="952500" cy="279400"/>
           </a:xfrm>
           <a:prstGeom prst="rect">
@@ -3187,7 +3307,7 @@
         </p:nvSpPr>
         <p:spPr>
           <a:xfrm rot="-60000">
-            <a:off x="674964" y="2222595"/>
+            <a:off x="675999" y="3365585"/>
             <a:ext cx="5815584" cy="146050"/>
           </a:xfrm>
           <a:prstGeom prst="rect">
@@ -3229,27 +3349,27 @@
         </p:nvSpPr>
         <p:spPr>
           <a:xfrm rot="-60000">
-            <a:off x="872877" y="2456785"/>
-            <a:ext cx="5613654" cy="527050"/>
-          </a:xfrm>
-          <a:prstGeom prst="rect">
-            <a:avLst/>
-          </a:prstGeom>
-          <a:noFill/>
-          <a:ln/>
-        </p:spPr>
-        <p:txBody>
-          <a:bodyPr wrap="square" lIns="0" tIns="0" rIns="0" bIns="0" rtlCol="0" anchor="t"/>
-          <a:lstStyle/>
-          <a:p>
-            <a:pPr algn="l" indent="0" marL="0">
-              <a:lnSpc>
-                <a:spcPts val="2070"/>
-              </a:lnSpc>
-              <a:buNone/>
-            </a:pPr>
-            <a:r>
-              <a:rPr lang="en-US" sz="1500" dirty="0">
+            <a:off x="873394" y="3601864"/>
+            <a:ext cx="5613654" cy="463550"/>
+          </a:xfrm>
+          <a:prstGeom prst="rect">
+            <a:avLst/>
+          </a:prstGeom>
+          <a:noFill/>
+          <a:ln/>
+        </p:spPr>
+        <p:txBody>
+          <a:bodyPr wrap="square" lIns="0" tIns="0" rIns="0" bIns="0" rtlCol="0" anchor="t"/>
+          <a:lstStyle/>
+          <a:p>
+            <a:pPr algn="l" indent="0" marL="0">
+              <a:lnSpc>
+                <a:spcPts val="1840"/>
+              </a:lnSpc>
+              <a:buNone/>
+            </a:pPr>
+            <a:r>
+              <a:rPr lang="en-US" sz="1350" dirty="0">
                 <a:solidFill>
                   <a:srgbClr val="2B2A27"/>
                 </a:solidFill>
@@ -3259,7 +3379,7 @@
               </a:rPr>
               <a:t>Томск технологиялық институтын тау-кен инженер-геологы ретінде бітірген.</a:t>
             </a:r>
-            <a:endParaRPr lang="en-US" sz="1500" dirty="0"/>
+            <a:endParaRPr lang="en-US" sz="1350" dirty="0"/>
           </a:p>
         </p:txBody>
       </p:sp>
@@ -3271,27 +3391,27 @@
         </p:nvSpPr>
         <p:spPr>
           <a:xfrm rot="-60000">
-            <a:off x="883824" y="3083951"/>
-            <a:ext cx="5613654" cy="527050"/>
-          </a:xfrm>
-          <a:prstGeom prst="rect">
-            <a:avLst/>
-          </a:prstGeom>
-          <a:noFill/>
-          <a:ln/>
-        </p:spPr>
-        <p:txBody>
-          <a:bodyPr wrap="square" lIns="0" tIns="0" rIns="0" bIns="0" rtlCol="0" anchor="t"/>
-          <a:lstStyle/>
-          <a:p>
-            <a:pPr algn="l" indent="0" marL="0">
-              <a:lnSpc>
-                <a:spcPts val="2070"/>
-              </a:lnSpc>
-              <a:buNone/>
-            </a:pPr>
-            <a:r>
-              <a:rPr lang="en-US" sz="1500" dirty="0">
+            <a:off x="883306" y="4169706"/>
+            <a:ext cx="5613654" cy="463550"/>
+          </a:xfrm>
+          <a:prstGeom prst="rect">
+            <a:avLst/>
+          </a:prstGeom>
+          <a:noFill/>
+          <a:ln/>
+        </p:spPr>
+        <p:txBody>
+          <a:bodyPr wrap="square" lIns="0" tIns="0" rIns="0" bIns="0" rtlCol="0" anchor="t"/>
+          <a:lstStyle/>
+          <a:p>
+            <a:pPr algn="l" indent="0" marL="0">
+              <a:lnSpc>
+                <a:spcPts val="1840"/>
+              </a:lnSpc>
+              <a:buNone/>
+            </a:pPr>
+            <a:r>
+              <a:rPr lang="en-US" sz="1350" dirty="0">
                 <a:solidFill>
                   <a:srgbClr val="2B2A27"/>
                 </a:solidFill>
@@ -3301,7 +3421,7 @@
               </a:rPr>
               <a:t>Жезқазған кен орнын зерттеген. Қазақ КСР Ғылым академиясының тұңғыш президенті болған.</a:t>
             </a:r>
-            <a:endParaRPr lang="en-US" sz="1500" dirty="0"/>
+            <a:endParaRPr lang="en-US" sz="1350" dirty="0"/>
           </a:p>
         </p:txBody>
       </p:sp>
@@ -3313,12 +3433,12 @@
         </p:nvSpPr>
         <p:spPr>
           <a:xfrm rot="60000">
-            <a:off x="457200" y="3967063"/>
-            <a:ext cx="5943600" cy="2406650"/>
+            <a:off x="457200" y="4977209"/>
+            <a:ext cx="5943600" cy="1765300"/>
           </a:xfrm>
           <a:prstGeom prst="roundRect">
             <a:avLst>
-              <a:gd name="adj" fmla="val 7388"/>
+              <a:gd name="adj" fmla="val 10072"/>
             </a:avLst>
           </a:prstGeom>
           <a:solidFill>
@@ -3329,281 +3449,32 @@
       </p:sp>
       <p:sp>
         <p:nvSpPr>
-          <p:cNvPr id="13" name="text-12"/>
-          <p:cNvSpPr txBox="1"/>
-          <p:nvPr/>
-        </p:nvSpPr>
-        <p:spPr>
-          <a:xfrm rot="60000">
-            <a:off x="702221" y="4156615"/>
-            <a:ext cx="5815584" cy="146050"/>
-          </a:xfrm>
-          <a:prstGeom prst="rect">
-            <a:avLst/>
-          </a:prstGeom>
-          <a:noFill/>
-          <a:ln/>
-        </p:spPr>
-        <p:txBody>
-          <a:bodyPr wrap="square" lIns="0" tIns="0" rIns="0" bIns="0" rtlCol="0" anchor="t"/>
-          <a:lstStyle/>
-          <a:p>
-            <a:pPr algn="l" indent="0" marL="0">
-              <a:lnSpc>
-                <a:spcPts val="1080"/>
-              </a:lnSpc>
-              <a:buNone/>
-            </a:pPr>
-            <a:r>
-              <a:rPr lang="en-US" sz="900" spc="140" kern="0" dirty="0">
-                <a:solidFill>
-                  <a:srgbClr val="FAF8F3"/>
-                </a:solidFill>
-                <a:latin typeface="IBM Plex Mono" pitchFamily="34" charset="0"/>
-                <a:ea typeface="IBM Plex Mono" pitchFamily="34" charset="-122"/>
-                <a:cs typeface="IBM Plex Mono" pitchFamily="34" charset="-120"/>
-              </a:rPr>
-              <a:t>2026 ЖЫЛЫ, 17 ЖАСТА</a:t>
-            </a:r>
-            <a:endParaRPr lang="en-US" sz="900" dirty="0"/>
-          </a:p>
-        </p:txBody>
-      </p:sp>
-      <p:sp>
-        <p:nvSpPr>
-          <p:cNvPr id="14" name="text-13"/>
-          <p:cNvSpPr txBox="1"/>
-          <p:nvPr/>
-        </p:nvSpPr>
-        <p:spPr>
-          <a:xfrm rot="60000">
-            <a:off x="885308" y="4390806"/>
-            <a:ext cx="5613654" cy="527050"/>
-          </a:xfrm>
-          <a:prstGeom prst="rect">
-            <a:avLst/>
-          </a:prstGeom>
-          <a:noFill/>
-          <a:ln/>
-        </p:spPr>
-        <p:txBody>
-          <a:bodyPr wrap="square" lIns="0" tIns="0" rIns="0" bIns="0" rtlCol="0" anchor="t"/>
-          <a:lstStyle/>
-          <a:p>
-            <a:pPr algn="l" indent="0" marL="0">
-              <a:lnSpc>
-                <a:spcPts val="2070"/>
-              </a:lnSpc>
-              <a:buNone/>
-            </a:pPr>
-            <a:r>
-              <a:rPr lang="en-US" sz="1500" dirty="0">
-                <a:solidFill>
-                  <a:srgbClr val="FAF8F3"/>
-                </a:solidFill>
-                <a:latin typeface="Geist" pitchFamily="34" charset="0"/>
-                <a:ea typeface="Geist" pitchFamily="34" charset="-122"/>
-                <a:cs typeface="Geist" pitchFamily="34" charset="-120"/>
-              </a:rPr>
-              <a:t>Халықаралық жер туралы ғылымдар олимпиадасы (IESO).</a:t>
-            </a:r>
-            <a:endParaRPr lang="en-US" sz="1500" dirty="0"/>
-          </a:p>
-        </p:txBody>
-      </p:sp>
-      <p:sp>
-        <p:nvSpPr>
-          <p:cNvPr id="15" name="text-14"/>
-          <p:cNvSpPr txBox="1"/>
-          <p:nvPr/>
-        </p:nvSpPr>
-        <p:spPr>
-          <a:xfrm rot="60000">
-            <a:off x="874360" y="5017971"/>
-            <a:ext cx="5613654" cy="527050"/>
-          </a:xfrm>
-          <a:prstGeom prst="rect">
-            <a:avLst/>
-          </a:prstGeom>
-          <a:noFill/>
-          <a:ln/>
-        </p:spPr>
-        <p:txBody>
-          <a:bodyPr wrap="square" lIns="0" tIns="0" rIns="0" bIns="0" rtlCol="0" anchor="t"/>
-          <a:lstStyle/>
-          <a:p>
-            <a:pPr algn="l" indent="0" marL="0">
-              <a:lnSpc>
-                <a:spcPts val="2070"/>
-              </a:lnSpc>
-              <a:buNone/>
-            </a:pPr>
-            <a:r>
-              <a:rPr lang="en-US" sz="1500" dirty="0">
-                <a:solidFill>
-                  <a:srgbClr val="FAF8F3"/>
-                </a:solidFill>
-                <a:latin typeface="Geist" pitchFamily="34" charset="0"/>
-                <a:ea typeface="Geist" pitchFamily="34" charset="-122"/>
-                <a:cs typeface="Geist" pitchFamily="34" charset="-120"/>
-              </a:rPr>
-              <a:t>Туған өлкенің кен орындарының картасы: жеке зерттеу жобасы.</a:t>
-            </a:r>
-            <a:endParaRPr lang="en-US" sz="1500" dirty="0"/>
-          </a:p>
-        </p:txBody>
-      </p:sp>
-      <p:sp>
-        <p:nvSpPr>
-          <p:cNvPr id="16" name="text-15"/>
-          <p:cNvSpPr txBox="1"/>
-          <p:nvPr/>
-        </p:nvSpPr>
-        <p:spPr>
-          <a:xfrm rot="60000">
-            <a:off x="863413" y="5645137"/>
-            <a:ext cx="5613654" cy="527050"/>
-          </a:xfrm>
-          <a:prstGeom prst="rect">
-            <a:avLst/>
-          </a:prstGeom>
-          <a:noFill/>
-          <a:ln/>
-        </p:spPr>
-        <p:txBody>
-          <a:bodyPr wrap="square" lIns="0" tIns="0" rIns="0" bIns="0" rtlCol="0" anchor="t"/>
-          <a:lstStyle/>
-          <a:p>
-            <a:pPr algn="l" indent="0" marL="0">
-              <a:lnSpc>
-                <a:spcPts val="2070"/>
-              </a:lnSpc>
-              <a:buNone/>
-            </a:pPr>
-            <a:r>
-              <a:rPr lang="en-US" sz="1500" b="1" dirty="0">
-                <a:solidFill>
-                  <a:srgbClr val="FAF8F3"/>
-                </a:solidFill>
-                <a:latin typeface="Geist" pitchFamily="34" charset="0"/>
-                <a:ea typeface="Geist" pitchFamily="34" charset="-122"/>
-                <a:cs typeface="Geist" pitchFamily="34" charset="-120"/>
-              </a:rPr>
-              <a:t>Оқитын мамандығы: тау-кен немесе геологиялық инженерия.</a:t>
-            </a:r>
-            <a:endParaRPr lang="en-US" sz="1500" dirty="0"/>
-          </a:p>
-        </p:txBody>
-      </p:sp>
-      <p:sp>
-        <p:nvSpPr>
-          <p:cNvPr id="17" name="text-16"/>
-          <p:cNvSpPr txBox="1"/>
-          <p:nvPr/>
-        </p:nvSpPr>
-        <p:spPr>
-          <a:xfrm>
-            <a:off x="457845" y="7969250"/>
-            <a:ext cx="895223" cy="171450"/>
-          </a:xfrm>
-          <a:prstGeom prst="rect">
-            <a:avLst/>
-          </a:prstGeom>
-          <a:noFill/>
-          <a:ln/>
-        </p:spPr>
-        <p:txBody>
-          <a:bodyPr wrap="square" lIns="0" tIns="0" rIns="0" bIns="0" rtlCol="0" anchor="t"/>
-          <a:lstStyle/>
-          <a:p>
-            <a:pPr algn="l" indent="0" marL="0">
-              <a:lnSpc>
-                <a:spcPts val="1200"/>
-              </a:lnSpc>
-              <a:buNone/>
-            </a:pPr>
-            <a:r>
-              <a:rPr lang="en-US" sz="1000" spc="140" kern="0" dirty="0">
-                <a:solidFill>
-                  <a:srgbClr val="0A0A0A"/>
-                </a:solidFill>
-                <a:latin typeface="IBM Plex Mono" pitchFamily="34" charset="0"/>
-                <a:ea typeface="IBM Plex Mono" pitchFamily="34" charset="-122"/>
-                <a:cs typeface="IBM Plex Mono" pitchFamily="34" charset="-120"/>
-              </a:rPr>
-              <a:t>@NURZYCOM</a:t>
-            </a:r>
-            <a:endParaRPr lang="en-US" sz="1000" dirty="0"/>
-          </a:p>
-        </p:txBody>
-      </p:sp>
-      <p:sp>
-        <p:nvSpPr>
-          <p:cNvPr id="18" name="shape-17"/>
+          <p:cNvPr id="13" name="shape-12"/>
           <p:cNvSpPr/>
           <p:nvPr/>
         </p:nvSpPr>
         <p:spPr>
-          <a:xfrm>
-            <a:off x="5060305" y="7893050"/>
-            <a:ext cx="1339850" cy="323850"/>
-          </a:xfrm>
-          <a:prstGeom prst="roundRect">
-            <a:avLst>
-              <a:gd name="adj" fmla="val 50000"/>
-            </a:avLst>
+          <a:xfrm rot="-420000">
+            <a:off x="5715981" y="4831558"/>
+            <a:ext cx="533400" cy="533400"/>
+          </a:xfrm>
+          <a:prstGeom prst="ellipse">
+            <a:avLst/>
           </a:prstGeom>
           <a:solidFill>
-            <a:srgbClr val="0A0A0A"/>
+            <a:srgbClr val="FAF8F3"/>
           </a:solidFill>
-          <a:ln/>
-        </p:spPr>
-      </p:sp>
-      <p:sp>
-        <p:nvSpPr>
-          <p:cNvPr id="19" name="text-18"/>
-          <p:cNvSpPr txBox="1"/>
-          <p:nvPr/>
-        </p:nvSpPr>
-        <p:spPr>
-          <a:xfrm>
-            <a:off x="5200005" y="7969250"/>
-            <a:ext cx="895223" cy="171450"/>
-          </a:xfrm>
-          <a:prstGeom prst="rect">
-            <a:avLst/>
-          </a:prstGeom>
-          <a:noFill/>
-          <a:ln/>
-        </p:spPr>
-        <p:txBody>
-          <a:bodyPr wrap="square" lIns="0" tIns="0" rIns="0" bIns="0" rtlCol="0" anchor="t"/>
-          <a:lstStyle/>
-          <a:p>
-            <a:pPr algn="l" indent="0" marL="0">
-              <a:lnSpc>
-                <a:spcPts val="1200"/>
-              </a:lnSpc>
-              <a:buNone/>
-            </a:pPr>
-            <a:r>
-              <a:rPr lang="en-US" sz="1000" spc="140" kern="0" dirty="0">
-                <a:solidFill>
-                  <a:srgbClr val="FAF8F3"/>
-                </a:solidFill>
-                <a:latin typeface="IBM Plex Mono" pitchFamily="34" charset="0"/>
-                <a:ea typeface="IBM Plex Mono" pitchFamily="34" charset="-122"/>
-                <a:cs typeface="IBM Plex Mono" pitchFamily="34" charset="-120"/>
-              </a:rPr>
-              <a:t>ӘРІ ҚАРАЙ</a:t>
-            </a:r>
-            <a:endParaRPr lang="en-US" sz="1000" dirty="0"/>
-          </a:p>
-        </p:txBody>
+          <a:ln w="12700">
+            <a:solidFill>
+              <a:srgbClr val="0A0A0A"/>
+            </a:solidFill>
+            <a:prstDash val="solid"/>
+          </a:ln>
+        </p:spPr>
       </p:sp>
       <p:pic>
         <p:nvPicPr>
-          <p:cNvPr id="20" name="svg-19" descr="preencoded.png">    </p:cNvPr>
+          <p:cNvPr id="14" name="svg-13" descr="preencoded.png">    </p:cNvPr>
           <p:cNvPicPr>
             <a:picLocks noChangeAspect="1"/>
           </p:cNvPicPr>
@@ -3616,6 +3487,328 @@
           </a:stretch>
         </p:blipFill>
         <p:spPr>
+          <a:xfrm rot="-420000">
+            <a:off x="5836631" y="4952208"/>
+            <a:ext cx="292100" cy="292100"/>
+          </a:xfrm>
+          <a:prstGeom prst="rect">
+            <a:avLst/>
+          </a:prstGeom>
+        </p:spPr>
+      </p:pic>
+      <p:sp>
+        <p:nvSpPr>
+          <p:cNvPr id="15" name="text-14"/>
+          <p:cNvSpPr txBox="1"/>
+          <p:nvPr/>
+        </p:nvSpPr>
+        <p:spPr>
+          <a:xfrm rot="60000">
+            <a:off x="696598" y="5168200"/>
+            <a:ext cx="5815584" cy="146050"/>
+          </a:xfrm>
+          <a:prstGeom prst="rect">
+            <a:avLst/>
+          </a:prstGeom>
+          <a:noFill/>
+          <a:ln/>
+        </p:spPr>
+        <p:txBody>
+          <a:bodyPr wrap="square" lIns="0" tIns="0" rIns="0" bIns="0" rtlCol="0" anchor="t"/>
+          <a:lstStyle/>
+          <a:p>
+            <a:pPr algn="l" indent="0" marL="0">
+              <a:lnSpc>
+                <a:spcPts val="1080"/>
+              </a:lnSpc>
+              <a:buNone/>
+            </a:pPr>
+            <a:r>
+              <a:rPr lang="en-US" sz="900" spc="140" kern="0" dirty="0">
+                <a:solidFill>
+                  <a:srgbClr val="FAF8F3"/>
+                </a:solidFill>
+                <a:latin typeface="IBM Plex Mono" pitchFamily="34" charset="0"/>
+                <a:ea typeface="IBM Plex Mono" pitchFamily="34" charset="-122"/>
+                <a:cs typeface="IBM Plex Mono" pitchFamily="34" charset="-120"/>
+              </a:rPr>
+              <a:t>2026 ЖЫЛЫ, 17 ЖАСТА</a:t>
+            </a:r>
+            <a:endParaRPr lang="en-US" sz="900" dirty="0"/>
+          </a:p>
+        </p:txBody>
+      </p:sp>
+      <p:pic>
+        <p:nvPicPr>
+          <p:cNvPr id="16" name="svg-15" descr="preencoded.png">    </p:cNvPr>
+          <p:cNvPicPr>
+            <a:picLocks noChangeAspect="1"/>
+          </p:cNvPicPr>
+          <p:nvPr/>
+        </p:nvPicPr>
+        <p:blipFill>
+          <a:blip r:embed="rId4"/>
+          <a:stretch>
+            <a:fillRect/>
+          </a:stretch>
+        </p:blipFill>
+        <p:spPr>
+          <a:xfrm rot="60000">
+            <a:off x="692180" y="5369706"/>
+            <a:ext cx="203200" cy="203200"/>
+          </a:xfrm>
+          <a:prstGeom prst="rect">
+            <a:avLst/>
+          </a:prstGeom>
+        </p:spPr>
+      </p:pic>
+      <p:sp>
+        <p:nvSpPr>
+          <p:cNvPr id="17" name="text-16"/>
+          <p:cNvSpPr txBox="1"/>
+          <p:nvPr/>
+        </p:nvSpPr>
+        <p:spPr>
+          <a:xfrm rot="60000">
+            <a:off x="957108" y="5401532"/>
+            <a:ext cx="5061712" cy="222250"/>
+          </a:xfrm>
+          <a:prstGeom prst="rect">
+            <a:avLst/>
+          </a:prstGeom>
+          <a:noFill/>
+          <a:ln/>
+        </p:spPr>
+        <p:txBody>
+          <a:bodyPr wrap="square" lIns="0" tIns="0" rIns="0" bIns="0" rtlCol="0" anchor="t"/>
+          <a:lstStyle/>
+          <a:p>
+            <a:pPr algn="l" indent="0" marL="0">
+              <a:lnSpc>
+                <a:spcPts val="1840"/>
+              </a:lnSpc>
+              <a:buNone/>
+            </a:pPr>
+            <a:r>
+              <a:rPr lang="en-US" sz="1350" dirty="0">
+                <a:solidFill>
+                  <a:srgbClr val="FAF8F3"/>
+                </a:solidFill>
+                <a:latin typeface="Geist" pitchFamily="34" charset="0"/>
+                <a:ea typeface="Geist" pitchFamily="34" charset="-122"/>
+                <a:cs typeface="Geist" pitchFamily="34" charset="-120"/>
+              </a:rPr>
+              <a:t>Халықаралық жер туралы ғылымдар олимпиадасы (IESO).</a:t>
+            </a:r>
+            <a:endParaRPr lang="en-US" sz="1350" dirty="0"/>
+          </a:p>
+        </p:txBody>
+      </p:sp>
+      <p:sp>
+        <p:nvSpPr>
+          <p:cNvPr id="18" name="text-17"/>
+          <p:cNvSpPr txBox="1"/>
+          <p:nvPr/>
+        </p:nvSpPr>
+        <p:spPr>
+          <a:xfrm rot="60000">
+            <a:off x="876395" y="5736928"/>
+            <a:ext cx="5613654" cy="234950"/>
+          </a:xfrm>
+          <a:prstGeom prst="rect">
+            <a:avLst/>
+          </a:prstGeom>
+          <a:noFill/>
+          <a:ln/>
+        </p:spPr>
+        <p:txBody>
+          <a:bodyPr wrap="square" lIns="0" tIns="0" rIns="0" bIns="0" rtlCol="0" anchor="t"/>
+          <a:lstStyle/>
+          <a:p>
+            <a:pPr algn="l" indent="0" marL="0">
+              <a:lnSpc>
+                <a:spcPts val="1840"/>
+              </a:lnSpc>
+              <a:buNone/>
+            </a:pPr>
+            <a:r>
+              <a:rPr lang="en-US" sz="1350" dirty="0">
+                <a:solidFill>
+                  <a:srgbClr val="FAF8F3"/>
+                </a:solidFill>
+                <a:latin typeface="Geist" pitchFamily="34" charset="0"/>
+                <a:ea typeface="Geist" pitchFamily="34" charset="-122"/>
+                <a:cs typeface="Geist" pitchFamily="34" charset="-120"/>
+              </a:rPr>
+              <a:t>Туған өлкенің кен орындарының картасы: жеке зерттеу жобасы.</a:t>
+            </a:r>
+            <a:endParaRPr lang="en-US" sz="1350" dirty="0"/>
+          </a:p>
+        </p:txBody>
+      </p:sp>
+      <p:sp>
+        <p:nvSpPr>
+          <p:cNvPr id="19" name="text-18"/>
+          <p:cNvSpPr txBox="1"/>
+          <p:nvPr/>
+        </p:nvSpPr>
+        <p:spPr>
+          <a:xfrm rot="60000">
+            <a:off x="868518" y="6073906"/>
+            <a:ext cx="5613654" cy="463550"/>
+          </a:xfrm>
+          <a:prstGeom prst="rect">
+            <a:avLst/>
+          </a:prstGeom>
+          <a:noFill/>
+          <a:ln/>
+        </p:spPr>
+        <p:txBody>
+          <a:bodyPr wrap="square" lIns="0" tIns="0" rIns="0" bIns="0" rtlCol="0" anchor="t"/>
+          <a:lstStyle/>
+          <a:p>
+            <a:pPr algn="l" indent="0" marL="0">
+              <a:lnSpc>
+                <a:spcPts val="1840"/>
+              </a:lnSpc>
+              <a:buNone/>
+            </a:pPr>
+            <a:r>
+              <a:rPr lang="en-US" sz="1350" b="1" dirty="0">
+                <a:solidFill>
+                  <a:srgbClr val="FAF8F3"/>
+                </a:solidFill>
+                <a:latin typeface="Geist" pitchFamily="34" charset="0"/>
+                <a:ea typeface="Geist" pitchFamily="34" charset="-122"/>
+                <a:cs typeface="Geist" pitchFamily="34" charset="-120"/>
+              </a:rPr>
+              <a:t>Оқитын мамандығы: тау-кен немесе геологиялық инженерия.</a:t>
+            </a:r>
+            <a:endParaRPr lang="en-US" sz="1350" dirty="0"/>
+          </a:p>
+        </p:txBody>
+      </p:sp>
+      <p:sp>
+        <p:nvSpPr>
+          <p:cNvPr id="20" name="text-19"/>
+          <p:cNvSpPr txBox="1"/>
+          <p:nvPr/>
+        </p:nvSpPr>
+        <p:spPr>
+          <a:xfrm>
+            <a:off x="457845" y="7969250"/>
+            <a:ext cx="895223" cy="171450"/>
+          </a:xfrm>
+          <a:prstGeom prst="rect">
+            <a:avLst/>
+          </a:prstGeom>
+          <a:noFill/>
+          <a:ln/>
+        </p:spPr>
+        <p:txBody>
+          <a:bodyPr wrap="square" lIns="0" tIns="0" rIns="0" bIns="0" rtlCol="0" anchor="t"/>
+          <a:lstStyle/>
+          <a:p>
+            <a:pPr algn="l" indent="0" marL="0">
+              <a:lnSpc>
+                <a:spcPts val="1200"/>
+              </a:lnSpc>
+              <a:buNone/>
+            </a:pPr>
+            <a:r>
+              <a:rPr lang="en-US" sz="1000" spc="140" kern="0" dirty="0">
+                <a:solidFill>
+                  <a:srgbClr val="0A0A0A"/>
+                </a:solidFill>
+                <a:latin typeface="IBM Plex Mono" pitchFamily="34" charset="0"/>
+                <a:ea typeface="IBM Plex Mono" pitchFamily="34" charset="-122"/>
+                <a:cs typeface="IBM Plex Mono" pitchFamily="34" charset="-120"/>
+              </a:rPr>
+              <a:t>@NURZYCOM</a:t>
+            </a:r>
+            <a:endParaRPr lang="en-US" sz="1000" dirty="0"/>
+          </a:p>
+        </p:txBody>
+      </p:sp>
+      <p:sp>
+        <p:nvSpPr>
+          <p:cNvPr id="21" name="shape-20"/>
+          <p:cNvSpPr/>
+          <p:nvPr/>
+        </p:nvSpPr>
+        <p:spPr>
+          <a:xfrm>
+            <a:off x="5060305" y="7893050"/>
+            <a:ext cx="1339850" cy="323850"/>
+          </a:xfrm>
+          <a:prstGeom prst="roundRect">
+            <a:avLst>
+              <a:gd name="adj" fmla="val 50000"/>
+            </a:avLst>
+          </a:prstGeom>
+          <a:solidFill>
+            <a:srgbClr val="0A0A0A"/>
+          </a:solidFill>
+          <a:ln/>
+        </p:spPr>
+      </p:sp>
+      <p:sp>
+        <p:nvSpPr>
+          <p:cNvPr id="22" name="text-21"/>
+          <p:cNvSpPr txBox="1"/>
+          <p:nvPr/>
+        </p:nvSpPr>
+        <p:spPr>
+          <a:xfrm>
+            <a:off x="5200005" y="7969250"/>
+            <a:ext cx="895223" cy="171450"/>
+          </a:xfrm>
+          <a:prstGeom prst="rect">
+            <a:avLst/>
+          </a:prstGeom>
+          <a:noFill/>
+          <a:ln/>
+        </p:spPr>
+        <p:txBody>
+          <a:bodyPr wrap="square" lIns="0" tIns="0" rIns="0" bIns="0" rtlCol="0" anchor="t"/>
+          <a:lstStyle/>
+          <a:p>
+            <a:pPr algn="l" indent="0" marL="0">
+              <a:lnSpc>
+                <a:spcPts val="1200"/>
+              </a:lnSpc>
+              <a:buNone/>
+            </a:pPr>
+            <a:r>
+              <a:rPr lang="en-US" sz="1000" spc="140" kern="0" dirty="0">
+                <a:solidFill>
+                  <a:srgbClr val="FAF8F3"/>
+                </a:solidFill>
+                <a:latin typeface="IBM Plex Mono" pitchFamily="34" charset="0"/>
+                <a:ea typeface="IBM Plex Mono" pitchFamily="34" charset="-122"/>
+                <a:cs typeface="IBM Plex Mono" pitchFamily="34" charset="-120"/>
+              </a:rPr>
+              <a:t>ӘРІ ҚАРАЙ</a:t>
+            </a:r>
+            <a:endParaRPr lang="en-US" sz="1000" dirty="0"/>
+          </a:p>
+        </p:txBody>
+      </p:sp>
+      <p:pic>
+        <p:nvPicPr>
+          <p:cNvPr id="23" name="svg-22" descr="preencoded.png">    </p:cNvPr>
+          <p:cNvPicPr>
+            <a:picLocks noChangeAspect="1"/>
+          </p:cNvPicPr>
+          <p:nvPr/>
+        </p:nvPicPr>
+        <p:blipFill>
+          <a:blip r:embed="rId5"/>
+          <a:stretch>
+            <a:fillRect/>
+          </a:stretch>
+        </p:blipFill>
+        <p:spPr>
           <a:xfrm>
             <a:off x="6121400" y="7985125"/>
             <a:ext cx="139700" cy="139700"/>
@@ -3627,7 +3820,122 @@
       </p:pic>
       <p:sp>
         <p:nvSpPr>
-          <p:cNvPr id="21" name="text-20"/>
+          <p:cNvPr id="24" name="shape-23"/>
+          <p:cNvSpPr/>
+          <p:nvPr/>
+        </p:nvSpPr>
+        <p:spPr>
+          <a:xfrm rot="240000">
+            <a:off x="4660900" y="950913"/>
+            <a:ext cx="1714500" cy="2349500"/>
+          </a:xfrm>
+          <a:prstGeom prst="rect">
+            <a:avLst/>
+          </a:prstGeom>
+          <a:solidFill>
+            <a:srgbClr val="FFFFFF"/>
+          </a:solidFill>
+          <a:ln/>
+          <a:effectLst>
+            <a:outerShdw sx="100000" sy="100000" kx="0" ky="0" algn="bl" rotWithShape="0" blurRad="177800" dist="76200" dir="5400000">
+              <a:srgbClr val="000000">
+                <a:alpha val="22000"/>
+              </a:srgbClr>
+            </a:outerShdw>
+          </a:effectLst>
+        </p:spPr>
+      </p:sp>
+      <p:sp>
+        <p:nvSpPr>
+          <p:cNvPr id="25" name="shape-24"/>
+          <p:cNvSpPr/>
+          <p:nvPr/>
+        </p:nvSpPr>
+        <p:spPr>
+          <a:xfrm rot="60000">
+            <a:off x="5121964" y="840996"/>
+            <a:ext cx="952500" cy="279400"/>
+          </a:xfrm>
+          <a:prstGeom prst="rect">
+            <a:avLst/>
+          </a:prstGeom>
+          <a:solidFill>
+            <a:srgbClr val="D5D5D4">
+              <a:alpha val="90000"/>
+            </a:srgbClr>
+          </a:solidFill>
+          <a:ln/>
+        </p:spPr>
+      </p:sp>
+      <p:pic>
+        <p:nvPicPr>
+          <p:cNvPr id="26" name="img-25" descr="preencoded.png">    </p:cNvPr>
+          <p:cNvPicPr>
+            <a:picLocks noChangeAspect="1"/>
+          </p:cNvPicPr>
+          <p:nvPr/>
+        </p:nvPicPr>
+        <p:blipFill>
+          <a:blip r:embed="rId6"/>
+          <a:stretch>
+            <a:fillRect/>
+          </a:stretch>
+        </p:blipFill>
+        <p:spPr>
+          <a:xfrm rot="240000">
+            <a:off x="4745516" y="1027406"/>
+            <a:ext cx="1562100" cy="1955800"/>
+          </a:xfrm>
+          <a:prstGeom prst="rect">
+            <a:avLst/>
+          </a:prstGeom>
+        </p:spPr>
+      </p:pic>
+      <p:sp>
+        <p:nvSpPr>
+          <p:cNvPr id="27" name="text-26"/>
+          <p:cNvSpPr txBox="1"/>
+          <p:nvPr/>
+        </p:nvSpPr>
+        <p:spPr>
+          <a:xfrm rot="240000">
+            <a:off x="4557177" y="3004300"/>
+            <a:ext cx="1783080" cy="228600"/>
+          </a:xfrm>
+          <a:prstGeom prst="rect">
+            <a:avLst/>
+          </a:prstGeom>
+          <a:noFill/>
+          <a:ln/>
+        </p:spPr>
+        <p:txBody>
+          <a:bodyPr wrap="square" lIns="0" tIns="0" rIns="0" bIns="0" rtlCol="0" anchor="t"/>
+          <a:lstStyle/>
+          <a:p>
+            <a:pPr algn="ctr" indent="0" marL="0">
+              <a:lnSpc>
+                <a:spcPts val="1560"/>
+              </a:lnSpc>
+              <a:buNone/>
+            </a:pPr>
+            <a:r>
+              <a:rPr lang="en-US" sz="1300" i="1" dirty="0">
+                <a:solidFill>
+                  <a:srgbClr val="0A0A0A"/>
+                </a:solidFill>
+                <a:latin typeface="Noto Serif Display Light" pitchFamily="34" charset="0"/>
+                <a:ea typeface="Noto Serif Display Light" pitchFamily="34" charset="-122"/>
+                <a:cs typeface="Noto Serif Display Light" pitchFamily="34" charset="-120"/>
+              </a:rPr>
+              <a:t>1899–1964</a:t>
+            </a:r>
+            <a:endParaRPr lang="en-US" sz="1300" dirty="0"/>
+          </a:p>
+        </p:txBody>
+      </p:sp>
+      <p:sp>
+        <p:nvSpPr>
+          <p:cNvPr id="28" name="text-27"/>
           <p:cNvSpPr txBox="1"/>
           <p:nvPr/>
         </p:nvSpPr>
@@ -3849,8 +4157,8 @@
         </p:nvSpPr>
         <p:spPr>
           <a:xfrm>
-            <a:off x="457200" y="951458"/>
-            <a:ext cx="6300216" cy="673100"/>
+            <a:off x="457200" y="953591"/>
+            <a:ext cx="4092448" cy="1212850"/>
           </a:xfrm>
           <a:prstGeom prst="rect">
             <a:avLst/>
@@ -3908,8 +4216,8 @@
         </p:nvSpPr>
         <p:spPr>
           <a:xfrm rot="-60000">
-            <a:off x="457200" y="2030611"/>
-            <a:ext cx="5943600" cy="1771650"/>
+            <a:off x="457200" y="3174603"/>
+            <a:ext cx="5943600" cy="1651000"/>
           </a:xfrm>
           <a:prstGeom prst="rect">
             <a:avLst/>
@@ -3935,7 +4243,7 @@
         </p:nvSpPr>
         <p:spPr>
           <a:xfrm rot="-240000">
-            <a:off x="2937758" y="1917831"/>
+            <a:off x="2938793" y="3060822"/>
             <a:ext cx="952500" cy="279400"/>
           </a:xfrm>
           <a:prstGeom prst="rect">
@@ -3957,7 +4265,7 @@
         </p:nvSpPr>
         <p:spPr>
           <a:xfrm rot="-60000">
-            <a:off x="674964" y="2222595"/>
+            <a:off x="675999" y="3365585"/>
             <a:ext cx="5815584" cy="146050"/>
           </a:xfrm>
           <a:prstGeom prst="rect">
@@ -3999,27 +4307,27 @@
         </p:nvSpPr>
         <p:spPr>
           <a:xfrm rot="-60000">
-            <a:off x="870583" y="2458740"/>
-            <a:ext cx="5613654" cy="260350"/>
-          </a:xfrm>
-          <a:prstGeom prst="rect">
-            <a:avLst/>
-          </a:prstGeom>
-          <a:noFill/>
-          <a:ln/>
-        </p:spPr>
-        <p:txBody>
-          <a:bodyPr wrap="square" lIns="0" tIns="0" rIns="0" bIns="0" rtlCol="0" anchor="t"/>
-          <a:lstStyle/>
-          <a:p>
-            <a:pPr algn="l" indent="0" marL="0">
-              <a:lnSpc>
-                <a:spcPts val="2070"/>
-              </a:lnSpc>
-              <a:buNone/>
-            </a:pPr>
-            <a:r>
-              <a:rPr lang="en-US" sz="1500" dirty="0">
+            <a:off x="871360" y="3599600"/>
+            <a:ext cx="5613654" cy="234950"/>
+          </a:xfrm>
+          <a:prstGeom prst="rect">
+            <a:avLst/>
+          </a:prstGeom>
+          <a:noFill/>
+          <a:ln/>
+        </p:spPr>
+        <p:txBody>
+          <a:bodyPr wrap="square" lIns="0" tIns="0" rIns="0" bIns="0" rtlCol="0" anchor="t"/>
+          <a:lstStyle/>
+          <a:p>
+            <a:pPr algn="l" indent="0" marL="0">
+              <a:lnSpc>
+                <a:spcPts val="1840"/>
+              </a:lnSpc>
+              <a:buNone/>
+            </a:pPr>
+            <a:r>
+              <a:rPr lang="en-US" sz="1350" dirty="0">
                 <a:solidFill>
                   <a:srgbClr val="2B2A27"/>
                 </a:solidFill>
@@ -4029,7 +4337,7 @@
               </a:rPr>
               <a:t>1853 жылы Омбы кадет корпусын бітірген.</a:t>
             </a:r>
-            <a:endParaRPr lang="en-US" sz="1500" dirty="0"/>
+            <a:endParaRPr lang="en-US" sz="1350" dirty="0"/>
           </a:p>
         </p:txBody>
       </p:sp>
@@ -4041,27 +4349,27 @@
         </p:nvSpPr>
         <p:spPr>
           <a:xfrm rot="-60000">
-            <a:off x="881530" y="2822381"/>
-            <a:ext cx="5613654" cy="787400"/>
-          </a:xfrm>
-          <a:prstGeom prst="rect">
-            <a:avLst/>
-          </a:prstGeom>
-          <a:noFill/>
-          <a:ln/>
-        </p:spPr>
-        <p:txBody>
-          <a:bodyPr wrap="square" lIns="0" tIns="0" rIns="0" bIns="0" rtlCol="0" anchor="t"/>
-          <a:lstStyle/>
-          <a:p>
-            <a:pPr algn="l" indent="0" marL="0">
-              <a:lnSpc>
-                <a:spcPts val="2070"/>
-              </a:lnSpc>
-              <a:buNone/>
-            </a:pPr>
-            <a:r>
-              <a:rPr lang="en-US" sz="1500" dirty="0">
+            <a:off x="881271" y="3935667"/>
+            <a:ext cx="5613654" cy="698500"/>
+          </a:xfrm>
+          <a:prstGeom prst="rect">
+            <a:avLst/>
+          </a:prstGeom>
+          <a:noFill/>
+          <a:ln/>
+        </p:spPr>
+        <p:txBody>
+          <a:bodyPr wrap="square" lIns="0" tIns="0" rIns="0" bIns="0" rtlCol="0" anchor="t"/>
+          <a:lstStyle/>
+          <a:p>
+            <a:pPr algn="l" indent="0" marL="0">
+              <a:lnSpc>
+                <a:spcPts val="1840"/>
+              </a:lnSpc>
+              <a:buNone/>
+            </a:pPr>
+            <a:r>
+              <a:rPr lang="en-US" sz="1350" dirty="0">
                 <a:solidFill>
                   <a:srgbClr val="2B2A27"/>
                 </a:solidFill>
@@ -4071,7 +4379,7 @@
               </a:rPr>
               <a:t>1858–1859 жылдары көпес кейпінде Қашғарға барып, Шығыс Түркістанның тарихы мен этнографиясы туралы материал жинаған.</a:t>
             </a:r>
-            <a:endParaRPr lang="en-US" sz="1500" dirty="0"/>
+            <a:endParaRPr lang="en-US" sz="1350" dirty="0"/>
           </a:p>
         </p:txBody>
       </p:sp>
@@ -4083,12 +4391,12 @@
         </p:nvSpPr>
         <p:spPr>
           <a:xfrm rot="60000">
-            <a:off x="457200" y="3965823"/>
-            <a:ext cx="5943600" cy="2146300"/>
+            <a:off x="457200" y="4976316"/>
+            <a:ext cx="5943600" cy="2000250"/>
           </a:xfrm>
           <a:prstGeom prst="roundRect">
             <a:avLst>
-              <a:gd name="adj" fmla="val 8284"/>
+              <a:gd name="adj" fmla="val 8889"/>
             </a:avLst>
           </a:prstGeom>
           <a:solidFill>
@@ -4099,281 +4407,32 @@
       </p:sp>
       <p:sp>
         <p:nvSpPr>
-          <p:cNvPr id="13" name="text-12"/>
-          <p:cNvSpPr txBox="1"/>
-          <p:nvPr/>
-        </p:nvSpPr>
-        <p:spPr>
-          <a:xfrm rot="60000">
-            <a:off x="699927" y="4156595"/>
-            <a:ext cx="5815584" cy="146050"/>
-          </a:xfrm>
-          <a:prstGeom prst="rect">
-            <a:avLst/>
-          </a:prstGeom>
-          <a:noFill/>
-          <a:ln/>
-        </p:spPr>
-        <p:txBody>
-          <a:bodyPr wrap="square" lIns="0" tIns="0" rIns="0" bIns="0" rtlCol="0" anchor="t"/>
-          <a:lstStyle/>
-          <a:p>
-            <a:pPr algn="l" indent="0" marL="0">
-              <a:lnSpc>
-                <a:spcPts val="1080"/>
-              </a:lnSpc>
-              <a:buNone/>
-            </a:pPr>
-            <a:r>
-              <a:rPr lang="en-US" sz="900" spc="140" kern="0" dirty="0">
-                <a:solidFill>
-                  <a:srgbClr val="FAF8F3"/>
-                </a:solidFill>
-                <a:latin typeface="IBM Plex Mono" pitchFamily="34" charset="0"/>
-                <a:ea typeface="IBM Plex Mono" pitchFamily="34" charset="-122"/>
-                <a:cs typeface="IBM Plex Mono" pitchFamily="34" charset="-120"/>
-              </a:rPr>
-              <a:t>2026 ЖЫЛЫ, 17 ЖАСТА</a:t>
-            </a:r>
-            <a:endParaRPr lang="en-US" sz="900" dirty="0"/>
-          </a:p>
-        </p:txBody>
-      </p:sp>
-      <p:sp>
-        <p:nvSpPr>
-          <p:cNvPr id="14" name="text-13"/>
-          <p:cNvSpPr txBox="1"/>
-          <p:nvPr/>
-        </p:nvSpPr>
-        <p:spPr>
-          <a:xfrm rot="60000">
-            <a:off x="885308" y="4392741"/>
-            <a:ext cx="5613654" cy="260350"/>
-          </a:xfrm>
-          <a:prstGeom prst="rect">
-            <a:avLst/>
-          </a:prstGeom>
-          <a:noFill/>
-          <a:ln/>
-        </p:spPr>
-        <p:txBody>
-          <a:bodyPr wrap="square" lIns="0" tIns="0" rIns="0" bIns="0" rtlCol="0" anchor="t"/>
-          <a:lstStyle/>
-          <a:p>
-            <a:pPr algn="l" indent="0" marL="0">
-              <a:lnSpc>
-                <a:spcPts val="2070"/>
-              </a:lnSpc>
-              <a:buNone/>
-            </a:pPr>
-            <a:r>
-              <a:rPr lang="en-US" sz="1500" dirty="0">
-                <a:solidFill>
-                  <a:srgbClr val="FAF8F3"/>
-                </a:solidFill>
-                <a:latin typeface="Geist" pitchFamily="34" charset="0"/>
-                <a:ea typeface="Geist" pitchFamily="34" charset="-122"/>
-                <a:cs typeface="Geist" pitchFamily="34" charset="-120"/>
-              </a:rPr>
-              <a:t>Халықаралық география олимпиадасы (iGeo).</a:t>
-            </a:r>
-            <a:endParaRPr lang="en-US" sz="1500" dirty="0"/>
-          </a:p>
-        </p:txBody>
-      </p:sp>
-      <p:sp>
-        <p:nvSpPr>
-          <p:cNvPr id="15" name="text-14"/>
-          <p:cNvSpPr txBox="1"/>
-          <p:nvPr/>
-        </p:nvSpPr>
-        <p:spPr>
-          <a:xfrm rot="60000">
-            <a:off x="876654" y="4755161"/>
-            <a:ext cx="5613654" cy="527050"/>
-          </a:xfrm>
-          <a:prstGeom prst="rect">
-            <a:avLst/>
-          </a:prstGeom>
-          <a:noFill/>
-          <a:ln/>
-        </p:spPr>
-        <p:txBody>
-          <a:bodyPr wrap="square" lIns="0" tIns="0" rIns="0" bIns="0" rtlCol="0" anchor="t"/>
-          <a:lstStyle/>
-          <a:p>
-            <a:pPr algn="l" indent="0" marL="0">
-              <a:lnSpc>
-                <a:spcPts val="2070"/>
-              </a:lnSpc>
-              <a:buNone/>
-            </a:pPr>
-            <a:r>
-              <a:rPr lang="en-US" sz="1500" dirty="0">
-                <a:solidFill>
-                  <a:srgbClr val="FAF8F3"/>
-                </a:solidFill>
-                <a:latin typeface="Geist" pitchFamily="34" charset="0"/>
-                <a:ea typeface="Geist" pitchFamily="34" charset="-122"/>
-                <a:cs typeface="Geist" pitchFamily="34" charset="-120"/>
-              </a:rPr>
-              <a:t>Қазақ және қырғыз ауыз әдебиетін жинайтын подкаст немесе блог.</a:t>
-            </a:r>
-            <a:endParaRPr lang="en-US" sz="1500" dirty="0"/>
-          </a:p>
-        </p:txBody>
-      </p:sp>
-      <p:sp>
-        <p:nvSpPr>
-          <p:cNvPr id="16" name="text-15"/>
-          <p:cNvSpPr txBox="1"/>
-          <p:nvPr/>
-        </p:nvSpPr>
-        <p:spPr>
-          <a:xfrm rot="60000">
-            <a:off x="865707" y="5382326"/>
-            <a:ext cx="5613654" cy="527050"/>
-          </a:xfrm>
-          <a:prstGeom prst="rect">
-            <a:avLst/>
-          </a:prstGeom>
-          <a:noFill/>
-          <a:ln/>
-        </p:spPr>
-        <p:txBody>
-          <a:bodyPr wrap="square" lIns="0" tIns="0" rIns="0" bIns="0" rtlCol="0" anchor="t"/>
-          <a:lstStyle/>
-          <a:p>
-            <a:pPr algn="l" indent="0" marL="0">
-              <a:lnSpc>
-                <a:spcPts val="2070"/>
-              </a:lnSpc>
-              <a:buNone/>
-            </a:pPr>
-            <a:r>
-              <a:rPr lang="en-US" sz="1500" b="1" dirty="0">
-                <a:solidFill>
-                  <a:srgbClr val="FAF8F3"/>
-                </a:solidFill>
-                <a:latin typeface="Geist" pitchFamily="34" charset="0"/>
-                <a:ea typeface="Geist" pitchFamily="34" charset="-122"/>
-                <a:cs typeface="Geist" pitchFamily="34" charset="-120"/>
-              </a:rPr>
-              <a:t>Оқитын мамандығы: антропология немесе Орталық Азияны зерттеу.</a:t>
-            </a:r>
-            <a:endParaRPr lang="en-US" sz="1500" dirty="0"/>
-          </a:p>
-        </p:txBody>
-      </p:sp>
-      <p:sp>
-        <p:nvSpPr>
-          <p:cNvPr id="17" name="text-16"/>
-          <p:cNvSpPr txBox="1"/>
-          <p:nvPr/>
-        </p:nvSpPr>
-        <p:spPr>
-          <a:xfrm>
-            <a:off x="457845" y="7969250"/>
-            <a:ext cx="895223" cy="171450"/>
-          </a:xfrm>
-          <a:prstGeom prst="rect">
-            <a:avLst/>
-          </a:prstGeom>
-          <a:noFill/>
-          <a:ln/>
-        </p:spPr>
-        <p:txBody>
-          <a:bodyPr wrap="square" lIns="0" tIns="0" rIns="0" bIns="0" rtlCol="0" anchor="t"/>
-          <a:lstStyle/>
-          <a:p>
-            <a:pPr algn="l" indent="0" marL="0">
-              <a:lnSpc>
-                <a:spcPts val="1200"/>
-              </a:lnSpc>
-              <a:buNone/>
-            </a:pPr>
-            <a:r>
-              <a:rPr lang="en-US" sz="1000" spc="140" kern="0" dirty="0">
-                <a:solidFill>
-                  <a:srgbClr val="0A0A0A"/>
-                </a:solidFill>
-                <a:latin typeface="IBM Plex Mono" pitchFamily="34" charset="0"/>
-                <a:ea typeface="IBM Plex Mono" pitchFamily="34" charset="-122"/>
-                <a:cs typeface="IBM Plex Mono" pitchFamily="34" charset="-120"/>
-              </a:rPr>
-              <a:t>@NURZYCOM</a:t>
-            </a:r>
-            <a:endParaRPr lang="en-US" sz="1000" dirty="0"/>
-          </a:p>
-        </p:txBody>
-      </p:sp>
-      <p:sp>
-        <p:nvSpPr>
-          <p:cNvPr id="18" name="shape-17"/>
+          <p:cNvPr id="13" name="shape-12"/>
           <p:cNvSpPr/>
           <p:nvPr/>
         </p:nvSpPr>
         <p:spPr>
-          <a:xfrm>
-            <a:off x="5060305" y="7893050"/>
-            <a:ext cx="1339850" cy="323850"/>
-          </a:xfrm>
-          <a:prstGeom prst="roundRect">
-            <a:avLst>
-              <a:gd name="adj" fmla="val 50000"/>
-            </a:avLst>
+          <a:xfrm rot="-420000">
+            <a:off x="5718015" y="4831576"/>
+            <a:ext cx="533400" cy="533400"/>
+          </a:xfrm>
+          <a:prstGeom prst="ellipse">
+            <a:avLst/>
           </a:prstGeom>
           <a:solidFill>
-            <a:srgbClr val="0A0A0A"/>
+            <a:srgbClr val="FAF8F3"/>
           </a:solidFill>
-          <a:ln/>
-        </p:spPr>
-      </p:sp>
-      <p:sp>
-        <p:nvSpPr>
-          <p:cNvPr id="19" name="text-18"/>
-          <p:cNvSpPr txBox="1"/>
-          <p:nvPr/>
-        </p:nvSpPr>
-        <p:spPr>
-          <a:xfrm>
-            <a:off x="5200005" y="7969250"/>
-            <a:ext cx="895223" cy="171450"/>
-          </a:xfrm>
-          <a:prstGeom prst="rect">
-            <a:avLst/>
-          </a:prstGeom>
-          <a:noFill/>
-          <a:ln/>
-        </p:spPr>
-        <p:txBody>
-          <a:bodyPr wrap="square" lIns="0" tIns="0" rIns="0" bIns="0" rtlCol="0" anchor="t"/>
-          <a:lstStyle/>
-          <a:p>
-            <a:pPr algn="l" indent="0" marL="0">
-              <a:lnSpc>
-                <a:spcPts val="1200"/>
-              </a:lnSpc>
-              <a:buNone/>
-            </a:pPr>
-            <a:r>
-              <a:rPr lang="en-US" sz="1000" spc="140" kern="0" dirty="0">
-                <a:solidFill>
-                  <a:srgbClr val="FAF8F3"/>
-                </a:solidFill>
-                <a:latin typeface="IBM Plex Mono" pitchFamily="34" charset="0"/>
-                <a:ea typeface="IBM Plex Mono" pitchFamily="34" charset="-122"/>
-                <a:cs typeface="IBM Plex Mono" pitchFamily="34" charset="-120"/>
-              </a:rPr>
-              <a:t>ӘРІ ҚАРАЙ</a:t>
-            </a:r>
-            <a:endParaRPr lang="en-US" sz="1000" dirty="0"/>
-          </a:p>
-        </p:txBody>
+          <a:ln w="12700">
+            <a:solidFill>
+              <a:srgbClr val="0A0A0A"/>
+            </a:solidFill>
+            <a:prstDash val="solid"/>
+          </a:ln>
+        </p:spPr>
       </p:sp>
       <p:pic>
         <p:nvPicPr>
-          <p:cNvPr id="20" name="svg-19" descr="preencoded.png">    </p:cNvPr>
+          <p:cNvPr id="14" name="svg-13" descr="preencoded.png">    </p:cNvPr>
           <p:cNvPicPr>
             <a:picLocks noChangeAspect="1"/>
           </p:cNvPicPr>
@@ -4386,6 +4445,328 @@
           </a:stretch>
         </p:blipFill>
         <p:spPr>
+          <a:xfrm rot="-420000">
+            <a:off x="5838665" y="4952226"/>
+            <a:ext cx="292100" cy="292100"/>
+          </a:xfrm>
+          <a:prstGeom prst="rect">
+            <a:avLst/>
+          </a:prstGeom>
+        </p:spPr>
+      </p:pic>
+      <p:sp>
+        <p:nvSpPr>
+          <p:cNvPr id="15" name="text-14"/>
+          <p:cNvSpPr txBox="1"/>
+          <p:nvPr/>
+        </p:nvSpPr>
+        <p:spPr>
+          <a:xfrm rot="60000">
+            <a:off x="698633" y="5168218"/>
+            <a:ext cx="5815584" cy="146050"/>
+          </a:xfrm>
+          <a:prstGeom prst="rect">
+            <a:avLst/>
+          </a:prstGeom>
+          <a:noFill/>
+          <a:ln/>
+        </p:spPr>
+        <p:txBody>
+          <a:bodyPr wrap="square" lIns="0" tIns="0" rIns="0" bIns="0" rtlCol="0" anchor="t"/>
+          <a:lstStyle/>
+          <a:p>
+            <a:pPr algn="l" indent="0" marL="0">
+              <a:lnSpc>
+                <a:spcPts val="1080"/>
+              </a:lnSpc>
+              <a:buNone/>
+            </a:pPr>
+            <a:r>
+              <a:rPr lang="en-US" sz="900" spc="140" kern="0" dirty="0">
+                <a:solidFill>
+                  <a:srgbClr val="FAF8F3"/>
+                </a:solidFill>
+                <a:latin typeface="IBM Plex Mono" pitchFamily="34" charset="0"/>
+                <a:ea typeface="IBM Plex Mono" pitchFamily="34" charset="-122"/>
+                <a:cs typeface="IBM Plex Mono" pitchFamily="34" charset="-120"/>
+              </a:rPr>
+              <a:t>2026 ЖЫЛЫ, 17 ЖАСТА</a:t>
+            </a:r>
+            <a:endParaRPr lang="en-US" sz="900" dirty="0"/>
+          </a:p>
+        </p:txBody>
+      </p:sp>
+      <p:pic>
+        <p:nvPicPr>
+          <p:cNvPr id="16" name="svg-15" descr="preencoded.png">    </p:cNvPr>
+          <p:cNvPicPr>
+            <a:picLocks noChangeAspect="1"/>
+          </p:cNvPicPr>
+          <p:nvPr/>
+        </p:nvPicPr>
+        <p:blipFill>
+          <a:blip r:embed="rId4"/>
+          <a:stretch>
+            <a:fillRect/>
+          </a:stretch>
+        </p:blipFill>
+        <p:spPr>
+          <a:xfrm rot="60000">
+            <a:off x="694214" y="5369724"/>
+            <a:ext cx="203200" cy="203200"/>
+          </a:xfrm>
+          <a:prstGeom prst="rect">
+            <a:avLst/>
+          </a:prstGeom>
+        </p:spPr>
+      </p:pic>
+      <p:sp>
+        <p:nvSpPr>
+          <p:cNvPr id="17" name="text-16"/>
+          <p:cNvSpPr txBox="1"/>
+          <p:nvPr/>
+        </p:nvSpPr>
+        <p:spPr>
+          <a:xfrm rot="60000">
+            <a:off x="960265" y="5392370"/>
+            <a:ext cx="3944366" cy="222250"/>
+          </a:xfrm>
+          <a:prstGeom prst="rect">
+            <a:avLst/>
+          </a:prstGeom>
+          <a:noFill/>
+          <a:ln/>
+        </p:spPr>
+        <p:txBody>
+          <a:bodyPr wrap="square" lIns="0" tIns="0" rIns="0" bIns="0" rtlCol="0" anchor="t"/>
+          <a:lstStyle/>
+          <a:p>
+            <a:pPr algn="l" indent="0" marL="0">
+              <a:lnSpc>
+                <a:spcPts val="1840"/>
+              </a:lnSpc>
+              <a:buNone/>
+            </a:pPr>
+            <a:r>
+              <a:rPr lang="en-US" sz="1350" dirty="0">
+                <a:solidFill>
+                  <a:srgbClr val="FAF8F3"/>
+                </a:solidFill>
+                <a:latin typeface="Geist" pitchFamily="34" charset="0"/>
+                <a:ea typeface="Geist" pitchFamily="34" charset="-122"/>
+                <a:cs typeface="Geist" pitchFamily="34" charset="-120"/>
+              </a:rPr>
+              <a:t>Халықаралық география олимпиадасы (iGeo).</a:t>
+            </a:r>
+            <a:endParaRPr lang="en-US" sz="1350" dirty="0"/>
+          </a:p>
+        </p:txBody>
+      </p:sp>
+      <p:sp>
+        <p:nvSpPr>
+          <p:cNvPr id="18" name="text-17"/>
+          <p:cNvSpPr txBox="1"/>
+          <p:nvPr/>
+        </p:nvSpPr>
+        <p:spPr>
+          <a:xfrm rot="60000">
+            <a:off x="876395" y="5739210"/>
+            <a:ext cx="5613654" cy="463550"/>
+          </a:xfrm>
+          <a:prstGeom prst="rect">
+            <a:avLst/>
+          </a:prstGeom>
+          <a:noFill/>
+          <a:ln/>
+        </p:spPr>
+        <p:txBody>
+          <a:bodyPr wrap="square" lIns="0" tIns="0" rIns="0" bIns="0" rtlCol="0" anchor="t"/>
+          <a:lstStyle/>
+          <a:p>
+            <a:pPr algn="l" indent="0" marL="0">
+              <a:lnSpc>
+                <a:spcPts val="1840"/>
+              </a:lnSpc>
+              <a:buNone/>
+            </a:pPr>
+            <a:r>
+              <a:rPr lang="en-US" sz="1350" dirty="0">
+                <a:solidFill>
+                  <a:srgbClr val="FAF8F3"/>
+                </a:solidFill>
+                <a:latin typeface="Geist" pitchFamily="34" charset="0"/>
+                <a:ea typeface="Geist" pitchFamily="34" charset="-122"/>
+                <a:cs typeface="Geist" pitchFamily="34" charset="-120"/>
+              </a:rPr>
+              <a:t>Қазақ және қырғыз ауыз әдебиетін жинайтын подкаст немесе блог.</a:t>
+            </a:r>
+            <a:endParaRPr lang="en-US" sz="1350" dirty="0"/>
+          </a:p>
+        </p:txBody>
+      </p:sp>
+      <p:sp>
+        <p:nvSpPr>
+          <p:cNvPr id="19" name="text-18"/>
+          <p:cNvSpPr txBox="1"/>
+          <p:nvPr/>
+        </p:nvSpPr>
+        <p:spPr>
+          <a:xfrm rot="60000">
+            <a:off x="866483" y="6307052"/>
+            <a:ext cx="5613654" cy="463550"/>
+          </a:xfrm>
+          <a:prstGeom prst="rect">
+            <a:avLst/>
+          </a:prstGeom>
+          <a:noFill/>
+          <a:ln/>
+        </p:spPr>
+        <p:txBody>
+          <a:bodyPr wrap="square" lIns="0" tIns="0" rIns="0" bIns="0" rtlCol="0" anchor="t"/>
+          <a:lstStyle/>
+          <a:p>
+            <a:pPr algn="l" indent="0" marL="0">
+              <a:lnSpc>
+                <a:spcPts val="1840"/>
+              </a:lnSpc>
+              <a:buNone/>
+            </a:pPr>
+            <a:r>
+              <a:rPr lang="en-US" sz="1350" b="1" dirty="0">
+                <a:solidFill>
+                  <a:srgbClr val="FAF8F3"/>
+                </a:solidFill>
+                <a:latin typeface="Geist" pitchFamily="34" charset="0"/>
+                <a:ea typeface="Geist" pitchFamily="34" charset="-122"/>
+                <a:cs typeface="Geist" pitchFamily="34" charset="-120"/>
+              </a:rPr>
+              <a:t>Оқитын мамандығы: антропология немесе Орталық Азияны зерттеу.</a:t>
+            </a:r>
+            <a:endParaRPr lang="en-US" sz="1350" dirty="0"/>
+          </a:p>
+        </p:txBody>
+      </p:sp>
+      <p:sp>
+        <p:nvSpPr>
+          <p:cNvPr id="20" name="text-19"/>
+          <p:cNvSpPr txBox="1"/>
+          <p:nvPr/>
+        </p:nvSpPr>
+        <p:spPr>
+          <a:xfrm>
+            <a:off x="457845" y="7969250"/>
+            <a:ext cx="895223" cy="171450"/>
+          </a:xfrm>
+          <a:prstGeom prst="rect">
+            <a:avLst/>
+          </a:prstGeom>
+          <a:noFill/>
+          <a:ln/>
+        </p:spPr>
+        <p:txBody>
+          <a:bodyPr wrap="square" lIns="0" tIns="0" rIns="0" bIns="0" rtlCol="0" anchor="t"/>
+          <a:lstStyle/>
+          <a:p>
+            <a:pPr algn="l" indent="0" marL="0">
+              <a:lnSpc>
+                <a:spcPts val="1200"/>
+              </a:lnSpc>
+              <a:buNone/>
+            </a:pPr>
+            <a:r>
+              <a:rPr lang="en-US" sz="1000" spc="140" kern="0" dirty="0">
+                <a:solidFill>
+                  <a:srgbClr val="0A0A0A"/>
+                </a:solidFill>
+                <a:latin typeface="IBM Plex Mono" pitchFamily="34" charset="0"/>
+                <a:ea typeface="IBM Plex Mono" pitchFamily="34" charset="-122"/>
+                <a:cs typeface="IBM Plex Mono" pitchFamily="34" charset="-120"/>
+              </a:rPr>
+              <a:t>@NURZYCOM</a:t>
+            </a:r>
+            <a:endParaRPr lang="en-US" sz="1000" dirty="0"/>
+          </a:p>
+        </p:txBody>
+      </p:sp>
+      <p:sp>
+        <p:nvSpPr>
+          <p:cNvPr id="21" name="shape-20"/>
+          <p:cNvSpPr/>
+          <p:nvPr/>
+        </p:nvSpPr>
+        <p:spPr>
+          <a:xfrm>
+            <a:off x="5060305" y="7893050"/>
+            <a:ext cx="1339850" cy="323850"/>
+          </a:xfrm>
+          <a:prstGeom prst="roundRect">
+            <a:avLst>
+              <a:gd name="adj" fmla="val 50000"/>
+            </a:avLst>
+          </a:prstGeom>
+          <a:solidFill>
+            <a:srgbClr val="0A0A0A"/>
+          </a:solidFill>
+          <a:ln/>
+        </p:spPr>
+      </p:sp>
+      <p:sp>
+        <p:nvSpPr>
+          <p:cNvPr id="22" name="text-21"/>
+          <p:cNvSpPr txBox="1"/>
+          <p:nvPr/>
+        </p:nvSpPr>
+        <p:spPr>
+          <a:xfrm>
+            <a:off x="5200005" y="7969250"/>
+            <a:ext cx="895223" cy="171450"/>
+          </a:xfrm>
+          <a:prstGeom prst="rect">
+            <a:avLst/>
+          </a:prstGeom>
+          <a:noFill/>
+          <a:ln/>
+        </p:spPr>
+        <p:txBody>
+          <a:bodyPr wrap="square" lIns="0" tIns="0" rIns="0" bIns="0" rtlCol="0" anchor="t"/>
+          <a:lstStyle/>
+          <a:p>
+            <a:pPr algn="l" indent="0" marL="0">
+              <a:lnSpc>
+                <a:spcPts val="1200"/>
+              </a:lnSpc>
+              <a:buNone/>
+            </a:pPr>
+            <a:r>
+              <a:rPr lang="en-US" sz="1000" spc="140" kern="0" dirty="0">
+                <a:solidFill>
+                  <a:srgbClr val="FAF8F3"/>
+                </a:solidFill>
+                <a:latin typeface="IBM Plex Mono" pitchFamily="34" charset="0"/>
+                <a:ea typeface="IBM Plex Mono" pitchFamily="34" charset="-122"/>
+                <a:cs typeface="IBM Plex Mono" pitchFamily="34" charset="-120"/>
+              </a:rPr>
+              <a:t>ӘРІ ҚАРАЙ</a:t>
+            </a:r>
+            <a:endParaRPr lang="en-US" sz="1000" dirty="0"/>
+          </a:p>
+        </p:txBody>
+      </p:sp>
+      <p:pic>
+        <p:nvPicPr>
+          <p:cNvPr id="23" name="svg-22" descr="preencoded.png">    </p:cNvPr>
+          <p:cNvPicPr>
+            <a:picLocks noChangeAspect="1"/>
+          </p:cNvPicPr>
+          <p:nvPr/>
+        </p:nvPicPr>
+        <p:blipFill>
+          <a:blip r:embed="rId5"/>
+          <a:stretch>
+            <a:fillRect/>
+          </a:stretch>
+        </p:blipFill>
+        <p:spPr>
           <a:xfrm>
             <a:off x="6121400" y="7985125"/>
             <a:ext cx="139700" cy="139700"/>
@@ -4397,7 +4778,122 @@
       </p:pic>
       <p:sp>
         <p:nvSpPr>
-          <p:cNvPr id="21" name="text-20"/>
+          <p:cNvPr id="24" name="shape-23"/>
+          <p:cNvSpPr/>
+          <p:nvPr/>
+        </p:nvSpPr>
+        <p:spPr>
+          <a:xfrm rot="240000">
+            <a:off x="4660900" y="950913"/>
+            <a:ext cx="1714500" cy="2349500"/>
+          </a:xfrm>
+          <a:prstGeom prst="rect">
+            <a:avLst/>
+          </a:prstGeom>
+          <a:solidFill>
+            <a:srgbClr val="FFFFFF"/>
+          </a:solidFill>
+          <a:ln/>
+          <a:effectLst>
+            <a:outerShdw sx="100000" sy="100000" kx="0" ky="0" algn="bl" rotWithShape="0" blurRad="177800" dist="76200" dir="5400000">
+              <a:srgbClr val="000000">
+                <a:alpha val="22000"/>
+              </a:srgbClr>
+            </a:outerShdw>
+          </a:effectLst>
+        </p:spPr>
+      </p:sp>
+      <p:sp>
+        <p:nvSpPr>
+          <p:cNvPr id="25" name="shape-24"/>
+          <p:cNvSpPr/>
+          <p:nvPr/>
+        </p:nvSpPr>
+        <p:spPr>
+          <a:xfrm rot="60000">
+            <a:off x="5121964" y="840996"/>
+            <a:ext cx="952500" cy="279400"/>
+          </a:xfrm>
+          <a:prstGeom prst="rect">
+            <a:avLst/>
+          </a:prstGeom>
+          <a:solidFill>
+            <a:srgbClr val="D5D5D4">
+              <a:alpha val="90000"/>
+            </a:srgbClr>
+          </a:solidFill>
+          <a:ln/>
+        </p:spPr>
+      </p:sp>
+      <p:pic>
+        <p:nvPicPr>
+          <p:cNvPr id="26" name="img-25" descr="preencoded.png">    </p:cNvPr>
+          <p:cNvPicPr>
+            <a:picLocks noChangeAspect="1"/>
+          </p:cNvPicPr>
+          <p:nvPr/>
+        </p:nvPicPr>
+        <p:blipFill>
+          <a:blip r:embed="rId6"/>
+          <a:stretch>
+            <a:fillRect/>
+          </a:stretch>
+        </p:blipFill>
+        <p:spPr>
+          <a:xfrm rot="240000">
+            <a:off x="4745516" y="1027406"/>
+            <a:ext cx="1562100" cy="1955800"/>
+          </a:xfrm>
+          <a:prstGeom prst="rect">
+            <a:avLst/>
+          </a:prstGeom>
+        </p:spPr>
+      </p:pic>
+      <p:sp>
+        <p:nvSpPr>
+          <p:cNvPr id="27" name="text-26"/>
+          <p:cNvSpPr txBox="1"/>
+          <p:nvPr/>
+        </p:nvSpPr>
+        <p:spPr>
+          <a:xfrm rot="240000">
+            <a:off x="4557177" y="3004300"/>
+            <a:ext cx="1783080" cy="228600"/>
+          </a:xfrm>
+          <a:prstGeom prst="rect">
+            <a:avLst/>
+          </a:prstGeom>
+          <a:noFill/>
+          <a:ln/>
+        </p:spPr>
+        <p:txBody>
+          <a:bodyPr wrap="square" lIns="0" tIns="0" rIns="0" bIns="0" rtlCol="0" anchor="t"/>
+          <a:lstStyle/>
+          <a:p>
+            <a:pPr algn="ctr" indent="0" marL="0">
+              <a:lnSpc>
+                <a:spcPts val="1560"/>
+              </a:lnSpc>
+              <a:buNone/>
+            </a:pPr>
+            <a:r>
+              <a:rPr lang="en-US" sz="1300" i="1" dirty="0">
+                <a:solidFill>
+                  <a:srgbClr val="0A0A0A"/>
+                </a:solidFill>
+                <a:latin typeface="Noto Serif Display Light" pitchFamily="34" charset="0"/>
+                <a:ea typeface="Noto Serif Display Light" pitchFamily="34" charset="-122"/>
+                <a:cs typeface="Noto Serif Display Light" pitchFamily="34" charset="-120"/>
+              </a:rPr>
+              <a:t>1835–1865</a:t>
+            </a:r>
+            <a:endParaRPr lang="en-US" sz="1300" dirty="0"/>
+          </a:p>
+        </p:txBody>
+      </p:sp>
+      <p:sp>
+        <p:nvSpPr>
+          <p:cNvPr id="28" name="text-27"/>
           <p:cNvSpPr txBox="1"/>
           <p:nvPr/>
         </p:nvSpPr>
@@ -4619,8 +5115,8 @@
         </p:nvSpPr>
         <p:spPr>
           <a:xfrm>
-            <a:off x="457200" y="951458"/>
-            <a:ext cx="6300216" cy="673100"/>
+            <a:off x="457200" y="953591"/>
+            <a:ext cx="4092448" cy="1212850"/>
           </a:xfrm>
           <a:prstGeom prst="rect">
             <a:avLst/>
@@ -4678,8 +5174,8 @@
         </p:nvSpPr>
         <p:spPr>
           <a:xfrm rot="-60000">
-            <a:off x="457200" y="2030611"/>
-            <a:ext cx="5943600" cy="1771650"/>
+            <a:off x="457200" y="3174603"/>
+            <a:ext cx="5943600" cy="1651000"/>
           </a:xfrm>
           <a:prstGeom prst="rect">
             <a:avLst/>
@@ -4705,7 +5201,7 @@
         </p:nvSpPr>
         <p:spPr>
           <a:xfrm rot="-240000">
-            <a:off x="2937758" y="1917831"/>
+            <a:off x="2938793" y="3060822"/>
             <a:ext cx="952500" cy="279400"/>
           </a:xfrm>
           <a:prstGeom prst="rect">
@@ -4727,7 +5223,7 @@
         </p:nvSpPr>
         <p:spPr>
           <a:xfrm rot="-60000">
-            <a:off x="674964" y="2222595"/>
+            <a:off x="675999" y="3365585"/>
             <a:ext cx="5815584" cy="146050"/>
           </a:xfrm>
           <a:prstGeom prst="rect">
@@ -4769,27 +5265,27 @@
         </p:nvSpPr>
         <p:spPr>
           <a:xfrm rot="-60000">
-            <a:off x="872877" y="2456785"/>
-            <a:ext cx="5613654" cy="527050"/>
-          </a:xfrm>
-          <a:prstGeom prst="rect">
-            <a:avLst/>
-          </a:prstGeom>
-          <a:noFill/>
-          <a:ln/>
-        </p:spPr>
-        <p:txBody>
-          <a:bodyPr wrap="square" lIns="0" tIns="0" rIns="0" bIns="0" rtlCol="0" anchor="t"/>
-          <a:lstStyle/>
-          <a:p>
-            <a:pPr algn="l" indent="0" marL="0">
-              <a:lnSpc>
-                <a:spcPts val="2070"/>
-              </a:lnSpc>
-              <a:buNone/>
-            </a:pPr>
-            <a:r>
-              <a:rPr lang="en-US" sz="1500" dirty="0">
+            <a:off x="873394" y="3601864"/>
+            <a:ext cx="5613654" cy="463550"/>
+          </a:xfrm>
+          <a:prstGeom prst="rect">
+            <a:avLst/>
+          </a:prstGeom>
+          <a:noFill/>
+          <a:ln/>
+        </p:spPr>
+        <p:txBody>
+          <a:bodyPr wrap="square" lIns="0" tIns="0" rIns="0" bIns="0" rtlCol="0" anchor="t"/>
+          <a:lstStyle/>
+          <a:p>
+            <a:pPr algn="l" indent="0" marL="0">
+              <a:lnSpc>
+                <a:spcPts val="1840"/>
+              </a:lnSpc>
+              <a:buNone/>
+            </a:pPr>
+            <a:r>
+              <a:rPr lang="en-US" sz="1350" dirty="0">
                 <a:solidFill>
                   <a:srgbClr val="2B2A27"/>
                 </a:solidFill>
@@ -4799,7 +5295,7 @@
               </a:rPr>
               <a:t>Химик-металлург, академик, КСРО Мемлекеттік сыйлығының лауреаты (1969).</a:t>
             </a:r>
-            <a:endParaRPr lang="en-US" sz="1500" dirty="0"/>
+            <a:endParaRPr lang="en-US" sz="1350" dirty="0"/>
           </a:p>
         </p:txBody>
       </p:sp>
@@ -4811,27 +5307,27 @@
         </p:nvSpPr>
         <p:spPr>
           <a:xfrm rot="-60000">
-            <a:off x="883824" y="3083951"/>
-            <a:ext cx="5613654" cy="527050"/>
-          </a:xfrm>
-          <a:prstGeom prst="rect">
-            <a:avLst/>
-          </a:prstGeom>
-          <a:noFill/>
-          <a:ln/>
-        </p:spPr>
-        <p:txBody>
-          <a:bodyPr wrap="square" lIns="0" tIns="0" rIns="0" bIns="0" rtlCol="0" anchor="t"/>
-          <a:lstStyle/>
-          <a:p>
-            <a:pPr algn="l" indent="0" marL="0">
-              <a:lnSpc>
-                <a:spcPts val="2070"/>
-              </a:lnSpc>
-              <a:buNone/>
-            </a:pPr>
-            <a:r>
-              <a:rPr lang="en-US" sz="1500" dirty="0">
+            <a:off x="883306" y="4169706"/>
+            <a:ext cx="5613654" cy="463550"/>
+          </a:xfrm>
+          <a:prstGeom prst="rect">
+            <a:avLst/>
+          </a:prstGeom>
+          <a:noFill/>
+          <a:ln/>
+        </p:spPr>
+        <p:txBody>
+          <a:bodyPr wrap="square" lIns="0" tIns="0" rIns="0" bIns="0" rtlCol="0" anchor="t"/>
+          <a:lstStyle/>
+          <a:p>
+            <a:pPr algn="l" indent="0" marL="0">
+              <a:lnSpc>
+                <a:spcPts val="1840"/>
+              </a:lnSpc>
+              <a:buNone/>
+            </a:pPr>
+            <a:r>
+              <a:rPr lang="en-US" sz="1350" dirty="0">
                 <a:solidFill>
                   <a:srgbClr val="2B2A27"/>
                 </a:solidFill>
@@ -4841,7 +5337,7 @@
               </a:rPr>
               <a:t>Қарағанды мемлекеттік университетінің тұңғыш ректоры, Сәтбаевтың шәкірті, жазушы.</a:t>
             </a:r>
-            <a:endParaRPr lang="en-US" sz="1500" dirty="0"/>
+            <a:endParaRPr lang="en-US" sz="1350" dirty="0"/>
           </a:p>
         </p:txBody>
       </p:sp>
@@ -4853,12 +5349,12 @@
         </p:nvSpPr>
         <p:spPr>
           <a:xfrm rot="60000">
-            <a:off x="457200" y="3965823"/>
-            <a:ext cx="5943600" cy="2146300"/>
+            <a:off x="457200" y="4976316"/>
+            <a:ext cx="5943600" cy="2000250"/>
           </a:xfrm>
           <a:prstGeom prst="roundRect">
             <a:avLst>
-              <a:gd name="adj" fmla="val 8284"/>
+              <a:gd name="adj" fmla="val 8889"/>
             </a:avLst>
           </a:prstGeom>
           <a:solidFill>
@@ -4869,281 +5365,32 @@
       </p:sp>
       <p:sp>
         <p:nvSpPr>
-          <p:cNvPr id="13" name="text-12"/>
-          <p:cNvSpPr txBox="1"/>
-          <p:nvPr/>
-        </p:nvSpPr>
-        <p:spPr>
-          <a:xfrm rot="60000">
-            <a:off x="699927" y="4156595"/>
-            <a:ext cx="5815584" cy="146050"/>
-          </a:xfrm>
-          <a:prstGeom prst="rect">
-            <a:avLst/>
-          </a:prstGeom>
-          <a:noFill/>
-          <a:ln/>
-        </p:spPr>
-        <p:txBody>
-          <a:bodyPr wrap="square" lIns="0" tIns="0" rIns="0" bIns="0" rtlCol="0" anchor="t"/>
-          <a:lstStyle/>
-          <a:p>
-            <a:pPr algn="l" indent="0" marL="0">
-              <a:lnSpc>
-                <a:spcPts val="1080"/>
-              </a:lnSpc>
-              <a:buNone/>
-            </a:pPr>
-            <a:r>
-              <a:rPr lang="en-US" sz="900" spc="140" kern="0" dirty="0">
-                <a:solidFill>
-                  <a:srgbClr val="FAF8F3"/>
-                </a:solidFill>
-                <a:latin typeface="IBM Plex Mono" pitchFamily="34" charset="0"/>
-                <a:ea typeface="IBM Plex Mono" pitchFamily="34" charset="-122"/>
-                <a:cs typeface="IBM Plex Mono" pitchFamily="34" charset="-120"/>
-              </a:rPr>
-              <a:t>2026 ЖЫЛЫ, 17 ЖАСТА</a:t>
-            </a:r>
-            <a:endParaRPr lang="en-US" sz="900" dirty="0"/>
-          </a:p>
-        </p:txBody>
-      </p:sp>
-      <p:sp>
-        <p:nvSpPr>
-          <p:cNvPr id="14" name="text-13"/>
-          <p:cNvSpPr txBox="1"/>
-          <p:nvPr/>
-        </p:nvSpPr>
-        <p:spPr>
-          <a:xfrm rot="60000">
-            <a:off x="885308" y="4392741"/>
-            <a:ext cx="5613654" cy="260350"/>
-          </a:xfrm>
-          <a:prstGeom prst="rect">
-            <a:avLst/>
-          </a:prstGeom>
-          <a:noFill/>
-          <a:ln/>
-        </p:spPr>
-        <p:txBody>
-          <a:bodyPr wrap="square" lIns="0" tIns="0" rIns="0" bIns="0" rtlCol="0" anchor="t"/>
-          <a:lstStyle/>
-          <a:p>
-            <a:pPr algn="l" indent="0" marL="0">
-              <a:lnSpc>
-                <a:spcPts val="2070"/>
-              </a:lnSpc>
-              <a:buNone/>
-            </a:pPr>
-            <a:r>
-              <a:rPr lang="en-US" sz="1500" dirty="0">
-                <a:solidFill>
-                  <a:srgbClr val="FAF8F3"/>
-                </a:solidFill>
-                <a:latin typeface="Geist" pitchFamily="34" charset="0"/>
-                <a:ea typeface="Geist" pitchFamily="34" charset="-122"/>
-                <a:cs typeface="Geist" pitchFamily="34" charset="-120"/>
-              </a:rPr>
-              <a:t>Халықаралық химия олимпиадасы (IChO).</a:t>
-            </a:r>
-            <a:endParaRPr lang="en-US" sz="1500" dirty="0"/>
-          </a:p>
-        </p:txBody>
-      </p:sp>
-      <p:sp>
-        <p:nvSpPr>
-          <p:cNvPr id="15" name="text-14"/>
-          <p:cNvSpPr txBox="1"/>
-          <p:nvPr/>
-        </p:nvSpPr>
-        <p:spPr>
-          <a:xfrm rot="60000">
-            <a:off x="876654" y="4755161"/>
-            <a:ext cx="5613654" cy="527050"/>
-          </a:xfrm>
-          <a:prstGeom prst="rect">
-            <a:avLst/>
-          </a:prstGeom>
-          <a:noFill/>
-          <a:ln/>
-        </p:spPr>
-        <p:txBody>
-          <a:bodyPr wrap="square" lIns="0" tIns="0" rIns="0" bIns="0" rtlCol="0" anchor="t"/>
-          <a:lstStyle/>
-          <a:p>
-            <a:pPr algn="l" indent="0" marL="0">
-              <a:lnSpc>
-                <a:spcPts val="2070"/>
-              </a:lnSpc>
-              <a:buNone/>
-            </a:pPr>
-            <a:r>
-              <a:rPr lang="en-US" sz="1500" dirty="0">
-                <a:solidFill>
-                  <a:srgbClr val="FAF8F3"/>
-                </a:solidFill>
-                <a:latin typeface="Geist" pitchFamily="34" charset="0"/>
-                <a:ea typeface="Geist" pitchFamily="34" charset="-122"/>
-                <a:cs typeface="Geist" pitchFamily="34" charset="-120"/>
-              </a:rPr>
-              <a:t>Қарағандының металлургиясы туралы зерттеу жобасы және әдеби эссе байқауы.</a:t>
-            </a:r>
-            <a:endParaRPr lang="en-US" sz="1500" dirty="0"/>
-          </a:p>
-        </p:txBody>
-      </p:sp>
-      <p:sp>
-        <p:nvSpPr>
-          <p:cNvPr id="16" name="text-15"/>
-          <p:cNvSpPr txBox="1"/>
-          <p:nvPr/>
-        </p:nvSpPr>
-        <p:spPr>
-          <a:xfrm rot="60000">
-            <a:off x="865707" y="5382326"/>
-            <a:ext cx="5613654" cy="527050"/>
-          </a:xfrm>
-          <a:prstGeom prst="rect">
-            <a:avLst/>
-          </a:prstGeom>
-          <a:noFill/>
-          <a:ln/>
-        </p:spPr>
-        <p:txBody>
-          <a:bodyPr wrap="square" lIns="0" tIns="0" rIns="0" bIns="0" rtlCol="0" anchor="t"/>
-          <a:lstStyle/>
-          <a:p>
-            <a:pPr algn="l" indent="0" marL="0">
-              <a:lnSpc>
-                <a:spcPts val="2070"/>
-              </a:lnSpc>
-              <a:buNone/>
-            </a:pPr>
-            <a:r>
-              <a:rPr lang="en-US" sz="1500" b="1" dirty="0">
-                <a:solidFill>
-                  <a:srgbClr val="FAF8F3"/>
-                </a:solidFill>
-                <a:latin typeface="Geist" pitchFamily="34" charset="0"/>
-                <a:ea typeface="Geist" pitchFamily="34" charset="-122"/>
-                <a:cs typeface="Geist" pitchFamily="34" charset="-120"/>
-              </a:rPr>
-              <a:t>Оқитын мамандығы: химиялық инженерия немесе материалтану.</a:t>
-            </a:r>
-            <a:endParaRPr lang="en-US" sz="1500" dirty="0"/>
-          </a:p>
-        </p:txBody>
-      </p:sp>
-      <p:sp>
-        <p:nvSpPr>
-          <p:cNvPr id="17" name="text-16"/>
-          <p:cNvSpPr txBox="1"/>
-          <p:nvPr/>
-        </p:nvSpPr>
-        <p:spPr>
-          <a:xfrm>
-            <a:off x="457845" y="7969250"/>
-            <a:ext cx="895223" cy="171450"/>
-          </a:xfrm>
-          <a:prstGeom prst="rect">
-            <a:avLst/>
-          </a:prstGeom>
-          <a:noFill/>
-          <a:ln/>
-        </p:spPr>
-        <p:txBody>
-          <a:bodyPr wrap="square" lIns="0" tIns="0" rIns="0" bIns="0" rtlCol="0" anchor="t"/>
-          <a:lstStyle/>
-          <a:p>
-            <a:pPr algn="l" indent="0" marL="0">
-              <a:lnSpc>
-                <a:spcPts val="1200"/>
-              </a:lnSpc>
-              <a:buNone/>
-            </a:pPr>
-            <a:r>
-              <a:rPr lang="en-US" sz="1000" spc="140" kern="0" dirty="0">
-                <a:solidFill>
-                  <a:srgbClr val="0A0A0A"/>
-                </a:solidFill>
-                <a:latin typeface="IBM Plex Mono" pitchFamily="34" charset="0"/>
-                <a:ea typeface="IBM Plex Mono" pitchFamily="34" charset="-122"/>
-                <a:cs typeface="IBM Plex Mono" pitchFamily="34" charset="-120"/>
-              </a:rPr>
-              <a:t>@NURZYCOM</a:t>
-            </a:r>
-            <a:endParaRPr lang="en-US" sz="1000" dirty="0"/>
-          </a:p>
-        </p:txBody>
-      </p:sp>
-      <p:sp>
-        <p:nvSpPr>
-          <p:cNvPr id="18" name="shape-17"/>
+          <p:cNvPr id="13" name="shape-12"/>
           <p:cNvSpPr/>
           <p:nvPr/>
         </p:nvSpPr>
         <p:spPr>
-          <a:xfrm>
-            <a:off x="5060305" y="7893050"/>
-            <a:ext cx="1339850" cy="323850"/>
-          </a:xfrm>
-          <a:prstGeom prst="roundRect">
-            <a:avLst>
-              <a:gd name="adj" fmla="val 50000"/>
-            </a:avLst>
+          <a:xfrm rot="-420000">
+            <a:off x="5718015" y="4831576"/>
+            <a:ext cx="533400" cy="533400"/>
+          </a:xfrm>
+          <a:prstGeom prst="ellipse">
+            <a:avLst/>
           </a:prstGeom>
           <a:solidFill>
-            <a:srgbClr val="0A0A0A"/>
+            <a:srgbClr val="FAF8F3"/>
           </a:solidFill>
-          <a:ln/>
-        </p:spPr>
-      </p:sp>
-      <p:sp>
-        <p:nvSpPr>
-          <p:cNvPr id="19" name="text-18"/>
-          <p:cNvSpPr txBox="1"/>
-          <p:nvPr/>
-        </p:nvSpPr>
-        <p:spPr>
-          <a:xfrm>
-            <a:off x="5200005" y="7969250"/>
-            <a:ext cx="895223" cy="171450"/>
-          </a:xfrm>
-          <a:prstGeom prst="rect">
-            <a:avLst/>
-          </a:prstGeom>
-          <a:noFill/>
-          <a:ln/>
-        </p:spPr>
-        <p:txBody>
-          <a:bodyPr wrap="square" lIns="0" tIns="0" rIns="0" bIns="0" rtlCol="0" anchor="t"/>
-          <a:lstStyle/>
-          <a:p>
-            <a:pPr algn="l" indent="0" marL="0">
-              <a:lnSpc>
-                <a:spcPts val="1200"/>
-              </a:lnSpc>
-              <a:buNone/>
-            </a:pPr>
-            <a:r>
-              <a:rPr lang="en-US" sz="1000" spc="140" kern="0" dirty="0">
-                <a:solidFill>
-                  <a:srgbClr val="FAF8F3"/>
-                </a:solidFill>
-                <a:latin typeface="IBM Plex Mono" pitchFamily="34" charset="0"/>
-                <a:ea typeface="IBM Plex Mono" pitchFamily="34" charset="-122"/>
-                <a:cs typeface="IBM Plex Mono" pitchFamily="34" charset="-120"/>
-              </a:rPr>
-              <a:t>ӘРІ ҚАРАЙ</a:t>
-            </a:r>
-            <a:endParaRPr lang="en-US" sz="1000" dirty="0"/>
-          </a:p>
-        </p:txBody>
+          <a:ln w="12700">
+            <a:solidFill>
+              <a:srgbClr val="0A0A0A"/>
+            </a:solidFill>
+            <a:prstDash val="solid"/>
+          </a:ln>
+        </p:spPr>
       </p:sp>
       <p:pic>
         <p:nvPicPr>
-          <p:cNvPr id="20" name="svg-19" descr="preencoded.png">    </p:cNvPr>
+          <p:cNvPr id="14" name="svg-13" descr="preencoded.png">    </p:cNvPr>
           <p:cNvPicPr>
             <a:picLocks noChangeAspect="1"/>
           </p:cNvPicPr>
@@ -5156,6 +5403,328 @@
           </a:stretch>
         </p:blipFill>
         <p:spPr>
+          <a:xfrm rot="-420000">
+            <a:off x="5838665" y="4952226"/>
+            <a:ext cx="292100" cy="292100"/>
+          </a:xfrm>
+          <a:prstGeom prst="rect">
+            <a:avLst/>
+          </a:prstGeom>
+        </p:spPr>
+      </p:pic>
+      <p:sp>
+        <p:nvSpPr>
+          <p:cNvPr id="15" name="text-14"/>
+          <p:cNvSpPr txBox="1"/>
+          <p:nvPr/>
+        </p:nvSpPr>
+        <p:spPr>
+          <a:xfrm rot="60000">
+            <a:off x="698633" y="5168218"/>
+            <a:ext cx="5815584" cy="146050"/>
+          </a:xfrm>
+          <a:prstGeom prst="rect">
+            <a:avLst/>
+          </a:prstGeom>
+          <a:noFill/>
+          <a:ln/>
+        </p:spPr>
+        <p:txBody>
+          <a:bodyPr wrap="square" lIns="0" tIns="0" rIns="0" bIns="0" rtlCol="0" anchor="t"/>
+          <a:lstStyle/>
+          <a:p>
+            <a:pPr algn="l" indent="0" marL="0">
+              <a:lnSpc>
+                <a:spcPts val="1080"/>
+              </a:lnSpc>
+              <a:buNone/>
+            </a:pPr>
+            <a:r>
+              <a:rPr lang="en-US" sz="900" spc="140" kern="0" dirty="0">
+                <a:solidFill>
+                  <a:srgbClr val="FAF8F3"/>
+                </a:solidFill>
+                <a:latin typeface="IBM Plex Mono" pitchFamily="34" charset="0"/>
+                <a:ea typeface="IBM Plex Mono" pitchFamily="34" charset="-122"/>
+                <a:cs typeface="IBM Plex Mono" pitchFamily="34" charset="-120"/>
+              </a:rPr>
+              <a:t>2026 ЖЫЛЫ, 17 ЖАСТА</a:t>
+            </a:r>
+            <a:endParaRPr lang="en-US" sz="900" dirty="0"/>
+          </a:p>
+        </p:txBody>
+      </p:sp>
+      <p:pic>
+        <p:nvPicPr>
+          <p:cNvPr id="16" name="svg-15" descr="preencoded.png">    </p:cNvPr>
+          <p:cNvPicPr>
+            <a:picLocks noChangeAspect="1"/>
+          </p:cNvPicPr>
+          <p:nvPr/>
+        </p:nvPicPr>
+        <p:blipFill>
+          <a:blip r:embed="rId4"/>
+          <a:stretch>
+            <a:fillRect/>
+          </a:stretch>
+        </p:blipFill>
+        <p:spPr>
+          <a:xfrm rot="60000">
+            <a:off x="694214" y="5369724"/>
+            <a:ext cx="203200" cy="203200"/>
+          </a:xfrm>
+          <a:prstGeom prst="rect">
+            <a:avLst/>
+          </a:prstGeom>
+        </p:spPr>
+      </p:pic>
+      <p:sp>
+        <p:nvSpPr>
+          <p:cNvPr id="17" name="text-16"/>
+          <p:cNvSpPr txBox="1"/>
+          <p:nvPr/>
+        </p:nvSpPr>
+        <p:spPr>
+          <a:xfrm rot="60000">
+            <a:off x="962173" y="5389688"/>
+            <a:ext cx="3614547" cy="222250"/>
+          </a:xfrm>
+          <a:prstGeom prst="rect">
+            <a:avLst/>
+          </a:prstGeom>
+          <a:noFill/>
+          <a:ln/>
+        </p:spPr>
+        <p:txBody>
+          <a:bodyPr wrap="square" lIns="0" tIns="0" rIns="0" bIns="0" rtlCol="0" anchor="t"/>
+          <a:lstStyle/>
+          <a:p>
+            <a:pPr algn="l" indent="0" marL="0">
+              <a:lnSpc>
+                <a:spcPts val="1840"/>
+              </a:lnSpc>
+              <a:buNone/>
+            </a:pPr>
+            <a:r>
+              <a:rPr lang="en-US" sz="1350" dirty="0">
+                <a:solidFill>
+                  <a:srgbClr val="FAF8F3"/>
+                </a:solidFill>
+                <a:latin typeface="Geist" pitchFamily="34" charset="0"/>
+                <a:ea typeface="Geist" pitchFamily="34" charset="-122"/>
+                <a:cs typeface="Geist" pitchFamily="34" charset="-120"/>
+              </a:rPr>
+              <a:t>Халықаралық химия олимпиадасы (IChO).</a:t>
+            </a:r>
+            <a:endParaRPr lang="en-US" sz="1350" dirty="0"/>
+          </a:p>
+        </p:txBody>
+      </p:sp>
+      <p:sp>
+        <p:nvSpPr>
+          <p:cNvPr id="18" name="text-17"/>
+          <p:cNvSpPr txBox="1"/>
+          <p:nvPr/>
+        </p:nvSpPr>
+        <p:spPr>
+          <a:xfrm rot="60000">
+            <a:off x="876395" y="5739210"/>
+            <a:ext cx="5613654" cy="463550"/>
+          </a:xfrm>
+          <a:prstGeom prst="rect">
+            <a:avLst/>
+          </a:prstGeom>
+          <a:noFill/>
+          <a:ln/>
+        </p:spPr>
+        <p:txBody>
+          <a:bodyPr wrap="square" lIns="0" tIns="0" rIns="0" bIns="0" rtlCol="0" anchor="t"/>
+          <a:lstStyle/>
+          <a:p>
+            <a:pPr algn="l" indent="0" marL="0">
+              <a:lnSpc>
+                <a:spcPts val="1840"/>
+              </a:lnSpc>
+              <a:buNone/>
+            </a:pPr>
+            <a:r>
+              <a:rPr lang="en-US" sz="1350" dirty="0">
+                <a:solidFill>
+                  <a:srgbClr val="FAF8F3"/>
+                </a:solidFill>
+                <a:latin typeface="Geist" pitchFamily="34" charset="0"/>
+                <a:ea typeface="Geist" pitchFamily="34" charset="-122"/>
+                <a:cs typeface="Geist" pitchFamily="34" charset="-120"/>
+              </a:rPr>
+              <a:t>Қарағандының металлургиясы туралы зерттеу жобасы және әдеби эссе байқауы.</a:t>
+            </a:r>
+            <a:endParaRPr lang="en-US" sz="1350" dirty="0"/>
+          </a:p>
+        </p:txBody>
+      </p:sp>
+      <p:sp>
+        <p:nvSpPr>
+          <p:cNvPr id="19" name="text-18"/>
+          <p:cNvSpPr txBox="1"/>
+          <p:nvPr/>
+        </p:nvSpPr>
+        <p:spPr>
+          <a:xfrm rot="60000">
+            <a:off x="866483" y="6307052"/>
+            <a:ext cx="5613654" cy="463550"/>
+          </a:xfrm>
+          <a:prstGeom prst="rect">
+            <a:avLst/>
+          </a:prstGeom>
+          <a:noFill/>
+          <a:ln/>
+        </p:spPr>
+        <p:txBody>
+          <a:bodyPr wrap="square" lIns="0" tIns="0" rIns="0" bIns="0" rtlCol="0" anchor="t"/>
+          <a:lstStyle/>
+          <a:p>
+            <a:pPr algn="l" indent="0" marL="0">
+              <a:lnSpc>
+                <a:spcPts val="1840"/>
+              </a:lnSpc>
+              <a:buNone/>
+            </a:pPr>
+            <a:r>
+              <a:rPr lang="en-US" sz="1350" b="1" dirty="0">
+                <a:solidFill>
+                  <a:srgbClr val="FAF8F3"/>
+                </a:solidFill>
+                <a:latin typeface="Geist" pitchFamily="34" charset="0"/>
+                <a:ea typeface="Geist" pitchFamily="34" charset="-122"/>
+                <a:cs typeface="Geist" pitchFamily="34" charset="-120"/>
+              </a:rPr>
+              <a:t>Оқитын мамандығы: химиялық инженерия немесе материалтану.</a:t>
+            </a:r>
+            <a:endParaRPr lang="en-US" sz="1350" dirty="0"/>
+          </a:p>
+        </p:txBody>
+      </p:sp>
+      <p:sp>
+        <p:nvSpPr>
+          <p:cNvPr id="20" name="text-19"/>
+          <p:cNvSpPr txBox="1"/>
+          <p:nvPr/>
+        </p:nvSpPr>
+        <p:spPr>
+          <a:xfrm>
+            <a:off x="457845" y="7969250"/>
+            <a:ext cx="895223" cy="171450"/>
+          </a:xfrm>
+          <a:prstGeom prst="rect">
+            <a:avLst/>
+          </a:prstGeom>
+          <a:noFill/>
+          <a:ln/>
+        </p:spPr>
+        <p:txBody>
+          <a:bodyPr wrap="square" lIns="0" tIns="0" rIns="0" bIns="0" rtlCol="0" anchor="t"/>
+          <a:lstStyle/>
+          <a:p>
+            <a:pPr algn="l" indent="0" marL="0">
+              <a:lnSpc>
+                <a:spcPts val="1200"/>
+              </a:lnSpc>
+              <a:buNone/>
+            </a:pPr>
+            <a:r>
+              <a:rPr lang="en-US" sz="1000" spc="140" kern="0" dirty="0">
+                <a:solidFill>
+                  <a:srgbClr val="0A0A0A"/>
+                </a:solidFill>
+                <a:latin typeface="IBM Plex Mono" pitchFamily="34" charset="0"/>
+                <a:ea typeface="IBM Plex Mono" pitchFamily="34" charset="-122"/>
+                <a:cs typeface="IBM Plex Mono" pitchFamily="34" charset="-120"/>
+              </a:rPr>
+              <a:t>@NURZYCOM</a:t>
+            </a:r>
+            <a:endParaRPr lang="en-US" sz="1000" dirty="0"/>
+          </a:p>
+        </p:txBody>
+      </p:sp>
+      <p:sp>
+        <p:nvSpPr>
+          <p:cNvPr id="21" name="shape-20"/>
+          <p:cNvSpPr/>
+          <p:nvPr/>
+        </p:nvSpPr>
+        <p:spPr>
+          <a:xfrm>
+            <a:off x="5060305" y="7893050"/>
+            <a:ext cx="1339850" cy="323850"/>
+          </a:xfrm>
+          <a:prstGeom prst="roundRect">
+            <a:avLst>
+              <a:gd name="adj" fmla="val 50000"/>
+            </a:avLst>
+          </a:prstGeom>
+          <a:solidFill>
+            <a:srgbClr val="0A0A0A"/>
+          </a:solidFill>
+          <a:ln/>
+        </p:spPr>
+      </p:sp>
+      <p:sp>
+        <p:nvSpPr>
+          <p:cNvPr id="22" name="text-21"/>
+          <p:cNvSpPr txBox="1"/>
+          <p:nvPr/>
+        </p:nvSpPr>
+        <p:spPr>
+          <a:xfrm>
+            <a:off x="5200005" y="7969250"/>
+            <a:ext cx="895223" cy="171450"/>
+          </a:xfrm>
+          <a:prstGeom prst="rect">
+            <a:avLst/>
+          </a:prstGeom>
+          <a:noFill/>
+          <a:ln/>
+        </p:spPr>
+        <p:txBody>
+          <a:bodyPr wrap="square" lIns="0" tIns="0" rIns="0" bIns="0" rtlCol="0" anchor="t"/>
+          <a:lstStyle/>
+          <a:p>
+            <a:pPr algn="l" indent="0" marL="0">
+              <a:lnSpc>
+                <a:spcPts val="1200"/>
+              </a:lnSpc>
+              <a:buNone/>
+            </a:pPr>
+            <a:r>
+              <a:rPr lang="en-US" sz="1000" spc="140" kern="0" dirty="0">
+                <a:solidFill>
+                  <a:srgbClr val="FAF8F3"/>
+                </a:solidFill>
+                <a:latin typeface="IBM Plex Mono" pitchFamily="34" charset="0"/>
+                <a:ea typeface="IBM Plex Mono" pitchFamily="34" charset="-122"/>
+                <a:cs typeface="IBM Plex Mono" pitchFamily="34" charset="-120"/>
+              </a:rPr>
+              <a:t>ӘРІ ҚАРАЙ</a:t>
+            </a:r>
+            <a:endParaRPr lang="en-US" sz="1000" dirty="0"/>
+          </a:p>
+        </p:txBody>
+      </p:sp>
+      <p:pic>
+        <p:nvPicPr>
+          <p:cNvPr id="23" name="svg-22" descr="preencoded.png">    </p:cNvPr>
+          <p:cNvPicPr>
+            <a:picLocks noChangeAspect="1"/>
+          </p:cNvPicPr>
+          <p:nvPr/>
+        </p:nvPicPr>
+        <p:blipFill>
+          <a:blip r:embed="rId5"/>
+          <a:stretch>
+            <a:fillRect/>
+          </a:stretch>
+        </p:blipFill>
+        <p:spPr>
           <a:xfrm>
             <a:off x="6121400" y="7985125"/>
             <a:ext cx="139700" cy="139700"/>
@@ -5167,7 +5736,122 @@
       </p:pic>
       <p:sp>
         <p:nvSpPr>
-          <p:cNvPr id="21" name="text-20"/>
+          <p:cNvPr id="24" name="shape-23"/>
+          <p:cNvSpPr/>
+          <p:nvPr/>
+        </p:nvSpPr>
+        <p:spPr>
+          <a:xfrm rot="240000">
+            <a:off x="4660900" y="950913"/>
+            <a:ext cx="1714500" cy="2349500"/>
+          </a:xfrm>
+          <a:prstGeom prst="rect">
+            <a:avLst/>
+          </a:prstGeom>
+          <a:solidFill>
+            <a:srgbClr val="FFFFFF"/>
+          </a:solidFill>
+          <a:ln/>
+          <a:effectLst>
+            <a:outerShdw sx="100000" sy="100000" kx="0" ky="0" algn="bl" rotWithShape="0" blurRad="177800" dist="76200" dir="5400000">
+              <a:srgbClr val="000000">
+                <a:alpha val="22000"/>
+              </a:srgbClr>
+            </a:outerShdw>
+          </a:effectLst>
+        </p:spPr>
+      </p:sp>
+      <p:sp>
+        <p:nvSpPr>
+          <p:cNvPr id="25" name="shape-24"/>
+          <p:cNvSpPr/>
+          <p:nvPr/>
+        </p:nvSpPr>
+        <p:spPr>
+          <a:xfrm rot="60000">
+            <a:off x="5121964" y="840996"/>
+            <a:ext cx="952500" cy="279400"/>
+          </a:xfrm>
+          <a:prstGeom prst="rect">
+            <a:avLst/>
+          </a:prstGeom>
+          <a:solidFill>
+            <a:srgbClr val="D5D5D4">
+              <a:alpha val="90000"/>
+            </a:srgbClr>
+          </a:solidFill>
+          <a:ln/>
+        </p:spPr>
+      </p:sp>
+      <p:pic>
+        <p:nvPicPr>
+          <p:cNvPr id="26" name="img-25" descr="preencoded.png">    </p:cNvPr>
+          <p:cNvPicPr>
+            <a:picLocks noChangeAspect="1"/>
+          </p:cNvPicPr>
+          <p:nvPr/>
+        </p:nvPicPr>
+        <p:blipFill>
+          <a:blip r:embed="rId6"/>
+          <a:stretch>
+            <a:fillRect/>
+          </a:stretch>
+        </p:blipFill>
+        <p:spPr>
+          <a:xfrm rot="240000">
+            <a:off x="4745516" y="1027406"/>
+            <a:ext cx="1562100" cy="1955800"/>
+          </a:xfrm>
+          <a:prstGeom prst="rect">
+            <a:avLst/>
+          </a:prstGeom>
+        </p:spPr>
+      </p:pic>
+      <p:sp>
+        <p:nvSpPr>
+          <p:cNvPr id="27" name="text-26"/>
+          <p:cNvSpPr txBox="1"/>
+          <p:nvPr/>
+        </p:nvSpPr>
+        <p:spPr>
+          <a:xfrm rot="240000">
+            <a:off x="4557177" y="3004300"/>
+            <a:ext cx="1783080" cy="228600"/>
+          </a:xfrm>
+          <a:prstGeom prst="rect">
+            <a:avLst/>
+          </a:prstGeom>
+          <a:noFill/>
+          <a:ln/>
+        </p:spPr>
+        <p:txBody>
+          <a:bodyPr wrap="square" lIns="0" tIns="0" rIns="0" bIns="0" rtlCol="0" anchor="t"/>
+          <a:lstStyle/>
+          <a:p>
+            <a:pPr algn="ctr" indent="0" marL="0">
+              <a:lnSpc>
+                <a:spcPts val="1560"/>
+              </a:lnSpc>
+              <a:buNone/>
+            </a:pPr>
+            <a:r>
+              <a:rPr lang="en-US" sz="1300" i="1" dirty="0">
+                <a:solidFill>
+                  <a:srgbClr val="0A0A0A"/>
+                </a:solidFill>
+                <a:latin typeface="Noto Serif Display Light" pitchFamily="34" charset="0"/>
+                <a:ea typeface="Noto Serif Display Light" pitchFamily="34" charset="-122"/>
+                <a:cs typeface="Noto Serif Display Light" pitchFamily="34" charset="-120"/>
+              </a:rPr>
+              <a:t>1925–1983</a:t>
+            </a:r>
+            <a:endParaRPr lang="en-US" sz="1300" dirty="0"/>
+          </a:p>
+        </p:txBody>
+      </p:sp>
+      <p:sp>
+        <p:nvSpPr>
+          <p:cNvPr id="28" name="text-27"/>
           <p:cNvSpPr txBox="1"/>
           <p:nvPr/>
         </p:nvSpPr>
@@ -5389,8 +6073,8 @@
         </p:nvSpPr>
         <p:spPr>
           <a:xfrm>
-            <a:off x="457200" y="953988"/>
-            <a:ext cx="6300216" cy="558800"/>
+            <a:off x="457200" y="952302"/>
+            <a:ext cx="4092448" cy="1009650"/>
           </a:xfrm>
           <a:prstGeom prst="rect">
             <a:avLst/>
@@ -5426,7 +6110,7 @@
               <a:buNone/>
             </a:pPr>
             <a:r>
-              <a:rPr lang="en-US" sz="4300" i="1" spc="-90" kern="0" dirty="0">
+              <a:rPr lang="en-US" sz="4000" i="1" spc="-80" kern="0" dirty="0">
                 <a:solidFill>
                   <a:srgbClr val="0A0A0A"/>
                 </a:solidFill>
@@ -5448,8 +6132,8 @@
         </p:nvSpPr>
         <p:spPr>
           <a:xfrm rot="-60000">
-            <a:off x="457200" y="2033091"/>
-            <a:ext cx="5943600" cy="2292350"/>
+            <a:off x="457200" y="3173710"/>
+            <a:ext cx="5943600" cy="1885950"/>
           </a:xfrm>
           <a:prstGeom prst="rect">
             <a:avLst/>
@@ -5475,7 +6159,7 @@
         </p:nvSpPr>
         <p:spPr>
           <a:xfrm rot="-240000">
-            <a:off x="2933171" y="1917871"/>
+            <a:off x="2936759" y="3060840"/>
             <a:ext cx="952500" cy="279400"/>
           </a:xfrm>
           <a:prstGeom prst="rect">
@@ -5497,7 +6181,7 @@
         </p:nvSpPr>
         <p:spPr>
           <a:xfrm rot="-60000">
-            <a:off x="670376" y="2222635"/>
+            <a:off x="673965" y="3365603"/>
             <a:ext cx="5815584" cy="146050"/>
           </a:xfrm>
           <a:prstGeom prst="rect">
@@ -5539,27 +6223,27 @@
         </p:nvSpPr>
         <p:spPr>
           <a:xfrm rot="-60000">
-            <a:off x="870583" y="2458046"/>
-            <a:ext cx="5613654" cy="787400"/>
-          </a:xfrm>
-          <a:prstGeom prst="rect">
-            <a:avLst/>
-          </a:prstGeom>
-          <a:noFill/>
-          <a:ln/>
-        </p:spPr>
-        <p:txBody>
-          <a:bodyPr wrap="square" lIns="0" tIns="0" rIns="0" bIns="0" rtlCol="0" anchor="t"/>
-          <a:lstStyle/>
-          <a:p>
-            <a:pPr algn="l" indent="0" marL="0">
-              <a:lnSpc>
-                <a:spcPts val="2070"/>
-              </a:lnSpc>
-              <a:buNone/>
-            </a:pPr>
-            <a:r>
-              <a:rPr lang="en-US" sz="1500" dirty="0">
+            <a:off x="873394" y="3600971"/>
+            <a:ext cx="5613654" cy="698500"/>
+          </a:xfrm>
+          <a:prstGeom prst="rect">
+            <a:avLst/>
+          </a:prstGeom>
+          <a:noFill/>
+          <a:ln/>
+        </p:spPr>
+        <p:txBody>
+          <a:bodyPr wrap="square" lIns="0" tIns="0" rIns="0" bIns="0" rtlCol="0" anchor="t"/>
+          <a:lstStyle/>
+          <a:p>
+            <a:pPr algn="l" indent="0" marL="0">
+              <a:lnSpc>
+                <a:spcPts val="1840"/>
+              </a:lnSpc>
+              <a:buNone/>
+            </a:pPr>
+            <a:r>
+              <a:rPr lang="en-US" sz="1350" dirty="0">
                 <a:solidFill>
                   <a:srgbClr val="2B2A27"/>
                 </a:solidFill>
@@ -5569,7 +6253,7 @@
               </a:rPr>
               <a:t>ҚазМУ-дың механика-математика факультетін бітірген. Дифференциалдық теңдеулер мен математикалық модельдеумен айналысқан.</a:t>
             </a:r>
-            <a:endParaRPr lang="en-US" sz="1500" dirty="0"/>
+            <a:endParaRPr lang="en-US" sz="1350" dirty="0"/>
           </a:p>
         </p:txBody>
       </p:sp>
@@ -5581,27 +6265,27 @@
         </p:nvSpPr>
         <p:spPr>
           <a:xfrm rot="-60000">
-            <a:off x="886117" y="3348001"/>
-            <a:ext cx="5613654" cy="787400"/>
-          </a:xfrm>
-          <a:prstGeom prst="rect">
-            <a:avLst/>
-          </a:prstGeom>
-          <a:noFill/>
-          <a:ln/>
-        </p:spPr>
-        <p:txBody>
-          <a:bodyPr wrap="square" lIns="0" tIns="0" rIns="0" bIns="0" rtlCol="0" anchor="t"/>
-          <a:lstStyle/>
-          <a:p>
-            <a:pPr algn="l" indent="0" marL="0">
-              <a:lnSpc>
-                <a:spcPts val="2070"/>
-              </a:lnSpc>
-              <a:buNone/>
-            </a:pPr>
-            <a:r>
-              <a:rPr lang="en-US" sz="1500" dirty="0">
+            <a:off x="885341" y="4402852"/>
+            <a:ext cx="5613654" cy="463550"/>
+          </a:xfrm>
+          <a:prstGeom prst="rect">
+            <a:avLst/>
+          </a:prstGeom>
+          <a:noFill/>
+          <a:ln/>
+        </p:spPr>
+        <p:txBody>
+          <a:bodyPr wrap="square" lIns="0" tIns="0" rIns="0" bIns="0" rtlCol="0" anchor="t"/>
+          <a:lstStyle/>
+          <a:p>
+            <a:pPr algn="l" indent="0" marL="0">
+              <a:lnSpc>
+                <a:spcPts val="1840"/>
+              </a:lnSpc>
+              <a:buNone/>
+            </a:pPr>
+            <a:r>
+              <a:rPr lang="en-US" sz="1350" dirty="0">
                 <a:solidFill>
                   <a:srgbClr val="2B2A27"/>
                 </a:solidFill>
@@ -5611,7 +6295,7 @@
               </a:rPr>
               <a:t>1988–1994 жылдары Ғылым академиясының президенті болған, 1991 жылдан Ғарыштық зерттеулер институтын басқарған.</a:t>
             </a:r>
-            <a:endParaRPr lang="en-US" sz="1500" dirty="0"/>
+            <a:endParaRPr lang="en-US" sz="1350" dirty="0"/>
           </a:p>
         </p:txBody>
       </p:sp>
@@ -5623,12 +6307,12 @@
         </p:nvSpPr>
         <p:spPr>
           <a:xfrm rot="60000">
-            <a:off x="457200" y="4491484"/>
-            <a:ext cx="5943600" cy="2146300"/>
+            <a:off x="457200" y="5209480"/>
+            <a:ext cx="5943600" cy="2000250"/>
           </a:xfrm>
           <a:prstGeom prst="roundRect">
             <a:avLst>
-              <a:gd name="adj" fmla="val 8284"/>
+              <a:gd name="adj" fmla="val 8889"/>
             </a:avLst>
           </a:prstGeom>
           <a:solidFill>
@@ -5639,281 +6323,32 @@
       </p:sp>
       <p:sp>
         <p:nvSpPr>
-          <p:cNvPr id="13" name="text-12"/>
-          <p:cNvSpPr txBox="1"/>
-          <p:nvPr/>
-        </p:nvSpPr>
-        <p:spPr>
-          <a:xfrm rot="60000">
-            <a:off x="699927" y="4682256"/>
-            <a:ext cx="5815584" cy="146050"/>
-          </a:xfrm>
-          <a:prstGeom prst="rect">
-            <a:avLst/>
-          </a:prstGeom>
-          <a:noFill/>
-          <a:ln/>
-        </p:spPr>
-        <p:txBody>
-          <a:bodyPr wrap="square" lIns="0" tIns="0" rIns="0" bIns="0" rtlCol="0" anchor="t"/>
-          <a:lstStyle/>
-          <a:p>
-            <a:pPr algn="l" indent="0" marL="0">
-              <a:lnSpc>
-                <a:spcPts val="1080"/>
-              </a:lnSpc>
-              <a:buNone/>
-            </a:pPr>
-            <a:r>
-              <a:rPr lang="en-US" sz="900" spc="140" kern="0" dirty="0">
-                <a:solidFill>
-                  <a:srgbClr val="FAF8F3"/>
-                </a:solidFill>
-                <a:latin typeface="IBM Plex Mono" pitchFamily="34" charset="0"/>
-                <a:ea typeface="IBM Plex Mono" pitchFamily="34" charset="-122"/>
-                <a:cs typeface="IBM Plex Mono" pitchFamily="34" charset="-120"/>
-              </a:rPr>
-              <a:t>2026 ЖЫЛЫ, 17 ЖАСТА</a:t>
-            </a:r>
-            <a:endParaRPr lang="en-US" sz="900" dirty="0"/>
-          </a:p>
-        </p:txBody>
-      </p:sp>
-      <p:sp>
-        <p:nvSpPr>
-          <p:cNvPr id="14" name="text-13"/>
-          <p:cNvSpPr txBox="1"/>
-          <p:nvPr/>
-        </p:nvSpPr>
-        <p:spPr>
-          <a:xfrm rot="60000">
-            <a:off x="885308" y="4918402"/>
-            <a:ext cx="5613654" cy="260350"/>
-          </a:xfrm>
-          <a:prstGeom prst="rect">
-            <a:avLst/>
-          </a:prstGeom>
-          <a:noFill/>
-          <a:ln/>
-        </p:spPr>
-        <p:txBody>
-          <a:bodyPr wrap="square" lIns="0" tIns="0" rIns="0" bIns="0" rtlCol="0" anchor="t"/>
-          <a:lstStyle/>
-          <a:p>
-            <a:pPr algn="l" indent="0" marL="0">
-              <a:lnSpc>
-                <a:spcPts val="2070"/>
-              </a:lnSpc>
-              <a:buNone/>
-            </a:pPr>
-            <a:r>
-              <a:rPr lang="en-US" sz="1500" dirty="0">
-                <a:solidFill>
-                  <a:srgbClr val="FAF8F3"/>
-                </a:solidFill>
-                <a:latin typeface="Geist" pitchFamily="34" charset="0"/>
-                <a:ea typeface="Geist" pitchFamily="34" charset="-122"/>
-                <a:cs typeface="Geist" pitchFamily="34" charset="-120"/>
-              </a:rPr>
-              <a:t>Халықаралық математика олимпиадасы (IMO).</a:t>
-            </a:r>
-            <a:endParaRPr lang="en-US" sz="1500" dirty="0"/>
-          </a:p>
-        </p:txBody>
-      </p:sp>
-      <p:sp>
-        <p:nvSpPr>
-          <p:cNvPr id="15" name="text-14"/>
-          <p:cNvSpPr txBox="1"/>
-          <p:nvPr/>
-        </p:nvSpPr>
-        <p:spPr>
-          <a:xfrm rot="60000">
-            <a:off x="876654" y="5280822"/>
-            <a:ext cx="5613654" cy="527050"/>
-          </a:xfrm>
-          <a:prstGeom prst="rect">
-            <a:avLst/>
-          </a:prstGeom>
-          <a:noFill/>
-          <a:ln/>
-        </p:spPr>
-        <p:txBody>
-          <a:bodyPr wrap="square" lIns="0" tIns="0" rIns="0" bIns="0" rtlCol="0" anchor="t"/>
-          <a:lstStyle/>
-          <a:p>
-            <a:pPr algn="l" indent="0" marL="0">
-              <a:lnSpc>
-                <a:spcPts val="2070"/>
-              </a:lnSpc>
-              <a:buNone/>
-            </a:pPr>
-            <a:r>
-              <a:rPr lang="en-US" sz="1500" dirty="0">
-                <a:solidFill>
-                  <a:srgbClr val="FAF8F3"/>
-                </a:solidFill>
-                <a:latin typeface="Geist" pitchFamily="34" charset="0"/>
-                <a:ea typeface="Geist" pitchFamily="34" charset="-122"/>
-                <a:cs typeface="Geist" pitchFamily="34" charset="-120"/>
-              </a:rPr>
-              <a:t>Спутник деректерімен жасалған жоба, мысалы NASA Space Apps Challenge.</a:t>
-            </a:r>
-            <a:endParaRPr lang="en-US" sz="1500" dirty="0"/>
-          </a:p>
-        </p:txBody>
-      </p:sp>
-      <p:sp>
-        <p:nvSpPr>
-          <p:cNvPr id="16" name="text-15"/>
-          <p:cNvSpPr txBox="1"/>
-          <p:nvPr/>
-        </p:nvSpPr>
-        <p:spPr>
-          <a:xfrm rot="60000">
-            <a:off x="865707" y="5907987"/>
-            <a:ext cx="5613654" cy="527050"/>
-          </a:xfrm>
-          <a:prstGeom prst="rect">
-            <a:avLst/>
-          </a:prstGeom>
-          <a:noFill/>
-          <a:ln/>
-        </p:spPr>
-        <p:txBody>
-          <a:bodyPr wrap="square" lIns="0" tIns="0" rIns="0" bIns="0" rtlCol="0" anchor="t"/>
-          <a:lstStyle/>
-          <a:p>
-            <a:pPr algn="l" indent="0" marL="0">
-              <a:lnSpc>
-                <a:spcPts val="2070"/>
-              </a:lnSpc>
-              <a:buNone/>
-            </a:pPr>
-            <a:r>
-              <a:rPr lang="en-US" sz="1500" b="1" dirty="0">
-                <a:solidFill>
-                  <a:srgbClr val="FAF8F3"/>
-                </a:solidFill>
-                <a:latin typeface="Geist" pitchFamily="34" charset="0"/>
-                <a:ea typeface="Geist" pitchFamily="34" charset="-122"/>
-                <a:cs typeface="Geist" pitchFamily="34" charset="-120"/>
-              </a:rPr>
-              <a:t>Оқитын мамандығы: қолданбалы математика немесе аэроғарыш инженериясы.</a:t>
-            </a:r>
-            <a:endParaRPr lang="en-US" sz="1500" dirty="0"/>
-          </a:p>
-        </p:txBody>
-      </p:sp>
-      <p:sp>
-        <p:nvSpPr>
-          <p:cNvPr id="17" name="text-16"/>
-          <p:cNvSpPr txBox="1"/>
-          <p:nvPr/>
-        </p:nvSpPr>
-        <p:spPr>
-          <a:xfrm>
-            <a:off x="457845" y="7969250"/>
-            <a:ext cx="895223" cy="171450"/>
-          </a:xfrm>
-          <a:prstGeom prst="rect">
-            <a:avLst/>
-          </a:prstGeom>
-          <a:noFill/>
-          <a:ln/>
-        </p:spPr>
-        <p:txBody>
-          <a:bodyPr wrap="square" lIns="0" tIns="0" rIns="0" bIns="0" rtlCol="0" anchor="t"/>
-          <a:lstStyle/>
-          <a:p>
-            <a:pPr algn="l" indent="0" marL="0">
-              <a:lnSpc>
-                <a:spcPts val="1200"/>
-              </a:lnSpc>
-              <a:buNone/>
-            </a:pPr>
-            <a:r>
-              <a:rPr lang="en-US" sz="1000" spc="140" kern="0" dirty="0">
-                <a:solidFill>
-                  <a:srgbClr val="0A0A0A"/>
-                </a:solidFill>
-                <a:latin typeface="IBM Plex Mono" pitchFamily="34" charset="0"/>
-                <a:ea typeface="IBM Plex Mono" pitchFamily="34" charset="-122"/>
-                <a:cs typeface="IBM Plex Mono" pitchFamily="34" charset="-120"/>
-              </a:rPr>
-              <a:t>@NURZYCOM</a:t>
-            </a:r>
-            <a:endParaRPr lang="en-US" sz="1000" dirty="0"/>
-          </a:p>
-        </p:txBody>
-      </p:sp>
-      <p:sp>
-        <p:nvSpPr>
-          <p:cNvPr id="18" name="shape-17"/>
+          <p:cNvPr id="13" name="shape-12"/>
           <p:cNvSpPr/>
           <p:nvPr/>
         </p:nvSpPr>
         <p:spPr>
-          <a:xfrm>
-            <a:off x="5060305" y="7893050"/>
-            <a:ext cx="1339850" cy="323850"/>
-          </a:xfrm>
-          <a:prstGeom prst="roundRect">
-            <a:avLst>
-              <a:gd name="adj" fmla="val 50000"/>
-            </a:avLst>
+          <a:xfrm rot="-420000">
+            <a:off x="5718015" y="5064740"/>
+            <a:ext cx="533400" cy="533400"/>
+          </a:xfrm>
+          <a:prstGeom prst="ellipse">
+            <a:avLst/>
           </a:prstGeom>
           <a:solidFill>
-            <a:srgbClr val="0A0A0A"/>
+            <a:srgbClr val="FAF8F3"/>
           </a:solidFill>
-          <a:ln/>
-        </p:spPr>
-      </p:sp>
-      <p:sp>
-        <p:nvSpPr>
-          <p:cNvPr id="19" name="text-18"/>
-          <p:cNvSpPr txBox="1"/>
-          <p:nvPr/>
-        </p:nvSpPr>
-        <p:spPr>
-          <a:xfrm>
-            <a:off x="5200005" y="7969250"/>
-            <a:ext cx="895223" cy="171450"/>
-          </a:xfrm>
-          <a:prstGeom prst="rect">
-            <a:avLst/>
-          </a:prstGeom>
-          <a:noFill/>
-          <a:ln/>
-        </p:spPr>
-        <p:txBody>
-          <a:bodyPr wrap="square" lIns="0" tIns="0" rIns="0" bIns="0" rtlCol="0" anchor="t"/>
-          <a:lstStyle/>
-          <a:p>
-            <a:pPr algn="l" indent="0" marL="0">
-              <a:lnSpc>
-                <a:spcPts val="1200"/>
-              </a:lnSpc>
-              <a:buNone/>
-            </a:pPr>
-            <a:r>
-              <a:rPr lang="en-US" sz="1000" spc="140" kern="0" dirty="0">
-                <a:solidFill>
-                  <a:srgbClr val="FAF8F3"/>
-                </a:solidFill>
-                <a:latin typeface="IBM Plex Mono" pitchFamily="34" charset="0"/>
-                <a:ea typeface="IBM Plex Mono" pitchFamily="34" charset="-122"/>
-                <a:cs typeface="IBM Plex Mono" pitchFamily="34" charset="-120"/>
-              </a:rPr>
-              <a:t>ӘРІ ҚАРАЙ</a:t>
-            </a:r>
-            <a:endParaRPr lang="en-US" sz="1000" dirty="0"/>
-          </a:p>
-        </p:txBody>
+          <a:ln w="12700">
+            <a:solidFill>
+              <a:srgbClr val="0A0A0A"/>
+            </a:solidFill>
+            <a:prstDash val="solid"/>
+          </a:ln>
+        </p:spPr>
       </p:sp>
       <p:pic>
         <p:nvPicPr>
-          <p:cNvPr id="20" name="svg-19" descr="preencoded.png">    </p:cNvPr>
+          <p:cNvPr id="14" name="svg-13" descr="preencoded.png">    </p:cNvPr>
           <p:cNvPicPr>
             <a:picLocks noChangeAspect="1"/>
           </p:cNvPicPr>
@@ -5926,6 +6361,328 @@
           </a:stretch>
         </p:blipFill>
         <p:spPr>
+          <a:xfrm rot="-420000">
+            <a:off x="5838665" y="5185390"/>
+            <a:ext cx="292100" cy="292100"/>
+          </a:xfrm>
+          <a:prstGeom prst="rect">
+            <a:avLst/>
+          </a:prstGeom>
+        </p:spPr>
+      </p:pic>
+      <p:sp>
+        <p:nvSpPr>
+          <p:cNvPr id="15" name="text-14"/>
+          <p:cNvSpPr txBox="1"/>
+          <p:nvPr/>
+        </p:nvSpPr>
+        <p:spPr>
+          <a:xfrm rot="60000">
+            <a:off x="698633" y="5401382"/>
+            <a:ext cx="5815584" cy="146050"/>
+          </a:xfrm>
+          <a:prstGeom prst="rect">
+            <a:avLst/>
+          </a:prstGeom>
+          <a:noFill/>
+          <a:ln/>
+        </p:spPr>
+        <p:txBody>
+          <a:bodyPr wrap="square" lIns="0" tIns="0" rIns="0" bIns="0" rtlCol="0" anchor="t"/>
+          <a:lstStyle/>
+          <a:p>
+            <a:pPr algn="l" indent="0" marL="0">
+              <a:lnSpc>
+                <a:spcPts val="1080"/>
+              </a:lnSpc>
+              <a:buNone/>
+            </a:pPr>
+            <a:r>
+              <a:rPr lang="en-US" sz="900" spc="140" kern="0" dirty="0">
+                <a:solidFill>
+                  <a:srgbClr val="FAF8F3"/>
+                </a:solidFill>
+                <a:latin typeface="IBM Plex Mono" pitchFamily="34" charset="0"/>
+                <a:ea typeface="IBM Plex Mono" pitchFamily="34" charset="-122"/>
+                <a:cs typeface="IBM Plex Mono" pitchFamily="34" charset="-120"/>
+              </a:rPr>
+              <a:t>2026 ЖЫЛЫ, 17 ЖАСТА</a:t>
+            </a:r>
+            <a:endParaRPr lang="en-US" sz="900" dirty="0"/>
+          </a:p>
+        </p:txBody>
+      </p:sp>
+      <p:pic>
+        <p:nvPicPr>
+          <p:cNvPr id="16" name="svg-15" descr="preencoded.png">    </p:cNvPr>
+          <p:cNvPicPr>
+            <a:picLocks noChangeAspect="1"/>
+          </p:cNvPicPr>
+          <p:nvPr/>
+        </p:nvPicPr>
+        <p:blipFill>
+          <a:blip r:embed="rId4"/>
+          <a:stretch>
+            <a:fillRect/>
+          </a:stretch>
+        </p:blipFill>
+        <p:spPr>
+          <a:xfrm rot="60000">
+            <a:off x="694214" y="5602888"/>
+            <a:ext cx="203200" cy="203200"/>
+          </a:xfrm>
+          <a:prstGeom prst="rect">
+            <a:avLst/>
+          </a:prstGeom>
+        </p:spPr>
+      </p:pic>
+      <p:sp>
+        <p:nvSpPr>
+          <p:cNvPr id="17" name="text-16"/>
+          <p:cNvSpPr txBox="1"/>
+          <p:nvPr/>
+        </p:nvSpPr>
+        <p:spPr>
+          <a:xfrm rot="60000">
+            <a:off x="962045" y="5626175"/>
+            <a:ext cx="4018407" cy="222250"/>
+          </a:xfrm>
+          <a:prstGeom prst="rect">
+            <a:avLst/>
+          </a:prstGeom>
+          <a:noFill/>
+          <a:ln/>
+        </p:spPr>
+        <p:txBody>
+          <a:bodyPr wrap="square" lIns="0" tIns="0" rIns="0" bIns="0" rtlCol="0" anchor="t"/>
+          <a:lstStyle/>
+          <a:p>
+            <a:pPr algn="l" indent="0" marL="0">
+              <a:lnSpc>
+                <a:spcPts val="1840"/>
+              </a:lnSpc>
+              <a:buNone/>
+            </a:pPr>
+            <a:r>
+              <a:rPr lang="en-US" sz="1350" dirty="0">
+                <a:solidFill>
+                  <a:srgbClr val="FAF8F3"/>
+                </a:solidFill>
+                <a:latin typeface="Geist" pitchFamily="34" charset="0"/>
+                <a:ea typeface="Geist" pitchFamily="34" charset="-122"/>
+                <a:cs typeface="Geist" pitchFamily="34" charset="-120"/>
+              </a:rPr>
+              <a:t>Халықаралық математика олимпиадасы (IMO).</a:t>
+            </a:r>
+            <a:endParaRPr lang="en-US" sz="1350" dirty="0"/>
+          </a:p>
+        </p:txBody>
+      </p:sp>
+      <p:sp>
+        <p:nvSpPr>
+          <p:cNvPr id="18" name="text-17"/>
+          <p:cNvSpPr txBox="1"/>
+          <p:nvPr/>
+        </p:nvSpPr>
+        <p:spPr>
+          <a:xfrm rot="60000">
+            <a:off x="876395" y="5972374"/>
+            <a:ext cx="5613654" cy="463550"/>
+          </a:xfrm>
+          <a:prstGeom prst="rect">
+            <a:avLst/>
+          </a:prstGeom>
+          <a:noFill/>
+          <a:ln/>
+        </p:spPr>
+        <p:txBody>
+          <a:bodyPr wrap="square" lIns="0" tIns="0" rIns="0" bIns="0" rtlCol="0" anchor="t"/>
+          <a:lstStyle/>
+          <a:p>
+            <a:pPr algn="l" indent="0" marL="0">
+              <a:lnSpc>
+                <a:spcPts val="1840"/>
+              </a:lnSpc>
+              <a:buNone/>
+            </a:pPr>
+            <a:r>
+              <a:rPr lang="en-US" sz="1350" dirty="0">
+                <a:solidFill>
+                  <a:srgbClr val="FAF8F3"/>
+                </a:solidFill>
+                <a:latin typeface="Geist" pitchFamily="34" charset="0"/>
+                <a:ea typeface="Geist" pitchFamily="34" charset="-122"/>
+                <a:cs typeface="Geist" pitchFamily="34" charset="-120"/>
+              </a:rPr>
+              <a:t>Спутник деректерімен жасалған жоба, мысалы NASA Space Apps Challenge.</a:t>
+            </a:r>
+            <a:endParaRPr lang="en-US" sz="1350" dirty="0"/>
+          </a:p>
+        </p:txBody>
+      </p:sp>
+      <p:sp>
+        <p:nvSpPr>
+          <p:cNvPr id="19" name="text-18"/>
+          <p:cNvSpPr txBox="1"/>
+          <p:nvPr/>
+        </p:nvSpPr>
+        <p:spPr>
+          <a:xfrm rot="60000">
+            <a:off x="866483" y="6540216"/>
+            <a:ext cx="5613654" cy="463550"/>
+          </a:xfrm>
+          <a:prstGeom prst="rect">
+            <a:avLst/>
+          </a:prstGeom>
+          <a:noFill/>
+          <a:ln/>
+        </p:spPr>
+        <p:txBody>
+          <a:bodyPr wrap="square" lIns="0" tIns="0" rIns="0" bIns="0" rtlCol="0" anchor="t"/>
+          <a:lstStyle/>
+          <a:p>
+            <a:pPr algn="l" indent="0" marL="0">
+              <a:lnSpc>
+                <a:spcPts val="1840"/>
+              </a:lnSpc>
+              <a:buNone/>
+            </a:pPr>
+            <a:r>
+              <a:rPr lang="en-US" sz="1350" b="1" dirty="0">
+                <a:solidFill>
+                  <a:srgbClr val="FAF8F3"/>
+                </a:solidFill>
+                <a:latin typeface="Geist" pitchFamily="34" charset="0"/>
+                <a:ea typeface="Geist" pitchFamily="34" charset="-122"/>
+                <a:cs typeface="Geist" pitchFamily="34" charset="-120"/>
+              </a:rPr>
+              <a:t>Оқитын мамандығы: қолданбалы математика немесе аэроғарыш инженериясы.</a:t>
+            </a:r>
+            <a:endParaRPr lang="en-US" sz="1350" dirty="0"/>
+          </a:p>
+        </p:txBody>
+      </p:sp>
+      <p:sp>
+        <p:nvSpPr>
+          <p:cNvPr id="20" name="text-19"/>
+          <p:cNvSpPr txBox="1"/>
+          <p:nvPr/>
+        </p:nvSpPr>
+        <p:spPr>
+          <a:xfrm>
+            <a:off x="457845" y="7969250"/>
+            <a:ext cx="895223" cy="171450"/>
+          </a:xfrm>
+          <a:prstGeom prst="rect">
+            <a:avLst/>
+          </a:prstGeom>
+          <a:noFill/>
+          <a:ln/>
+        </p:spPr>
+        <p:txBody>
+          <a:bodyPr wrap="square" lIns="0" tIns="0" rIns="0" bIns="0" rtlCol="0" anchor="t"/>
+          <a:lstStyle/>
+          <a:p>
+            <a:pPr algn="l" indent="0" marL="0">
+              <a:lnSpc>
+                <a:spcPts val="1200"/>
+              </a:lnSpc>
+              <a:buNone/>
+            </a:pPr>
+            <a:r>
+              <a:rPr lang="en-US" sz="1000" spc="140" kern="0" dirty="0">
+                <a:solidFill>
+                  <a:srgbClr val="0A0A0A"/>
+                </a:solidFill>
+                <a:latin typeface="IBM Plex Mono" pitchFamily="34" charset="0"/>
+                <a:ea typeface="IBM Plex Mono" pitchFamily="34" charset="-122"/>
+                <a:cs typeface="IBM Plex Mono" pitchFamily="34" charset="-120"/>
+              </a:rPr>
+              <a:t>@NURZYCOM</a:t>
+            </a:r>
+            <a:endParaRPr lang="en-US" sz="1000" dirty="0"/>
+          </a:p>
+        </p:txBody>
+      </p:sp>
+      <p:sp>
+        <p:nvSpPr>
+          <p:cNvPr id="21" name="shape-20"/>
+          <p:cNvSpPr/>
+          <p:nvPr/>
+        </p:nvSpPr>
+        <p:spPr>
+          <a:xfrm>
+            <a:off x="5060305" y="7893050"/>
+            <a:ext cx="1339850" cy="323850"/>
+          </a:xfrm>
+          <a:prstGeom prst="roundRect">
+            <a:avLst>
+              <a:gd name="adj" fmla="val 50000"/>
+            </a:avLst>
+          </a:prstGeom>
+          <a:solidFill>
+            <a:srgbClr val="0A0A0A"/>
+          </a:solidFill>
+          <a:ln/>
+        </p:spPr>
+      </p:sp>
+      <p:sp>
+        <p:nvSpPr>
+          <p:cNvPr id="22" name="text-21"/>
+          <p:cNvSpPr txBox="1"/>
+          <p:nvPr/>
+        </p:nvSpPr>
+        <p:spPr>
+          <a:xfrm>
+            <a:off x="5200005" y="7969250"/>
+            <a:ext cx="895223" cy="171450"/>
+          </a:xfrm>
+          <a:prstGeom prst="rect">
+            <a:avLst/>
+          </a:prstGeom>
+          <a:noFill/>
+          <a:ln/>
+        </p:spPr>
+        <p:txBody>
+          <a:bodyPr wrap="square" lIns="0" tIns="0" rIns="0" bIns="0" rtlCol="0" anchor="t"/>
+          <a:lstStyle/>
+          <a:p>
+            <a:pPr algn="l" indent="0" marL="0">
+              <a:lnSpc>
+                <a:spcPts val="1200"/>
+              </a:lnSpc>
+              <a:buNone/>
+            </a:pPr>
+            <a:r>
+              <a:rPr lang="en-US" sz="1000" spc="140" kern="0" dirty="0">
+                <a:solidFill>
+                  <a:srgbClr val="FAF8F3"/>
+                </a:solidFill>
+                <a:latin typeface="IBM Plex Mono" pitchFamily="34" charset="0"/>
+                <a:ea typeface="IBM Plex Mono" pitchFamily="34" charset="-122"/>
+                <a:cs typeface="IBM Plex Mono" pitchFamily="34" charset="-120"/>
+              </a:rPr>
+              <a:t>ӘРІ ҚАРАЙ</a:t>
+            </a:r>
+            <a:endParaRPr lang="en-US" sz="1000" dirty="0"/>
+          </a:p>
+        </p:txBody>
+      </p:sp>
+      <p:pic>
+        <p:nvPicPr>
+          <p:cNvPr id="23" name="svg-22" descr="preencoded.png">    </p:cNvPr>
+          <p:cNvPicPr>
+            <a:picLocks noChangeAspect="1"/>
+          </p:cNvPicPr>
+          <p:nvPr/>
+        </p:nvPicPr>
+        <p:blipFill>
+          <a:blip r:embed="rId5"/>
+          <a:stretch>
+            <a:fillRect/>
+          </a:stretch>
+        </p:blipFill>
+        <p:spPr>
           <a:xfrm>
             <a:off x="6121400" y="7985125"/>
             <a:ext cx="139700" cy="139700"/>
@@ -5937,7 +6694,122 @@
       </p:pic>
       <p:sp>
         <p:nvSpPr>
-          <p:cNvPr id="21" name="text-20"/>
+          <p:cNvPr id="24" name="shape-23"/>
+          <p:cNvSpPr/>
+          <p:nvPr/>
+        </p:nvSpPr>
+        <p:spPr>
+          <a:xfrm rot="240000">
+            <a:off x="4660900" y="950913"/>
+            <a:ext cx="1714500" cy="2349500"/>
+          </a:xfrm>
+          <a:prstGeom prst="rect">
+            <a:avLst/>
+          </a:prstGeom>
+          <a:solidFill>
+            <a:srgbClr val="FFFFFF"/>
+          </a:solidFill>
+          <a:ln/>
+          <a:effectLst>
+            <a:outerShdw sx="100000" sy="100000" kx="0" ky="0" algn="bl" rotWithShape="0" blurRad="177800" dist="76200" dir="5400000">
+              <a:srgbClr val="000000">
+                <a:alpha val="22000"/>
+              </a:srgbClr>
+            </a:outerShdw>
+          </a:effectLst>
+        </p:spPr>
+      </p:sp>
+      <p:sp>
+        <p:nvSpPr>
+          <p:cNvPr id="25" name="shape-24"/>
+          <p:cNvSpPr/>
+          <p:nvPr/>
+        </p:nvSpPr>
+        <p:spPr>
+          <a:xfrm rot="60000">
+            <a:off x="5121964" y="840996"/>
+            <a:ext cx="952500" cy="279400"/>
+          </a:xfrm>
+          <a:prstGeom prst="rect">
+            <a:avLst/>
+          </a:prstGeom>
+          <a:solidFill>
+            <a:srgbClr val="D5D5D4">
+              <a:alpha val="90000"/>
+            </a:srgbClr>
+          </a:solidFill>
+          <a:ln/>
+        </p:spPr>
+      </p:sp>
+      <p:pic>
+        <p:nvPicPr>
+          <p:cNvPr id="26" name="img-25" descr="preencoded.png">    </p:cNvPr>
+          <p:cNvPicPr>
+            <a:picLocks noChangeAspect="1"/>
+          </p:cNvPicPr>
+          <p:nvPr/>
+        </p:nvPicPr>
+        <p:blipFill>
+          <a:blip r:embed="rId6"/>
+          <a:stretch>
+            <a:fillRect/>
+          </a:stretch>
+        </p:blipFill>
+        <p:spPr>
+          <a:xfrm rot="240000">
+            <a:off x="4745516" y="1027406"/>
+            <a:ext cx="1562100" cy="1955800"/>
+          </a:xfrm>
+          <a:prstGeom prst="rect">
+            <a:avLst/>
+          </a:prstGeom>
+        </p:spPr>
+      </p:pic>
+      <p:sp>
+        <p:nvSpPr>
+          <p:cNvPr id="27" name="text-26"/>
+          <p:cNvSpPr txBox="1"/>
+          <p:nvPr/>
+        </p:nvSpPr>
+        <p:spPr>
+          <a:xfrm rot="240000">
+            <a:off x="4557177" y="3004300"/>
+            <a:ext cx="1783080" cy="228600"/>
+          </a:xfrm>
+          <a:prstGeom prst="rect">
+            <a:avLst/>
+          </a:prstGeom>
+          <a:noFill/>
+          <a:ln/>
+        </p:spPr>
+        <p:txBody>
+          <a:bodyPr wrap="square" lIns="0" tIns="0" rIns="0" bIns="0" rtlCol="0" anchor="t"/>
+          <a:lstStyle/>
+          <a:p>
+            <a:pPr algn="ctr" indent="0" marL="0">
+              <a:lnSpc>
+                <a:spcPts val="1560"/>
+              </a:lnSpc>
+              <a:buNone/>
+            </a:pPr>
+            <a:r>
+              <a:rPr lang="en-US" sz="1300" i="1" dirty="0">
+                <a:solidFill>
+                  <a:srgbClr val="0A0A0A"/>
+                </a:solidFill>
+                <a:latin typeface="Noto Serif Display Light" pitchFamily="34" charset="0"/>
+                <a:ea typeface="Noto Serif Display Light" pitchFamily="34" charset="-122"/>
+                <a:cs typeface="Noto Serif Display Light" pitchFamily="34" charset="-120"/>
+              </a:rPr>
+              <a:t>1936–2005</a:t>
+            </a:r>
+            <a:endParaRPr lang="en-US" sz="1300" dirty="0"/>
+          </a:p>
+        </p:txBody>
+      </p:sp>
+      <p:sp>
+        <p:nvSpPr>
+          <p:cNvPr id="28" name="text-27"/>
           <p:cNvSpPr txBox="1"/>
           <p:nvPr/>
         </p:nvSpPr>
@@ -6159,8 +7031,8 @@
         </p:nvSpPr>
         <p:spPr>
           <a:xfrm>
-            <a:off x="457200" y="951458"/>
-            <a:ext cx="6300216" cy="673100"/>
+            <a:off x="457200" y="953591"/>
+            <a:ext cx="4092448" cy="1212850"/>
           </a:xfrm>
           <a:prstGeom prst="rect">
             <a:avLst/>
@@ -6218,8 +7090,8 @@
         </p:nvSpPr>
         <p:spPr>
           <a:xfrm rot="-60000">
-            <a:off x="457200" y="2033091"/>
-            <a:ext cx="5943600" cy="2292350"/>
+            <a:off x="457200" y="3173710"/>
+            <a:ext cx="5943600" cy="1885950"/>
           </a:xfrm>
           <a:prstGeom prst="rect">
             <a:avLst/>
@@ -6245,7 +7117,7 @@
         </p:nvSpPr>
         <p:spPr>
           <a:xfrm rot="-240000">
-            <a:off x="2933171" y="1917871"/>
+            <a:off x="2936759" y="3060840"/>
             <a:ext cx="952500" cy="279400"/>
           </a:xfrm>
           <a:prstGeom prst="rect">
@@ -6267,7 +7139,7 @@
         </p:nvSpPr>
         <p:spPr>
           <a:xfrm rot="-60000">
-            <a:off x="670376" y="2222635"/>
+            <a:off x="673965" y="3365603"/>
             <a:ext cx="5815584" cy="146050"/>
           </a:xfrm>
           <a:prstGeom prst="rect">
@@ -6309,27 +7181,27 @@
         </p:nvSpPr>
         <p:spPr>
           <a:xfrm rot="-60000">
-            <a:off x="870583" y="2458046"/>
-            <a:ext cx="5613654" cy="787400"/>
-          </a:xfrm>
-          <a:prstGeom prst="rect">
-            <a:avLst/>
-          </a:prstGeom>
-          <a:noFill/>
-          <a:ln/>
-        </p:spPr>
-        <p:txBody>
-          <a:bodyPr wrap="square" lIns="0" tIns="0" rIns="0" bIns="0" rtlCol="0" anchor="t"/>
-          <a:lstStyle/>
-          <a:p>
-            <a:pPr algn="l" indent="0" marL="0">
-              <a:lnSpc>
-                <a:spcPts val="2070"/>
-              </a:lnSpc>
-              <a:buNone/>
-            </a:pPr>
-            <a:r>
-              <a:rPr lang="en-US" sz="1500" dirty="0">
+            <a:off x="871360" y="3601882"/>
+            <a:ext cx="5613654" cy="463550"/>
+          </a:xfrm>
+          <a:prstGeom prst="rect">
+            <a:avLst/>
+          </a:prstGeom>
+          <a:noFill/>
+          <a:ln/>
+        </p:spPr>
+        <p:txBody>
+          <a:bodyPr wrap="square" lIns="0" tIns="0" rIns="0" bIns="0" rtlCol="0" anchor="t"/>
+          <a:lstStyle/>
+          <a:p>
+            <a:pPr algn="l" indent="0" marL="0">
+              <a:lnSpc>
+                <a:spcPts val="1840"/>
+              </a:lnSpc>
+              <a:buNone/>
+            </a:pPr>
+            <a:r>
+              <a:rPr lang="en-US" sz="1350" dirty="0">
                 <a:solidFill>
                   <a:srgbClr val="2B2A27"/>
                 </a:solidFill>
@@ -6339,7 +7211,7 @@
               </a:rPr>
               <a:t>Мәскеу мемлекеттік университетінде және ҚазМУ-да оқыған. Қазақстандағы молекулалық биологияның негізін қалаушы.</a:t>
             </a:r>
-            <a:endParaRPr lang="en-US" sz="1500" dirty="0"/>
+            <a:endParaRPr lang="en-US" sz="1350" dirty="0"/>
           </a:p>
         </p:txBody>
       </p:sp>
@@ -6351,27 +7223,27 @@
         </p:nvSpPr>
         <p:spPr>
           <a:xfrm rot="-60000">
-            <a:off x="886117" y="3348001"/>
-            <a:ext cx="5613654" cy="787400"/>
-          </a:xfrm>
-          <a:prstGeom prst="rect">
-            <a:avLst/>
-          </a:prstGeom>
-          <a:noFill/>
-          <a:ln/>
-        </p:spPr>
-        <p:txBody>
-          <a:bodyPr wrap="square" lIns="0" tIns="0" rIns="0" bIns="0" rtlCol="0" anchor="t"/>
-          <a:lstStyle/>
-          <a:p>
-            <a:pPr algn="l" indent="0" marL="0">
-              <a:lnSpc>
-                <a:spcPts val="2070"/>
-              </a:lnSpc>
-              <a:buNone/>
-            </a:pPr>
-            <a:r>
-              <a:rPr lang="en-US" sz="1500" dirty="0">
+            <a:off x="883306" y="4168813"/>
+            <a:ext cx="5613654" cy="698500"/>
+          </a:xfrm>
+          <a:prstGeom prst="rect">
+            <a:avLst/>
+          </a:prstGeom>
+          <a:noFill/>
+          <a:ln/>
+        </p:spPr>
+        <p:txBody>
+          <a:bodyPr wrap="square" lIns="0" tIns="0" rIns="0" bIns="0" rtlCol="0" anchor="t"/>
+          <a:lstStyle/>
+          <a:p>
+            <a:pPr algn="l" indent="0" marL="0">
+              <a:lnSpc>
+                <a:spcPts val="1840"/>
+              </a:lnSpc>
+              <a:buNone/>
+            </a:pPr>
+            <a:r>
+              <a:rPr lang="en-US" sz="1350" dirty="0">
                 <a:solidFill>
                   <a:srgbClr val="2B2A27"/>
                 </a:solidFill>
@@ -6381,7 +7253,7 @@
               </a:rPr>
               <a:t>Жасушаның ішіндегі бөлшектердің жаңа класын, информосомаларды ашқан ғалымдар тобында болып, 1976 жылы Ленин сыйлығын алған.</a:t>
             </a:r>
-            <a:endParaRPr lang="en-US" sz="1500" dirty="0"/>
+            <a:endParaRPr lang="en-US" sz="1350" dirty="0"/>
           </a:p>
         </p:txBody>
       </p:sp>
@@ -6393,12 +7265,12 @@
         </p:nvSpPr>
         <p:spPr>
           <a:xfrm rot="60000">
-            <a:off x="457200" y="4491484"/>
-            <a:ext cx="5943600" cy="2146300"/>
+            <a:off x="457200" y="5209480"/>
+            <a:ext cx="5943600" cy="2000250"/>
           </a:xfrm>
           <a:prstGeom prst="roundRect">
             <a:avLst>
-              <a:gd name="adj" fmla="val 8284"/>
+              <a:gd name="adj" fmla="val 8889"/>
             </a:avLst>
           </a:prstGeom>
           <a:solidFill>
@@ -6409,281 +7281,32 @@
       </p:sp>
       <p:sp>
         <p:nvSpPr>
-          <p:cNvPr id="13" name="text-12"/>
-          <p:cNvSpPr txBox="1"/>
-          <p:nvPr/>
-        </p:nvSpPr>
-        <p:spPr>
-          <a:xfrm rot="60000">
-            <a:off x="699927" y="4682256"/>
-            <a:ext cx="5815584" cy="146050"/>
-          </a:xfrm>
-          <a:prstGeom prst="rect">
-            <a:avLst/>
-          </a:prstGeom>
-          <a:noFill/>
-          <a:ln/>
-        </p:spPr>
-        <p:txBody>
-          <a:bodyPr wrap="square" lIns="0" tIns="0" rIns="0" bIns="0" rtlCol="0" anchor="t"/>
-          <a:lstStyle/>
-          <a:p>
-            <a:pPr algn="l" indent="0" marL="0">
-              <a:lnSpc>
-                <a:spcPts val="1080"/>
-              </a:lnSpc>
-              <a:buNone/>
-            </a:pPr>
-            <a:r>
-              <a:rPr lang="en-US" sz="900" spc="140" kern="0" dirty="0">
-                <a:solidFill>
-                  <a:srgbClr val="FAF8F3"/>
-                </a:solidFill>
-                <a:latin typeface="IBM Plex Mono" pitchFamily="34" charset="0"/>
-                <a:ea typeface="IBM Plex Mono" pitchFamily="34" charset="-122"/>
-                <a:cs typeface="IBM Plex Mono" pitchFamily="34" charset="-120"/>
-              </a:rPr>
-              <a:t>2026 ЖЫЛЫ, 17 ЖАСТА</a:t>
-            </a:r>
-            <a:endParaRPr lang="en-US" sz="900" dirty="0"/>
-          </a:p>
-        </p:txBody>
-      </p:sp>
-      <p:sp>
-        <p:nvSpPr>
-          <p:cNvPr id="14" name="text-13"/>
-          <p:cNvSpPr txBox="1"/>
-          <p:nvPr/>
-        </p:nvSpPr>
-        <p:spPr>
-          <a:xfrm rot="60000">
-            <a:off x="885308" y="4918402"/>
-            <a:ext cx="5613654" cy="260350"/>
-          </a:xfrm>
-          <a:prstGeom prst="rect">
-            <a:avLst/>
-          </a:prstGeom>
-          <a:noFill/>
-          <a:ln/>
-        </p:spPr>
-        <p:txBody>
-          <a:bodyPr wrap="square" lIns="0" tIns="0" rIns="0" bIns="0" rtlCol="0" anchor="t"/>
-          <a:lstStyle/>
-          <a:p>
-            <a:pPr algn="l" indent="0" marL="0">
-              <a:lnSpc>
-                <a:spcPts val="2070"/>
-              </a:lnSpc>
-              <a:buNone/>
-            </a:pPr>
-            <a:r>
-              <a:rPr lang="en-US" sz="1500" dirty="0">
-                <a:solidFill>
-                  <a:srgbClr val="FAF8F3"/>
-                </a:solidFill>
-                <a:latin typeface="Geist" pitchFamily="34" charset="0"/>
-                <a:ea typeface="Geist" pitchFamily="34" charset="-122"/>
-                <a:cs typeface="Geist" pitchFamily="34" charset="-120"/>
-              </a:rPr>
-              <a:t>Халықаралық биология олимпиадасы (IBO).</a:t>
-            </a:r>
-            <a:endParaRPr lang="en-US" sz="1500" dirty="0"/>
-          </a:p>
-        </p:txBody>
-      </p:sp>
-      <p:sp>
-        <p:nvSpPr>
-          <p:cNvPr id="15" name="text-14"/>
-          <p:cNvSpPr txBox="1"/>
-          <p:nvPr/>
-        </p:nvSpPr>
-        <p:spPr>
-          <a:xfrm rot="60000">
-            <a:off x="876654" y="5280822"/>
-            <a:ext cx="5613654" cy="527050"/>
-          </a:xfrm>
-          <a:prstGeom prst="rect">
-            <a:avLst/>
-          </a:prstGeom>
-          <a:noFill/>
-          <a:ln/>
-        </p:spPr>
-        <p:txBody>
-          <a:bodyPr wrap="square" lIns="0" tIns="0" rIns="0" bIns="0" rtlCol="0" anchor="t"/>
-          <a:lstStyle/>
-          <a:p>
-            <a:pPr algn="l" indent="0" marL="0">
-              <a:lnSpc>
-                <a:spcPts val="2070"/>
-              </a:lnSpc>
-              <a:buNone/>
-            </a:pPr>
-            <a:r>
-              <a:rPr lang="en-US" sz="1500" dirty="0">
-                <a:solidFill>
-                  <a:srgbClr val="FAF8F3"/>
-                </a:solidFill>
-                <a:latin typeface="Geist" pitchFamily="34" charset="0"/>
-                <a:ea typeface="Geist" pitchFamily="34" charset="-122"/>
-                <a:cs typeface="Geist" pitchFamily="34" charset="-120"/>
-              </a:rPr>
-              <a:t>Зертханада жасалған зерттеу жобасы, мысалы ISEF сияқты ғылыми жарыста.</a:t>
-            </a:r>
-            <a:endParaRPr lang="en-US" sz="1500" dirty="0"/>
-          </a:p>
-        </p:txBody>
-      </p:sp>
-      <p:sp>
-        <p:nvSpPr>
-          <p:cNvPr id="16" name="text-15"/>
-          <p:cNvSpPr txBox="1"/>
-          <p:nvPr/>
-        </p:nvSpPr>
-        <p:spPr>
-          <a:xfrm rot="60000">
-            <a:off x="865707" y="5907987"/>
-            <a:ext cx="5613654" cy="527050"/>
-          </a:xfrm>
-          <a:prstGeom prst="rect">
-            <a:avLst/>
-          </a:prstGeom>
-          <a:noFill/>
-          <a:ln/>
-        </p:spPr>
-        <p:txBody>
-          <a:bodyPr wrap="square" lIns="0" tIns="0" rIns="0" bIns="0" rtlCol="0" anchor="t"/>
-          <a:lstStyle/>
-          <a:p>
-            <a:pPr algn="l" indent="0" marL="0">
-              <a:lnSpc>
-                <a:spcPts val="2070"/>
-              </a:lnSpc>
-              <a:buNone/>
-            </a:pPr>
-            <a:r>
-              <a:rPr lang="en-US" sz="1500" b="1" dirty="0">
-                <a:solidFill>
-                  <a:srgbClr val="FAF8F3"/>
-                </a:solidFill>
-                <a:latin typeface="Geist" pitchFamily="34" charset="0"/>
-                <a:ea typeface="Geist" pitchFamily="34" charset="-122"/>
-                <a:cs typeface="Geist" pitchFamily="34" charset="-120"/>
-              </a:rPr>
-              <a:t>Оқитын мамандығы: молекулалық биология немесе биохимия.</a:t>
-            </a:r>
-            <a:endParaRPr lang="en-US" sz="1500" dirty="0"/>
-          </a:p>
-        </p:txBody>
-      </p:sp>
-      <p:sp>
-        <p:nvSpPr>
-          <p:cNvPr id="17" name="text-16"/>
-          <p:cNvSpPr txBox="1"/>
-          <p:nvPr/>
-        </p:nvSpPr>
-        <p:spPr>
-          <a:xfrm>
-            <a:off x="457845" y="7969250"/>
-            <a:ext cx="895223" cy="171450"/>
-          </a:xfrm>
-          <a:prstGeom prst="rect">
-            <a:avLst/>
-          </a:prstGeom>
-          <a:noFill/>
-          <a:ln/>
-        </p:spPr>
-        <p:txBody>
-          <a:bodyPr wrap="square" lIns="0" tIns="0" rIns="0" bIns="0" rtlCol="0" anchor="t"/>
-          <a:lstStyle/>
-          <a:p>
-            <a:pPr algn="l" indent="0" marL="0">
-              <a:lnSpc>
-                <a:spcPts val="1200"/>
-              </a:lnSpc>
-              <a:buNone/>
-            </a:pPr>
-            <a:r>
-              <a:rPr lang="en-US" sz="1000" spc="140" kern="0" dirty="0">
-                <a:solidFill>
-                  <a:srgbClr val="0A0A0A"/>
-                </a:solidFill>
-                <a:latin typeface="IBM Plex Mono" pitchFamily="34" charset="0"/>
-                <a:ea typeface="IBM Plex Mono" pitchFamily="34" charset="-122"/>
-                <a:cs typeface="IBM Plex Mono" pitchFamily="34" charset="-120"/>
-              </a:rPr>
-              <a:t>@NURZYCOM</a:t>
-            </a:r>
-            <a:endParaRPr lang="en-US" sz="1000" dirty="0"/>
-          </a:p>
-        </p:txBody>
-      </p:sp>
-      <p:sp>
-        <p:nvSpPr>
-          <p:cNvPr id="18" name="shape-17"/>
+          <p:cNvPr id="13" name="shape-12"/>
           <p:cNvSpPr/>
           <p:nvPr/>
         </p:nvSpPr>
         <p:spPr>
-          <a:xfrm>
-            <a:off x="5060305" y="7893050"/>
-            <a:ext cx="1339850" cy="323850"/>
-          </a:xfrm>
-          <a:prstGeom prst="roundRect">
-            <a:avLst>
-              <a:gd name="adj" fmla="val 50000"/>
-            </a:avLst>
+          <a:xfrm rot="-420000">
+            <a:off x="5718015" y="5064740"/>
+            <a:ext cx="533400" cy="533400"/>
+          </a:xfrm>
+          <a:prstGeom prst="ellipse">
+            <a:avLst/>
           </a:prstGeom>
           <a:solidFill>
-            <a:srgbClr val="0A0A0A"/>
+            <a:srgbClr val="FAF8F3"/>
           </a:solidFill>
-          <a:ln/>
-        </p:spPr>
-      </p:sp>
-      <p:sp>
-        <p:nvSpPr>
-          <p:cNvPr id="19" name="text-18"/>
-          <p:cNvSpPr txBox="1"/>
-          <p:nvPr/>
-        </p:nvSpPr>
-        <p:spPr>
-          <a:xfrm>
-            <a:off x="5200005" y="7969250"/>
-            <a:ext cx="895223" cy="171450"/>
-          </a:xfrm>
-          <a:prstGeom prst="rect">
-            <a:avLst/>
-          </a:prstGeom>
-          <a:noFill/>
-          <a:ln/>
-        </p:spPr>
-        <p:txBody>
-          <a:bodyPr wrap="square" lIns="0" tIns="0" rIns="0" bIns="0" rtlCol="0" anchor="t"/>
-          <a:lstStyle/>
-          <a:p>
-            <a:pPr algn="l" indent="0" marL="0">
-              <a:lnSpc>
-                <a:spcPts val="1200"/>
-              </a:lnSpc>
-              <a:buNone/>
-            </a:pPr>
-            <a:r>
-              <a:rPr lang="en-US" sz="1000" spc="140" kern="0" dirty="0">
-                <a:solidFill>
-                  <a:srgbClr val="FAF8F3"/>
-                </a:solidFill>
-                <a:latin typeface="IBM Plex Mono" pitchFamily="34" charset="0"/>
-                <a:ea typeface="IBM Plex Mono" pitchFamily="34" charset="-122"/>
-                <a:cs typeface="IBM Plex Mono" pitchFamily="34" charset="-120"/>
-              </a:rPr>
-              <a:t>ӘРІ ҚАРАЙ</a:t>
-            </a:r>
-            <a:endParaRPr lang="en-US" sz="1000" dirty="0"/>
-          </a:p>
-        </p:txBody>
+          <a:ln w="12700">
+            <a:solidFill>
+              <a:srgbClr val="0A0A0A"/>
+            </a:solidFill>
+            <a:prstDash val="solid"/>
+          </a:ln>
+        </p:spPr>
       </p:sp>
       <p:pic>
         <p:nvPicPr>
-          <p:cNvPr id="20" name="svg-19" descr="preencoded.png">    </p:cNvPr>
+          <p:cNvPr id="14" name="svg-13" descr="preencoded.png">    </p:cNvPr>
           <p:cNvPicPr>
             <a:picLocks noChangeAspect="1"/>
           </p:cNvPicPr>
@@ -6696,6 +7319,328 @@
           </a:stretch>
         </p:blipFill>
         <p:spPr>
+          <a:xfrm rot="-420000">
+            <a:off x="5838665" y="5185390"/>
+            <a:ext cx="292100" cy="292100"/>
+          </a:xfrm>
+          <a:prstGeom prst="rect">
+            <a:avLst/>
+          </a:prstGeom>
+        </p:spPr>
+      </p:pic>
+      <p:sp>
+        <p:nvSpPr>
+          <p:cNvPr id="15" name="text-14"/>
+          <p:cNvSpPr txBox="1"/>
+          <p:nvPr/>
+        </p:nvSpPr>
+        <p:spPr>
+          <a:xfrm rot="60000">
+            <a:off x="698633" y="5401382"/>
+            <a:ext cx="5815584" cy="146050"/>
+          </a:xfrm>
+          <a:prstGeom prst="rect">
+            <a:avLst/>
+          </a:prstGeom>
+          <a:noFill/>
+          <a:ln/>
+        </p:spPr>
+        <p:txBody>
+          <a:bodyPr wrap="square" lIns="0" tIns="0" rIns="0" bIns="0" rtlCol="0" anchor="t"/>
+          <a:lstStyle/>
+          <a:p>
+            <a:pPr algn="l" indent="0" marL="0">
+              <a:lnSpc>
+                <a:spcPts val="1080"/>
+              </a:lnSpc>
+              <a:buNone/>
+            </a:pPr>
+            <a:r>
+              <a:rPr lang="en-US" sz="900" spc="140" kern="0" dirty="0">
+                <a:solidFill>
+                  <a:srgbClr val="FAF8F3"/>
+                </a:solidFill>
+                <a:latin typeface="IBM Plex Mono" pitchFamily="34" charset="0"/>
+                <a:ea typeface="IBM Plex Mono" pitchFamily="34" charset="-122"/>
+                <a:cs typeface="IBM Plex Mono" pitchFamily="34" charset="-120"/>
+              </a:rPr>
+              <a:t>2026 ЖЫЛЫ, 17 ЖАСТА</a:t>
+            </a:r>
+            <a:endParaRPr lang="en-US" sz="900" dirty="0"/>
+          </a:p>
+        </p:txBody>
+      </p:sp>
+      <p:pic>
+        <p:nvPicPr>
+          <p:cNvPr id="16" name="svg-15" descr="preencoded.png">    </p:cNvPr>
+          <p:cNvPicPr>
+            <a:picLocks noChangeAspect="1"/>
+          </p:cNvPicPr>
+          <p:nvPr/>
+        </p:nvPicPr>
+        <p:blipFill>
+          <a:blip r:embed="rId4"/>
+          <a:stretch>
+            <a:fillRect/>
+          </a:stretch>
+        </p:blipFill>
+        <p:spPr>
+          <a:xfrm rot="60000">
+            <a:off x="694214" y="5602888"/>
+            <a:ext cx="203200" cy="203200"/>
+          </a:xfrm>
+          <a:prstGeom prst="rect">
+            <a:avLst/>
+          </a:prstGeom>
+        </p:spPr>
+      </p:pic>
+      <p:sp>
+        <p:nvSpPr>
+          <p:cNvPr id="17" name="text-16"/>
+          <p:cNvSpPr txBox="1"/>
+          <p:nvPr/>
+        </p:nvSpPr>
+        <p:spPr>
+          <a:xfrm rot="60000">
+            <a:off x="961071" y="5624052"/>
+            <a:ext cx="3762629" cy="222250"/>
+          </a:xfrm>
+          <a:prstGeom prst="rect">
+            <a:avLst/>
+          </a:prstGeom>
+          <a:noFill/>
+          <a:ln/>
+        </p:spPr>
+        <p:txBody>
+          <a:bodyPr wrap="square" lIns="0" tIns="0" rIns="0" bIns="0" rtlCol="0" anchor="t"/>
+          <a:lstStyle/>
+          <a:p>
+            <a:pPr algn="l" indent="0" marL="0">
+              <a:lnSpc>
+                <a:spcPts val="1840"/>
+              </a:lnSpc>
+              <a:buNone/>
+            </a:pPr>
+            <a:r>
+              <a:rPr lang="en-US" sz="1350" dirty="0">
+                <a:solidFill>
+                  <a:srgbClr val="FAF8F3"/>
+                </a:solidFill>
+                <a:latin typeface="Geist" pitchFamily="34" charset="0"/>
+                <a:ea typeface="Geist" pitchFamily="34" charset="-122"/>
+                <a:cs typeface="Geist" pitchFamily="34" charset="-120"/>
+              </a:rPr>
+              <a:t>Халықаралық биология олимпиадасы (IBO).</a:t>
+            </a:r>
+            <a:endParaRPr lang="en-US" sz="1350" dirty="0"/>
+          </a:p>
+        </p:txBody>
+      </p:sp>
+      <p:sp>
+        <p:nvSpPr>
+          <p:cNvPr id="18" name="text-17"/>
+          <p:cNvSpPr txBox="1"/>
+          <p:nvPr/>
+        </p:nvSpPr>
+        <p:spPr>
+          <a:xfrm rot="60000">
+            <a:off x="876395" y="5972374"/>
+            <a:ext cx="5613654" cy="463550"/>
+          </a:xfrm>
+          <a:prstGeom prst="rect">
+            <a:avLst/>
+          </a:prstGeom>
+          <a:noFill/>
+          <a:ln/>
+        </p:spPr>
+        <p:txBody>
+          <a:bodyPr wrap="square" lIns="0" tIns="0" rIns="0" bIns="0" rtlCol="0" anchor="t"/>
+          <a:lstStyle/>
+          <a:p>
+            <a:pPr algn="l" indent="0" marL="0">
+              <a:lnSpc>
+                <a:spcPts val="1840"/>
+              </a:lnSpc>
+              <a:buNone/>
+            </a:pPr>
+            <a:r>
+              <a:rPr lang="en-US" sz="1350" dirty="0">
+                <a:solidFill>
+                  <a:srgbClr val="FAF8F3"/>
+                </a:solidFill>
+                <a:latin typeface="Geist" pitchFamily="34" charset="0"/>
+                <a:ea typeface="Geist" pitchFamily="34" charset="-122"/>
+                <a:cs typeface="Geist" pitchFamily="34" charset="-120"/>
+              </a:rPr>
+              <a:t>Зертханада жасалған зерттеу жобасы, мысалы ISEF сияқты ғылыми жарыста.</a:t>
+            </a:r>
+            <a:endParaRPr lang="en-US" sz="1350" dirty="0"/>
+          </a:p>
+        </p:txBody>
+      </p:sp>
+      <p:sp>
+        <p:nvSpPr>
+          <p:cNvPr id="19" name="text-18"/>
+          <p:cNvSpPr txBox="1"/>
+          <p:nvPr/>
+        </p:nvSpPr>
+        <p:spPr>
+          <a:xfrm rot="60000">
+            <a:off x="866483" y="6540216"/>
+            <a:ext cx="5613654" cy="463550"/>
+          </a:xfrm>
+          <a:prstGeom prst="rect">
+            <a:avLst/>
+          </a:prstGeom>
+          <a:noFill/>
+          <a:ln/>
+        </p:spPr>
+        <p:txBody>
+          <a:bodyPr wrap="square" lIns="0" tIns="0" rIns="0" bIns="0" rtlCol="0" anchor="t"/>
+          <a:lstStyle/>
+          <a:p>
+            <a:pPr algn="l" indent="0" marL="0">
+              <a:lnSpc>
+                <a:spcPts val="1840"/>
+              </a:lnSpc>
+              <a:buNone/>
+            </a:pPr>
+            <a:r>
+              <a:rPr lang="en-US" sz="1350" b="1" dirty="0">
+                <a:solidFill>
+                  <a:srgbClr val="FAF8F3"/>
+                </a:solidFill>
+                <a:latin typeface="Geist" pitchFamily="34" charset="0"/>
+                <a:ea typeface="Geist" pitchFamily="34" charset="-122"/>
+                <a:cs typeface="Geist" pitchFamily="34" charset="-120"/>
+              </a:rPr>
+              <a:t>Оқитын мамандығы: молекулалық биология немесе биохимия.</a:t>
+            </a:r>
+            <a:endParaRPr lang="en-US" sz="1350" dirty="0"/>
+          </a:p>
+        </p:txBody>
+      </p:sp>
+      <p:sp>
+        <p:nvSpPr>
+          <p:cNvPr id="20" name="text-19"/>
+          <p:cNvSpPr txBox="1"/>
+          <p:nvPr/>
+        </p:nvSpPr>
+        <p:spPr>
+          <a:xfrm>
+            <a:off x="457845" y="7969250"/>
+            <a:ext cx="895223" cy="171450"/>
+          </a:xfrm>
+          <a:prstGeom prst="rect">
+            <a:avLst/>
+          </a:prstGeom>
+          <a:noFill/>
+          <a:ln/>
+        </p:spPr>
+        <p:txBody>
+          <a:bodyPr wrap="square" lIns="0" tIns="0" rIns="0" bIns="0" rtlCol="0" anchor="t"/>
+          <a:lstStyle/>
+          <a:p>
+            <a:pPr algn="l" indent="0" marL="0">
+              <a:lnSpc>
+                <a:spcPts val="1200"/>
+              </a:lnSpc>
+              <a:buNone/>
+            </a:pPr>
+            <a:r>
+              <a:rPr lang="en-US" sz="1000" spc="140" kern="0" dirty="0">
+                <a:solidFill>
+                  <a:srgbClr val="0A0A0A"/>
+                </a:solidFill>
+                <a:latin typeface="IBM Plex Mono" pitchFamily="34" charset="0"/>
+                <a:ea typeface="IBM Plex Mono" pitchFamily="34" charset="-122"/>
+                <a:cs typeface="IBM Plex Mono" pitchFamily="34" charset="-120"/>
+              </a:rPr>
+              <a:t>@NURZYCOM</a:t>
+            </a:r>
+            <a:endParaRPr lang="en-US" sz="1000" dirty="0"/>
+          </a:p>
+        </p:txBody>
+      </p:sp>
+      <p:sp>
+        <p:nvSpPr>
+          <p:cNvPr id="21" name="shape-20"/>
+          <p:cNvSpPr/>
+          <p:nvPr/>
+        </p:nvSpPr>
+        <p:spPr>
+          <a:xfrm>
+            <a:off x="5060305" y="7893050"/>
+            <a:ext cx="1339850" cy="323850"/>
+          </a:xfrm>
+          <a:prstGeom prst="roundRect">
+            <a:avLst>
+              <a:gd name="adj" fmla="val 50000"/>
+            </a:avLst>
+          </a:prstGeom>
+          <a:solidFill>
+            <a:srgbClr val="0A0A0A"/>
+          </a:solidFill>
+          <a:ln/>
+        </p:spPr>
+      </p:sp>
+      <p:sp>
+        <p:nvSpPr>
+          <p:cNvPr id="22" name="text-21"/>
+          <p:cNvSpPr txBox="1"/>
+          <p:nvPr/>
+        </p:nvSpPr>
+        <p:spPr>
+          <a:xfrm>
+            <a:off x="5200005" y="7969250"/>
+            <a:ext cx="895223" cy="171450"/>
+          </a:xfrm>
+          <a:prstGeom prst="rect">
+            <a:avLst/>
+          </a:prstGeom>
+          <a:noFill/>
+          <a:ln/>
+        </p:spPr>
+        <p:txBody>
+          <a:bodyPr wrap="square" lIns="0" tIns="0" rIns="0" bIns="0" rtlCol="0" anchor="t"/>
+          <a:lstStyle/>
+          <a:p>
+            <a:pPr algn="l" indent="0" marL="0">
+              <a:lnSpc>
+                <a:spcPts val="1200"/>
+              </a:lnSpc>
+              <a:buNone/>
+            </a:pPr>
+            <a:r>
+              <a:rPr lang="en-US" sz="1000" spc="140" kern="0" dirty="0">
+                <a:solidFill>
+                  <a:srgbClr val="FAF8F3"/>
+                </a:solidFill>
+                <a:latin typeface="IBM Plex Mono" pitchFamily="34" charset="0"/>
+                <a:ea typeface="IBM Plex Mono" pitchFamily="34" charset="-122"/>
+                <a:cs typeface="IBM Plex Mono" pitchFamily="34" charset="-120"/>
+              </a:rPr>
+              <a:t>ӘРІ ҚАРАЙ</a:t>
+            </a:r>
+            <a:endParaRPr lang="en-US" sz="1000" dirty="0"/>
+          </a:p>
+        </p:txBody>
+      </p:sp>
+      <p:pic>
+        <p:nvPicPr>
+          <p:cNvPr id="23" name="svg-22" descr="preencoded.png">    </p:cNvPr>
+          <p:cNvPicPr>
+            <a:picLocks noChangeAspect="1"/>
+          </p:cNvPicPr>
+          <p:nvPr/>
+        </p:nvPicPr>
+        <p:blipFill>
+          <a:blip r:embed="rId5"/>
+          <a:stretch>
+            <a:fillRect/>
+          </a:stretch>
+        </p:blipFill>
+        <p:spPr>
           <a:xfrm>
             <a:off x="6121400" y="7985125"/>
             <a:ext cx="139700" cy="139700"/>
@@ -6707,7 +7652,122 @@
       </p:pic>
       <p:sp>
         <p:nvSpPr>
-          <p:cNvPr id="21" name="text-20"/>
+          <p:cNvPr id="24" name="shape-23"/>
+          <p:cNvSpPr/>
+          <p:nvPr/>
+        </p:nvSpPr>
+        <p:spPr>
+          <a:xfrm rot="240000">
+            <a:off x="4660900" y="950913"/>
+            <a:ext cx="1714500" cy="2349500"/>
+          </a:xfrm>
+          <a:prstGeom prst="rect">
+            <a:avLst/>
+          </a:prstGeom>
+          <a:solidFill>
+            <a:srgbClr val="FFFFFF"/>
+          </a:solidFill>
+          <a:ln/>
+          <a:effectLst>
+            <a:outerShdw sx="100000" sy="100000" kx="0" ky="0" algn="bl" rotWithShape="0" blurRad="177800" dist="76200" dir="5400000">
+              <a:srgbClr val="000000">
+                <a:alpha val="22000"/>
+              </a:srgbClr>
+            </a:outerShdw>
+          </a:effectLst>
+        </p:spPr>
+      </p:sp>
+      <p:sp>
+        <p:nvSpPr>
+          <p:cNvPr id="25" name="shape-24"/>
+          <p:cNvSpPr/>
+          <p:nvPr/>
+        </p:nvSpPr>
+        <p:spPr>
+          <a:xfrm rot="60000">
+            <a:off x="5121964" y="840996"/>
+            <a:ext cx="952500" cy="279400"/>
+          </a:xfrm>
+          <a:prstGeom prst="rect">
+            <a:avLst/>
+          </a:prstGeom>
+          <a:solidFill>
+            <a:srgbClr val="D5D5D4">
+              <a:alpha val="90000"/>
+            </a:srgbClr>
+          </a:solidFill>
+          <a:ln/>
+        </p:spPr>
+      </p:sp>
+      <p:pic>
+        <p:nvPicPr>
+          <p:cNvPr id="26" name="img-25" descr="preencoded.png">    </p:cNvPr>
+          <p:cNvPicPr>
+            <a:picLocks noChangeAspect="1"/>
+          </p:cNvPicPr>
+          <p:nvPr/>
+        </p:nvPicPr>
+        <p:blipFill>
+          <a:blip r:embed="rId6"/>
+          <a:stretch>
+            <a:fillRect/>
+          </a:stretch>
+        </p:blipFill>
+        <p:spPr>
+          <a:xfrm rot="240000">
+            <a:off x="4745516" y="1027406"/>
+            <a:ext cx="1562100" cy="1955800"/>
+          </a:xfrm>
+          <a:prstGeom prst="rect">
+            <a:avLst/>
+          </a:prstGeom>
+        </p:spPr>
+      </p:pic>
+      <p:sp>
+        <p:nvSpPr>
+          <p:cNvPr id="27" name="text-26"/>
+          <p:cNvSpPr txBox="1"/>
+          <p:nvPr/>
+        </p:nvSpPr>
+        <p:spPr>
+          <a:xfrm rot="240000">
+            <a:off x="4557177" y="3004300"/>
+            <a:ext cx="1783080" cy="228600"/>
+          </a:xfrm>
+          <a:prstGeom prst="rect">
+            <a:avLst/>
+          </a:prstGeom>
+          <a:noFill/>
+          <a:ln/>
+        </p:spPr>
+        <p:txBody>
+          <a:bodyPr wrap="square" lIns="0" tIns="0" rIns="0" bIns="0" rtlCol="0" anchor="t"/>
+          <a:lstStyle/>
+          <a:p>
+            <a:pPr algn="ctr" indent="0" marL="0">
+              <a:lnSpc>
+                <a:spcPts val="1560"/>
+              </a:lnSpc>
+              <a:buNone/>
+            </a:pPr>
+            <a:r>
+              <a:rPr lang="en-US" sz="1300" i="1" dirty="0">
+                <a:solidFill>
+                  <a:srgbClr val="0A0A0A"/>
+                </a:solidFill>
+                <a:latin typeface="Noto Serif Display Light" pitchFamily="34" charset="0"/>
+                <a:ea typeface="Noto Serif Display Light" pitchFamily="34" charset="-122"/>
+                <a:cs typeface="Noto Serif Display Light" pitchFamily="34" charset="-120"/>
+              </a:rPr>
+              <a:t>1939–1987</a:t>
+            </a:r>
+            <a:endParaRPr lang="en-US" sz="1300" dirty="0"/>
+          </a:p>
+        </p:txBody>
+      </p:sp>
+      <p:sp>
+        <p:nvSpPr>
+          <p:cNvPr id="28" name="text-27"/>
           <p:cNvSpPr txBox="1"/>
           <p:nvPr/>
         </p:nvSpPr>

--- a/social/pptx/kz-scientists.pptx
+++ b/social/pptx/kz-scientists.pptx
@@ -1812,7 +1812,7 @@
             <a:r>
               <a:rPr lang="en-US" sz="3500" i="1" dirty="0">
                 <a:solidFill>
-                  <a:srgbClr val="0A0A0A"/>
+                  <a:srgbClr val="9C4F22"/>
                 </a:solidFill>
                 <a:latin typeface="Noto Serif Display Light" pitchFamily="34" charset="0"/>
                 <a:ea typeface="Noto Serif Display Light" pitchFamily="34" charset="-122"/>
@@ -1878,7 +1878,7 @@
             <a:r>
               <a:rPr lang="en-US" sz="3500" i="1" dirty="0">
                 <a:solidFill>
-                  <a:srgbClr val="0A0A0A"/>
+                  <a:srgbClr val="1B6676"/>
                 </a:solidFill>
                 <a:latin typeface="Noto Serif Display Light" pitchFamily="34" charset="0"/>
                 <a:ea typeface="Noto Serif Display Light" pitchFamily="34" charset="-122"/>
@@ -1944,7 +1944,7 @@
             <a:r>
               <a:rPr lang="en-US" sz="3500" i="1" dirty="0">
                 <a:solidFill>
-                  <a:srgbClr val="0A0A0A"/>
+                  <a:srgbClr val="5B2E91"/>
                 </a:solidFill>
                 <a:latin typeface="Noto Serif Display Light" pitchFamily="34" charset="0"/>
                 <a:ea typeface="Noto Serif Display Light" pitchFamily="34" charset="-122"/>
@@ -2010,7 +2010,7 @@
             <a:r>
               <a:rPr lang="en-US" sz="3500" i="1" dirty="0">
                 <a:solidFill>
-                  <a:srgbClr val="0A0A0A"/>
+                  <a:srgbClr val="2338A0"/>
                 </a:solidFill>
                 <a:latin typeface="Noto Serif Display Light" pitchFamily="34" charset="0"/>
                 <a:ea typeface="Noto Serif Display Light" pitchFamily="34" charset="-122"/>
@@ -2076,7 +2076,7 @@
             <a:r>
               <a:rPr lang="en-US" sz="3500" i="1" dirty="0">
                 <a:solidFill>
-                  <a:srgbClr val="0A0A0A"/>
+                  <a:srgbClr val="2F7A33"/>
                 </a:solidFill>
                 <a:latin typeface="Noto Serif Display Light" pitchFamily="34" charset="0"/>
                 <a:ea typeface="Noto Serif Display Light" pitchFamily="34" charset="-122"/>
@@ -3077,7 +3077,7 @@
           </a:solidFill>
           <a:ln w="12700">
             <a:solidFill>
-              <a:srgbClr val="0A0A0A"/>
+              <a:srgbClr val="9C4F22"/>
             </a:solidFill>
             <a:prstDash val="solid"/>
           </a:ln>
@@ -3137,7 +3137,7 @@
             <a:r>
               <a:rPr lang="en-US" sz="1000" spc="140" kern="0" dirty="0">
                 <a:solidFill>
-                  <a:srgbClr val="0A0A0A"/>
+                  <a:srgbClr val="9C4F22"/>
                 </a:solidFill>
                 <a:latin typeface="IBM Plex Mono" pitchFamily="34" charset="0"/>
                 <a:ea typeface="IBM Plex Mono" pitchFamily="34" charset="-122"/>
@@ -3193,7 +3193,27 @@
       </p:sp>
       <p:sp>
         <p:nvSpPr>
-          <p:cNvPr id="6" name="text-5"/>
+          <p:cNvPr id="6" name="shape-5"/>
+          <p:cNvSpPr/>
+          <p:nvPr/>
+        </p:nvSpPr>
+        <p:spPr>
+          <a:xfrm>
+            <a:off x="0" y="0"/>
+            <a:ext cx="6858000" cy="88900"/>
+          </a:xfrm>
+          <a:prstGeom prst="rect">
+            <a:avLst/>
+          </a:prstGeom>
+          <a:solidFill>
+            <a:srgbClr val="9C4F22"/>
+          </a:solidFill>
+          <a:ln/>
+        </p:spPr>
+      </p:sp>
+      <p:sp>
+        <p:nvSpPr>
+          <p:cNvPr id="7" name="text-6"/>
           <p:cNvSpPr txBox="1"/>
           <p:nvPr/>
         </p:nvSpPr>
@@ -3238,7 +3258,7 @@
             <a:r>
               <a:rPr lang="en-US" sz="5200" i="1" spc="-100" kern="0" dirty="0">
                 <a:solidFill>
-                  <a:srgbClr val="0A0A0A"/>
+                  <a:srgbClr val="9C4F22"/>
                 </a:solidFill>
                 <a:latin typeface="Noto Serif Display Light" pitchFamily="34" charset="0"/>
                 <a:ea typeface="Noto Serif Display Light" pitchFamily="34" charset="-122"/>
@@ -3252,7 +3272,7 @@
       </p:sp>
       <p:sp>
         <p:nvSpPr>
-          <p:cNvPr id="7" name="shape-6"/>
+          <p:cNvPr id="8" name="shape-7"/>
           <p:cNvSpPr/>
           <p:nvPr/>
         </p:nvSpPr>
@@ -3279,7 +3299,7 @@
       </p:sp>
       <p:sp>
         <p:nvSpPr>
-          <p:cNvPr id="8" name="shape-7"/>
+          <p:cNvPr id="9" name="shape-8"/>
           <p:cNvSpPr/>
           <p:nvPr/>
         </p:nvSpPr>
@@ -3301,7 +3321,7 @@
       </p:sp>
       <p:sp>
         <p:nvSpPr>
-          <p:cNvPr id="9" name="text-8"/>
+          <p:cNvPr id="10" name="text-9"/>
           <p:cNvSpPr txBox="1"/>
           <p:nvPr/>
         </p:nvSpPr>
@@ -3343,7 +3363,7 @@
       </p:sp>
       <p:sp>
         <p:nvSpPr>
-          <p:cNvPr id="10" name="text-9"/>
+          <p:cNvPr id="11" name="text-10"/>
           <p:cNvSpPr txBox="1"/>
           <p:nvPr/>
         </p:nvSpPr>
@@ -3385,7 +3405,7 @@
       </p:sp>
       <p:sp>
         <p:nvSpPr>
-          <p:cNvPr id="11" name="text-10"/>
+          <p:cNvPr id="12" name="text-11"/>
           <p:cNvSpPr txBox="1"/>
           <p:nvPr/>
         </p:nvSpPr>
@@ -3427,7 +3447,7 @@
       </p:sp>
       <p:sp>
         <p:nvSpPr>
-          <p:cNvPr id="12" name="shape-11"/>
+          <p:cNvPr id="13" name="shape-12"/>
           <p:cNvSpPr/>
           <p:nvPr/>
         </p:nvSpPr>
@@ -3442,14 +3462,14 @@
             </a:avLst>
           </a:prstGeom>
           <a:solidFill>
-            <a:srgbClr val="0A0A0A"/>
+            <a:srgbClr val="9C4F22"/>
           </a:solidFill>
           <a:ln/>
         </p:spPr>
       </p:sp>
       <p:sp>
         <p:nvSpPr>
-          <p:cNvPr id="13" name="shape-12"/>
+          <p:cNvPr id="14" name="shape-13"/>
           <p:cNvSpPr/>
           <p:nvPr/>
         </p:nvSpPr>
@@ -3466,7 +3486,7 @@
           </a:solidFill>
           <a:ln w="12700">
             <a:solidFill>
-              <a:srgbClr val="0A0A0A"/>
+              <a:srgbClr val="9C4F22"/>
             </a:solidFill>
             <a:prstDash val="solid"/>
           </a:ln>
@@ -3474,7 +3494,7 @@
       </p:sp>
       <p:pic>
         <p:nvPicPr>
-          <p:cNvPr id="14" name="svg-13" descr="preencoded.png">    </p:cNvPr>
+          <p:cNvPr id="15" name="svg-14" descr="preencoded.png">    </p:cNvPr>
           <p:cNvPicPr>
             <a:picLocks noChangeAspect="1"/>
           </p:cNvPicPr>
@@ -3498,7 +3518,7 @@
       </p:pic>
       <p:sp>
         <p:nvSpPr>
-          <p:cNvPr id="15" name="text-14"/>
+          <p:cNvPr id="16" name="text-15"/>
           <p:cNvSpPr txBox="1"/>
           <p:nvPr/>
         </p:nvSpPr>
@@ -3540,7 +3560,7 @@
       </p:sp>
       <p:pic>
         <p:nvPicPr>
-          <p:cNvPr id="16" name="svg-15" descr="preencoded.png">    </p:cNvPr>
+          <p:cNvPr id="17" name="svg-16" descr="preencoded.png">    </p:cNvPr>
           <p:cNvPicPr>
             <a:picLocks noChangeAspect="1"/>
           </p:cNvPicPr>
@@ -3564,7 +3584,7 @@
       </p:pic>
       <p:sp>
         <p:nvSpPr>
-          <p:cNvPr id="17" name="text-16"/>
+          <p:cNvPr id="18" name="text-17"/>
           <p:cNvSpPr txBox="1"/>
           <p:nvPr/>
         </p:nvSpPr>
@@ -3606,7 +3626,7 @@
       </p:sp>
       <p:sp>
         <p:nvSpPr>
-          <p:cNvPr id="18" name="text-17"/>
+          <p:cNvPr id="19" name="text-18"/>
           <p:cNvSpPr txBox="1"/>
           <p:nvPr/>
         </p:nvSpPr>
@@ -3648,7 +3668,7 @@
       </p:sp>
       <p:sp>
         <p:nvSpPr>
-          <p:cNvPr id="19" name="text-18"/>
+          <p:cNvPr id="20" name="text-19"/>
           <p:cNvSpPr txBox="1"/>
           <p:nvPr/>
         </p:nvSpPr>
@@ -3690,7 +3710,7 @@
       </p:sp>
       <p:sp>
         <p:nvSpPr>
-          <p:cNvPr id="20" name="text-19"/>
+          <p:cNvPr id="21" name="text-20"/>
           <p:cNvSpPr txBox="1"/>
           <p:nvPr/>
         </p:nvSpPr>
@@ -3732,7 +3752,7 @@
       </p:sp>
       <p:sp>
         <p:nvSpPr>
-          <p:cNvPr id="21" name="shape-20"/>
+          <p:cNvPr id="22" name="shape-21"/>
           <p:cNvSpPr/>
           <p:nvPr/>
         </p:nvSpPr>
@@ -3754,7 +3774,7 @@
       </p:sp>
       <p:sp>
         <p:nvSpPr>
-          <p:cNvPr id="22" name="text-21"/>
+          <p:cNvPr id="23" name="text-22"/>
           <p:cNvSpPr txBox="1"/>
           <p:nvPr/>
         </p:nvSpPr>
@@ -3796,7 +3816,7 @@
       </p:sp>
       <p:pic>
         <p:nvPicPr>
-          <p:cNvPr id="23" name="svg-22" descr="preencoded.png">    </p:cNvPr>
+          <p:cNvPr id="24" name="svg-23" descr="preencoded.png">    </p:cNvPr>
           <p:cNvPicPr>
             <a:picLocks noChangeAspect="1"/>
           </p:cNvPicPr>
@@ -3820,7 +3840,7 @@
       </p:pic>
       <p:sp>
         <p:nvSpPr>
-          <p:cNvPr id="24" name="shape-23"/>
+          <p:cNvPr id="25" name="shape-24"/>
           <p:cNvSpPr/>
           <p:nvPr/>
         </p:nvSpPr>
@@ -3847,7 +3867,7 @@
       </p:sp>
       <p:sp>
         <p:nvSpPr>
-          <p:cNvPr id="25" name="shape-24"/>
+          <p:cNvPr id="26" name="shape-25"/>
           <p:cNvSpPr/>
           <p:nvPr/>
         </p:nvSpPr>
@@ -3869,7 +3889,7 @@
       </p:sp>
       <p:pic>
         <p:nvPicPr>
-          <p:cNvPr id="26" name="img-25" descr="preencoded.png">    </p:cNvPr>
+          <p:cNvPr id="27" name="img-26" descr="preencoded.png">    </p:cNvPr>
           <p:cNvPicPr>
             <a:picLocks noChangeAspect="1"/>
           </p:cNvPicPr>
@@ -3893,7 +3913,7 @@
       </p:pic>
       <p:sp>
         <p:nvSpPr>
-          <p:cNvPr id="27" name="text-26"/>
+          <p:cNvPr id="28" name="text-27"/>
           <p:cNvSpPr txBox="1"/>
           <p:nvPr/>
         </p:nvSpPr>
@@ -3935,7 +3955,7 @@
       </p:sp>
       <p:sp>
         <p:nvSpPr>
-          <p:cNvPr id="28" name="text-27"/>
+          <p:cNvPr id="29" name="text-28"/>
           <p:cNvSpPr txBox="1"/>
           <p:nvPr/>
         </p:nvSpPr>
@@ -4035,7 +4055,7 @@
           </a:solidFill>
           <a:ln w="12700">
             <a:solidFill>
-              <a:srgbClr val="0A0A0A"/>
+              <a:srgbClr val="1B6676"/>
             </a:solidFill>
             <a:prstDash val="solid"/>
           </a:ln>
@@ -4095,7 +4115,7 @@
             <a:r>
               <a:rPr lang="en-US" sz="1000" spc="140" kern="0" dirty="0">
                 <a:solidFill>
-                  <a:srgbClr val="0A0A0A"/>
+                  <a:srgbClr val="1B6676"/>
                 </a:solidFill>
                 <a:latin typeface="IBM Plex Mono" pitchFamily="34" charset="0"/>
                 <a:ea typeface="IBM Plex Mono" pitchFamily="34" charset="-122"/>
@@ -4151,7 +4171,27 @@
       </p:sp>
       <p:sp>
         <p:nvSpPr>
-          <p:cNvPr id="6" name="text-5"/>
+          <p:cNvPr id="6" name="shape-5"/>
+          <p:cNvSpPr/>
+          <p:nvPr/>
+        </p:nvSpPr>
+        <p:spPr>
+          <a:xfrm>
+            <a:off x="0" y="0"/>
+            <a:ext cx="6858000" cy="88900"/>
+          </a:xfrm>
+          <a:prstGeom prst="rect">
+            <a:avLst/>
+          </a:prstGeom>
+          <a:solidFill>
+            <a:srgbClr val="1B6676"/>
+          </a:solidFill>
+          <a:ln/>
+        </p:spPr>
+      </p:sp>
+      <p:sp>
+        <p:nvSpPr>
+          <p:cNvPr id="7" name="text-6"/>
           <p:cNvSpPr txBox="1"/>
           <p:nvPr/>
         </p:nvSpPr>
@@ -4196,7 +4236,7 @@
             <a:r>
               <a:rPr lang="en-US" sz="5200" i="1" spc="-100" kern="0" dirty="0">
                 <a:solidFill>
-                  <a:srgbClr val="0A0A0A"/>
+                  <a:srgbClr val="1B6676"/>
                 </a:solidFill>
                 <a:latin typeface="Noto Serif Display Light" pitchFamily="34" charset="0"/>
                 <a:ea typeface="Noto Serif Display Light" pitchFamily="34" charset="-122"/>
@@ -4210,7 +4250,7 @@
       </p:sp>
       <p:sp>
         <p:nvSpPr>
-          <p:cNvPr id="7" name="shape-6"/>
+          <p:cNvPr id="8" name="shape-7"/>
           <p:cNvSpPr/>
           <p:nvPr/>
         </p:nvSpPr>
@@ -4237,7 +4277,7 @@
       </p:sp>
       <p:sp>
         <p:nvSpPr>
-          <p:cNvPr id="8" name="shape-7"/>
+          <p:cNvPr id="9" name="shape-8"/>
           <p:cNvSpPr/>
           <p:nvPr/>
         </p:nvSpPr>
@@ -4259,7 +4299,7 @@
       </p:sp>
       <p:sp>
         <p:nvSpPr>
-          <p:cNvPr id="9" name="text-8"/>
+          <p:cNvPr id="10" name="text-9"/>
           <p:cNvSpPr txBox="1"/>
           <p:nvPr/>
         </p:nvSpPr>
@@ -4301,7 +4341,7 @@
       </p:sp>
       <p:sp>
         <p:nvSpPr>
-          <p:cNvPr id="10" name="text-9"/>
+          <p:cNvPr id="11" name="text-10"/>
           <p:cNvSpPr txBox="1"/>
           <p:nvPr/>
         </p:nvSpPr>
@@ -4343,7 +4383,7 @@
       </p:sp>
       <p:sp>
         <p:nvSpPr>
-          <p:cNvPr id="11" name="text-10"/>
+          <p:cNvPr id="12" name="text-11"/>
           <p:cNvSpPr txBox="1"/>
           <p:nvPr/>
         </p:nvSpPr>
@@ -4385,7 +4425,7 @@
       </p:sp>
       <p:sp>
         <p:nvSpPr>
-          <p:cNvPr id="12" name="shape-11"/>
+          <p:cNvPr id="13" name="shape-12"/>
           <p:cNvSpPr/>
           <p:nvPr/>
         </p:nvSpPr>
@@ -4400,14 +4440,14 @@
             </a:avLst>
           </a:prstGeom>
           <a:solidFill>
-            <a:srgbClr val="0A0A0A"/>
+            <a:srgbClr val="1B6676"/>
           </a:solidFill>
           <a:ln/>
         </p:spPr>
       </p:sp>
       <p:sp>
         <p:nvSpPr>
-          <p:cNvPr id="13" name="shape-12"/>
+          <p:cNvPr id="14" name="shape-13"/>
           <p:cNvSpPr/>
           <p:nvPr/>
         </p:nvSpPr>
@@ -4424,7 +4464,7 @@
           </a:solidFill>
           <a:ln w="12700">
             <a:solidFill>
-              <a:srgbClr val="0A0A0A"/>
+              <a:srgbClr val="1B6676"/>
             </a:solidFill>
             <a:prstDash val="solid"/>
           </a:ln>
@@ -4432,7 +4472,7 @@
       </p:sp>
       <p:pic>
         <p:nvPicPr>
-          <p:cNvPr id="14" name="svg-13" descr="preencoded.png">    </p:cNvPr>
+          <p:cNvPr id="15" name="svg-14" descr="preencoded.png">    </p:cNvPr>
           <p:cNvPicPr>
             <a:picLocks noChangeAspect="1"/>
           </p:cNvPicPr>
@@ -4456,7 +4496,7 @@
       </p:pic>
       <p:sp>
         <p:nvSpPr>
-          <p:cNvPr id="15" name="text-14"/>
+          <p:cNvPr id="16" name="text-15"/>
           <p:cNvSpPr txBox="1"/>
           <p:nvPr/>
         </p:nvSpPr>
@@ -4498,7 +4538,7 @@
       </p:sp>
       <p:pic>
         <p:nvPicPr>
-          <p:cNvPr id="16" name="svg-15" descr="preencoded.png">    </p:cNvPr>
+          <p:cNvPr id="17" name="svg-16" descr="preencoded.png">    </p:cNvPr>
           <p:cNvPicPr>
             <a:picLocks noChangeAspect="1"/>
           </p:cNvPicPr>
@@ -4522,7 +4562,7 @@
       </p:pic>
       <p:sp>
         <p:nvSpPr>
-          <p:cNvPr id="17" name="text-16"/>
+          <p:cNvPr id="18" name="text-17"/>
           <p:cNvSpPr txBox="1"/>
           <p:nvPr/>
         </p:nvSpPr>
@@ -4564,7 +4604,7 @@
       </p:sp>
       <p:sp>
         <p:nvSpPr>
-          <p:cNvPr id="18" name="text-17"/>
+          <p:cNvPr id="19" name="text-18"/>
           <p:cNvSpPr txBox="1"/>
           <p:nvPr/>
         </p:nvSpPr>
@@ -4606,7 +4646,7 @@
       </p:sp>
       <p:sp>
         <p:nvSpPr>
-          <p:cNvPr id="19" name="text-18"/>
+          <p:cNvPr id="20" name="text-19"/>
           <p:cNvSpPr txBox="1"/>
           <p:nvPr/>
         </p:nvSpPr>
@@ -4648,7 +4688,7 @@
       </p:sp>
       <p:sp>
         <p:nvSpPr>
-          <p:cNvPr id="20" name="text-19"/>
+          <p:cNvPr id="21" name="text-20"/>
           <p:cNvSpPr txBox="1"/>
           <p:nvPr/>
         </p:nvSpPr>
@@ -4690,7 +4730,7 @@
       </p:sp>
       <p:sp>
         <p:nvSpPr>
-          <p:cNvPr id="21" name="shape-20"/>
+          <p:cNvPr id="22" name="shape-21"/>
           <p:cNvSpPr/>
           <p:nvPr/>
         </p:nvSpPr>
@@ -4712,7 +4752,7 @@
       </p:sp>
       <p:sp>
         <p:nvSpPr>
-          <p:cNvPr id="22" name="text-21"/>
+          <p:cNvPr id="23" name="text-22"/>
           <p:cNvSpPr txBox="1"/>
           <p:nvPr/>
         </p:nvSpPr>
@@ -4754,7 +4794,7 @@
       </p:sp>
       <p:pic>
         <p:nvPicPr>
-          <p:cNvPr id="23" name="svg-22" descr="preencoded.png">    </p:cNvPr>
+          <p:cNvPr id="24" name="svg-23" descr="preencoded.png">    </p:cNvPr>
           <p:cNvPicPr>
             <a:picLocks noChangeAspect="1"/>
           </p:cNvPicPr>
@@ -4778,7 +4818,7 @@
       </p:pic>
       <p:sp>
         <p:nvSpPr>
-          <p:cNvPr id="24" name="shape-23"/>
+          <p:cNvPr id="25" name="shape-24"/>
           <p:cNvSpPr/>
           <p:nvPr/>
         </p:nvSpPr>
@@ -4805,7 +4845,7 @@
       </p:sp>
       <p:sp>
         <p:nvSpPr>
-          <p:cNvPr id="25" name="shape-24"/>
+          <p:cNvPr id="26" name="shape-25"/>
           <p:cNvSpPr/>
           <p:nvPr/>
         </p:nvSpPr>
@@ -4827,7 +4867,7 @@
       </p:sp>
       <p:pic>
         <p:nvPicPr>
-          <p:cNvPr id="26" name="img-25" descr="preencoded.png">    </p:cNvPr>
+          <p:cNvPr id="27" name="img-26" descr="preencoded.png">    </p:cNvPr>
           <p:cNvPicPr>
             <a:picLocks noChangeAspect="1"/>
           </p:cNvPicPr>
@@ -4851,7 +4891,7 @@
       </p:pic>
       <p:sp>
         <p:nvSpPr>
-          <p:cNvPr id="27" name="text-26"/>
+          <p:cNvPr id="28" name="text-27"/>
           <p:cNvSpPr txBox="1"/>
           <p:nvPr/>
         </p:nvSpPr>
@@ -4893,7 +4933,7 @@
       </p:sp>
       <p:sp>
         <p:nvSpPr>
-          <p:cNvPr id="28" name="text-27"/>
+          <p:cNvPr id="29" name="text-28"/>
           <p:cNvSpPr txBox="1"/>
           <p:nvPr/>
         </p:nvSpPr>
@@ -4993,7 +5033,7 @@
           </a:solidFill>
           <a:ln w="12700">
             <a:solidFill>
-              <a:srgbClr val="0A0A0A"/>
+              <a:srgbClr val="5B2E91"/>
             </a:solidFill>
             <a:prstDash val="solid"/>
           </a:ln>
@@ -5053,7 +5093,7 @@
             <a:r>
               <a:rPr lang="en-US" sz="1000" spc="140" kern="0" dirty="0">
                 <a:solidFill>
-                  <a:srgbClr val="0A0A0A"/>
+                  <a:srgbClr val="5B2E91"/>
                 </a:solidFill>
                 <a:latin typeface="IBM Plex Mono" pitchFamily="34" charset="0"/>
                 <a:ea typeface="IBM Plex Mono" pitchFamily="34" charset="-122"/>
@@ -5109,7 +5149,27 @@
       </p:sp>
       <p:sp>
         <p:nvSpPr>
-          <p:cNvPr id="6" name="text-5"/>
+          <p:cNvPr id="6" name="shape-5"/>
+          <p:cNvSpPr/>
+          <p:nvPr/>
+        </p:nvSpPr>
+        <p:spPr>
+          <a:xfrm>
+            <a:off x="0" y="0"/>
+            <a:ext cx="6858000" cy="88900"/>
+          </a:xfrm>
+          <a:prstGeom prst="rect">
+            <a:avLst/>
+          </a:prstGeom>
+          <a:solidFill>
+            <a:srgbClr val="5B2E91"/>
+          </a:solidFill>
+          <a:ln/>
+        </p:spPr>
+      </p:sp>
+      <p:sp>
+        <p:nvSpPr>
+          <p:cNvPr id="7" name="text-6"/>
           <p:cNvSpPr txBox="1"/>
           <p:nvPr/>
         </p:nvSpPr>
@@ -5154,7 +5214,7 @@
             <a:r>
               <a:rPr lang="en-US" sz="5200" i="1" spc="-100" kern="0" dirty="0">
                 <a:solidFill>
-                  <a:srgbClr val="0A0A0A"/>
+                  <a:srgbClr val="5B2E91"/>
                 </a:solidFill>
                 <a:latin typeface="Noto Serif Display Light" pitchFamily="34" charset="0"/>
                 <a:ea typeface="Noto Serif Display Light" pitchFamily="34" charset="-122"/>
@@ -5168,7 +5228,7 @@
       </p:sp>
       <p:sp>
         <p:nvSpPr>
-          <p:cNvPr id="7" name="shape-6"/>
+          <p:cNvPr id="8" name="shape-7"/>
           <p:cNvSpPr/>
           <p:nvPr/>
         </p:nvSpPr>
@@ -5195,7 +5255,7 @@
       </p:sp>
       <p:sp>
         <p:nvSpPr>
-          <p:cNvPr id="8" name="shape-7"/>
+          <p:cNvPr id="9" name="shape-8"/>
           <p:cNvSpPr/>
           <p:nvPr/>
         </p:nvSpPr>
@@ -5217,7 +5277,7 @@
       </p:sp>
       <p:sp>
         <p:nvSpPr>
-          <p:cNvPr id="9" name="text-8"/>
+          <p:cNvPr id="10" name="text-9"/>
           <p:cNvSpPr txBox="1"/>
           <p:nvPr/>
         </p:nvSpPr>
@@ -5259,7 +5319,7 @@
       </p:sp>
       <p:sp>
         <p:nvSpPr>
-          <p:cNvPr id="10" name="text-9"/>
+          <p:cNvPr id="11" name="text-10"/>
           <p:cNvSpPr txBox="1"/>
           <p:nvPr/>
         </p:nvSpPr>
@@ -5301,7 +5361,7 @@
       </p:sp>
       <p:sp>
         <p:nvSpPr>
-          <p:cNvPr id="11" name="text-10"/>
+          <p:cNvPr id="12" name="text-11"/>
           <p:cNvSpPr txBox="1"/>
           <p:nvPr/>
         </p:nvSpPr>
@@ -5343,7 +5403,7 @@
       </p:sp>
       <p:sp>
         <p:nvSpPr>
-          <p:cNvPr id="12" name="shape-11"/>
+          <p:cNvPr id="13" name="shape-12"/>
           <p:cNvSpPr/>
           <p:nvPr/>
         </p:nvSpPr>
@@ -5358,14 +5418,14 @@
             </a:avLst>
           </a:prstGeom>
           <a:solidFill>
-            <a:srgbClr val="0A0A0A"/>
+            <a:srgbClr val="5B2E91"/>
           </a:solidFill>
           <a:ln/>
         </p:spPr>
       </p:sp>
       <p:sp>
         <p:nvSpPr>
-          <p:cNvPr id="13" name="shape-12"/>
+          <p:cNvPr id="14" name="shape-13"/>
           <p:cNvSpPr/>
           <p:nvPr/>
         </p:nvSpPr>
@@ -5382,7 +5442,7 @@
           </a:solidFill>
           <a:ln w="12700">
             <a:solidFill>
-              <a:srgbClr val="0A0A0A"/>
+              <a:srgbClr val="5B2E91"/>
             </a:solidFill>
             <a:prstDash val="solid"/>
           </a:ln>
@@ -5390,7 +5450,7 @@
       </p:sp>
       <p:pic>
         <p:nvPicPr>
-          <p:cNvPr id="14" name="svg-13" descr="preencoded.png">    </p:cNvPr>
+          <p:cNvPr id="15" name="svg-14" descr="preencoded.png">    </p:cNvPr>
           <p:cNvPicPr>
             <a:picLocks noChangeAspect="1"/>
           </p:cNvPicPr>
@@ -5414,7 +5474,7 @@
       </p:pic>
       <p:sp>
         <p:nvSpPr>
-          <p:cNvPr id="15" name="text-14"/>
+          <p:cNvPr id="16" name="text-15"/>
           <p:cNvSpPr txBox="1"/>
           <p:nvPr/>
         </p:nvSpPr>
@@ -5456,7 +5516,7 @@
       </p:sp>
       <p:pic>
         <p:nvPicPr>
-          <p:cNvPr id="16" name="svg-15" descr="preencoded.png">    </p:cNvPr>
+          <p:cNvPr id="17" name="svg-16" descr="preencoded.png">    </p:cNvPr>
           <p:cNvPicPr>
             <a:picLocks noChangeAspect="1"/>
           </p:cNvPicPr>
@@ -5480,7 +5540,7 @@
       </p:pic>
       <p:sp>
         <p:nvSpPr>
-          <p:cNvPr id="17" name="text-16"/>
+          <p:cNvPr id="18" name="text-17"/>
           <p:cNvSpPr txBox="1"/>
           <p:nvPr/>
         </p:nvSpPr>
@@ -5522,7 +5582,7 @@
       </p:sp>
       <p:sp>
         <p:nvSpPr>
-          <p:cNvPr id="18" name="text-17"/>
+          <p:cNvPr id="19" name="text-18"/>
           <p:cNvSpPr txBox="1"/>
           <p:nvPr/>
         </p:nvSpPr>
@@ -5564,7 +5624,7 @@
       </p:sp>
       <p:sp>
         <p:nvSpPr>
-          <p:cNvPr id="19" name="text-18"/>
+          <p:cNvPr id="20" name="text-19"/>
           <p:cNvSpPr txBox="1"/>
           <p:nvPr/>
         </p:nvSpPr>
@@ -5606,7 +5666,7 @@
       </p:sp>
       <p:sp>
         <p:nvSpPr>
-          <p:cNvPr id="20" name="text-19"/>
+          <p:cNvPr id="21" name="text-20"/>
           <p:cNvSpPr txBox="1"/>
           <p:nvPr/>
         </p:nvSpPr>
@@ -5648,7 +5708,7 @@
       </p:sp>
       <p:sp>
         <p:nvSpPr>
-          <p:cNvPr id="21" name="shape-20"/>
+          <p:cNvPr id="22" name="shape-21"/>
           <p:cNvSpPr/>
           <p:nvPr/>
         </p:nvSpPr>
@@ -5670,7 +5730,7 @@
       </p:sp>
       <p:sp>
         <p:nvSpPr>
-          <p:cNvPr id="22" name="text-21"/>
+          <p:cNvPr id="23" name="text-22"/>
           <p:cNvSpPr txBox="1"/>
           <p:nvPr/>
         </p:nvSpPr>
@@ -5712,7 +5772,7 @@
       </p:sp>
       <p:pic>
         <p:nvPicPr>
-          <p:cNvPr id="23" name="svg-22" descr="preencoded.png">    </p:cNvPr>
+          <p:cNvPr id="24" name="svg-23" descr="preencoded.png">    </p:cNvPr>
           <p:cNvPicPr>
             <a:picLocks noChangeAspect="1"/>
           </p:cNvPicPr>
@@ -5736,7 +5796,7 @@
       </p:pic>
       <p:sp>
         <p:nvSpPr>
-          <p:cNvPr id="24" name="shape-23"/>
+          <p:cNvPr id="25" name="shape-24"/>
           <p:cNvSpPr/>
           <p:nvPr/>
         </p:nvSpPr>
@@ -5763,7 +5823,7 @@
       </p:sp>
       <p:sp>
         <p:nvSpPr>
-          <p:cNvPr id="25" name="shape-24"/>
+          <p:cNvPr id="26" name="shape-25"/>
           <p:cNvSpPr/>
           <p:nvPr/>
         </p:nvSpPr>
@@ -5785,7 +5845,7 @@
       </p:sp>
       <p:pic>
         <p:nvPicPr>
-          <p:cNvPr id="26" name="img-25" descr="preencoded.png">    </p:cNvPr>
+          <p:cNvPr id="27" name="img-26" descr="preencoded.png">    </p:cNvPr>
           <p:cNvPicPr>
             <a:picLocks noChangeAspect="1"/>
           </p:cNvPicPr>
@@ -5809,7 +5869,7 @@
       </p:pic>
       <p:sp>
         <p:nvSpPr>
-          <p:cNvPr id="27" name="text-26"/>
+          <p:cNvPr id="28" name="text-27"/>
           <p:cNvSpPr txBox="1"/>
           <p:nvPr/>
         </p:nvSpPr>
@@ -5851,7 +5911,7 @@
       </p:sp>
       <p:sp>
         <p:nvSpPr>
-          <p:cNvPr id="28" name="text-27"/>
+          <p:cNvPr id="29" name="text-28"/>
           <p:cNvSpPr txBox="1"/>
           <p:nvPr/>
         </p:nvSpPr>
@@ -5951,7 +6011,7 @@
           </a:solidFill>
           <a:ln w="12700">
             <a:solidFill>
-              <a:srgbClr val="0A0A0A"/>
+              <a:srgbClr val="2338A0"/>
             </a:solidFill>
             <a:prstDash val="solid"/>
           </a:ln>
@@ -6011,7 +6071,7 @@
             <a:r>
               <a:rPr lang="en-US" sz="1000" spc="140" kern="0" dirty="0">
                 <a:solidFill>
-                  <a:srgbClr val="0A0A0A"/>
+                  <a:srgbClr val="2338A0"/>
                 </a:solidFill>
                 <a:latin typeface="IBM Plex Mono" pitchFamily="34" charset="0"/>
                 <a:ea typeface="IBM Plex Mono" pitchFamily="34" charset="-122"/>
@@ -6067,7 +6127,27 @@
       </p:sp>
       <p:sp>
         <p:nvSpPr>
-          <p:cNvPr id="6" name="text-5"/>
+          <p:cNvPr id="6" name="shape-5"/>
+          <p:cNvSpPr/>
+          <p:nvPr/>
+        </p:nvSpPr>
+        <p:spPr>
+          <a:xfrm>
+            <a:off x="0" y="0"/>
+            <a:ext cx="6858000" cy="88900"/>
+          </a:xfrm>
+          <a:prstGeom prst="rect">
+            <a:avLst/>
+          </a:prstGeom>
+          <a:solidFill>
+            <a:srgbClr val="2338A0"/>
+          </a:solidFill>
+          <a:ln/>
+        </p:spPr>
+      </p:sp>
+      <p:sp>
+        <p:nvSpPr>
+          <p:cNvPr id="7" name="text-6"/>
           <p:cNvSpPr txBox="1"/>
           <p:nvPr/>
         </p:nvSpPr>
@@ -6112,7 +6192,7 @@
             <a:r>
               <a:rPr lang="en-US" sz="4000" i="1" spc="-80" kern="0" dirty="0">
                 <a:solidFill>
-                  <a:srgbClr val="0A0A0A"/>
+                  <a:srgbClr val="2338A0"/>
                 </a:solidFill>
                 <a:latin typeface="Noto Serif Display Light" pitchFamily="34" charset="0"/>
                 <a:ea typeface="Noto Serif Display Light" pitchFamily="34" charset="-122"/>
@@ -6126,7 +6206,7 @@
       </p:sp>
       <p:sp>
         <p:nvSpPr>
-          <p:cNvPr id="7" name="shape-6"/>
+          <p:cNvPr id="8" name="shape-7"/>
           <p:cNvSpPr/>
           <p:nvPr/>
         </p:nvSpPr>
@@ -6153,7 +6233,7 @@
       </p:sp>
       <p:sp>
         <p:nvSpPr>
-          <p:cNvPr id="8" name="shape-7"/>
+          <p:cNvPr id="9" name="shape-8"/>
           <p:cNvSpPr/>
           <p:nvPr/>
         </p:nvSpPr>
@@ -6175,7 +6255,7 @@
       </p:sp>
       <p:sp>
         <p:nvSpPr>
-          <p:cNvPr id="9" name="text-8"/>
+          <p:cNvPr id="10" name="text-9"/>
           <p:cNvSpPr txBox="1"/>
           <p:nvPr/>
         </p:nvSpPr>
@@ -6217,7 +6297,7 @@
       </p:sp>
       <p:sp>
         <p:nvSpPr>
-          <p:cNvPr id="10" name="text-9"/>
+          <p:cNvPr id="11" name="text-10"/>
           <p:cNvSpPr txBox="1"/>
           <p:nvPr/>
         </p:nvSpPr>
@@ -6259,7 +6339,7 @@
       </p:sp>
       <p:sp>
         <p:nvSpPr>
-          <p:cNvPr id="11" name="text-10"/>
+          <p:cNvPr id="12" name="text-11"/>
           <p:cNvSpPr txBox="1"/>
           <p:nvPr/>
         </p:nvSpPr>
@@ -6301,7 +6381,7 @@
       </p:sp>
       <p:sp>
         <p:nvSpPr>
-          <p:cNvPr id="12" name="shape-11"/>
+          <p:cNvPr id="13" name="shape-12"/>
           <p:cNvSpPr/>
           <p:nvPr/>
         </p:nvSpPr>
@@ -6316,14 +6396,14 @@
             </a:avLst>
           </a:prstGeom>
           <a:solidFill>
-            <a:srgbClr val="0A0A0A"/>
+            <a:srgbClr val="2338A0"/>
           </a:solidFill>
           <a:ln/>
         </p:spPr>
       </p:sp>
       <p:sp>
         <p:nvSpPr>
-          <p:cNvPr id="13" name="shape-12"/>
+          <p:cNvPr id="14" name="shape-13"/>
           <p:cNvSpPr/>
           <p:nvPr/>
         </p:nvSpPr>
@@ -6340,7 +6420,7 @@
           </a:solidFill>
           <a:ln w="12700">
             <a:solidFill>
-              <a:srgbClr val="0A0A0A"/>
+              <a:srgbClr val="2338A0"/>
             </a:solidFill>
             <a:prstDash val="solid"/>
           </a:ln>
@@ -6348,7 +6428,7 @@
       </p:sp>
       <p:pic>
         <p:nvPicPr>
-          <p:cNvPr id="14" name="svg-13" descr="preencoded.png">    </p:cNvPr>
+          <p:cNvPr id="15" name="svg-14" descr="preencoded.png">    </p:cNvPr>
           <p:cNvPicPr>
             <a:picLocks noChangeAspect="1"/>
           </p:cNvPicPr>
@@ -6372,7 +6452,7 @@
       </p:pic>
       <p:sp>
         <p:nvSpPr>
-          <p:cNvPr id="15" name="text-14"/>
+          <p:cNvPr id="16" name="text-15"/>
           <p:cNvSpPr txBox="1"/>
           <p:nvPr/>
         </p:nvSpPr>
@@ -6414,7 +6494,7 @@
       </p:sp>
       <p:pic>
         <p:nvPicPr>
-          <p:cNvPr id="16" name="svg-15" descr="preencoded.png">    </p:cNvPr>
+          <p:cNvPr id="17" name="svg-16" descr="preencoded.png">    </p:cNvPr>
           <p:cNvPicPr>
             <a:picLocks noChangeAspect="1"/>
           </p:cNvPicPr>
@@ -6438,7 +6518,7 @@
       </p:pic>
       <p:sp>
         <p:nvSpPr>
-          <p:cNvPr id="17" name="text-16"/>
+          <p:cNvPr id="18" name="text-17"/>
           <p:cNvSpPr txBox="1"/>
           <p:nvPr/>
         </p:nvSpPr>
@@ -6480,7 +6560,7 @@
       </p:sp>
       <p:sp>
         <p:nvSpPr>
-          <p:cNvPr id="18" name="text-17"/>
+          <p:cNvPr id="19" name="text-18"/>
           <p:cNvSpPr txBox="1"/>
           <p:nvPr/>
         </p:nvSpPr>
@@ -6522,7 +6602,7 @@
       </p:sp>
       <p:sp>
         <p:nvSpPr>
-          <p:cNvPr id="19" name="text-18"/>
+          <p:cNvPr id="20" name="text-19"/>
           <p:cNvSpPr txBox="1"/>
           <p:nvPr/>
         </p:nvSpPr>
@@ -6564,7 +6644,7 @@
       </p:sp>
       <p:sp>
         <p:nvSpPr>
-          <p:cNvPr id="20" name="text-19"/>
+          <p:cNvPr id="21" name="text-20"/>
           <p:cNvSpPr txBox="1"/>
           <p:nvPr/>
         </p:nvSpPr>
@@ -6606,7 +6686,7 @@
       </p:sp>
       <p:sp>
         <p:nvSpPr>
-          <p:cNvPr id="21" name="shape-20"/>
+          <p:cNvPr id="22" name="shape-21"/>
           <p:cNvSpPr/>
           <p:nvPr/>
         </p:nvSpPr>
@@ -6628,7 +6708,7 @@
       </p:sp>
       <p:sp>
         <p:nvSpPr>
-          <p:cNvPr id="22" name="text-21"/>
+          <p:cNvPr id="23" name="text-22"/>
           <p:cNvSpPr txBox="1"/>
           <p:nvPr/>
         </p:nvSpPr>
@@ -6670,7 +6750,7 @@
       </p:sp>
       <p:pic>
         <p:nvPicPr>
-          <p:cNvPr id="23" name="svg-22" descr="preencoded.png">    </p:cNvPr>
+          <p:cNvPr id="24" name="svg-23" descr="preencoded.png">    </p:cNvPr>
           <p:cNvPicPr>
             <a:picLocks noChangeAspect="1"/>
           </p:cNvPicPr>
@@ -6694,7 +6774,7 @@
       </p:pic>
       <p:sp>
         <p:nvSpPr>
-          <p:cNvPr id="24" name="shape-23"/>
+          <p:cNvPr id="25" name="shape-24"/>
           <p:cNvSpPr/>
           <p:nvPr/>
         </p:nvSpPr>
@@ -6721,7 +6801,7 @@
       </p:sp>
       <p:sp>
         <p:nvSpPr>
-          <p:cNvPr id="25" name="shape-24"/>
+          <p:cNvPr id="26" name="shape-25"/>
           <p:cNvSpPr/>
           <p:nvPr/>
         </p:nvSpPr>
@@ -6743,7 +6823,7 @@
       </p:sp>
       <p:pic>
         <p:nvPicPr>
-          <p:cNvPr id="26" name="img-25" descr="preencoded.png">    </p:cNvPr>
+          <p:cNvPr id="27" name="img-26" descr="preencoded.png">    </p:cNvPr>
           <p:cNvPicPr>
             <a:picLocks noChangeAspect="1"/>
           </p:cNvPicPr>
@@ -6767,7 +6847,7 @@
       </p:pic>
       <p:sp>
         <p:nvSpPr>
-          <p:cNvPr id="27" name="text-26"/>
+          <p:cNvPr id="28" name="text-27"/>
           <p:cNvSpPr txBox="1"/>
           <p:nvPr/>
         </p:nvSpPr>
@@ -6809,7 +6889,7 @@
       </p:sp>
       <p:sp>
         <p:nvSpPr>
-          <p:cNvPr id="28" name="text-27"/>
+          <p:cNvPr id="29" name="text-28"/>
           <p:cNvSpPr txBox="1"/>
           <p:nvPr/>
         </p:nvSpPr>
@@ -6909,7 +6989,7 @@
           </a:solidFill>
           <a:ln w="12700">
             <a:solidFill>
-              <a:srgbClr val="0A0A0A"/>
+              <a:srgbClr val="2F7A33"/>
             </a:solidFill>
             <a:prstDash val="solid"/>
           </a:ln>
@@ -6969,7 +7049,7 @@
             <a:r>
               <a:rPr lang="en-US" sz="1000" spc="140" kern="0" dirty="0">
                 <a:solidFill>
-                  <a:srgbClr val="0A0A0A"/>
+                  <a:srgbClr val="2F7A33"/>
                 </a:solidFill>
                 <a:latin typeface="IBM Plex Mono" pitchFamily="34" charset="0"/>
                 <a:ea typeface="IBM Plex Mono" pitchFamily="34" charset="-122"/>
@@ -7025,7 +7105,27 @@
       </p:sp>
       <p:sp>
         <p:nvSpPr>
-          <p:cNvPr id="6" name="text-5"/>
+          <p:cNvPr id="6" name="shape-5"/>
+          <p:cNvSpPr/>
+          <p:nvPr/>
+        </p:nvSpPr>
+        <p:spPr>
+          <a:xfrm>
+            <a:off x="0" y="0"/>
+            <a:ext cx="6858000" cy="88900"/>
+          </a:xfrm>
+          <a:prstGeom prst="rect">
+            <a:avLst/>
+          </a:prstGeom>
+          <a:solidFill>
+            <a:srgbClr val="2F7A33"/>
+          </a:solidFill>
+          <a:ln/>
+        </p:spPr>
+      </p:sp>
+      <p:sp>
+        <p:nvSpPr>
+          <p:cNvPr id="7" name="text-6"/>
           <p:cNvSpPr txBox="1"/>
           <p:nvPr/>
         </p:nvSpPr>
@@ -7070,7 +7170,7 @@
             <a:r>
               <a:rPr lang="en-US" sz="5200" i="1" spc="-100" kern="0" dirty="0">
                 <a:solidFill>
-                  <a:srgbClr val="0A0A0A"/>
+                  <a:srgbClr val="2F7A33"/>
                 </a:solidFill>
                 <a:latin typeface="Noto Serif Display Light" pitchFamily="34" charset="0"/>
                 <a:ea typeface="Noto Serif Display Light" pitchFamily="34" charset="-122"/>
@@ -7084,7 +7184,7 @@
       </p:sp>
       <p:sp>
         <p:nvSpPr>
-          <p:cNvPr id="7" name="shape-6"/>
+          <p:cNvPr id="8" name="shape-7"/>
           <p:cNvSpPr/>
           <p:nvPr/>
         </p:nvSpPr>
@@ -7111,7 +7211,7 @@
       </p:sp>
       <p:sp>
         <p:nvSpPr>
-          <p:cNvPr id="8" name="shape-7"/>
+          <p:cNvPr id="9" name="shape-8"/>
           <p:cNvSpPr/>
           <p:nvPr/>
         </p:nvSpPr>
@@ -7133,7 +7233,7 @@
       </p:sp>
       <p:sp>
         <p:nvSpPr>
-          <p:cNvPr id="9" name="text-8"/>
+          <p:cNvPr id="10" name="text-9"/>
           <p:cNvSpPr txBox="1"/>
           <p:nvPr/>
         </p:nvSpPr>
@@ -7175,7 +7275,7 @@
       </p:sp>
       <p:sp>
         <p:nvSpPr>
-          <p:cNvPr id="10" name="text-9"/>
+          <p:cNvPr id="11" name="text-10"/>
           <p:cNvSpPr txBox="1"/>
           <p:nvPr/>
         </p:nvSpPr>
@@ -7217,7 +7317,7 @@
       </p:sp>
       <p:sp>
         <p:nvSpPr>
-          <p:cNvPr id="11" name="text-10"/>
+          <p:cNvPr id="12" name="text-11"/>
           <p:cNvSpPr txBox="1"/>
           <p:nvPr/>
         </p:nvSpPr>
@@ -7259,7 +7359,7 @@
       </p:sp>
       <p:sp>
         <p:nvSpPr>
-          <p:cNvPr id="12" name="shape-11"/>
+          <p:cNvPr id="13" name="shape-12"/>
           <p:cNvSpPr/>
           <p:nvPr/>
         </p:nvSpPr>
@@ -7274,14 +7374,14 @@
             </a:avLst>
           </a:prstGeom>
           <a:solidFill>
-            <a:srgbClr val="0A0A0A"/>
+            <a:srgbClr val="2F7A33"/>
           </a:solidFill>
           <a:ln/>
         </p:spPr>
       </p:sp>
       <p:sp>
         <p:nvSpPr>
-          <p:cNvPr id="13" name="shape-12"/>
+          <p:cNvPr id="14" name="shape-13"/>
           <p:cNvSpPr/>
           <p:nvPr/>
         </p:nvSpPr>
@@ -7298,7 +7398,7 @@
           </a:solidFill>
           <a:ln w="12700">
             <a:solidFill>
-              <a:srgbClr val="0A0A0A"/>
+              <a:srgbClr val="2F7A33"/>
             </a:solidFill>
             <a:prstDash val="solid"/>
           </a:ln>
@@ -7306,7 +7406,7 @@
       </p:sp>
       <p:pic>
         <p:nvPicPr>
-          <p:cNvPr id="14" name="svg-13" descr="preencoded.png">    </p:cNvPr>
+          <p:cNvPr id="15" name="svg-14" descr="preencoded.png">    </p:cNvPr>
           <p:cNvPicPr>
             <a:picLocks noChangeAspect="1"/>
           </p:cNvPicPr>
@@ -7330,7 +7430,7 @@
       </p:pic>
       <p:sp>
         <p:nvSpPr>
-          <p:cNvPr id="15" name="text-14"/>
+          <p:cNvPr id="16" name="text-15"/>
           <p:cNvSpPr txBox="1"/>
           <p:nvPr/>
         </p:nvSpPr>
@@ -7372,7 +7472,7 @@
       </p:sp>
       <p:pic>
         <p:nvPicPr>
-          <p:cNvPr id="16" name="svg-15" descr="preencoded.png">    </p:cNvPr>
+          <p:cNvPr id="17" name="svg-16" descr="preencoded.png">    </p:cNvPr>
           <p:cNvPicPr>
             <a:picLocks noChangeAspect="1"/>
           </p:cNvPicPr>
@@ -7396,7 +7496,7 @@
       </p:pic>
       <p:sp>
         <p:nvSpPr>
-          <p:cNvPr id="17" name="text-16"/>
+          <p:cNvPr id="18" name="text-17"/>
           <p:cNvSpPr txBox="1"/>
           <p:nvPr/>
         </p:nvSpPr>
@@ -7438,7 +7538,7 @@
       </p:sp>
       <p:sp>
         <p:nvSpPr>
-          <p:cNvPr id="18" name="text-17"/>
+          <p:cNvPr id="19" name="text-18"/>
           <p:cNvSpPr txBox="1"/>
           <p:nvPr/>
         </p:nvSpPr>
@@ -7480,7 +7580,7 @@
       </p:sp>
       <p:sp>
         <p:nvSpPr>
-          <p:cNvPr id="19" name="text-18"/>
+          <p:cNvPr id="20" name="text-19"/>
           <p:cNvSpPr txBox="1"/>
           <p:nvPr/>
         </p:nvSpPr>
@@ -7522,7 +7622,7 @@
       </p:sp>
       <p:sp>
         <p:nvSpPr>
-          <p:cNvPr id="20" name="text-19"/>
+          <p:cNvPr id="21" name="text-20"/>
           <p:cNvSpPr txBox="1"/>
           <p:nvPr/>
         </p:nvSpPr>
@@ -7564,7 +7664,7 @@
       </p:sp>
       <p:sp>
         <p:nvSpPr>
-          <p:cNvPr id="21" name="shape-20"/>
+          <p:cNvPr id="22" name="shape-21"/>
           <p:cNvSpPr/>
           <p:nvPr/>
         </p:nvSpPr>
@@ -7586,7 +7686,7 @@
       </p:sp>
       <p:sp>
         <p:nvSpPr>
-          <p:cNvPr id="22" name="text-21"/>
+          <p:cNvPr id="23" name="text-22"/>
           <p:cNvSpPr txBox="1"/>
           <p:nvPr/>
         </p:nvSpPr>
@@ -7628,7 +7728,7 @@
       </p:sp>
       <p:pic>
         <p:nvPicPr>
-          <p:cNvPr id="23" name="svg-22" descr="preencoded.png">    </p:cNvPr>
+          <p:cNvPr id="24" name="svg-23" descr="preencoded.png">    </p:cNvPr>
           <p:cNvPicPr>
             <a:picLocks noChangeAspect="1"/>
           </p:cNvPicPr>
@@ -7652,7 +7752,7 @@
       </p:pic>
       <p:sp>
         <p:nvSpPr>
-          <p:cNvPr id="24" name="shape-23"/>
+          <p:cNvPr id="25" name="shape-24"/>
           <p:cNvSpPr/>
           <p:nvPr/>
         </p:nvSpPr>
@@ -7679,7 +7779,7 @@
       </p:sp>
       <p:sp>
         <p:nvSpPr>
-          <p:cNvPr id="25" name="shape-24"/>
+          <p:cNvPr id="26" name="shape-25"/>
           <p:cNvSpPr/>
           <p:nvPr/>
         </p:nvSpPr>
@@ -7701,7 +7801,7 @@
       </p:sp>
       <p:pic>
         <p:nvPicPr>
-          <p:cNvPr id="26" name="img-25" descr="preencoded.png">    </p:cNvPr>
+          <p:cNvPr id="27" name="img-26" descr="preencoded.png">    </p:cNvPr>
           <p:cNvPicPr>
             <a:picLocks noChangeAspect="1"/>
           </p:cNvPicPr>
@@ -7725,7 +7825,7 @@
       </p:pic>
       <p:sp>
         <p:nvSpPr>
-          <p:cNvPr id="27" name="text-26"/>
+          <p:cNvPr id="28" name="text-27"/>
           <p:cNvSpPr txBox="1"/>
           <p:nvPr/>
         </p:nvSpPr>
@@ -7767,7 +7867,7 @@
       </p:sp>
       <p:sp>
         <p:nvSpPr>
-          <p:cNvPr id="28" name="text-27"/>
+          <p:cNvPr id="29" name="text-28"/>
           <p:cNvSpPr txBox="1"/>
           <p:nvPr/>
         </p:nvSpPr>

--- a/social/pptx/kz-scientists.pptx
+++ b/social/pptx/kz-scientists.pptx
@@ -3037,7 +3037,7 @@
         </p:nvSpPr>
         <p:spPr>
           <a:xfrm rot="-90000">
-            <a:off x="458143" y="2286000"/>
+            <a:off x="458143" y="1968500"/>
             <a:ext cx="2311400" cy="1117600"/>
           </a:xfrm>
           <a:prstGeom prst="roundRect">
@@ -3059,7 +3059,7 @@
         </p:nvSpPr>
         <p:spPr>
           <a:xfrm rot="-90000">
-            <a:off x="588783" y="2425819"/>
+            <a:off x="588783" y="2108319"/>
             <a:ext cx="2153920" cy="146050"/>
           </a:xfrm>
           <a:prstGeom prst="rect">
@@ -3101,7 +3101,7 @@
         </p:nvSpPr>
         <p:spPr>
           <a:xfrm rot="-90000">
-            <a:off x="598009" y="2609848"/>
+            <a:off x="598009" y="2292348"/>
             <a:ext cx="2153920" cy="482600"/>
           </a:xfrm>
           <a:prstGeom prst="rect">
@@ -3143,7 +3143,7 @@
         </p:nvSpPr>
         <p:spPr>
           <a:xfrm rot="-90000">
-            <a:off x="607234" y="3130427"/>
+            <a:off x="607234" y="2812927"/>
             <a:ext cx="2153920" cy="146050"/>
           </a:xfrm>
           <a:prstGeom prst="rect">
@@ -3185,7 +3185,7 @@
         </p:nvSpPr>
         <p:spPr>
           <a:xfrm rot="60000">
-            <a:off x="2871589" y="2286000"/>
+            <a:off x="2871589" y="1968500"/>
             <a:ext cx="1714500" cy="1117600"/>
           </a:xfrm>
           <a:prstGeom prst="roundRect">
@@ -3207,7 +3207,7 @@
         </p:nvSpPr>
         <p:spPr>
           <a:xfrm rot="60000">
-            <a:off x="3017329" y="2425753"/>
+            <a:off x="3017329" y="2108253"/>
             <a:ext cx="1521206" cy="146050"/>
           </a:xfrm>
           <a:prstGeom prst="rect">
@@ -3249,7 +3249,7 @@
         </p:nvSpPr>
         <p:spPr>
           <a:xfrm rot="60000">
-            <a:off x="3011178" y="2609849"/>
+            <a:off x="3011178" y="2292349"/>
             <a:ext cx="1521206" cy="482600"/>
           </a:xfrm>
           <a:prstGeom prst="rect">
@@ -3277,7 +3277,7 @@
                 <a:ea typeface="Noto Serif Display Light" pitchFamily="34" charset="-122"/>
                 <a:cs typeface="Noto Serif Display Light" pitchFamily="34" charset="-120"/>
               </a:rPr>
-              <a:t>6.0</a:t>
+              <a:t>7.0</a:t>
             </a:r>
             <a:endParaRPr lang="en-US" sz="3800" dirty="0"/>
           </a:p>
@@ -3291,7 +3291,7 @@
         </p:nvSpPr>
         <p:spPr>
           <a:xfrm rot="60000">
-            <a:off x="3005028" y="3130495"/>
+            <a:off x="3005028" y="2812995"/>
             <a:ext cx="1521206" cy="146050"/>
           </a:xfrm>
           <a:prstGeom prst="rect">
@@ -3333,7 +3333,7 @@
         </p:nvSpPr>
         <p:spPr>
           <a:xfrm rot="-36000">
-            <a:off x="4686746" y="2286000"/>
+            <a:off x="4686746" y="1968500"/>
             <a:ext cx="1714500" cy="1117600"/>
           </a:xfrm>
           <a:prstGeom prst="roundRect">
@@ -3355,7 +3355,7 @@
         </p:nvSpPr>
         <p:spPr>
           <a:xfrm rot="-36000">
-            <a:off x="4822822" y="2425719"/>
+            <a:off x="4822822" y="2108219"/>
             <a:ext cx="1521206" cy="146050"/>
           </a:xfrm>
           <a:prstGeom prst="rect">
@@ -3397,7 +3397,7 @@
         </p:nvSpPr>
         <p:spPr>
           <a:xfrm rot="-36000">
-            <a:off x="4826513" y="2609850"/>
+            <a:off x="4826513" y="2292350"/>
             <a:ext cx="1521206" cy="482600"/>
           </a:xfrm>
           <a:prstGeom prst="rect">
@@ -3439,7 +3439,7 @@
         </p:nvSpPr>
         <p:spPr>
           <a:xfrm rot="-36000">
-            <a:off x="4830203" y="3130530"/>
+            <a:off x="4830203" y="2813030"/>
             <a:ext cx="1521206" cy="146050"/>
           </a:xfrm>
           <a:prstGeom prst="rect">
@@ -3475,86 +3475,19 @@
       </p:sp>
       <p:sp>
         <p:nvSpPr>
-          <p:cNvPr id="20" name="text-19"/>
-          <p:cNvSpPr txBox="1"/>
+          <p:cNvPr id="20" name="shape-19"/>
+          <p:cNvSpPr/>
           <p:nvPr/>
         </p:nvSpPr>
         <p:spPr>
           <a:xfrm rot="-60000">
-            <a:off x="457200" y="3935710"/>
-            <a:ext cx="6300216" cy="520700"/>
-          </a:xfrm>
-          <a:prstGeom prst="rect">
-            <a:avLst/>
-          </a:prstGeom>
-          <a:noFill/>
-          <a:ln/>
-        </p:spPr>
-        <p:txBody>
-          <a:bodyPr wrap="square" lIns="0" tIns="0" rIns="0" bIns="0" rtlCol="0" anchor="t"/>
-          <a:lstStyle/>
-          <a:p>
-            <a:pPr algn="l" indent="0" marL="0">
-              <a:lnSpc>
-                <a:spcPts val="2040"/>
-              </a:lnSpc>
-              <a:buNone/>
-            </a:pPr>
-            <a:r>
-              <a:rPr lang="en-US" sz="1700" i="1" dirty="0">
-                <a:solidFill>
-                  <a:srgbClr val="0A0A0A"/>
-                </a:solidFill>
-                <a:latin typeface="Noto Serif Display Light" pitchFamily="34" charset="0"/>
-                <a:ea typeface="Noto Serif Display Light" pitchFamily="34" charset="-122"/>
-                <a:cs typeface="Noto Serif Display Light" pitchFamily="34" charset="-120"/>
-              </a:rPr>
-              <a:t>Ауыл мектебінде ағылшын тілін үйрену қиын болар еді, бірақ математикасы мінсіз.</a:t>
-            </a:r>
-            <a:endParaRPr lang="en-US" sz="1700" dirty="0"/>
-          </a:p>
-        </p:txBody>
-      </p:sp>
-      <p:sp>
-        <p:nvSpPr>
-          <p:cNvPr id="21" name="shape-20"/>
-          <p:cNvSpPr/>
-          <p:nvPr/>
-        </p:nvSpPr>
-        <p:spPr>
-          <a:xfrm rot="48000">
-            <a:off x="457200" y="5208389"/>
-            <a:ext cx="5943600" cy="1600200"/>
-          </a:xfrm>
-          <a:prstGeom prst="rect">
-            <a:avLst/>
-          </a:prstGeom>
-          <a:solidFill>
-            <a:srgbClr val="FFFFFF"/>
-          </a:solidFill>
-          <a:ln/>
-          <a:effectLst>
-            <a:outerShdw sx="100000" sy="100000" kx="0" ky="0" algn="bl" rotWithShape="0" blurRad="177800" dist="76200" dir="5400000">
-              <a:srgbClr val="000000">
-                <a:alpha val="22000"/>
-              </a:srgbClr>
-            </a:outerShdw>
-          </a:effectLst>
-        </p:spPr>
-      </p:sp>
-      <p:sp>
-        <p:nvSpPr>
-          <p:cNvPr id="22" name="shape-21"/>
-          <p:cNvSpPr/>
-          <p:nvPr/>
-        </p:nvSpPr>
-        <p:spPr>
-          <a:xfrm rot="-432000">
-            <a:off x="5712179" y="5052035"/>
-            <a:ext cx="533400" cy="533400"/>
-          </a:xfrm>
-          <a:prstGeom prst="ellipse">
-            <a:avLst/>
+            <a:off x="458440" y="3302000"/>
+            <a:ext cx="5435600" cy="419100"/>
+          </a:xfrm>
+          <a:prstGeom prst="roundRect">
+            <a:avLst>
+              <a:gd name="adj" fmla="val 50000"/>
+            </a:avLst>
           </a:prstGeom>
           <a:solidFill>
             <a:srgbClr val="FAF8F3"/>
@@ -3567,9 +3500,187 @@
           </a:ln>
         </p:spPr>
       </p:sp>
+      <p:sp>
+        <p:nvSpPr>
+          <p:cNvPr id="21" name="text-20"/>
+          <p:cNvSpPr txBox="1"/>
+          <p:nvPr/>
+        </p:nvSpPr>
+        <p:spPr>
+          <a:xfrm rot="-60000">
+            <a:off x="622176" y="3493663"/>
+            <a:ext cx="646176" cy="146050"/>
+          </a:xfrm>
+          <a:prstGeom prst="rect">
+            <a:avLst/>
+          </a:prstGeom>
+          <a:noFill/>
+          <a:ln/>
+        </p:spPr>
+        <p:txBody>
+          <a:bodyPr wrap="square" lIns="0" tIns="0" rIns="0" bIns="0" rtlCol="0" anchor="t"/>
+          <a:lstStyle/>
+          <a:p>
+            <a:pPr algn="l" indent="0" marL="0">
+              <a:lnSpc>
+                <a:spcPts val="1080"/>
+              </a:lnSpc>
+              <a:buNone/>
+            </a:pPr>
+            <a:r>
+              <a:rPr lang="en-US" sz="900" spc="140" kern="0" dirty="0">
+                <a:solidFill>
+                  <a:srgbClr val="2338A0"/>
+                </a:solidFill>
+                <a:latin typeface="IBM Plex Mono" pitchFamily="34" charset="0"/>
+                <a:ea typeface="IBM Plex Mono" pitchFamily="34" charset="-122"/>
+                <a:cs typeface="IBM Plex Mono" pitchFamily="34" charset="-120"/>
+              </a:rPr>
+              <a:t>МЕКТЕБІ</a:t>
+            </a:r>
+            <a:endParaRPr lang="en-US" sz="900" dirty="0"/>
+          </a:p>
+        </p:txBody>
+      </p:sp>
+      <p:sp>
+        <p:nvSpPr>
+          <p:cNvPr id="22" name="text-21"/>
+          <p:cNvSpPr txBox="1"/>
+          <p:nvPr/>
+        </p:nvSpPr>
+        <p:spPr>
+          <a:xfrm rot="-60000">
+            <a:off x="1343466" y="3397296"/>
+            <a:ext cx="4651121" cy="215900"/>
+          </a:xfrm>
+          <a:prstGeom prst="rect">
+            <a:avLst/>
+          </a:prstGeom>
+          <a:noFill/>
+          <a:ln/>
+        </p:spPr>
+        <p:txBody>
+          <a:bodyPr wrap="square" lIns="0" tIns="0" rIns="0" bIns="0" rtlCol="0" anchor="t"/>
+          <a:lstStyle/>
+          <a:p>
+            <a:pPr algn="l" indent="0" marL="0">
+              <a:lnSpc>
+                <a:spcPts val="1560"/>
+              </a:lnSpc>
+              <a:buNone/>
+            </a:pPr>
+            <a:r>
+              <a:rPr lang="en-US" sz="1300" b="1" dirty="0">
+                <a:solidFill>
+                  <a:srgbClr val="0A0A0A"/>
+                </a:solidFill>
+                <a:latin typeface="Geist" pitchFamily="34" charset="0"/>
+                <a:ea typeface="Geist" pitchFamily="34" charset="-122"/>
+                <a:cs typeface="Geist" pitchFamily="34" charset="-120"/>
+              </a:rPr>
+              <a:t>Ауылдан грантпен iQanat, кейін Алматыдағы РФМШ</a:t>
+            </a:r>
+            <a:endParaRPr lang="en-US" sz="1300" dirty="0"/>
+          </a:p>
+        </p:txBody>
+      </p:sp>
+      <p:sp>
+        <p:nvSpPr>
+          <p:cNvPr id="23" name="text-22"/>
+          <p:cNvSpPr txBox="1"/>
+          <p:nvPr/>
+        </p:nvSpPr>
+        <p:spPr>
+          <a:xfrm rot="-60000">
+            <a:off x="457200" y="3936305"/>
+            <a:ext cx="6300216" cy="488950"/>
+          </a:xfrm>
+          <a:prstGeom prst="rect">
+            <a:avLst/>
+          </a:prstGeom>
+          <a:noFill/>
+          <a:ln/>
+        </p:spPr>
+        <p:txBody>
+          <a:bodyPr wrap="square" lIns="0" tIns="0" rIns="0" bIns="0" rtlCol="0" anchor="t"/>
+          <a:lstStyle/>
+          <a:p>
+            <a:pPr algn="l" indent="0" marL="0">
+              <a:lnSpc>
+                <a:spcPts val="1920"/>
+              </a:lnSpc>
+              <a:buNone/>
+            </a:pPr>
+            <a:r>
+              <a:rPr lang="en-US" sz="1600" i="1" dirty="0">
+                <a:solidFill>
+                  <a:srgbClr val="0A0A0A"/>
+                </a:solidFill>
+                <a:latin typeface="Noto Serif Display Light" pitchFamily="34" charset="0"/>
+                <a:ea typeface="Noto Serif Display Light" pitchFamily="34" charset="-122"/>
+                <a:cs typeface="Noto Serif Display Light" pitchFamily="34" charset="-120"/>
+              </a:rPr>
+              <a:t>Ауыл мектебінде ағылшын тілін үйрену қиын болар еді, бірақ математикасы мінсіз.</a:t>
+            </a:r>
+            <a:endParaRPr lang="en-US" sz="1600" dirty="0"/>
+          </a:p>
+        </p:txBody>
+      </p:sp>
+      <p:sp>
+        <p:nvSpPr>
+          <p:cNvPr id="24" name="shape-23"/>
+          <p:cNvSpPr/>
+          <p:nvPr/>
+        </p:nvSpPr>
+        <p:spPr>
+          <a:xfrm rot="48000">
+            <a:off x="457200" y="4763294"/>
+            <a:ext cx="5943600" cy="2247900"/>
+          </a:xfrm>
+          <a:prstGeom prst="rect">
+            <a:avLst/>
+          </a:prstGeom>
+          <a:solidFill>
+            <a:srgbClr val="FFFFFF"/>
+          </a:solidFill>
+          <a:ln/>
+          <a:effectLst>
+            <a:outerShdw sx="100000" sy="100000" kx="0" ky="0" algn="bl" rotWithShape="0" blurRad="177800" dist="76200" dir="5400000">
+              <a:srgbClr val="000000">
+                <a:alpha val="22000"/>
+              </a:srgbClr>
+            </a:outerShdw>
+          </a:effectLst>
+        </p:spPr>
+      </p:sp>
+      <p:sp>
+        <p:nvSpPr>
+          <p:cNvPr id="25" name="shape-24"/>
+          <p:cNvSpPr/>
+          <p:nvPr/>
+        </p:nvSpPr>
+        <p:spPr>
+          <a:xfrm rot="-432000">
+            <a:off x="5716692" y="4607566"/>
+            <a:ext cx="533400" cy="533400"/>
+          </a:xfrm>
+          <a:prstGeom prst="ellipse">
+            <a:avLst/>
+          </a:prstGeom>
+          <a:solidFill>
+            <a:srgbClr val="FAF8F3"/>
+          </a:solidFill>
+          <a:ln w="12700">
+            <a:solidFill>
+              <a:srgbClr val="2338A0"/>
+            </a:solidFill>
+            <a:prstDash val="solid"/>
+          </a:ln>
+        </p:spPr>
+      </p:sp>
       <p:pic>
         <p:nvPicPr>
-          <p:cNvPr id="23" name="svg-22" descr="preencoded.png">    </p:cNvPr>
+          <p:cNvPr id="26" name="svg-25" descr="preencoded.png">    </p:cNvPr>
           <p:cNvPicPr>
             <a:picLocks noChangeAspect="1"/>
           </p:cNvPicPr>
@@ -3583,7 +3694,7 @@
         </p:blipFill>
         <p:spPr>
           <a:xfrm rot="-432000">
-            <a:off x="5832829" y="5172685"/>
+            <a:off x="5837342" y="4728216"/>
             <a:ext cx="292100" cy="292100"/>
           </a:xfrm>
           <a:prstGeom prst="rect">
@@ -3593,14 +3704,14 @@
       </p:pic>
       <p:sp>
         <p:nvSpPr>
-          <p:cNvPr id="24" name="text-23"/>
+          <p:cNvPr id="27" name="text-26"/>
           <p:cNvSpPr txBox="1"/>
           <p:nvPr/>
         </p:nvSpPr>
         <p:spPr>
           <a:xfrm rot="48000">
-            <a:off x="680788" y="5384854"/>
-            <a:ext cx="5842508" cy="146050"/>
+            <a:off x="660257" y="4914988"/>
+            <a:ext cx="5896356" cy="146050"/>
           </a:xfrm>
           <a:prstGeom prst="rect">
             <a:avLst/>
@@ -3635,7 +3746,7 @@
       </p:sp>
       <p:pic>
         <p:nvPicPr>
-          <p:cNvPr id="25" name="svg-24" descr="preencoded.png">    </p:cNvPr>
+          <p:cNvPr id="28" name="svg-27" descr="preencoded.png">    </p:cNvPr>
           <p:cNvPicPr>
             <a:picLocks noChangeAspect="1"/>
           </p:cNvPicPr>
@@ -3649,7 +3760,7 @@
         </p:blipFill>
         <p:spPr>
           <a:xfrm rot="48000">
-            <a:off x="677723" y="5563582"/>
+            <a:off x="657194" y="5093361"/>
             <a:ext cx="190500" cy="190500"/>
           </a:xfrm>
           <a:prstGeom prst="rect">
@@ -3659,33 +3770,33 @@
       </p:pic>
       <p:sp>
         <p:nvSpPr>
-          <p:cNvPr id="26" name="text-25"/>
+          <p:cNvPr id="29" name="text-28"/>
           <p:cNvSpPr txBox="1"/>
           <p:nvPr/>
         </p:nvSpPr>
         <p:spPr>
           <a:xfrm rot="48000">
-            <a:off x="931415" y="5595710"/>
-            <a:ext cx="5505958" cy="215900"/>
-          </a:xfrm>
-          <a:prstGeom prst="rect">
-            <a:avLst/>
-          </a:prstGeom>
-          <a:noFill/>
-          <a:ln/>
-        </p:spPr>
-        <p:txBody>
-          <a:bodyPr wrap="square" lIns="0" tIns="0" rIns="0" bIns="0" rtlCol="0" anchor="t"/>
-          <a:lstStyle/>
-          <a:p>
-            <a:pPr algn="l" indent="0" marL="0">
-              <a:lnSpc>
-                <a:spcPts val="1770"/>
-              </a:lnSpc>
-              <a:buNone/>
-            </a:pPr>
-            <a:r>
-              <a:rPr lang="en-US" sz="1300" dirty="0">
+            <a:off x="903902" y="5107756"/>
+            <a:ext cx="5283835" cy="806450"/>
+          </a:xfrm>
+          <a:prstGeom prst="rect">
+            <a:avLst/>
+          </a:prstGeom>
+          <a:noFill/>
+          <a:ln/>
+        </p:spPr>
+        <p:txBody>
+          <a:bodyPr wrap="square" lIns="0" tIns="0" rIns="0" bIns="0" rtlCol="0" anchor="t"/>
+          <a:lstStyle/>
+          <a:p>
+            <a:pPr algn="l" indent="0" marL="0">
+              <a:lnSpc>
+                <a:spcPts val="1610"/>
+              </a:lnSpc>
+              <a:buNone/>
+            </a:pPr>
+            <a:r>
+              <a:rPr lang="en-US" sz="1200" dirty="0">
                 <a:solidFill>
                   <a:srgbClr val="2B2A27"/>
                 </a:solidFill>
@@ -3693,41 +3804,41 @@
                 <a:ea typeface="Geist" pitchFamily="34" charset="-122"/>
                 <a:cs typeface="Geist" pitchFamily="34" charset="-120"/>
               </a:rPr>
-              <a:t>Халықаралық математика олимпиадасы (IMO): құрмет грамотасы.</a:t>
-            </a:r>
-            <a:endParaRPr lang="en-US" sz="1300" dirty="0"/>
-          </a:p>
-        </p:txBody>
-      </p:sp>
-      <p:sp>
-        <p:nvSpPr>
-          <p:cNvPr id="27" name="text-26"/>
+              <a:t>Халықаралық физика олимпиадасы (IPhO): 10-сыныпта құрмет грамотасы, 11-сыныпта күміс. Халықаралық астрономия және астрофизика олимпиадасы: 10-сыныпта қола, 11-сыныпта алтын. «Ел мақтанышы» төсбелгісінің иегері.</a:t>
+            </a:r>
+            <a:endParaRPr lang="en-US" sz="1200" dirty="0"/>
+          </a:p>
+        </p:txBody>
+      </p:sp>
+      <p:sp>
+        <p:nvSpPr>
+          <p:cNvPr id="30" name="text-29"/>
           <p:cNvSpPr txBox="1"/>
           <p:nvPr/>
         </p:nvSpPr>
         <p:spPr>
           <a:xfrm rot="48000">
-            <a:off x="851093" y="5883524"/>
-            <a:ext cx="5654040" cy="222250"/>
-          </a:xfrm>
-          <a:prstGeom prst="rect">
-            <a:avLst/>
-          </a:prstGeom>
-          <a:noFill/>
-          <a:ln/>
-        </p:spPr>
-        <p:txBody>
-          <a:bodyPr wrap="square" lIns="0" tIns="0" rIns="0" bIns="0" rtlCol="0" anchor="t"/>
-          <a:lstStyle/>
-          <a:p>
-            <a:pPr algn="l" indent="0" marL="0">
-              <a:lnSpc>
-                <a:spcPts val="1770"/>
-              </a:lnSpc>
-              <a:buNone/>
-            </a:pPr>
-            <a:r>
-              <a:rPr lang="en-US" sz="1300" dirty="0">
+            <a:off x="819761" y="5993467"/>
+            <a:ext cx="5707888" cy="609600"/>
+          </a:xfrm>
+          <a:prstGeom prst="rect">
+            <a:avLst/>
+          </a:prstGeom>
+          <a:noFill/>
+          <a:ln/>
+        </p:spPr>
+        <p:txBody>
+          <a:bodyPr wrap="square" lIns="0" tIns="0" rIns="0" bIns="0" rtlCol="0" anchor="t"/>
+          <a:lstStyle/>
+          <a:p>
+            <a:pPr algn="l" indent="0" marL="0">
+              <a:lnSpc>
+                <a:spcPts val="1610"/>
+              </a:lnSpc>
+              <a:buNone/>
+            </a:pPr>
+            <a:r>
+              <a:rPr lang="en-US" sz="1200" dirty="0">
                 <a:solidFill>
                   <a:srgbClr val="2B2A27"/>
                 </a:solidFill>
@@ -3735,41 +3846,41 @@
                 <a:ea typeface="Geist" pitchFamily="34" charset="-122"/>
                 <a:cs typeface="Geist" pitchFamily="34" charset="-120"/>
               </a:rPr>
-              <a:t>Спутник деректерімен жоба: NASA Space Apps Challenge.</a:t>
-            </a:r>
-            <a:endParaRPr lang="en-US" sz="1300" dirty="0"/>
-          </a:p>
-        </p:txBody>
-      </p:sp>
-      <p:sp>
-        <p:nvSpPr>
-          <p:cNvPr id="28" name="text-27"/>
+              <a:t>NASA Space Apps Challenge: спутник деректерімен жоба. Зымыран моделін өз қолымен жасаған, SpaceX зымыранының бір бөлігін жетілдіру идеясын ұсынып, тәлімгерлікке шақырылған.</a:t>
+            </a:r>
+            <a:endParaRPr lang="en-US" sz="1200" dirty="0"/>
+          </a:p>
+        </p:txBody>
+      </p:sp>
+      <p:sp>
+        <p:nvSpPr>
+          <p:cNvPr id="31" name="text-30"/>
           <p:cNvSpPr txBox="1"/>
           <p:nvPr/>
         </p:nvSpPr>
         <p:spPr>
           <a:xfrm rot="48000">
-            <a:off x="845504" y="6169483"/>
-            <a:ext cx="5654040" cy="450850"/>
-          </a:xfrm>
-          <a:prstGeom prst="rect">
-            <a:avLst/>
-          </a:prstGeom>
-          <a:noFill/>
-          <a:ln/>
-        </p:spPr>
-        <p:txBody>
-          <a:bodyPr wrap="square" lIns="0" tIns="0" rIns="0" bIns="0" rtlCol="0" anchor="t"/>
-          <a:lstStyle/>
-          <a:p>
-            <a:pPr algn="l" indent="0" marL="0">
-              <a:lnSpc>
-                <a:spcPts val="1770"/>
-              </a:lnSpc>
-              <a:buNone/>
-            </a:pPr>
-            <a:r>
-              <a:rPr lang="en-US" sz="1300" b="1" dirty="0">
+            <a:off x="813349" y="6655807"/>
+            <a:ext cx="5707888" cy="203200"/>
+          </a:xfrm>
+          <a:prstGeom prst="rect">
+            <a:avLst/>
+          </a:prstGeom>
+          <a:noFill/>
+          <a:ln/>
+        </p:spPr>
+        <p:txBody>
+          <a:bodyPr wrap="square" lIns="0" tIns="0" rIns="0" bIns="0" rtlCol="0" anchor="t"/>
+          <a:lstStyle/>
+          <a:p>
+            <a:pPr algn="l" indent="0" marL="0">
+              <a:lnSpc>
+                <a:spcPts val="1610"/>
+              </a:lnSpc>
+              <a:buNone/>
+            </a:pPr>
+            <a:r>
+              <a:rPr lang="en-US" sz="1200" b="1" dirty="0">
                 <a:solidFill>
                   <a:srgbClr val="0A0A0A"/>
                 </a:solidFill>
@@ -3777,15 +3888,15 @@
                 <a:ea typeface="Geist" pitchFamily="34" charset="-122"/>
                 <a:cs typeface="Geist" pitchFamily="34" charset="-120"/>
               </a:rPr>
-              <a:t>Оқитын мамандығы: қолданбалы математика немесе аэроғарыш инженериясы.</a:t>
-            </a:r>
-            <a:endParaRPr lang="en-US" sz="1300" dirty="0"/>
-          </a:p>
-        </p:txBody>
-      </p:sp>
-      <p:sp>
-        <p:nvSpPr>
-          <p:cNvPr id="29" name="text-28"/>
+              <a:t>Оқитын мамандығы: аэроғарыш инженериясы.</a:t>
+            </a:r>
+            <a:endParaRPr lang="en-US" sz="1200" dirty="0"/>
+          </a:p>
+        </p:txBody>
+      </p:sp>
+      <p:sp>
+        <p:nvSpPr>
+          <p:cNvPr id="32" name="text-31"/>
           <p:cNvSpPr txBox="1"/>
           <p:nvPr/>
         </p:nvSpPr>
@@ -3827,7 +3938,7 @@
       </p:sp>
       <p:sp>
         <p:nvSpPr>
-          <p:cNvPr id="30" name="shape-29"/>
+          <p:cNvPr id="33" name="shape-32"/>
           <p:cNvSpPr/>
           <p:nvPr/>
         </p:nvSpPr>
@@ -3849,7 +3960,7 @@
       </p:sp>
       <p:sp>
         <p:nvSpPr>
-          <p:cNvPr id="31" name="text-30"/>
+          <p:cNvPr id="34" name="text-33"/>
           <p:cNvSpPr txBox="1"/>
           <p:nvPr/>
         </p:nvSpPr>
@@ -3891,7 +4002,7 @@
       </p:sp>
       <p:pic>
         <p:nvPicPr>
-          <p:cNvPr id="32" name="svg-31" descr="preencoded.png">    </p:cNvPr>
+          <p:cNvPr id="35" name="svg-34" descr="preencoded.png">    </p:cNvPr>
           <p:cNvPicPr>
             <a:picLocks noChangeAspect="1"/>
           </p:cNvPicPr>
@@ -3915,7 +4026,7 @@
       </p:pic>
       <p:sp>
         <p:nvSpPr>
-          <p:cNvPr id="33" name="text-32"/>
+          <p:cNvPr id="36" name="text-35"/>
           <p:cNvSpPr txBox="1"/>
           <p:nvPr/>
         </p:nvSpPr>
@@ -4210,14 +4321,140 @@
       </p:sp>
       <p:sp>
         <p:nvSpPr>
-          <p:cNvPr id="8" name="shape-7"/>
+          <p:cNvPr id="8" name="text-7"/>
+          <p:cNvSpPr txBox="1"/>
+          <p:nvPr/>
+        </p:nvSpPr>
+        <p:spPr>
+          <a:xfrm>
+            <a:off x="457200" y="2281833"/>
+            <a:ext cx="3769360" cy="146050"/>
+          </a:xfrm>
+          <a:prstGeom prst="rect">
+            <a:avLst/>
+          </a:prstGeom>
+          <a:noFill/>
+          <a:ln/>
+        </p:spPr>
+        <p:txBody>
+          <a:bodyPr wrap="square" lIns="0" tIns="0" rIns="0" bIns="0" rtlCol="0" anchor="t"/>
+          <a:lstStyle/>
+          <a:p>
+            <a:pPr algn="l" indent="0" marL="0">
+              <a:lnSpc>
+                <a:spcPts val="1080"/>
+              </a:lnSpc>
+              <a:buNone/>
+            </a:pPr>
+            <a:r>
+              <a:rPr lang="en-US" sz="900" spc="140" kern="0" dirty="0">
+                <a:solidFill>
+                  <a:srgbClr val="2F7A33"/>
+                </a:solidFill>
+                <a:latin typeface="IBM Plex Mono" pitchFamily="34" charset="0"/>
+                <a:ea typeface="IBM Plex Mono" pitchFamily="34" charset="-122"/>
+                <a:cs typeface="IBM Plex Mono" pitchFamily="34" charset="-120"/>
+              </a:rPr>
+              <a:t>ТУҒАН ЖЕРІ</a:t>
+            </a:r>
+            <a:endParaRPr lang="en-US" sz="900" dirty="0"/>
+          </a:p>
+        </p:txBody>
+      </p:sp>
+      <p:sp>
+        <p:nvSpPr>
+          <p:cNvPr id="9" name="text-8"/>
+          <p:cNvSpPr txBox="1"/>
+          <p:nvPr/>
+        </p:nvSpPr>
+        <p:spPr>
+          <a:xfrm>
+            <a:off x="457200" y="2465338"/>
+            <a:ext cx="3769360" cy="215900"/>
+          </a:xfrm>
+          <a:prstGeom prst="rect">
+            <a:avLst/>
+          </a:prstGeom>
+          <a:noFill/>
+          <a:ln/>
+        </p:spPr>
+        <p:txBody>
+          <a:bodyPr wrap="square" lIns="0" tIns="0" rIns="0" bIns="0" rtlCol="0" anchor="t"/>
+          <a:lstStyle/>
+          <a:p>
+            <a:pPr algn="l" indent="0" marL="0">
+              <a:lnSpc>
+                <a:spcPts val="1690"/>
+              </a:lnSpc>
+              <a:buNone/>
+            </a:pPr>
+            <a:r>
+              <a:rPr lang="en-US" sz="1300" b="1" dirty="0">
+                <a:solidFill>
+                  <a:srgbClr val="0A0A0A"/>
+                </a:solidFill>
+                <a:latin typeface="Geist" pitchFamily="34" charset="0"/>
+                <a:ea typeface="Geist" pitchFamily="34" charset="-122"/>
+                <a:cs typeface="Geist" pitchFamily="34" charset="-120"/>
+              </a:rPr>
+              <a:t>1939 · Петропавл қаласы</a:t>
+            </a:r>
+            <a:endParaRPr lang="en-US" sz="1300" dirty="0"/>
+          </a:p>
+        </p:txBody>
+      </p:sp>
+      <p:sp>
+        <p:nvSpPr>
+          <p:cNvPr id="10" name="text-9"/>
+          <p:cNvSpPr txBox="1"/>
+          <p:nvPr/>
+        </p:nvSpPr>
+        <p:spPr>
+          <a:xfrm>
+            <a:off x="457200" y="2719735"/>
+            <a:ext cx="3769360" cy="628650"/>
+          </a:xfrm>
+          <a:prstGeom prst="rect">
+            <a:avLst/>
+          </a:prstGeom>
+          <a:noFill/>
+          <a:ln/>
+        </p:spPr>
+        <p:txBody>
+          <a:bodyPr wrap="square" lIns="0" tIns="0" rIns="0" bIns="0" rtlCol="0" anchor="t"/>
+          <a:lstStyle/>
+          <a:p>
+            <a:pPr algn="l" indent="0" marL="0">
+              <a:lnSpc>
+                <a:spcPts val="1660"/>
+              </a:lnSpc>
+              <a:buNone/>
+            </a:pPr>
+            <a:r>
+              <a:rPr lang="en-US" sz="1200" dirty="0">
+                <a:solidFill>
+                  <a:srgbClr val="2B2A27"/>
+                </a:solidFill>
+                <a:latin typeface="Geist" pitchFamily="34" charset="0"/>
+                <a:ea typeface="Geist" pitchFamily="34" charset="-122"/>
+                <a:cs typeface="Geist" pitchFamily="34" charset="-120"/>
+              </a:rPr>
+              <a:t>Көп балалы отбасында туған. Мектептен кейін ҚазМУ-ға түсіп, оқуының басым бөлігін Мәскеу университетінде өткерген.</a:t>
+            </a:r>
+            <a:endParaRPr lang="en-US" sz="1200" dirty="0"/>
+          </a:p>
+        </p:txBody>
+      </p:sp>
+      <p:sp>
+        <p:nvSpPr>
+          <p:cNvPr id="11" name="shape-10"/>
           <p:cNvSpPr/>
           <p:nvPr/>
         </p:nvSpPr>
         <p:spPr>
           <a:xfrm rot="-48000">
-            <a:off x="457200" y="3176389"/>
-            <a:ext cx="5943600" cy="1498600"/>
+            <a:off x="457200" y="3968353"/>
+            <a:ext cx="5943600" cy="1162050"/>
           </a:xfrm>
           <a:prstGeom prst="rect">
             <a:avLst/>
@@ -4237,13 +4474,13 @@
       </p:sp>
       <p:sp>
         <p:nvSpPr>
-          <p:cNvPr id="9" name="shape-8"/>
+          <p:cNvPr id="12" name="shape-11"/>
           <p:cNvSpPr/>
           <p:nvPr/>
         </p:nvSpPr>
         <p:spPr>
           <a:xfrm rot="-228000">
-            <a:off x="2942623" y="3060771"/>
+            <a:off x="2944998" y="3854504"/>
             <a:ext cx="952500" cy="279400"/>
           </a:xfrm>
           <a:prstGeom prst="rect">
@@ -4259,14 +4496,14 @@
       </p:sp>
       <p:sp>
         <p:nvSpPr>
-          <p:cNvPr id="10" name="text-9"/>
+          <p:cNvPr id="13" name="text-12"/>
           <p:cNvSpPr txBox="1"/>
           <p:nvPr/>
         </p:nvSpPr>
         <p:spPr>
           <a:xfrm rot="-48000">
-            <a:off x="653243" y="3340150"/>
-            <a:ext cx="5869432" cy="146050"/>
+            <a:off x="642563" y="4108486"/>
+            <a:ext cx="5896356" cy="146050"/>
           </a:xfrm>
           <a:prstGeom prst="rect">
             <a:avLst/>
@@ -4301,33 +4538,33 @@
       </p:sp>
       <p:sp>
         <p:nvSpPr>
-          <p:cNvPr id="11" name="text-10"/>
+          <p:cNvPr id="14" name="text-13"/>
           <p:cNvSpPr txBox="1"/>
           <p:nvPr/>
         </p:nvSpPr>
         <p:spPr>
           <a:xfrm rot="-48000">
-            <a:off x="836084" y="3548772"/>
-            <a:ext cx="5680964" cy="450850"/>
-          </a:xfrm>
-          <a:prstGeom prst="rect">
-            <a:avLst/>
-          </a:prstGeom>
-          <a:noFill/>
-          <a:ln/>
-        </p:spPr>
-        <p:txBody>
-          <a:bodyPr wrap="square" lIns="0" tIns="0" rIns="0" bIns="0" rtlCol="0" anchor="t"/>
-          <a:lstStyle/>
-          <a:p>
-            <a:pPr algn="l" indent="0" marL="0">
-              <a:lnSpc>
-                <a:spcPts val="1770"/>
-              </a:lnSpc>
-              <a:buNone/>
-            </a:pPr>
-            <a:r>
-              <a:rPr lang="en-US" sz="1300" dirty="0">
+            <a:off x="823716" y="4316822"/>
+            <a:ext cx="5707888" cy="209550"/>
+          </a:xfrm>
+          <a:prstGeom prst="rect">
+            <a:avLst/>
+          </a:prstGeom>
+          <a:noFill/>
+          <a:ln/>
+        </p:spPr>
+        <p:txBody>
+          <a:bodyPr wrap="square" lIns="0" tIns="0" rIns="0" bIns="0" rtlCol="0" anchor="t"/>
+          <a:lstStyle/>
+          <a:p>
+            <a:pPr algn="l" indent="0" marL="0">
+              <a:lnSpc>
+                <a:spcPts val="1630"/>
+              </a:lnSpc>
+              <a:buNone/>
+            </a:pPr>
+            <a:r>
+              <a:rPr lang="en-US" sz="1200" dirty="0">
                 <a:solidFill>
                   <a:srgbClr val="2B2A27"/>
                 </a:solidFill>
@@ -4335,41 +4572,41 @@
                 <a:ea typeface="Geist" pitchFamily="34" charset="-122"/>
                 <a:cs typeface="Geist" pitchFamily="34" charset="-120"/>
               </a:rPr>
-              <a:t>Оқуының басым бөлігін Мәскеу университетінде өткерген. Қазақстандағы молекулалық биологияның негізін қалаушы.</a:t>
-            </a:r>
-            <a:endParaRPr lang="en-US" sz="1300" dirty="0"/>
-          </a:p>
-        </p:txBody>
-      </p:sp>
-      <p:sp>
-        <p:nvSpPr>
-          <p:cNvPr id="12" name="text-11"/>
+              <a:t>Қазақстандағы молекулалық биологияның негізін қалаушы.</a:t>
+            </a:r>
+            <a:endParaRPr lang="en-US" sz="1200" dirty="0"/>
+          </a:p>
+        </p:txBody>
+      </p:sp>
+      <p:sp>
+        <p:nvSpPr>
+          <p:cNvPr id="15" name="text-14"/>
           <p:cNvSpPr txBox="1"/>
           <p:nvPr/>
         </p:nvSpPr>
         <p:spPr>
           <a:xfrm rot="-48000">
-            <a:off x="843241" y="4061286"/>
-            <a:ext cx="5680964" cy="450850"/>
-          </a:xfrm>
-          <a:prstGeom prst="rect">
-            <a:avLst/>
-          </a:prstGeom>
-          <a:noFill/>
-          <a:ln/>
-        </p:spPr>
-        <p:txBody>
-          <a:bodyPr wrap="square" lIns="0" tIns="0" rIns="0" bIns="0" rtlCol="0" anchor="t"/>
-          <a:lstStyle/>
-          <a:p>
-            <a:pPr algn="l" indent="0" marL="0">
-              <a:lnSpc>
-                <a:spcPts val="1770"/>
-              </a:lnSpc>
-              <a:buNone/>
-            </a:pPr>
-            <a:r>
-              <a:rPr lang="en-US" sz="1300" dirty="0">
+            <a:off x="828941" y="4589438"/>
+            <a:ext cx="5707888" cy="412750"/>
+          </a:xfrm>
+          <a:prstGeom prst="rect">
+            <a:avLst/>
+          </a:prstGeom>
+          <a:noFill/>
+          <a:ln/>
+        </p:spPr>
+        <p:txBody>
+          <a:bodyPr wrap="square" lIns="0" tIns="0" rIns="0" bIns="0" rtlCol="0" anchor="t"/>
+          <a:lstStyle/>
+          <a:p>
+            <a:pPr algn="l" indent="0" marL="0">
+              <a:lnSpc>
+                <a:spcPts val="1630"/>
+              </a:lnSpc>
+              <a:buNone/>
+            </a:pPr>
+            <a:r>
+              <a:rPr lang="en-US" sz="1200" dirty="0">
                 <a:solidFill>
                   <a:srgbClr val="2B2A27"/>
                 </a:solidFill>
@@ -4379,24 +4616,24 @@
               </a:rPr>
               <a:t>Информосомаларды ашқан ғалымдар тобында болып, 1976 жылы Ленин сыйлығын алған.</a:t>
             </a:r>
-            <a:endParaRPr lang="en-US" sz="1300" dirty="0"/>
-          </a:p>
-        </p:txBody>
-      </p:sp>
-      <p:sp>
-        <p:nvSpPr>
-          <p:cNvPr id="13" name="shape-12"/>
+            <a:endParaRPr lang="en-US" sz="1200" dirty="0"/>
+          </a:p>
+        </p:txBody>
+      </p:sp>
+      <p:sp>
+        <p:nvSpPr>
+          <p:cNvPr id="16" name="shape-15"/>
           <p:cNvSpPr/>
           <p:nvPr/>
         </p:nvSpPr>
         <p:spPr>
           <a:xfrm rot="48000">
-            <a:off x="457200" y="4815284"/>
-            <a:ext cx="5943600" cy="984250"/>
+            <a:off x="457200" y="5232400"/>
+            <a:ext cx="5943600" cy="850900"/>
           </a:xfrm>
           <a:prstGeom prst="roundRect">
             <a:avLst>
-              <a:gd name="adj" fmla="val 16774"/>
+              <a:gd name="adj" fmla="val 19403"/>
             </a:avLst>
           </a:prstGeom>
           <a:solidFill>
@@ -4412,14 +4649,14 @@
       </p:sp>
       <p:sp>
         <p:nvSpPr>
-          <p:cNvPr id="14" name="text-13"/>
+          <p:cNvPr id="17" name="text-16"/>
           <p:cNvSpPr txBox="1"/>
           <p:nvPr/>
         </p:nvSpPr>
         <p:spPr>
           <a:xfrm rot="48000">
-            <a:off x="676635" y="4981203"/>
-            <a:ext cx="5842508" cy="146050"/>
+            <a:off x="663559" y="5358628"/>
+            <a:ext cx="5869432" cy="146050"/>
           </a:xfrm>
           <a:prstGeom prst="rect">
             <a:avLst/>
@@ -4454,33 +4691,33 @@
       </p:sp>
       <p:sp>
         <p:nvSpPr>
-          <p:cNvPr id="15" name="text-14"/>
+          <p:cNvPr id="18" name="text-17"/>
           <p:cNvSpPr txBox="1"/>
           <p:nvPr/>
         </p:nvSpPr>
         <p:spPr>
           <a:xfrm rot="48000">
-            <a:off x="671726" y="5177225"/>
-            <a:ext cx="5842508" cy="457200"/>
-          </a:xfrm>
-          <a:prstGeom prst="rect">
-            <a:avLst/>
-          </a:prstGeom>
-          <a:noFill/>
-          <a:ln/>
-        </p:spPr>
-        <p:txBody>
-          <a:bodyPr wrap="square" lIns="0" tIns="0" rIns="0" bIns="0" rtlCol="0" anchor="t"/>
-          <a:lstStyle/>
-          <a:p>
-            <a:pPr algn="l" indent="0" marL="0">
-              <a:lnSpc>
-                <a:spcPts val="1790"/>
-              </a:lnSpc>
-              <a:buNone/>
-            </a:pPr>
-            <a:r>
-              <a:rPr lang="en-US" sz="1300" dirty="0">
+            <a:off x="659114" y="5543541"/>
+            <a:ext cx="5869432" cy="412750"/>
+          </a:xfrm>
+          <a:prstGeom prst="rect">
+            <a:avLst/>
+          </a:prstGeom>
+          <a:noFill/>
+          <a:ln/>
+        </p:spPr>
+        <p:txBody>
+          <a:bodyPr wrap="square" lIns="0" tIns="0" rIns="0" bIns="0" rtlCol="0" anchor="t"/>
+          <a:lstStyle/>
+          <a:p>
+            <a:pPr algn="l" indent="0" marL="0">
+              <a:lnSpc>
+                <a:spcPts val="1630"/>
+              </a:lnSpc>
+              <a:buNone/>
+            </a:pPr>
+            <a:r>
+              <a:rPr lang="en-US" sz="1200" dirty="0">
                 <a:solidFill>
                   <a:srgbClr val="0A0A0A"/>
                 </a:solidFill>
@@ -4490,24 +4727,24 @@
               </a:rPr>
               <a:t>1961 жылы, студент кезінде, курстық жұмысы Ашхабадтағы студенттік ғылыми конференцияда бірінші орын алған.</a:t>
             </a:r>
-            <a:endParaRPr lang="en-US" sz="1300" dirty="0"/>
-          </a:p>
-        </p:txBody>
-      </p:sp>
-      <p:sp>
-        <p:nvSpPr>
-          <p:cNvPr id="16" name="shape-15"/>
+            <a:endParaRPr lang="en-US" sz="1200" dirty="0"/>
+          </a:p>
+        </p:txBody>
+      </p:sp>
+      <p:sp>
+        <p:nvSpPr>
+          <p:cNvPr id="19" name="shape-18"/>
           <p:cNvSpPr/>
           <p:nvPr/>
         </p:nvSpPr>
         <p:spPr>
           <a:xfrm rot="-36000">
-            <a:off x="457200" y="5937647"/>
-            <a:ext cx="5943600" cy="933450"/>
+            <a:off x="457200" y="6186488"/>
+            <a:ext cx="5943600" cy="800100"/>
           </a:xfrm>
           <a:prstGeom prst="roundRect">
             <a:avLst>
-              <a:gd name="adj" fmla="val 17687"/>
+              <a:gd name="adj" fmla="val 20635"/>
             </a:avLst>
           </a:prstGeom>
           <a:solidFill>
@@ -4518,14 +4755,14 @@
       </p:sp>
       <p:sp>
         <p:nvSpPr>
-          <p:cNvPr id="17" name="text-16"/>
+          <p:cNvPr id="20" name="text-19"/>
           <p:cNvSpPr txBox="1"/>
           <p:nvPr/>
         </p:nvSpPr>
         <p:spPr>
           <a:xfrm rot="-36000">
-            <a:off x="657749" y="6078155"/>
-            <a:ext cx="5869432" cy="146050"/>
+            <a:off x="645331" y="6287306"/>
+            <a:ext cx="5896356" cy="146050"/>
           </a:xfrm>
           <a:prstGeom prst="rect">
             <a:avLst/>
@@ -4560,33 +4797,33 @@
       </p:sp>
       <p:sp>
         <p:nvSpPr>
-          <p:cNvPr id="18" name="text-17"/>
+          <p:cNvPr id="21" name="text-20"/>
           <p:cNvSpPr txBox="1"/>
           <p:nvPr/>
         </p:nvSpPr>
         <p:spPr>
           <a:xfrm rot="-36000">
-            <a:off x="661431" y="6274191"/>
-            <a:ext cx="5869432" cy="457200"/>
-          </a:xfrm>
-          <a:prstGeom prst="rect">
-            <a:avLst/>
-          </a:prstGeom>
-          <a:noFill/>
-          <a:ln/>
-        </p:spPr>
-        <p:txBody>
-          <a:bodyPr wrap="square" lIns="0" tIns="0" rIns="0" bIns="0" rtlCol="0" anchor="t"/>
-          <a:lstStyle/>
-          <a:p>
-            <a:pPr algn="l" indent="0" marL="0">
-              <a:lnSpc>
-                <a:spcPts val="1790"/>
-              </a:lnSpc>
-              <a:buNone/>
-            </a:pPr>
-            <a:r>
-              <a:rPr lang="en-US" sz="1300" dirty="0">
+            <a:off x="648664" y="6472232"/>
+            <a:ext cx="5896356" cy="412750"/>
+          </a:xfrm>
+          <a:prstGeom prst="rect">
+            <a:avLst/>
+          </a:prstGeom>
+          <a:noFill/>
+          <a:ln/>
+        </p:spPr>
+        <p:txBody>
+          <a:bodyPr wrap="square" lIns="0" tIns="0" rIns="0" bIns="0" rtlCol="0" anchor="t"/>
+          <a:lstStyle/>
+          <a:p>
+            <a:pPr algn="l" indent="0" marL="0">
+              <a:lnSpc>
+                <a:spcPts val="1630"/>
+              </a:lnSpc>
+              <a:buNone/>
+            </a:pPr>
+            <a:r>
+              <a:rPr lang="en-US" sz="1200" dirty="0">
                 <a:solidFill>
                   <a:srgbClr val="FAF8F3"/>
                 </a:solidFill>
@@ -4596,13 +4833,13 @@
               </a:rPr>
               <a:t>48 жасында қайтыс болған. Артында есімімен аталатын Молекулалық биология және биохимия институты қалды.</a:t>
             </a:r>
-            <a:endParaRPr lang="en-US" sz="1300" dirty="0"/>
-          </a:p>
-        </p:txBody>
-      </p:sp>
-      <p:sp>
-        <p:nvSpPr>
-          <p:cNvPr id="19" name="text-18"/>
+            <a:endParaRPr lang="en-US" sz="1200" dirty="0"/>
+          </a:p>
+        </p:txBody>
+      </p:sp>
+      <p:sp>
+        <p:nvSpPr>
+          <p:cNvPr id="22" name="text-21"/>
           <p:cNvSpPr txBox="1"/>
           <p:nvPr/>
         </p:nvSpPr>
@@ -4644,7 +4881,7 @@
       </p:sp>
       <p:sp>
         <p:nvSpPr>
-          <p:cNvPr id="20" name="shape-19"/>
+          <p:cNvPr id="23" name="shape-22"/>
           <p:cNvSpPr/>
           <p:nvPr/>
         </p:nvSpPr>
@@ -4666,7 +4903,7 @@
       </p:sp>
       <p:sp>
         <p:nvSpPr>
-          <p:cNvPr id="21" name="text-20"/>
+          <p:cNvPr id="24" name="text-23"/>
           <p:cNvSpPr txBox="1"/>
           <p:nvPr/>
         </p:nvSpPr>
@@ -4708,7 +4945,7 @@
       </p:sp>
       <p:pic>
         <p:nvPicPr>
-          <p:cNvPr id="22" name="svg-21" descr="preencoded.png">    </p:cNvPr>
+          <p:cNvPr id="25" name="svg-24" descr="preencoded.png">    </p:cNvPr>
           <p:cNvPicPr>
             <a:picLocks noChangeAspect="1"/>
           </p:cNvPicPr>
@@ -4732,7 +4969,7 @@
       </p:pic>
       <p:sp>
         <p:nvSpPr>
-          <p:cNvPr id="23" name="shape-22"/>
+          <p:cNvPr id="26" name="shape-25"/>
           <p:cNvSpPr/>
           <p:nvPr/>
         </p:nvSpPr>
@@ -4759,7 +4996,7 @@
       </p:sp>
       <p:sp>
         <p:nvSpPr>
-          <p:cNvPr id="24" name="shape-23"/>
+          <p:cNvPr id="27" name="shape-26"/>
           <p:cNvSpPr/>
           <p:nvPr/>
         </p:nvSpPr>
@@ -4781,7 +5018,7 @@
       </p:sp>
       <p:pic>
         <p:nvPicPr>
-          <p:cNvPr id="25" name="img-24" descr="preencoded.png">    </p:cNvPr>
+          <p:cNvPr id="28" name="img-27" descr="preencoded.png">    </p:cNvPr>
           <p:cNvPicPr>
             <a:picLocks noChangeAspect="1"/>
           </p:cNvPicPr>
@@ -4805,7 +5042,7 @@
       </p:pic>
       <p:sp>
         <p:nvSpPr>
-          <p:cNvPr id="26" name="text-25"/>
+          <p:cNvPr id="29" name="text-28"/>
           <p:cNvSpPr txBox="1"/>
           <p:nvPr/>
         </p:nvSpPr>
@@ -4847,7 +5084,7 @@
       </p:sp>
       <p:sp>
         <p:nvSpPr>
-          <p:cNvPr id="27" name="text-26"/>
+          <p:cNvPr id="30" name="text-29"/>
           <p:cNvSpPr txBox="1"/>
           <p:nvPr/>
         </p:nvSpPr>
@@ -5148,7 +5385,7 @@
         </p:nvSpPr>
         <p:spPr>
           <a:xfrm rot="-90000">
-            <a:off x="458143" y="2286000"/>
+            <a:off x="458143" y="1968500"/>
             <a:ext cx="2311400" cy="1117600"/>
           </a:xfrm>
           <a:prstGeom prst="roundRect">
@@ -5170,7 +5407,7 @@
         </p:nvSpPr>
         <p:spPr>
           <a:xfrm rot="-90000">
-            <a:off x="588783" y="2425819"/>
+            <a:off x="588783" y="2108319"/>
             <a:ext cx="2153920" cy="146050"/>
           </a:xfrm>
           <a:prstGeom prst="rect">
@@ -5212,7 +5449,7 @@
         </p:nvSpPr>
         <p:spPr>
           <a:xfrm rot="-90000">
-            <a:off x="598009" y="2609848"/>
+            <a:off x="598009" y="2292348"/>
             <a:ext cx="2153920" cy="482600"/>
           </a:xfrm>
           <a:prstGeom prst="rect">
@@ -5254,7 +5491,7 @@
         </p:nvSpPr>
         <p:spPr>
           <a:xfrm rot="-90000">
-            <a:off x="607234" y="3130427"/>
+            <a:off x="607234" y="2812927"/>
             <a:ext cx="2153920" cy="146050"/>
           </a:xfrm>
           <a:prstGeom prst="rect">
@@ -5296,7 +5533,7 @@
         </p:nvSpPr>
         <p:spPr>
           <a:xfrm rot="60000">
-            <a:off x="2871589" y="2286000"/>
+            <a:off x="2871589" y="1968500"/>
             <a:ext cx="1714500" cy="1117600"/>
           </a:xfrm>
           <a:prstGeom prst="roundRect">
@@ -5318,7 +5555,7 @@
         </p:nvSpPr>
         <p:spPr>
           <a:xfrm rot="60000">
-            <a:off x="3017329" y="2425753"/>
+            <a:off x="3017329" y="2108253"/>
             <a:ext cx="1521206" cy="146050"/>
           </a:xfrm>
           <a:prstGeom prst="rect">
@@ -5360,7 +5597,7 @@
         </p:nvSpPr>
         <p:spPr>
           <a:xfrm rot="60000">
-            <a:off x="3011178" y="2609849"/>
+            <a:off x="3011178" y="2292349"/>
             <a:ext cx="1521206" cy="482600"/>
           </a:xfrm>
           <a:prstGeom prst="rect">
@@ -5402,7 +5639,7 @@
         </p:nvSpPr>
         <p:spPr>
           <a:xfrm rot="60000">
-            <a:off x="3005028" y="3130495"/>
+            <a:off x="3005028" y="2812995"/>
             <a:ext cx="1521206" cy="146050"/>
           </a:xfrm>
           <a:prstGeom prst="rect">
@@ -5444,7 +5681,7 @@
         </p:nvSpPr>
         <p:spPr>
           <a:xfrm rot="-36000">
-            <a:off x="4686746" y="2286000"/>
+            <a:off x="4686746" y="1968500"/>
             <a:ext cx="1714500" cy="1117600"/>
           </a:xfrm>
           <a:prstGeom prst="roundRect">
@@ -5466,7 +5703,7 @@
         </p:nvSpPr>
         <p:spPr>
           <a:xfrm rot="-36000">
-            <a:off x="4822822" y="2425719"/>
+            <a:off x="4822822" y="2108219"/>
             <a:ext cx="1521206" cy="146050"/>
           </a:xfrm>
           <a:prstGeom prst="rect">
@@ -5508,7 +5745,7 @@
         </p:nvSpPr>
         <p:spPr>
           <a:xfrm rot="-36000">
-            <a:off x="4826513" y="2609850"/>
+            <a:off x="4826513" y="2292350"/>
             <a:ext cx="1521206" cy="482600"/>
           </a:xfrm>
           <a:prstGeom prst="rect">
@@ -5550,7 +5787,7 @@
         </p:nvSpPr>
         <p:spPr>
           <a:xfrm rot="-36000">
-            <a:off x="4830203" y="3130530"/>
+            <a:off x="4830203" y="2813030"/>
             <a:ext cx="1521206" cy="146050"/>
           </a:xfrm>
           <a:prstGeom prst="rect">
@@ -5586,86 +5823,19 @@
       </p:sp>
       <p:sp>
         <p:nvSpPr>
-          <p:cNvPr id="20" name="text-19"/>
-          <p:cNvSpPr txBox="1"/>
+          <p:cNvPr id="20" name="shape-19"/>
+          <p:cNvSpPr/>
           <p:nvPr/>
         </p:nvSpPr>
         <p:spPr>
           <a:xfrm rot="-60000">
-            <a:off x="457200" y="3935710"/>
-            <a:ext cx="6300216" cy="520700"/>
-          </a:xfrm>
-          <a:prstGeom prst="rect">
-            <a:avLst/>
-          </a:prstGeom>
-          <a:noFill/>
-          <a:ln/>
-        </p:spPr>
-        <p:txBody>
-          <a:bodyPr wrap="square" lIns="0" tIns="0" rIns="0" bIns="0" rtlCol="0" anchor="t"/>
-          <a:lstStyle/>
-          <a:p>
-            <a:pPr algn="l" indent="0" marL="0">
-              <a:lnSpc>
-                <a:spcPts val="2040"/>
-              </a:lnSpc>
-              <a:buNone/>
-            </a:pPr>
-            <a:r>
-              <a:rPr lang="en-US" sz="1700" i="1" dirty="0">
-                <a:solidFill>
-                  <a:srgbClr val="0A0A0A"/>
-                </a:solidFill>
-                <a:latin typeface="Noto Serif Display Light" pitchFamily="34" charset="0"/>
-                <a:ea typeface="Noto Serif Display Light" pitchFamily="34" charset="-122"/>
-                <a:cs typeface="Noto Serif Display Light" pitchFamily="34" charset="-120"/>
-              </a:rPr>
-              <a:t>Студент кезінен зертханада жүрген адам. Баллы тепе-тең, ал басты күші зерттеуде.</a:t>
-            </a:r>
-            <a:endParaRPr lang="en-US" sz="1700" dirty="0"/>
-          </a:p>
-        </p:txBody>
-      </p:sp>
-      <p:sp>
-        <p:nvSpPr>
-          <p:cNvPr id="21" name="shape-20"/>
-          <p:cNvSpPr/>
-          <p:nvPr/>
-        </p:nvSpPr>
-        <p:spPr>
-          <a:xfrm rot="48000">
-            <a:off x="457200" y="5207248"/>
-            <a:ext cx="5943600" cy="1377950"/>
-          </a:xfrm>
-          <a:prstGeom prst="rect">
-            <a:avLst/>
-          </a:prstGeom>
-          <a:solidFill>
-            <a:srgbClr val="FFFFFF"/>
-          </a:solidFill>
-          <a:ln/>
-          <a:effectLst>
-            <a:outerShdw sx="100000" sy="100000" kx="0" ky="0" algn="bl" rotWithShape="0" blurRad="177800" dist="76200" dir="5400000">
-              <a:srgbClr val="000000">
-                <a:alpha val="22000"/>
-              </a:srgbClr>
-            </a:outerShdw>
-          </a:effectLst>
-        </p:spPr>
-      </p:sp>
-      <p:sp>
-        <p:nvSpPr>
-          <p:cNvPr id="22" name="shape-21"/>
-          <p:cNvSpPr/>
-          <p:nvPr/>
-        </p:nvSpPr>
-        <p:spPr>
-          <a:xfrm rot="-432000">
-            <a:off x="5710612" y="5052024"/>
-            <a:ext cx="533400" cy="533400"/>
-          </a:xfrm>
-          <a:prstGeom prst="ellipse">
-            <a:avLst/>
+            <a:off x="456406" y="3302000"/>
+            <a:ext cx="4933950" cy="419100"/>
+          </a:xfrm>
+          <a:prstGeom prst="roundRect">
+            <a:avLst>
+              <a:gd name="adj" fmla="val 50000"/>
+            </a:avLst>
           </a:prstGeom>
           <a:solidFill>
             <a:srgbClr val="FAF8F3"/>
@@ -5678,9 +5848,187 @@
           </a:ln>
         </p:spPr>
       </p:sp>
+      <p:sp>
+        <p:nvSpPr>
+          <p:cNvPr id="21" name="text-20"/>
+          <p:cNvSpPr txBox="1"/>
+          <p:nvPr/>
+        </p:nvSpPr>
+        <p:spPr>
+          <a:xfrm rot="-60000">
+            <a:off x="622137" y="3489251"/>
+            <a:ext cx="646176" cy="146050"/>
+          </a:xfrm>
+          <a:prstGeom prst="rect">
+            <a:avLst/>
+          </a:prstGeom>
+          <a:noFill/>
+          <a:ln/>
+        </p:spPr>
+        <p:txBody>
+          <a:bodyPr wrap="square" lIns="0" tIns="0" rIns="0" bIns="0" rtlCol="0" anchor="t"/>
+          <a:lstStyle/>
+          <a:p>
+            <a:pPr algn="l" indent="0" marL="0">
+              <a:lnSpc>
+                <a:spcPts val="1080"/>
+              </a:lnSpc>
+              <a:buNone/>
+            </a:pPr>
+            <a:r>
+              <a:rPr lang="en-US" sz="900" spc="140" kern="0" dirty="0">
+                <a:solidFill>
+                  <a:srgbClr val="2F7A33"/>
+                </a:solidFill>
+                <a:latin typeface="IBM Plex Mono" pitchFamily="34" charset="0"/>
+                <a:ea typeface="IBM Plex Mono" pitchFamily="34" charset="-122"/>
+                <a:cs typeface="IBM Plex Mono" pitchFamily="34" charset="-120"/>
+              </a:rPr>
+              <a:t>МЕКТЕБІ</a:t>
+            </a:r>
+            <a:endParaRPr lang="en-US" sz="900" dirty="0"/>
+          </a:p>
+        </p:txBody>
+      </p:sp>
+      <p:sp>
+        <p:nvSpPr>
+          <p:cNvPr id="22" name="text-21"/>
+          <p:cNvSpPr txBox="1"/>
+          <p:nvPr/>
+        </p:nvSpPr>
+        <p:spPr>
+          <a:xfrm rot="-60000">
+            <a:off x="1344607" y="3397296"/>
+            <a:ext cx="4112641" cy="215900"/>
+          </a:xfrm>
+          <a:prstGeom prst="rect">
+            <a:avLst/>
+          </a:prstGeom>
+          <a:noFill/>
+          <a:ln/>
+        </p:spPr>
+        <p:txBody>
+          <a:bodyPr wrap="square" lIns="0" tIns="0" rIns="0" bIns="0" rtlCol="0" anchor="t"/>
+          <a:lstStyle/>
+          <a:p>
+            <a:pPr algn="l" indent="0" marL="0">
+              <a:lnSpc>
+                <a:spcPts val="1560"/>
+              </a:lnSpc>
+              <a:buNone/>
+            </a:pPr>
+            <a:r>
+              <a:rPr lang="en-US" sz="1300" b="1" dirty="0">
+                <a:solidFill>
+                  <a:srgbClr val="0A0A0A"/>
+                </a:solidFill>
+                <a:latin typeface="Geist" pitchFamily="34" charset="0"/>
+                <a:ea typeface="Geist" pitchFamily="34" charset="-122"/>
+                <a:cs typeface="Geist" pitchFamily="34" charset="-120"/>
+              </a:rPr>
+              <a:t>Петропавлдағы Білім-инновация лицейі (БИЛ)</a:t>
+            </a:r>
+            <a:endParaRPr lang="en-US" sz="1300" dirty="0"/>
+          </a:p>
+        </p:txBody>
+      </p:sp>
+      <p:sp>
+        <p:nvSpPr>
+          <p:cNvPr id="23" name="text-22"/>
+          <p:cNvSpPr txBox="1"/>
+          <p:nvPr/>
+        </p:nvSpPr>
+        <p:spPr>
+          <a:xfrm rot="-60000">
+            <a:off x="457200" y="3936305"/>
+            <a:ext cx="6300216" cy="488950"/>
+          </a:xfrm>
+          <a:prstGeom prst="rect">
+            <a:avLst/>
+          </a:prstGeom>
+          <a:noFill/>
+          <a:ln/>
+        </p:spPr>
+        <p:txBody>
+          <a:bodyPr wrap="square" lIns="0" tIns="0" rIns="0" bIns="0" rtlCol="0" anchor="t"/>
+          <a:lstStyle/>
+          <a:p>
+            <a:pPr algn="l" indent="0" marL="0">
+              <a:lnSpc>
+                <a:spcPts val="1920"/>
+              </a:lnSpc>
+              <a:buNone/>
+            </a:pPr>
+            <a:r>
+              <a:rPr lang="en-US" sz="1600" i="1" dirty="0">
+                <a:solidFill>
+                  <a:srgbClr val="0A0A0A"/>
+                </a:solidFill>
+                <a:latin typeface="Noto Serif Display Light" pitchFamily="34" charset="0"/>
+                <a:ea typeface="Noto Serif Display Light" pitchFamily="34" charset="-122"/>
+                <a:cs typeface="Noto Serif Display Light" pitchFamily="34" charset="-120"/>
+              </a:rPr>
+              <a:t>Студент кезінен зертханада жүрген адам. Баллы тепе-тең, ал басты күші зерттеуде.</a:t>
+            </a:r>
+            <a:endParaRPr lang="en-US" sz="1600" dirty="0"/>
+          </a:p>
+        </p:txBody>
+      </p:sp>
+      <p:sp>
+        <p:nvSpPr>
+          <p:cNvPr id="24" name="shape-23"/>
+          <p:cNvSpPr/>
+          <p:nvPr/>
+        </p:nvSpPr>
+        <p:spPr>
+          <a:xfrm rot="48000">
+            <a:off x="457200" y="4762798"/>
+            <a:ext cx="5943600" cy="2095500"/>
+          </a:xfrm>
+          <a:prstGeom prst="rect">
+            <a:avLst/>
+          </a:prstGeom>
+          <a:solidFill>
+            <a:srgbClr val="FFFFFF"/>
+          </a:solidFill>
+          <a:ln/>
+          <a:effectLst>
+            <a:outerShdw sx="100000" sy="100000" kx="0" ky="0" algn="bl" rotWithShape="0" blurRad="177800" dist="76200" dir="5400000">
+              <a:srgbClr val="000000">
+                <a:alpha val="22000"/>
+              </a:srgbClr>
+            </a:outerShdw>
+          </a:effectLst>
+        </p:spPr>
+      </p:sp>
+      <p:sp>
+        <p:nvSpPr>
+          <p:cNvPr id="25" name="shape-24"/>
+          <p:cNvSpPr/>
+          <p:nvPr/>
+        </p:nvSpPr>
+        <p:spPr>
+          <a:xfrm rot="-432000">
+            <a:off x="5715622" y="4607559"/>
+            <a:ext cx="533400" cy="533400"/>
+          </a:xfrm>
+          <a:prstGeom prst="ellipse">
+            <a:avLst/>
+          </a:prstGeom>
+          <a:solidFill>
+            <a:srgbClr val="FAF8F3"/>
+          </a:solidFill>
+          <a:ln w="12700">
+            <a:solidFill>
+              <a:srgbClr val="2F7A33"/>
+            </a:solidFill>
+            <a:prstDash val="solid"/>
+          </a:ln>
+        </p:spPr>
+      </p:sp>
       <p:pic>
         <p:nvPicPr>
-          <p:cNvPr id="23" name="svg-22" descr="preencoded.png">    </p:cNvPr>
+          <p:cNvPr id="26" name="svg-25" descr="preencoded.png">    </p:cNvPr>
           <p:cNvPicPr>
             <a:picLocks noChangeAspect="1"/>
           </p:cNvPicPr>
@@ -5694,7 +6042,7 @@
         </p:blipFill>
         <p:spPr>
           <a:xfrm rot="-432000">
-            <a:off x="5831262" y="5172674"/>
+            <a:off x="5836271" y="4728209"/>
             <a:ext cx="292100" cy="292100"/>
           </a:xfrm>
           <a:prstGeom prst="rect">
@@ -5704,14 +6052,14 @@
       </p:pic>
       <p:sp>
         <p:nvSpPr>
-          <p:cNvPr id="24" name="text-23"/>
+          <p:cNvPr id="27" name="text-26"/>
           <p:cNvSpPr txBox="1"/>
           <p:nvPr/>
         </p:nvSpPr>
         <p:spPr>
           <a:xfrm rot="48000">
-            <a:off x="679221" y="5384843"/>
-            <a:ext cx="5842508" cy="146050"/>
+            <a:off x="659186" y="4914980"/>
+            <a:ext cx="5896356" cy="146050"/>
           </a:xfrm>
           <a:prstGeom prst="rect">
             <a:avLst/>
@@ -5746,7 +6094,7 @@
       </p:sp>
       <p:pic>
         <p:nvPicPr>
-          <p:cNvPr id="25" name="svg-24" descr="preencoded.png">    </p:cNvPr>
+          <p:cNvPr id="28" name="svg-27" descr="preencoded.png">    </p:cNvPr>
           <p:cNvPicPr>
             <a:picLocks noChangeAspect="1"/>
           </p:cNvPicPr>
@@ -5760,7 +6108,7 @@
         </p:blipFill>
         <p:spPr>
           <a:xfrm rot="48000">
-            <a:off x="676156" y="5563571"/>
+            <a:off x="656123" y="5093354"/>
             <a:ext cx="190500" cy="190500"/>
           </a:xfrm>
           <a:prstGeom prst="rect">
@@ -5770,33 +6118,33 @@
       </p:pic>
       <p:sp>
         <p:nvSpPr>
-          <p:cNvPr id="26" name="text-25"/>
+          <p:cNvPr id="29" name="text-28"/>
           <p:cNvSpPr txBox="1"/>
           <p:nvPr/>
         </p:nvSpPr>
         <p:spPr>
           <a:xfrm rot="48000">
-            <a:off x="929831" y="5590955"/>
-            <a:ext cx="4785741" cy="215900"/>
-          </a:xfrm>
-          <a:prstGeom prst="rect">
-            <a:avLst/>
-          </a:prstGeom>
-          <a:noFill/>
-          <a:ln/>
-        </p:spPr>
-        <p:txBody>
-          <a:bodyPr wrap="square" lIns="0" tIns="0" rIns="0" bIns="0" rtlCol="0" anchor="t"/>
-          <a:lstStyle/>
-          <a:p>
-            <a:pPr algn="l" indent="0" marL="0">
-              <a:lnSpc>
-                <a:spcPts val="1770"/>
-              </a:lnSpc>
-              <a:buNone/>
-            </a:pPr>
-            <a:r>
-              <a:rPr lang="en-US" sz="1300" dirty="0">
+            <a:off x="909996" y="5118657"/>
+            <a:ext cx="4469384" cy="196850"/>
+          </a:xfrm>
+          <a:prstGeom prst="rect">
+            <a:avLst/>
+          </a:prstGeom>
+          <a:noFill/>
+          <a:ln/>
+        </p:spPr>
+        <p:txBody>
+          <a:bodyPr wrap="square" lIns="0" tIns="0" rIns="0" bIns="0" rtlCol="0" anchor="t"/>
+          <a:lstStyle/>
+          <a:p>
+            <a:pPr algn="l" indent="0" marL="0">
+              <a:lnSpc>
+                <a:spcPts val="1610"/>
+              </a:lnSpc>
+              <a:buNone/>
+            </a:pPr>
+            <a:r>
+              <a:rPr lang="en-US" sz="1200" dirty="0">
                 <a:solidFill>
                   <a:srgbClr val="2B2A27"/>
                 </a:solidFill>
@@ -5804,41 +6152,41 @@
                 <a:ea typeface="Geist" pitchFamily="34" charset="-122"/>
                 <a:cs typeface="Geist" pitchFamily="34" charset="-120"/>
               </a:rPr>
-              <a:t>Халықаралық биология олимпиадасы (IBO): қола медаль.</a:t>
-            </a:r>
-            <a:endParaRPr lang="en-US" sz="1300" dirty="0"/>
-          </a:p>
-        </p:txBody>
-      </p:sp>
-      <p:sp>
-        <p:nvSpPr>
-          <p:cNvPr id="27" name="text-26"/>
+              <a:t>Халықаралық биология олимпиадасы (IBO): күміс медаль.</a:t>
+            </a:r>
+            <a:endParaRPr lang="en-US" sz="1200" dirty="0"/>
+          </a:p>
+        </p:txBody>
+      </p:sp>
+      <p:sp>
+        <p:nvSpPr>
+          <p:cNvPr id="30" name="text-29"/>
           <p:cNvSpPr txBox="1"/>
           <p:nvPr/>
         </p:nvSpPr>
         <p:spPr>
           <a:xfrm rot="48000">
-            <a:off x="849526" y="5883513"/>
-            <a:ext cx="5654040" cy="222250"/>
-          </a:xfrm>
-          <a:prstGeom prst="rect">
-            <a:avLst/>
-          </a:prstGeom>
-          <a:noFill/>
-          <a:ln/>
-        </p:spPr>
-        <p:txBody>
-          <a:bodyPr wrap="square" lIns="0" tIns="0" rIns="0" bIns="0" rtlCol="0" anchor="t"/>
-          <a:lstStyle/>
-          <a:p>
-            <a:pPr algn="l" indent="0" marL="0">
-              <a:lnSpc>
-                <a:spcPts val="1770"/>
-              </a:lnSpc>
-              <a:buNone/>
-            </a:pPr>
-            <a:r>
-              <a:rPr lang="en-US" sz="1300" dirty="0">
+            <a:off x="828668" y="5380456"/>
+            <a:ext cx="5707888" cy="406400"/>
+          </a:xfrm>
+          <a:prstGeom prst="rect">
+            <a:avLst/>
+          </a:prstGeom>
+          <a:noFill/>
+          <a:ln/>
+        </p:spPr>
+        <p:txBody>
+          <a:bodyPr wrap="square" lIns="0" tIns="0" rIns="0" bIns="0" rtlCol="0" anchor="t"/>
+          <a:lstStyle/>
+          <a:p>
+            <a:pPr algn="l" indent="0" marL="0">
+              <a:lnSpc>
+                <a:spcPts val="1610"/>
+              </a:lnSpc>
+              <a:buNone/>
+            </a:pPr>
+            <a:r>
+              <a:rPr lang="en-US" sz="1200" dirty="0">
                 <a:solidFill>
                   <a:srgbClr val="2B2A27"/>
                 </a:solidFill>
@@ -5846,57 +6194,99 @@
                 <a:ea typeface="Geist" pitchFamily="34" charset="-122"/>
                 <a:cs typeface="Geist" pitchFamily="34" charset="-120"/>
               </a:rPr>
-              <a:t>Зертханалық зерттеу жобасы, ISEF деңгейінде.</a:t>
-            </a:r>
-            <a:endParaRPr lang="en-US" sz="1300" dirty="0"/>
-          </a:p>
-        </p:txBody>
-      </p:sp>
-      <p:sp>
-        <p:nvSpPr>
-          <p:cNvPr id="28" name="text-27"/>
+              <a:t>ISEF іріктеуінен өте алмаған, бірақ зерттеуі кейін Nature журналында жарияланып, әлемге танылған.</a:t>
+            </a:r>
+            <a:endParaRPr lang="en-US" sz="1200" dirty="0"/>
+          </a:p>
+        </p:txBody>
+      </p:sp>
+      <p:sp>
+        <p:nvSpPr>
+          <p:cNvPr id="31" name="text-30"/>
           <p:cNvSpPr txBox="1"/>
           <p:nvPr/>
         </p:nvSpPr>
         <p:spPr>
           <a:xfrm rot="48000">
-            <a:off x="845504" y="6171517"/>
-            <a:ext cx="5654040" cy="222250"/>
-          </a:xfrm>
-          <a:prstGeom prst="rect">
-            <a:avLst/>
-          </a:prstGeom>
-          <a:noFill/>
-          <a:ln/>
-        </p:spPr>
-        <p:txBody>
-          <a:bodyPr wrap="square" lIns="0" tIns="0" rIns="0" bIns="0" rtlCol="0" anchor="t"/>
-          <a:lstStyle/>
-          <a:p>
-            <a:pPr algn="l" indent="0" marL="0">
-              <a:lnSpc>
-                <a:spcPts val="1770"/>
-              </a:lnSpc>
-              <a:buNone/>
-            </a:pPr>
-            <a:r>
-              <a:rPr lang="en-US" sz="1300" b="1" dirty="0">
-                <a:solidFill>
-                  <a:srgbClr val="0A0A0A"/>
+            <a:off x="820832" y="5840082"/>
+            <a:ext cx="5707888" cy="609600"/>
+          </a:xfrm>
+          <a:prstGeom prst="rect">
+            <a:avLst/>
+          </a:prstGeom>
+          <a:noFill/>
+          <a:ln/>
+        </p:spPr>
+        <p:txBody>
+          <a:bodyPr wrap="square" lIns="0" tIns="0" rIns="0" bIns="0" rtlCol="0" anchor="t"/>
+          <a:lstStyle/>
+          <a:p>
+            <a:pPr algn="l" indent="0" marL="0">
+              <a:lnSpc>
+                <a:spcPts val="1610"/>
+              </a:lnSpc>
+              <a:buNone/>
+            </a:pPr>
+            <a:r>
+              <a:rPr lang="en-US" sz="1200" dirty="0">
+                <a:solidFill>
+                  <a:srgbClr val="2B2A27"/>
                 </a:solidFill>
                 <a:latin typeface="Geist" pitchFamily="34" charset="0"/>
                 <a:ea typeface="Geist" pitchFamily="34" charset="-122"/>
                 <a:cs typeface="Geist" pitchFamily="34" charset="-120"/>
               </a:rPr>
+              <a:t>Harvard университетінен ерте шақыру алған, Қазақстанға оралып өз зертханасын ашуды көздейді. Қазір NU School of Medicine-де қатерлі ісік жасушаларын зерттейді.</a:t>
+            </a:r>
+            <a:endParaRPr lang="en-US" sz="1200" dirty="0"/>
+          </a:p>
+        </p:txBody>
+      </p:sp>
+      <p:sp>
+        <p:nvSpPr>
+          <p:cNvPr id="32" name="text-31"/>
+          <p:cNvSpPr txBox="1"/>
+          <p:nvPr/>
+        </p:nvSpPr>
+        <p:spPr>
+          <a:xfrm rot="48000">
+            <a:off x="814420" y="6502422"/>
+            <a:ext cx="5707888" cy="203200"/>
+          </a:xfrm>
+          <a:prstGeom prst="rect">
+            <a:avLst/>
+          </a:prstGeom>
+          <a:noFill/>
+          <a:ln/>
+        </p:spPr>
+        <p:txBody>
+          <a:bodyPr wrap="square" lIns="0" tIns="0" rIns="0" bIns="0" rtlCol="0" anchor="t"/>
+          <a:lstStyle/>
+          <a:p>
+            <a:pPr algn="l" indent="0" marL="0">
+              <a:lnSpc>
+                <a:spcPts val="1610"/>
+              </a:lnSpc>
+              <a:buNone/>
+            </a:pPr>
+            <a:r>
+              <a:rPr lang="en-US" sz="1200" b="1" dirty="0">
+                <a:solidFill>
+                  <a:srgbClr val="0A0A0A"/>
+                </a:solidFill>
+                <a:latin typeface="Geist" pitchFamily="34" charset="0"/>
+                <a:ea typeface="Geist" pitchFamily="34" charset="-122"/>
+                <a:cs typeface="Geist" pitchFamily="34" charset="-120"/>
+              </a:rPr>
               <a:t>Оқитын мамандығы: молекулалық биология немесе биохимия.</a:t>
             </a:r>
-            <a:endParaRPr lang="en-US" sz="1300" dirty="0"/>
-          </a:p>
-        </p:txBody>
-      </p:sp>
-      <p:sp>
-        <p:nvSpPr>
-          <p:cNvPr id="29" name="text-28"/>
+            <a:endParaRPr lang="en-US" sz="1200" dirty="0"/>
+          </a:p>
+        </p:txBody>
+      </p:sp>
+      <p:sp>
+        <p:nvSpPr>
+          <p:cNvPr id="33" name="text-32"/>
           <p:cNvSpPr txBox="1"/>
           <p:nvPr/>
         </p:nvSpPr>
@@ -5938,7 +6328,7 @@
       </p:sp>
       <p:sp>
         <p:nvSpPr>
-          <p:cNvPr id="30" name="shape-29"/>
+          <p:cNvPr id="34" name="shape-33"/>
           <p:cNvSpPr/>
           <p:nvPr/>
         </p:nvSpPr>
@@ -5960,7 +6350,7 @@
       </p:sp>
       <p:sp>
         <p:nvSpPr>
-          <p:cNvPr id="31" name="text-30"/>
+          <p:cNvPr id="35" name="text-34"/>
           <p:cNvSpPr txBox="1"/>
           <p:nvPr/>
         </p:nvSpPr>
@@ -6002,7 +6392,7 @@
       </p:sp>
       <p:pic>
         <p:nvPicPr>
-          <p:cNvPr id="32" name="svg-31" descr="preencoded.png">    </p:cNvPr>
+          <p:cNvPr id="36" name="svg-35" descr="preencoded.png">    </p:cNvPr>
           <p:cNvPicPr>
             <a:picLocks noChangeAspect="1"/>
           </p:cNvPicPr>
@@ -6026,7 +6416,7 @@
       </p:pic>
       <p:sp>
         <p:nvSpPr>
-          <p:cNvPr id="33" name="text-32"/>
+          <p:cNvPr id="37" name="text-36"/>
           <p:cNvSpPr txBox="1"/>
           <p:nvPr/>
         </p:nvSpPr>
@@ -7986,14 +8376,140 @@
       </p:sp>
       <p:sp>
         <p:nvSpPr>
-          <p:cNvPr id="8" name="shape-7"/>
+          <p:cNvPr id="8" name="text-7"/>
+          <p:cNvSpPr txBox="1"/>
+          <p:nvPr/>
+        </p:nvSpPr>
+        <p:spPr>
+          <a:xfrm>
+            <a:off x="457200" y="2281833"/>
+            <a:ext cx="3769360" cy="146050"/>
+          </a:xfrm>
+          <a:prstGeom prst="rect">
+            <a:avLst/>
+          </a:prstGeom>
+          <a:noFill/>
+          <a:ln/>
+        </p:spPr>
+        <p:txBody>
+          <a:bodyPr wrap="square" lIns="0" tIns="0" rIns="0" bIns="0" rtlCol="0" anchor="t"/>
+          <a:lstStyle/>
+          <a:p>
+            <a:pPr algn="l" indent="0" marL="0">
+              <a:lnSpc>
+                <a:spcPts val="1080"/>
+              </a:lnSpc>
+              <a:buNone/>
+            </a:pPr>
+            <a:r>
+              <a:rPr lang="en-US" sz="900" spc="140" kern="0" dirty="0">
+                <a:solidFill>
+                  <a:srgbClr val="9C4F22"/>
+                </a:solidFill>
+                <a:latin typeface="IBM Plex Mono" pitchFamily="34" charset="0"/>
+                <a:ea typeface="IBM Plex Mono" pitchFamily="34" charset="-122"/>
+                <a:cs typeface="IBM Plex Mono" pitchFamily="34" charset="-120"/>
+              </a:rPr>
+              <a:t>ТУҒАН ЖЕРІ</a:t>
+            </a:r>
+            <a:endParaRPr lang="en-US" sz="900" dirty="0"/>
+          </a:p>
+        </p:txBody>
+      </p:sp>
+      <p:sp>
+        <p:nvSpPr>
+          <p:cNvPr id="9" name="text-8"/>
+          <p:cNvSpPr txBox="1"/>
+          <p:nvPr/>
+        </p:nvSpPr>
+        <p:spPr>
+          <a:xfrm>
+            <a:off x="457200" y="2464693"/>
+            <a:ext cx="3769360" cy="431800"/>
+          </a:xfrm>
+          <a:prstGeom prst="rect">
+            <a:avLst/>
+          </a:prstGeom>
+          <a:noFill/>
+          <a:ln/>
+        </p:spPr>
+        <p:txBody>
+          <a:bodyPr wrap="square" lIns="0" tIns="0" rIns="0" bIns="0" rtlCol="0" anchor="t"/>
+          <a:lstStyle/>
+          <a:p>
+            <a:pPr algn="l" indent="0" marL="0">
+              <a:lnSpc>
+                <a:spcPts val="1690"/>
+              </a:lnSpc>
+              <a:buNone/>
+            </a:pPr>
+            <a:r>
+              <a:rPr lang="en-US" sz="1300" b="1" dirty="0">
+                <a:solidFill>
+                  <a:srgbClr val="0A0A0A"/>
+                </a:solidFill>
+                <a:latin typeface="Geist" pitchFamily="34" charset="0"/>
+                <a:ea typeface="Geist" pitchFamily="34" charset="-122"/>
+                <a:cs typeface="Geist" pitchFamily="34" charset="-120"/>
+              </a:rPr>
+              <a:t>1899 · Павлодар өңірі, Баянауыл маңындағы Тендік ауылы</a:t>
+            </a:r>
+            <a:endParaRPr lang="en-US" sz="1300" dirty="0"/>
+          </a:p>
+        </p:txBody>
+      </p:sp>
+      <p:sp>
+        <p:nvSpPr>
+          <p:cNvPr id="10" name="text-9"/>
+          <p:cNvSpPr txBox="1"/>
+          <p:nvPr/>
+        </p:nvSpPr>
+        <p:spPr>
+          <a:xfrm>
+            <a:off x="457200" y="2934345"/>
+            <a:ext cx="3769360" cy="628650"/>
+          </a:xfrm>
+          <a:prstGeom prst="rect">
+            <a:avLst/>
+          </a:prstGeom>
+          <a:noFill/>
+          <a:ln/>
+        </p:spPr>
+        <p:txBody>
+          <a:bodyPr wrap="square" lIns="0" tIns="0" rIns="0" bIns="0" rtlCol="0" anchor="t"/>
+          <a:lstStyle/>
+          <a:p>
+            <a:pPr algn="l" indent="0" marL="0">
+              <a:lnSpc>
+                <a:spcPts val="1660"/>
+              </a:lnSpc>
+              <a:buNone/>
+            </a:pPr>
+            <a:r>
+              <a:rPr lang="en-US" sz="1200" dirty="0">
+                <a:solidFill>
+                  <a:srgbClr val="2B2A27"/>
+                </a:solidFill>
+                <a:latin typeface="Geist" pitchFamily="34" charset="0"/>
+                <a:ea typeface="Geist" pitchFamily="34" charset="-122"/>
+                <a:cs typeface="Geist" pitchFamily="34" charset="-120"/>
+              </a:rPr>
+              <a:t>Әкесі Имантай би болған. Алғашқы білімді ауыл молдасынан алып, араб, парсы тілін үйренген, кейін қазақ-орыс мектебінде оқыған.</a:t>
+            </a:r>
+            <a:endParaRPr lang="en-US" sz="1200" dirty="0"/>
+          </a:p>
+        </p:txBody>
+      </p:sp>
+      <p:sp>
+        <p:nvSpPr>
+          <p:cNvPr id="11" name="shape-10"/>
           <p:cNvSpPr/>
           <p:nvPr/>
         </p:nvSpPr>
         <p:spPr>
           <a:xfrm rot="-48000">
-            <a:off x="457200" y="3176389"/>
-            <a:ext cx="5943600" cy="1498600"/>
+            <a:off x="457200" y="3968353"/>
+            <a:ext cx="5943600" cy="1162050"/>
           </a:xfrm>
           <a:prstGeom prst="rect">
             <a:avLst/>
@@ -8013,13 +8529,13 @@
       </p:sp>
       <p:sp>
         <p:nvSpPr>
-          <p:cNvPr id="9" name="shape-8"/>
+          <p:cNvPr id="12" name="shape-11"/>
           <p:cNvSpPr/>
           <p:nvPr/>
         </p:nvSpPr>
         <p:spPr>
           <a:xfrm rot="-228000">
-            <a:off x="2942623" y="3060771"/>
+            <a:off x="2944998" y="3854504"/>
             <a:ext cx="952500" cy="279400"/>
           </a:xfrm>
           <a:prstGeom prst="rect">
@@ -8035,14 +8551,14 @@
       </p:sp>
       <p:sp>
         <p:nvSpPr>
-          <p:cNvPr id="10" name="text-9"/>
+          <p:cNvPr id="13" name="text-12"/>
           <p:cNvSpPr txBox="1"/>
           <p:nvPr/>
         </p:nvSpPr>
         <p:spPr>
           <a:xfrm rot="-48000">
-            <a:off x="653243" y="3340150"/>
-            <a:ext cx="5869432" cy="146050"/>
+            <a:off x="642563" y="4108486"/>
+            <a:ext cx="5896356" cy="146050"/>
           </a:xfrm>
           <a:prstGeom prst="rect">
             <a:avLst/>
@@ -8077,33 +8593,33 @@
       </p:sp>
       <p:sp>
         <p:nvSpPr>
-          <p:cNvPr id="11" name="text-10"/>
+          <p:cNvPr id="14" name="text-13"/>
           <p:cNvSpPr txBox="1"/>
           <p:nvPr/>
         </p:nvSpPr>
         <p:spPr>
           <a:xfrm rot="-48000">
-            <a:off x="836084" y="3548772"/>
-            <a:ext cx="5680964" cy="450850"/>
-          </a:xfrm>
-          <a:prstGeom prst="rect">
-            <a:avLst/>
-          </a:prstGeom>
-          <a:noFill/>
-          <a:ln/>
-        </p:spPr>
-        <p:txBody>
-          <a:bodyPr wrap="square" lIns="0" tIns="0" rIns="0" bIns="0" rtlCol="0" anchor="t"/>
-          <a:lstStyle/>
-          <a:p>
-            <a:pPr algn="l" indent="0" marL="0">
-              <a:lnSpc>
-                <a:spcPts val="1770"/>
-              </a:lnSpc>
-              <a:buNone/>
-            </a:pPr>
-            <a:r>
-              <a:rPr lang="en-US" sz="1300" dirty="0">
+            <a:off x="823716" y="4316822"/>
+            <a:ext cx="5707888" cy="209550"/>
+          </a:xfrm>
+          <a:prstGeom prst="rect">
+            <a:avLst/>
+          </a:prstGeom>
+          <a:noFill/>
+          <a:ln/>
+        </p:spPr>
+        <p:txBody>
+          <a:bodyPr wrap="square" lIns="0" tIns="0" rIns="0" bIns="0" rtlCol="0" anchor="t"/>
+          <a:lstStyle/>
+          <a:p>
+            <a:pPr algn="l" indent="0" marL="0">
+              <a:lnSpc>
+                <a:spcPts val="1630"/>
+              </a:lnSpc>
+              <a:buNone/>
+            </a:pPr>
+            <a:r>
+              <a:rPr lang="en-US" sz="1200" dirty="0">
                 <a:solidFill>
                   <a:srgbClr val="2B2A27"/>
                 </a:solidFill>
@@ -8111,41 +8627,41 @@
                 <a:ea typeface="Geist" pitchFamily="34" charset="-122"/>
                 <a:cs typeface="Geist" pitchFamily="34" charset="-120"/>
               </a:rPr>
-              <a:t>Томск технологиялық институтын тау-кен инженер-геологы ретінде бітірген.</a:t>
-            </a:r>
-            <a:endParaRPr lang="en-US" sz="1300" dirty="0"/>
-          </a:p>
-        </p:txBody>
-      </p:sp>
-      <p:sp>
-        <p:nvSpPr>
-          <p:cNvPr id="12" name="text-11"/>
+              <a:t>Томск технологиялық институтының түлегі, тау-кен инженер-геологы.</a:t>
+            </a:r>
+            <a:endParaRPr lang="en-US" sz="1200" dirty="0"/>
+          </a:p>
+        </p:txBody>
+      </p:sp>
+      <p:sp>
+        <p:nvSpPr>
+          <p:cNvPr id="15" name="text-14"/>
           <p:cNvSpPr txBox="1"/>
           <p:nvPr/>
         </p:nvSpPr>
         <p:spPr>
           <a:xfrm rot="-48000">
-            <a:off x="843241" y="4061286"/>
-            <a:ext cx="5680964" cy="450850"/>
-          </a:xfrm>
-          <a:prstGeom prst="rect">
-            <a:avLst/>
-          </a:prstGeom>
-          <a:noFill/>
-          <a:ln/>
-        </p:spPr>
-        <p:txBody>
-          <a:bodyPr wrap="square" lIns="0" tIns="0" rIns="0" bIns="0" rtlCol="0" anchor="t"/>
-          <a:lstStyle/>
-          <a:p>
-            <a:pPr algn="l" indent="0" marL="0">
-              <a:lnSpc>
-                <a:spcPts val="1770"/>
-              </a:lnSpc>
-              <a:buNone/>
-            </a:pPr>
-            <a:r>
-              <a:rPr lang="en-US" sz="1300" dirty="0">
+            <a:off x="828941" y="4589438"/>
+            <a:ext cx="5707888" cy="412750"/>
+          </a:xfrm>
+          <a:prstGeom prst="rect">
+            <a:avLst/>
+          </a:prstGeom>
+          <a:noFill/>
+          <a:ln/>
+        </p:spPr>
+        <p:txBody>
+          <a:bodyPr wrap="square" lIns="0" tIns="0" rIns="0" bIns="0" rtlCol="0" anchor="t"/>
+          <a:lstStyle/>
+          <a:p>
+            <a:pPr algn="l" indent="0" marL="0">
+              <a:lnSpc>
+                <a:spcPts val="1630"/>
+              </a:lnSpc>
+              <a:buNone/>
+            </a:pPr>
+            <a:r>
+              <a:rPr lang="en-US" sz="1200" dirty="0">
                 <a:solidFill>
                   <a:srgbClr val="2B2A27"/>
                 </a:solidFill>
@@ -8155,24 +8671,24 @@
               </a:rPr>
               <a:t>Жезқазған кен орнын зерттеген. Қазақ КСР Ғылым академиясының тұңғыш президенті болған.</a:t>
             </a:r>
-            <a:endParaRPr lang="en-US" sz="1300" dirty="0"/>
-          </a:p>
-        </p:txBody>
-      </p:sp>
-      <p:sp>
-        <p:nvSpPr>
-          <p:cNvPr id="13" name="shape-12"/>
+            <a:endParaRPr lang="en-US" sz="1200" dirty="0"/>
+          </a:p>
+        </p:txBody>
+      </p:sp>
+      <p:sp>
+        <p:nvSpPr>
+          <p:cNvPr id="16" name="shape-15"/>
           <p:cNvSpPr/>
           <p:nvPr/>
         </p:nvSpPr>
         <p:spPr>
           <a:xfrm rot="48000">
-            <a:off x="457200" y="4814888"/>
-            <a:ext cx="5943600" cy="1212850"/>
+            <a:off x="457200" y="5231209"/>
+            <a:ext cx="5943600" cy="1060450"/>
           </a:xfrm>
           <a:prstGeom prst="roundRect">
             <a:avLst>
-              <a:gd name="adj" fmla="val 13613"/>
+              <a:gd name="adj" fmla="val 15569"/>
             </a:avLst>
           </a:prstGeom>
           <a:solidFill>
@@ -8188,14 +8704,14 @@
       </p:sp>
       <p:sp>
         <p:nvSpPr>
-          <p:cNvPr id="14" name="text-13"/>
+          <p:cNvPr id="17" name="text-16"/>
           <p:cNvSpPr txBox="1"/>
           <p:nvPr/>
         </p:nvSpPr>
         <p:spPr>
           <a:xfrm rot="48000">
-            <a:off x="678226" y="4981214"/>
-            <a:ext cx="5842508" cy="146050"/>
+            <a:off x="665005" y="5358638"/>
+            <a:ext cx="5869432" cy="146050"/>
           </a:xfrm>
           <a:prstGeom prst="rect">
             <a:avLst/>
@@ -8230,33 +8746,33 @@
       </p:sp>
       <p:sp>
         <p:nvSpPr>
-          <p:cNvPr id="15" name="text-14"/>
+          <p:cNvPr id="18" name="text-17"/>
           <p:cNvSpPr txBox="1"/>
           <p:nvPr/>
         </p:nvSpPr>
         <p:spPr>
           <a:xfrm rot="48000">
-            <a:off x="671726" y="5176828"/>
-            <a:ext cx="5842508" cy="685800"/>
-          </a:xfrm>
-          <a:prstGeom prst="rect">
-            <a:avLst/>
-          </a:prstGeom>
-          <a:noFill/>
-          <a:ln/>
-        </p:spPr>
-        <p:txBody>
-          <a:bodyPr wrap="square" lIns="0" tIns="0" rIns="0" bIns="0" rtlCol="0" anchor="t"/>
-          <a:lstStyle/>
-          <a:p>
-            <a:pPr algn="l" indent="0" marL="0">
-              <a:lnSpc>
-                <a:spcPts val="1790"/>
-              </a:lnSpc>
-              <a:buNone/>
-            </a:pPr>
-            <a:r>
-              <a:rPr lang="en-US" sz="1300" dirty="0">
+            <a:off x="659114" y="5542350"/>
+            <a:ext cx="5869432" cy="622300"/>
+          </a:xfrm>
+          <a:prstGeom prst="rect">
+            <a:avLst/>
+          </a:prstGeom>
+          <a:noFill/>
+          <a:ln/>
+        </p:spPr>
+        <p:txBody>
+          <a:bodyPr wrap="square" lIns="0" tIns="0" rIns="0" bIns="0" rtlCol="0" anchor="t"/>
+          <a:lstStyle/>
+          <a:p>
+            <a:pPr algn="l" indent="0" marL="0">
+              <a:lnSpc>
+                <a:spcPts val="1630"/>
+              </a:lnSpc>
+              <a:buNone/>
+            </a:pPr>
+            <a:r>
+              <a:rPr lang="en-US" sz="1200" dirty="0">
                 <a:solidFill>
                   <a:srgbClr val="0A0A0A"/>
                 </a:solidFill>
@@ -8264,26 +8780,26 @@
                 <a:ea typeface="Geist" pitchFamily="34" charset="-122"/>
                 <a:cs typeface="Geist" pitchFamily="34" charset="-120"/>
               </a:rPr>
-              <a:t>1921 жылы туберкулезбен ауырып жүргенде ауылға емделуге келген геолог Михаил Усовпен танысады. Сол кездесу оны Томскіге, геологияға алып келеді.</a:t>
-            </a:r>
-            <a:endParaRPr lang="en-US" sz="1300" dirty="0"/>
-          </a:p>
-        </p:txBody>
-      </p:sp>
-      <p:sp>
-        <p:nvSpPr>
-          <p:cNvPr id="16" name="shape-15"/>
+              <a:t>1921 жылы туберкулезбен ауырып жүргенде ауылға емделуге келген геолог Михаил Усовпен танысады. Осы кездесу оны геологияға алып келеді.</a:t>
+            </a:r>
+            <a:endParaRPr lang="en-US" sz="1200" dirty="0"/>
+          </a:p>
+        </p:txBody>
+      </p:sp>
+      <p:sp>
+        <p:nvSpPr>
+          <p:cNvPr id="19" name="shape-18"/>
           <p:cNvSpPr/>
           <p:nvPr/>
         </p:nvSpPr>
         <p:spPr>
           <a:xfrm rot="-36000">
-            <a:off x="457200" y="6165453"/>
-            <a:ext cx="5943600" cy="933450"/>
+            <a:off x="457200" y="6393656"/>
+            <a:ext cx="5943600" cy="800100"/>
           </a:xfrm>
           <a:prstGeom prst="roundRect">
             <a:avLst>
-              <a:gd name="adj" fmla="val 17687"/>
+              <a:gd name="adj" fmla="val 20635"/>
             </a:avLst>
           </a:prstGeom>
           <a:solidFill>
@@ -8294,14 +8810,14 @@
       </p:sp>
       <p:sp>
         <p:nvSpPr>
-          <p:cNvPr id="17" name="text-16"/>
+          <p:cNvPr id="20" name="text-19"/>
           <p:cNvSpPr txBox="1"/>
           <p:nvPr/>
         </p:nvSpPr>
         <p:spPr>
           <a:xfrm rot="-36000">
-            <a:off x="657749" y="6305961"/>
-            <a:ext cx="5869432" cy="146050"/>
+            <a:off x="645331" y="6494475"/>
+            <a:ext cx="5896356" cy="146050"/>
           </a:xfrm>
           <a:prstGeom prst="rect">
             <a:avLst/>
@@ -8336,33 +8852,33 @@
       </p:sp>
       <p:sp>
         <p:nvSpPr>
-          <p:cNvPr id="18" name="text-17"/>
+          <p:cNvPr id="21" name="text-20"/>
           <p:cNvSpPr txBox="1"/>
           <p:nvPr/>
         </p:nvSpPr>
         <p:spPr>
           <a:xfrm rot="-36000">
-            <a:off x="661431" y="6501998"/>
-            <a:ext cx="5869432" cy="457200"/>
-          </a:xfrm>
-          <a:prstGeom prst="rect">
-            <a:avLst/>
-          </a:prstGeom>
-          <a:noFill/>
-          <a:ln/>
-        </p:spPr>
-        <p:txBody>
-          <a:bodyPr wrap="square" lIns="0" tIns="0" rIns="0" bIns="0" rtlCol="0" anchor="t"/>
-          <a:lstStyle/>
-          <a:p>
-            <a:pPr algn="l" indent="0" marL="0">
-              <a:lnSpc>
-                <a:spcPts val="1790"/>
-              </a:lnSpc>
-              <a:buNone/>
-            </a:pPr>
-            <a:r>
-              <a:rPr lang="en-US" sz="1300" dirty="0">
+            <a:off x="648664" y="6679401"/>
+            <a:ext cx="5896356" cy="412750"/>
+          </a:xfrm>
+          <a:prstGeom prst="rect">
+            <a:avLst/>
+          </a:prstGeom>
+          <a:noFill/>
+          <a:ln/>
+        </p:spPr>
+        <p:txBody>
+          <a:bodyPr wrap="square" lIns="0" tIns="0" rIns="0" bIns="0" rtlCol="0" anchor="t"/>
+          <a:lstStyle/>
+          <a:p>
+            <a:pPr algn="l" indent="0" marL="0">
+              <a:lnSpc>
+                <a:spcPts val="1630"/>
+              </a:lnSpc>
+              <a:buNone/>
+            </a:pPr>
+            <a:r>
+              <a:rPr lang="en-US" sz="1200" dirty="0">
                 <a:solidFill>
                   <a:srgbClr val="FAF8F3"/>
                 </a:solidFill>
@@ -8370,15 +8886,15 @@
                 <a:ea typeface="Geist" pitchFamily="34" charset="-122"/>
                 <a:cs typeface="Geist" pitchFamily="34" charset="-120"/>
               </a:rPr>
-              <a:t>1952 жылы академия президенті қызметінен кетеді. 1955 жылы ғана қайта сайланады.</a:t>
-            </a:r>
-            <a:endParaRPr lang="en-US" sz="1300" dirty="0"/>
-          </a:p>
-        </p:txBody>
-      </p:sp>
-      <p:sp>
-        <p:nvSpPr>
-          <p:cNvPr id="19" name="text-18"/>
+              <a:t>1952 жылы академия президенттігінен кетіп, 1955 жылы ғана қайта сайланады.</a:t>
+            </a:r>
+            <a:endParaRPr lang="en-US" sz="1200" dirty="0"/>
+          </a:p>
+        </p:txBody>
+      </p:sp>
+      <p:sp>
+        <p:nvSpPr>
+          <p:cNvPr id="22" name="text-21"/>
           <p:cNvSpPr txBox="1"/>
           <p:nvPr/>
         </p:nvSpPr>
@@ -8420,7 +8936,7 @@
       </p:sp>
       <p:sp>
         <p:nvSpPr>
-          <p:cNvPr id="20" name="shape-19"/>
+          <p:cNvPr id="23" name="shape-22"/>
           <p:cNvSpPr/>
           <p:nvPr/>
         </p:nvSpPr>
@@ -8442,7 +8958,7 @@
       </p:sp>
       <p:sp>
         <p:nvSpPr>
-          <p:cNvPr id="21" name="text-20"/>
+          <p:cNvPr id="24" name="text-23"/>
           <p:cNvSpPr txBox="1"/>
           <p:nvPr/>
         </p:nvSpPr>
@@ -8484,7 +9000,7 @@
       </p:sp>
       <p:pic>
         <p:nvPicPr>
-          <p:cNvPr id="22" name="svg-21" descr="preencoded.png">    </p:cNvPr>
+          <p:cNvPr id="25" name="svg-24" descr="preencoded.png">    </p:cNvPr>
           <p:cNvPicPr>
             <a:picLocks noChangeAspect="1"/>
           </p:cNvPicPr>
@@ -8508,7 +9024,7 @@
       </p:pic>
       <p:sp>
         <p:nvSpPr>
-          <p:cNvPr id="23" name="shape-22"/>
+          <p:cNvPr id="26" name="shape-25"/>
           <p:cNvSpPr/>
           <p:nvPr/>
         </p:nvSpPr>
@@ -8535,7 +9051,7 @@
       </p:sp>
       <p:sp>
         <p:nvSpPr>
-          <p:cNvPr id="24" name="shape-23"/>
+          <p:cNvPr id="27" name="shape-26"/>
           <p:cNvSpPr/>
           <p:nvPr/>
         </p:nvSpPr>
@@ -8557,7 +9073,7 @@
       </p:sp>
       <p:pic>
         <p:nvPicPr>
-          <p:cNvPr id="25" name="img-24" descr="preencoded.png">    </p:cNvPr>
+          <p:cNvPr id="28" name="img-27" descr="preencoded.png">    </p:cNvPr>
           <p:cNvPicPr>
             <a:picLocks noChangeAspect="1"/>
           </p:cNvPicPr>
@@ -8581,7 +9097,7 @@
       </p:pic>
       <p:sp>
         <p:nvSpPr>
-          <p:cNvPr id="26" name="text-25"/>
+          <p:cNvPr id="29" name="text-28"/>
           <p:cNvSpPr txBox="1"/>
           <p:nvPr/>
         </p:nvSpPr>
@@ -8623,7 +9139,7 @@
       </p:sp>
       <p:sp>
         <p:nvSpPr>
-          <p:cNvPr id="27" name="text-26"/>
+          <p:cNvPr id="30" name="text-29"/>
           <p:cNvSpPr txBox="1"/>
           <p:nvPr/>
         </p:nvSpPr>
@@ -8924,7 +9440,7 @@
         </p:nvSpPr>
         <p:spPr>
           <a:xfrm rot="-90000">
-            <a:off x="458143" y="2286000"/>
+            <a:off x="458143" y="1968500"/>
             <a:ext cx="2311400" cy="1117600"/>
           </a:xfrm>
           <a:prstGeom prst="roundRect">
@@ -8946,7 +9462,7 @@
         </p:nvSpPr>
         <p:spPr>
           <a:xfrm rot="-90000">
-            <a:off x="588783" y="2425819"/>
+            <a:off x="588783" y="2108319"/>
             <a:ext cx="2153920" cy="146050"/>
           </a:xfrm>
           <a:prstGeom prst="rect">
@@ -8988,7 +9504,7 @@
         </p:nvSpPr>
         <p:spPr>
           <a:xfrm rot="-90000">
-            <a:off x="598009" y="2609848"/>
+            <a:off x="598009" y="2292348"/>
             <a:ext cx="2153920" cy="482600"/>
           </a:xfrm>
           <a:prstGeom prst="rect">
@@ -9016,7 +9532,7 @@
                 <a:ea typeface="Noto Serif Display Light" pitchFamily="34" charset="-122"/>
                 <a:cs typeface="Noto Serif Display Light" pitchFamily="34" charset="-120"/>
               </a:rPr>
-              <a:t>1430</a:t>
+              <a:t>1530</a:t>
             </a:r>
             <a:endParaRPr lang="en-US" sz="3800" dirty="0"/>
           </a:p>
@@ -9030,7 +9546,7 @@
         </p:nvSpPr>
         <p:spPr>
           <a:xfrm rot="-90000">
-            <a:off x="607234" y="3130427"/>
+            <a:off x="607234" y="2812927"/>
             <a:ext cx="2153920" cy="146050"/>
           </a:xfrm>
           <a:prstGeom prst="rect">
@@ -9058,7 +9574,7 @@
                 <a:ea typeface="IBM Plex Mono" pitchFamily="34" charset="-122"/>
                 <a:cs typeface="IBM Plex Mono" pitchFamily="34" charset="-120"/>
               </a:rPr>
-              <a:t>Math 770 · RW 660</a:t>
+              <a:t>Math 790 · RW 710</a:t>
             </a:r>
             <a:endParaRPr lang="en-US" sz="900" dirty="0"/>
           </a:p>
@@ -9072,7 +9588,7 @@
         </p:nvSpPr>
         <p:spPr>
           <a:xfrm rot="60000">
-            <a:off x="2871589" y="2286000"/>
+            <a:off x="2871589" y="1968500"/>
             <a:ext cx="1714500" cy="1117600"/>
           </a:xfrm>
           <a:prstGeom prst="roundRect">
@@ -9094,7 +9610,7 @@
         </p:nvSpPr>
         <p:spPr>
           <a:xfrm rot="60000">
-            <a:off x="3017329" y="2425753"/>
+            <a:off x="3017329" y="2108253"/>
             <a:ext cx="1521206" cy="146050"/>
           </a:xfrm>
           <a:prstGeom prst="rect">
@@ -9136,7 +9652,7 @@
         </p:nvSpPr>
         <p:spPr>
           <a:xfrm rot="60000">
-            <a:off x="3011178" y="2609849"/>
+            <a:off x="3011178" y="2292349"/>
             <a:ext cx="1521206" cy="482600"/>
           </a:xfrm>
           <a:prstGeom prst="rect">
@@ -9164,7 +9680,7 @@
                 <a:ea typeface="Noto Serif Display Light" pitchFamily="34" charset="-122"/>
                 <a:cs typeface="Noto Serif Display Light" pitchFamily="34" charset="-120"/>
               </a:rPr>
-              <a:t>6.5</a:t>
+              <a:t>7.5</a:t>
             </a:r>
             <a:endParaRPr lang="en-US" sz="3800" dirty="0"/>
           </a:p>
@@ -9178,7 +9694,7 @@
         </p:nvSpPr>
         <p:spPr>
           <a:xfrm rot="60000">
-            <a:off x="3005028" y="3130495"/>
+            <a:off x="3005028" y="2812995"/>
             <a:ext cx="1521206" cy="146050"/>
           </a:xfrm>
           <a:prstGeom prst="rect">
@@ -9220,7 +9736,7 @@
         </p:nvSpPr>
         <p:spPr>
           <a:xfrm rot="-36000">
-            <a:off x="4686746" y="2286000"/>
+            <a:off x="4686746" y="1968500"/>
             <a:ext cx="1714500" cy="1117600"/>
           </a:xfrm>
           <a:prstGeom prst="roundRect">
@@ -9242,7 +9758,7 @@
         </p:nvSpPr>
         <p:spPr>
           <a:xfrm rot="-36000">
-            <a:off x="4822822" y="2425719"/>
+            <a:off x="4822822" y="2108219"/>
             <a:ext cx="1521206" cy="146050"/>
           </a:xfrm>
           <a:prstGeom prst="rect">
@@ -9284,7 +9800,7 @@
         </p:nvSpPr>
         <p:spPr>
           <a:xfrm rot="-36000">
-            <a:off x="4826513" y="2609850"/>
+            <a:off x="4826513" y="2292350"/>
             <a:ext cx="1521206" cy="482600"/>
           </a:xfrm>
           <a:prstGeom prst="rect">
@@ -9312,7 +9828,7 @@
                 <a:ea typeface="Noto Serif Display Light" pitchFamily="34" charset="-122"/>
                 <a:cs typeface="Noto Serif Display Light" pitchFamily="34" charset="-120"/>
               </a:rPr>
-              <a:t>4.6</a:t>
+              <a:t>5.0</a:t>
             </a:r>
             <a:endParaRPr lang="en-US" sz="3800" dirty="0"/>
           </a:p>
@@ -9326,7 +9842,7 @@
         </p:nvSpPr>
         <p:spPr>
           <a:xfrm rot="-36000">
-            <a:off x="4830203" y="3130530"/>
+            <a:off x="4830203" y="2813030"/>
             <a:ext cx="1521206" cy="146050"/>
           </a:xfrm>
           <a:prstGeom prst="rect">
@@ -9362,86 +9878,19 @@
       </p:sp>
       <p:sp>
         <p:nvSpPr>
-          <p:cNvPr id="20" name="text-19"/>
-          <p:cNvSpPr txBox="1"/>
+          <p:cNvPr id="20" name="shape-19"/>
+          <p:cNvSpPr/>
           <p:nvPr/>
         </p:nvSpPr>
         <p:spPr>
           <a:xfrm rot="-60000">
-            <a:off x="457200" y="3935710"/>
-            <a:ext cx="6300216" cy="520700"/>
-          </a:xfrm>
-          <a:prstGeom prst="rect">
-            <a:avLst/>
-          </a:prstGeom>
-          <a:noFill/>
-          <a:ln/>
-        </p:spPr>
-        <p:txBody>
-          <a:bodyPr wrap="square" lIns="0" tIns="0" rIns="0" bIns="0" rtlCol="0" anchor="t"/>
-          <a:lstStyle/>
-          <a:p>
-            <a:pPr algn="l" indent="0" marL="0">
-              <a:lnSpc>
-                <a:spcPts val="2040"/>
-              </a:lnSpc>
-              <a:buNone/>
-            </a:pPr>
-            <a:r>
-              <a:rPr lang="en-US" sz="1700" i="1" dirty="0">
-                <a:solidFill>
-                  <a:srgbClr val="0A0A0A"/>
-                </a:solidFill>
-                <a:latin typeface="Noto Serif Display Light" pitchFamily="34" charset="0"/>
-                <a:ea typeface="Noto Serif Display Light" pitchFamily="34" charset="-122"/>
-                <a:cs typeface="Noto Serif Display Light" pitchFamily="34" charset="-120"/>
-              </a:rPr>
-              <a:t>Орыс тілін мектепте үйренген, ағылшыны әлсіздеу болар еді. Есесіне математикасы мықты.</a:t>
-            </a:r>
-            <a:endParaRPr lang="en-US" sz="1700" dirty="0"/>
-          </a:p>
-        </p:txBody>
-      </p:sp>
-      <p:sp>
-        <p:nvSpPr>
-          <p:cNvPr id="21" name="shape-20"/>
-          <p:cNvSpPr/>
-          <p:nvPr/>
-        </p:nvSpPr>
-        <p:spPr>
-          <a:xfrm rot="48000">
-            <a:off x="457200" y="5208389"/>
-            <a:ext cx="5943600" cy="1600200"/>
-          </a:xfrm>
-          <a:prstGeom prst="rect">
-            <a:avLst/>
-          </a:prstGeom>
-          <a:solidFill>
-            <a:srgbClr val="FFFFFF"/>
-          </a:solidFill>
-          <a:ln/>
-          <a:effectLst>
-            <a:outerShdw sx="100000" sy="100000" kx="0" ky="0" algn="bl" rotWithShape="0" blurRad="177800" dist="76200" dir="5400000">
-              <a:srgbClr val="000000">
-                <a:alpha val="22000"/>
-              </a:srgbClr>
-            </a:outerShdw>
-          </a:effectLst>
-        </p:spPr>
-      </p:sp>
-      <p:sp>
-        <p:nvSpPr>
-          <p:cNvPr id="22" name="shape-21"/>
-          <p:cNvSpPr/>
-          <p:nvPr/>
-        </p:nvSpPr>
-        <p:spPr>
-          <a:xfrm rot="-432000">
-            <a:off x="5712179" y="5052035"/>
-            <a:ext cx="533400" cy="533400"/>
-          </a:xfrm>
-          <a:prstGeom prst="ellipse">
-            <a:avLst/>
+            <a:off x="457646" y="3302000"/>
+            <a:ext cx="4933950" cy="419100"/>
+          </a:xfrm>
+          <a:prstGeom prst="roundRect">
+            <a:avLst>
+              <a:gd name="adj" fmla="val 50000"/>
+            </a:avLst>
           </a:prstGeom>
           <a:solidFill>
             <a:srgbClr val="FAF8F3"/>
@@ -9454,9 +9903,187 @@
           </a:ln>
         </p:spPr>
       </p:sp>
+      <p:sp>
+        <p:nvSpPr>
+          <p:cNvPr id="21" name="text-20"/>
+          <p:cNvSpPr txBox="1"/>
+          <p:nvPr/>
+        </p:nvSpPr>
+        <p:spPr>
+          <a:xfrm rot="-60000">
+            <a:off x="622137" y="3489272"/>
+            <a:ext cx="646176" cy="146050"/>
+          </a:xfrm>
+          <a:prstGeom prst="rect">
+            <a:avLst/>
+          </a:prstGeom>
+          <a:noFill/>
+          <a:ln/>
+        </p:spPr>
+        <p:txBody>
+          <a:bodyPr wrap="square" lIns="0" tIns="0" rIns="0" bIns="0" rtlCol="0" anchor="t"/>
+          <a:lstStyle/>
+          <a:p>
+            <a:pPr algn="l" indent="0" marL="0">
+              <a:lnSpc>
+                <a:spcPts val="1080"/>
+              </a:lnSpc>
+              <a:buNone/>
+            </a:pPr>
+            <a:r>
+              <a:rPr lang="en-US" sz="900" spc="140" kern="0" dirty="0">
+                <a:solidFill>
+                  <a:srgbClr val="9C4F22"/>
+                </a:solidFill>
+                <a:latin typeface="IBM Plex Mono" pitchFamily="34" charset="0"/>
+                <a:ea typeface="IBM Plex Mono" pitchFamily="34" charset="-122"/>
+                <a:cs typeface="IBM Plex Mono" pitchFamily="34" charset="-120"/>
+              </a:rPr>
+              <a:t>МЕКТЕБІ</a:t>
+            </a:r>
+            <a:endParaRPr lang="en-US" sz="900" dirty="0"/>
+          </a:p>
+        </p:txBody>
+      </p:sp>
+      <p:sp>
+        <p:nvSpPr>
+          <p:cNvPr id="22" name="text-21"/>
+          <p:cNvSpPr txBox="1"/>
+          <p:nvPr/>
+        </p:nvSpPr>
+        <p:spPr>
+          <a:xfrm rot="-60000">
+            <a:off x="1345847" y="3397296"/>
+            <a:ext cx="4112641" cy="215900"/>
+          </a:xfrm>
+          <a:prstGeom prst="rect">
+            <a:avLst/>
+          </a:prstGeom>
+          <a:noFill/>
+          <a:ln/>
+        </p:spPr>
+        <p:txBody>
+          <a:bodyPr wrap="square" lIns="0" tIns="0" rIns="0" bIns="0" rtlCol="0" anchor="t"/>
+          <a:lstStyle/>
+          <a:p>
+            <a:pPr algn="l" indent="0" marL="0">
+              <a:lnSpc>
+                <a:spcPts val="1560"/>
+              </a:lnSpc>
+              <a:buNone/>
+            </a:pPr>
+            <a:r>
+              <a:rPr lang="en-US" sz="1300" b="1" dirty="0">
+                <a:solidFill>
+                  <a:srgbClr val="0A0A0A"/>
+                </a:solidFill>
+                <a:latin typeface="Geist" pitchFamily="34" charset="0"/>
+                <a:ea typeface="Geist" pitchFamily="34" charset="-122"/>
+                <a:cs typeface="Geist" pitchFamily="34" charset="-120"/>
+              </a:rPr>
+              <a:t>Павлодардағы Назарбаев Зияткерлік мектебі</a:t>
+            </a:r>
+            <a:endParaRPr lang="en-US" sz="1300" dirty="0"/>
+          </a:p>
+        </p:txBody>
+      </p:sp>
+      <p:sp>
+        <p:nvSpPr>
+          <p:cNvPr id="23" name="text-22"/>
+          <p:cNvSpPr txBox="1"/>
+          <p:nvPr/>
+        </p:nvSpPr>
+        <p:spPr>
+          <a:xfrm rot="-60000">
+            <a:off x="457200" y="3936305"/>
+            <a:ext cx="6300216" cy="488950"/>
+          </a:xfrm>
+          <a:prstGeom prst="rect">
+            <a:avLst/>
+          </a:prstGeom>
+          <a:noFill/>
+          <a:ln/>
+        </p:spPr>
+        <p:txBody>
+          <a:bodyPr wrap="square" lIns="0" tIns="0" rIns="0" bIns="0" rtlCol="0" anchor="t"/>
+          <a:lstStyle/>
+          <a:p>
+            <a:pPr algn="l" indent="0" marL="0">
+              <a:lnSpc>
+                <a:spcPts val="1920"/>
+              </a:lnSpc>
+              <a:buNone/>
+            </a:pPr>
+            <a:r>
+              <a:rPr lang="en-US" sz="1600" i="1" dirty="0">
+                <a:solidFill>
+                  <a:srgbClr val="0A0A0A"/>
+                </a:solidFill>
+                <a:latin typeface="Noto Serif Display Light" pitchFamily="34" charset="0"/>
+                <a:ea typeface="Noto Serif Display Light" pitchFamily="34" charset="-122"/>
+                <a:cs typeface="Noto Serif Display Light" pitchFamily="34" charset="-120"/>
+              </a:rPr>
+              <a:t>Математикасы бала кезден керемет, ал Reading &amp; Writing-ке көп еңбек сіңірген.</a:t>
+            </a:r>
+            <a:endParaRPr lang="en-US" sz="1600" dirty="0"/>
+          </a:p>
+        </p:txBody>
+      </p:sp>
+      <p:sp>
+        <p:nvSpPr>
+          <p:cNvPr id="24" name="shape-23"/>
+          <p:cNvSpPr/>
+          <p:nvPr/>
+        </p:nvSpPr>
+        <p:spPr>
+          <a:xfrm rot="48000">
+            <a:off x="457200" y="4762302"/>
+            <a:ext cx="5943600" cy="1892300"/>
+          </a:xfrm>
+          <a:prstGeom prst="rect">
+            <a:avLst/>
+          </a:prstGeom>
+          <a:solidFill>
+            <a:srgbClr val="FFFFFF"/>
+          </a:solidFill>
+          <a:ln/>
+          <a:effectLst>
+            <a:outerShdw sx="100000" sy="100000" kx="0" ky="0" algn="bl" rotWithShape="0" blurRad="177800" dist="76200" dir="5400000">
+              <a:srgbClr val="000000">
+                <a:alpha val="22000"/>
+              </a:srgbClr>
+            </a:outerShdw>
+          </a:effectLst>
+        </p:spPr>
+      </p:sp>
+      <p:sp>
+        <p:nvSpPr>
+          <p:cNvPr id="25" name="shape-24"/>
+          <p:cNvSpPr/>
+          <p:nvPr/>
+        </p:nvSpPr>
+        <p:spPr>
+          <a:xfrm rot="-432000">
+            <a:off x="5714196" y="4607549"/>
+            <a:ext cx="533400" cy="533400"/>
+          </a:xfrm>
+          <a:prstGeom prst="ellipse">
+            <a:avLst/>
+          </a:prstGeom>
+          <a:solidFill>
+            <a:srgbClr val="FAF8F3"/>
+          </a:solidFill>
+          <a:ln w="12700">
+            <a:solidFill>
+              <a:srgbClr val="9C4F22"/>
+            </a:solidFill>
+            <a:prstDash val="solid"/>
+          </a:ln>
+        </p:spPr>
+      </p:sp>
       <p:pic>
         <p:nvPicPr>
-          <p:cNvPr id="23" name="svg-22" descr="preencoded.png">    </p:cNvPr>
+          <p:cNvPr id="26" name="svg-25" descr="preencoded.png">    </p:cNvPr>
           <p:cNvPicPr>
             <a:picLocks noChangeAspect="1"/>
           </p:cNvPicPr>
@@ -9470,7 +10097,7 @@
         </p:blipFill>
         <p:spPr>
           <a:xfrm rot="-432000">
-            <a:off x="5832829" y="5172685"/>
+            <a:off x="5834846" y="4728199"/>
             <a:ext cx="292100" cy="292100"/>
           </a:xfrm>
           <a:prstGeom prst="rect">
@@ -9480,14 +10107,14 @@
       </p:pic>
       <p:sp>
         <p:nvSpPr>
-          <p:cNvPr id="24" name="text-23"/>
+          <p:cNvPr id="27" name="text-26"/>
           <p:cNvSpPr txBox="1"/>
           <p:nvPr/>
         </p:nvSpPr>
         <p:spPr>
           <a:xfrm rot="48000">
-            <a:off x="680788" y="5384854"/>
-            <a:ext cx="5842508" cy="146050"/>
+            <a:off x="657760" y="4914970"/>
+            <a:ext cx="5896356" cy="146050"/>
           </a:xfrm>
           <a:prstGeom prst="rect">
             <a:avLst/>
@@ -9522,7 +10149,7 @@
       </p:sp>
       <p:pic>
         <p:nvPicPr>
-          <p:cNvPr id="25" name="svg-24" descr="preencoded.png">    </p:cNvPr>
+          <p:cNvPr id="28" name="svg-27" descr="preencoded.png">    </p:cNvPr>
           <p:cNvPicPr>
             <a:picLocks noChangeAspect="1"/>
           </p:cNvPicPr>
@@ -9536,7 +10163,7 @@
         </p:blipFill>
         <p:spPr>
           <a:xfrm rot="48000">
-            <a:off x="677723" y="5563582"/>
+            <a:off x="654697" y="5093344"/>
             <a:ext cx="190500" cy="190500"/>
           </a:xfrm>
           <a:prstGeom prst="rect">
@@ -9546,33 +10173,33 @@
       </p:pic>
       <p:sp>
         <p:nvSpPr>
-          <p:cNvPr id="26" name="text-25"/>
+          <p:cNvPr id="29" name="text-28"/>
           <p:cNvSpPr txBox="1"/>
           <p:nvPr/>
         </p:nvSpPr>
         <p:spPr>
           <a:xfrm rot="48000">
-            <a:off x="929558" y="5564917"/>
-            <a:ext cx="5330952" cy="438150"/>
-          </a:xfrm>
-          <a:prstGeom prst="rect">
-            <a:avLst/>
-          </a:prstGeom>
-          <a:noFill/>
-          <a:ln/>
-        </p:spPr>
-        <p:txBody>
-          <a:bodyPr wrap="square" lIns="0" tIns="0" rIns="0" bIns="0" rtlCol="0" anchor="t"/>
-          <a:lstStyle/>
-          <a:p>
-            <a:pPr algn="l" indent="0" marL="0">
-              <a:lnSpc>
-                <a:spcPts val="1770"/>
-              </a:lnSpc>
-              <a:buNone/>
-            </a:pPr>
-            <a:r>
-              <a:rPr lang="en-US" sz="1300" dirty="0">
+            <a:off x="907240" y="5108901"/>
+            <a:ext cx="5620385" cy="400050"/>
+          </a:xfrm>
+          <a:prstGeom prst="rect">
+            <a:avLst/>
+          </a:prstGeom>
+          <a:noFill/>
+          <a:ln/>
+        </p:spPr>
+        <p:txBody>
+          <a:bodyPr wrap="square" lIns="0" tIns="0" rIns="0" bIns="0" rtlCol="0" anchor="t"/>
+          <a:lstStyle/>
+          <a:p>
+            <a:pPr algn="l" indent="0" marL="0">
+              <a:lnSpc>
+                <a:spcPts val="1610"/>
+              </a:lnSpc>
+              <a:buNone/>
+            </a:pPr>
+            <a:r>
+              <a:rPr lang="en-US" sz="1200" dirty="0">
                 <a:solidFill>
                   <a:srgbClr val="2B2A27"/>
                 </a:solidFill>
@@ -9580,41 +10207,41 @@
                 <a:ea typeface="Geist" pitchFamily="34" charset="-122"/>
                 <a:cs typeface="Geist" pitchFamily="34" charset="-120"/>
               </a:rPr>
-              <a:t>Халықаралық жер туралы ғылымдар олимпиадасы (IESO): қола медаль.</a:t>
-            </a:r>
-            <a:endParaRPr lang="en-US" sz="1300" dirty="0"/>
-          </a:p>
-        </p:txBody>
-      </p:sp>
-      <p:sp>
-        <p:nvSpPr>
-          <p:cNvPr id="27" name="text-26"/>
+              <a:t>Халықаралық жер туралы ғылымдар олимпиадасы (IESO): күміс медаль. «Ел мақтанышы» төсбелгісінің иегері.</a:t>
+            </a:r>
+            <a:endParaRPr lang="en-US" sz="1200" dirty="0"/>
+          </a:p>
+        </p:txBody>
+      </p:sp>
+      <p:sp>
+        <p:nvSpPr>
+          <p:cNvPr id="30" name="text-29"/>
           <p:cNvSpPr txBox="1"/>
           <p:nvPr/>
         </p:nvSpPr>
         <p:spPr>
           <a:xfrm rot="48000">
-            <a:off x="847958" y="6108035"/>
-            <a:ext cx="5654040" cy="222250"/>
-          </a:xfrm>
-          <a:prstGeom prst="rect">
-            <a:avLst/>
-          </a:prstGeom>
-          <a:noFill/>
-          <a:ln/>
-        </p:spPr>
-        <p:txBody>
-          <a:bodyPr wrap="square" lIns="0" tIns="0" rIns="0" bIns="0" rtlCol="0" anchor="t"/>
-          <a:lstStyle/>
-          <a:p>
-            <a:pPr algn="l" indent="0" marL="0">
-              <a:lnSpc>
-                <a:spcPts val="1770"/>
-              </a:lnSpc>
-              <a:buNone/>
-            </a:pPr>
-            <a:r>
-              <a:rPr lang="en-US" sz="1300" dirty="0">
+            <a:off x="824392" y="5584619"/>
+            <a:ext cx="5707888" cy="406400"/>
+          </a:xfrm>
+          <a:prstGeom prst="rect">
+            <a:avLst/>
+          </a:prstGeom>
+          <a:noFill/>
+          <a:ln/>
+        </p:spPr>
+        <p:txBody>
+          <a:bodyPr wrap="square" lIns="0" tIns="0" rIns="0" bIns="0" rtlCol="0" anchor="t"/>
+          <a:lstStyle/>
+          <a:p>
+            <a:pPr algn="l" indent="0" marL="0">
+              <a:lnSpc>
+                <a:spcPts val="1610"/>
+              </a:lnSpc>
+              <a:buNone/>
+            </a:pPr>
+            <a:r>
+              <a:rPr lang="en-US" sz="1200" dirty="0">
                 <a:solidFill>
                   <a:srgbClr val="2B2A27"/>
                 </a:solidFill>
@@ -9622,57 +10249,99 @@
                 <a:ea typeface="Geist" pitchFamily="34" charset="-122"/>
                 <a:cs typeface="Geist" pitchFamily="34" charset="-120"/>
               </a:rPr>
-              <a:t>Туған өлкенің кен орындарының картасы: жеке зерттеу жобасы.</a:t>
-            </a:r>
-            <a:endParaRPr lang="en-US" sz="1300" dirty="0"/>
-          </a:p>
-        </p:txBody>
-      </p:sp>
-      <p:sp>
-        <p:nvSpPr>
-          <p:cNvPr id="28" name="text-27"/>
+              <a:t>Туған өлкенің кен орындарының морфологиясы: жеке зерттеу жобасы, мақаласы Q1 ғылыми журналында жарияланған.</a:t>
+            </a:r>
+            <a:endParaRPr lang="en-US" sz="1200" dirty="0"/>
+          </a:p>
+        </p:txBody>
+      </p:sp>
+      <p:sp>
+        <p:nvSpPr>
+          <p:cNvPr id="31" name="text-30"/>
           <p:cNvSpPr txBox="1"/>
           <p:nvPr/>
         </p:nvSpPr>
         <p:spPr>
           <a:xfrm rot="48000">
-            <a:off x="843937" y="6396038"/>
-            <a:ext cx="5654040" cy="222250"/>
-          </a:xfrm>
-          <a:prstGeom prst="rect">
-            <a:avLst/>
-          </a:prstGeom>
-          <a:noFill/>
-          <a:ln/>
-        </p:spPr>
-        <p:txBody>
-          <a:bodyPr wrap="square" lIns="0" tIns="0" rIns="0" bIns="0" rtlCol="0" anchor="t"/>
-          <a:lstStyle/>
-          <a:p>
-            <a:pPr algn="l" indent="0" marL="0">
-              <a:lnSpc>
-                <a:spcPts val="1770"/>
-              </a:lnSpc>
-              <a:buNone/>
-            </a:pPr>
-            <a:r>
-              <a:rPr lang="en-US" sz="1300" b="1" dirty="0">
-                <a:solidFill>
-                  <a:srgbClr val="0A0A0A"/>
+            <a:off x="819406" y="6043272"/>
+            <a:ext cx="5707888" cy="203200"/>
+          </a:xfrm>
+          <a:prstGeom prst="rect">
+            <a:avLst/>
+          </a:prstGeom>
+          <a:noFill/>
+          <a:ln/>
+        </p:spPr>
+        <p:txBody>
+          <a:bodyPr wrap="square" lIns="0" tIns="0" rIns="0" bIns="0" rtlCol="0" anchor="t"/>
+          <a:lstStyle/>
+          <a:p>
+            <a:pPr algn="l" indent="0" marL="0">
+              <a:lnSpc>
+                <a:spcPts val="1610"/>
+              </a:lnSpc>
+              <a:buNone/>
+            </a:pPr>
+            <a:r>
+              <a:rPr lang="en-US" sz="1200" dirty="0">
+                <a:solidFill>
+                  <a:srgbClr val="2B2A27"/>
                 </a:solidFill>
                 <a:latin typeface="Geist" pitchFamily="34" charset="0"/>
                 <a:ea typeface="Geist" pitchFamily="34" charset="-122"/>
                 <a:cs typeface="Geist" pitchFamily="34" charset="-120"/>
               </a:rPr>
+              <a:t>Қалалық кітапханада апта сайын балаларға қызықты дәріс өткізеді.</a:t>
+            </a:r>
+            <a:endParaRPr lang="en-US" sz="1200" dirty="0"/>
+          </a:p>
+        </p:txBody>
+      </p:sp>
+      <p:sp>
+        <p:nvSpPr>
+          <p:cNvPr id="32" name="text-31"/>
+          <p:cNvSpPr txBox="1"/>
+          <p:nvPr/>
+        </p:nvSpPr>
+        <p:spPr>
+          <a:xfrm rot="48000">
+            <a:off x="815846" y="6298240"/>
+            <a:ext cx="5707888" cy="203200"/>
+          </a:xfrm>
+          <a:prstGeom prst="rect">
+            <a:avLst/>
+          </a:prstGeom>
+          <a:noFill/>
+          <a:ln/>
+        </p:spPr>
+        <p:txBody>
+          <a:bodyPr wrap="square" lIns="0" tIns="0" rIns="0" bIns="0" rtlCol="0" anchor="t"/>
+          <a:lstStyle/>
+          <a:p>
+            <a:pPr algn="l" indent="0" marL="0">
+              <a:lnSpc>
+                <a:spcPts val="1610"/>
+              </a:lnSpc>
+              <a:buNone/>
+            </a:pPr>
+            <a:r>
+              <a:rPr lang="en-US" sz="1200" b="1" dirty="0">
+                <a:solidFill>
+                  <a:srgbClr val="0A0A0A"/>
+                </a:solidFill>
+                <a:latin typeface="Geist" pitchFamily="34" charset="0"/>
+                <a:ea typeface="Geist" pitchFamily="34" charset="-122"/>
+                <a:cs typeface="Geist" pitchFamily="34" charset="-120"/>
+              </a:rPr>
               <a:t>Оқитын мамандығы: тау-кен немесе геологиялық инженерия.</a:t>
             </a:r>
-            <a:endParaRPr lang="en-US" sz="1300" dirty="0"/>
-          </a:p>
-        </p:txBody>
-      </p:sp>
-      <p:sp>
-        <p:nvSpPr>
-          <p:cNvPr id="29" name="text-28"/>
+            <a:endParaRPr lang="en-US" sz="1200" dirty="0"/>
+          </a:p>
+        </p:txBody>
+      </p:sp>
+      <p:sp>
+        <p:nvSpPr>
+          <p:cNvPr id="33" name="text-32"/>
           <p:cNvSpPr txBox="1"/>
           <p:nvPr/>
         </p:nvSpPr>
@@ -9714,7 +10383,7 @@
       </p:sp>
       <p:sp>
         <p:nvSpPr>
-          <p:cNvPr id="30" name="shape-29"/>
+          <p:cNvPr id="34" name="shape-33"/>
           <p:cNvSpPr/>
           <p:nvPr/>
         </p:nvSpPr>
@@ -9736,7 +10405,7 @@
       </p:sp>
       <p:sp>
         <p:nvSpPr>
-          <p:cNvPr id="31" name="text-30"/>
+          <p:cNvPr id="35" name="text-34"/>
           <p:cNvSpPr txBox="1"/>
           <p:nvPr/>
         </p:nvSpPr>
@@ -9778,7 +10447,7 @@
       </p:sp>
       <p:pic>
         <p:nvPicPr>
-          <p:cNvPr id="32" name="svg-31" descr="preencoded.png">    </p:cNvPr>
+          <p:cNvPr id="36" name="svg-35" descr="preencoded.png">    </p:cNvPr>
           <p:cNvPicPr>
             <a:picLocks noChangeAspect="1"/>
           </p:cNvPicPr>
@@ -9802,7 +10471,7 @@
       </p:pic>
       <p:sp>
         <p:nvSpPr>
-          <p:cNvPr id="33" name="text-32"/>
+          <p:cNvPr id="37" name="text-36"/>
           <p:cNvSpPr txBox="1"/>
           <p:nvPr/>
         </p:nvSpPr>
@@ -10097,14 +10766,140 @@
       </p:sp>
       <p:sp>
         <p:nvSpPr>
-          <p:cNvPr id="8" name="shape-7"/>
+          <p:cNvPr id="8" name="text-7"/>
+          <p:cNvSpPr txBox="1"/>
+          <p:nvPr/>
+        </p:nvSpPr>
+        <p:spPr>
+          <a:xfrm>
+            <a:off x="457200" y="2281833"/>
+            <a:ext cx="3769360" cy="146050"/>
+          </a:xfrm>
+          <a:prstGeom prst="rect">
+            <a:avLst/>
+          </a:prstGeom>
+          <a:noFill/>
+          <a:ln/>
+        </p:spPr>
+        <p:txBody>
+          <a:bodyPr wrap="square" lIns="0" tIns="0" rIns="0" bIns="0" rtlCol="0" anchor="t"/>
+          <a:lstStyle/>
+          <a:p>
+            <a:pPr algn="l" indent="0" marL="0">
+              <a:lnSpc>
+                <a:spcPts val="1080"/>
+              </a:lnSpc>
+              <a:buNone/>
+            </a:pPr>
+            <a:r>
+              <a:rPr lang="en-US" sz="900" spc="140" kern="0" dirty="0">
+                <a:solidFill>
+                  <a:srgbClr val="1B6676"/>
+                </a:solidFill>
+                <a:latin typeface="IBM Plex Mono" pitchFamily="34" charset="0"/>
+                <a:ea typeface="IBM Plex Mono" pitchFamily="34" charset="-122"/>
+                <a:cs typeface="IBM Plex Mono" pitchFamily="34" charset="-120"/>
+              </a:rPr>
+              <a:t>ТУҒАН ЖЕРІ</a:t>
+            </a:r>
+            <a:endParaRPr lang="en-US" sz="900" dirty="0"/>
+          </a:p>
+        </p:txBody>
+      </p:sp>
+      <p:sp>
+        <p:nvSpPr>
+          <p:cNvPr id="9" name="text-8"/>
+          <p:cNvSpPr txBox="1"/>
+          <p:nvPr/>
+        </p:nvSpPr>
+        <p:spPr>
+          <a:xfrm>
+            <a:off x="457200" y="2465338"/>
+            <a:ext cx="3769360" cy="215900"/>
+          </a:xfrm>
+          <a:prstGeom prst="rect">
+            <a:avLst/>
+          </a:prstGeom>
+          <a:noFill/>
+          <a:ln/>
+        </p:spPr>
+        <p:txBody>
+          <a:bodyPr wrap="square" lIns="0" tIns="0" rIns="0" bIns="0" rtlCol="0" anchor="t"/>
+          <a:lstStyle/>
+          <a:p>
+            <a:pPr algn="l" indent="0" marL="0">
+              <a:lnSpc>
+                <a:spcPts val="1690"/>
+              </a:lnSpc>
+              <a:buNone/>
+            </a:pPr>
+            <a:r>
+              <a:rPr lang="en-US" sz="1300" b="1" dirty="0">
+                <a:solidFill>
+                  <a:srgbClr val="0A0A0A"/>
+                </a:solidFill>
+                <a:latin typeface="Geist" pitchFamily="34" charset="0"/>
+                <a:ea typeface="Geist" pitchFamily="34" charset="-122"/>
+                <a:cs typeface="Geist" pitchFamily="34" charset="-120"/>
+              </a:rPr>
+              <a:t>1835 · Қостанай өңірі, Құсмұрын бекінісі</a:t>
+            </a:r>
+            <a:endParaRPr lang="en-US" sz="1300" dirty="0"/>
+          </a:p>
+        </p:txBody>
+      </p:sp>
+      <p:sp>
+        <p:nvSpPr>
+          <p:cNvPr id="10" name="text-9"/>
+          <p:cNvSpPr txBox="1"/>
+          <p:nvPr/>
+        </p:nvSpPr>
+        <p:spPr>
+          <a:xfrm>
+            <a:off x="457200" y="2720082"/>
+            <a:ext cx="3769360" cy="838200"/>
+          </a:xfrm>
+          <a:prstGeom prst="rect">
+            <a:avLst/>
+          </a:prstGeom>
+          <a:noFill/>
+          <a:ln/>
+        </p:spPr>
+        <p:txBody>
+          <a:bodyPr wrap="square" lIns="0" tIns="0" rIns="0" bIns="0" rtlCol="0" anchor="t"/>
+          <a:lstStyle/>
+          <a:p>
+            <a:pPr algn="l" indent="0" marL="0">
+              <a:lnSpc>
+                <a:spcPts val="1660"/>
+              </a:lnSpc>
+              <a:buNone/>
+            </a:pPr>
+            <a:r>
+              <a:rPr lang="en-US" sz="1200" dirty="0">
+                <a:solidFill>
+                  <a:srgbClr val="2B2A27"/>
+                </a:solidFill>
+                <a:latin typeface="Geist" pitchFamily="34" charset="0"/>
+                <a:ea typeface="Geist" pitchFamily="34" charset="-122"/>
+                <a:cs typeface="Geist" pitchFamily="34" charset="-120"/>
+              </a:rPr>
+              <a:t>Абылай ханның ұрпағы, әкесі Шыңғыс аға сұлтан болған. Балалығы Құсмұрын мен Сырымбетте, әжесі Айғанымның қолында өткен. 12 жасында Омбы кадет корпусына берілген.</a:t>
+            </a:r>
+            <a:endParaRPr lang="en-US" sz="1200" dirty="0"/>
+          </a:p>
+        </p:txBody>
+      </p:sp>
+      <p:sp>
+        <p:nvSpPr>
+          <p:cNvPr id="11" name="shape-10"/>
           <p:cNvSpPr/>
           <p:nvPr/>
         </p:nvSpPr>
         <p:spPr>
           <a:xfrm rot="-48000">
-            <a:off x="457200" y="3176389"/>
-            <a:ext cx="5943600" cy="1498600"/>
+            <a:off x="457200" y="3967162"/>
+            <a:ext cx="5943600" cy="1371600"/>
           </a:xfrm>
           <a:prstGeom prst="rect">
             <a:avLst/>
@@ -10124,13 +10919,13 @@
       </p:sp>
       <p:sp>
         <p:nvSpPr>
-          <p:cNvPr id="9" name="shape-8"/>
+          <p:cNvPr id="12" name="shape-11"/>
           <p:cNvSpPr/>
           <p:nvPr/>
         </p:nvSpPr>
         <p:spPr>
           <a:xfrm rot="-228000">
-            <a:off x="2942623" y="3060771"/>
+            <a:off x="2943551" y="3854514"/>
             <a:ext cx="952500" cy="279400"/>
           </a:xfrm>
           <a:prstGeom prst="rect">
@@ -10146,14 +10941,14 @@
       </p:sp>
       <p:sp>
         <p:nvSpPr>
-          <p:cNvPr id="10" name="text-9"/>
+          <p:cNvPr id="13" name="text-12"/>
           <p:cNvSpPr txBox="1"/>
           <p:nvPr/>
         </p:nvSpPr>
         <p:spPr>
           <a:xfrm rot="-48000">
-            <a:off x="653243" y="3340150"/>
-            <a:ext cx="5869432" cy="146050"/>
+            <a:off x="641117" y="4108496"/>
+            <a:ext cx="5896356" cy="146050"/>
           </a:xfrm>
           <a:prstGeom prst="rect">
             <a:avLst/>
@@ -10188,33 +10983,33 @@
       </p:sp>
       <p:sp>
         <p:nvSpPr>
-          <p:cNvPr id="11" name="text-10"/>
+          <p:cNvPr id="14" name="text-13"/>
           <p:cNvSpPr txBox="1"/>
           <p:nvPr/>
         </p:nvSpPr>
         <p:spPr>
           <a:xfrm rot="-48000">
-            <a:off x="834517" y="3550817"/>
-            <a:ext cx="5680964" cy="222250"/>
-          </a:xfrm>
-          <a:prstGeom prst="rect">
-            <a:avLst/>
-          </a:prstGeom>
-          <a:noFill/>
-          <a:ln/>
-        </p:spPr>
-        <p:txBody>
-          <a:bodyPr wrap="square" lIns="0" tIns="0" rIns="0" bIns="0" rtlCol="0" anchor="t"/>
-          <a:lstStyle/>
-          <a:p>
-            <a:pPr algn="l" indent="0" marL="0">
-              <a:lnSpc>
-                <a:spcPts val="1770"/>
-              </a:lnSpc>
-              <a:buNone/>
-            </a:pPr>
-            <a:r>
-              <a:rPr lang="en-US" sz="1300" dirty="0">
+            <a:off x="822269" y="4316832"/>
+            <a:ext cx="5707888" cy="209550"/>
+          </a:xfrm>
+          <a:prstGeom prst="rect">
+            <a:avLst/>
+          </a:prstGeom>
+          <a:noFill/>
+          <a:ln/>
+        </p:spPr>
+        <p:txBody>
+          <a:bodyPr wrap="square" lIns="0" tIns="0" rIns="0" bIns="0" rtlCol="0" anchor="t"/>
+          <a:lstStyle/>
+          <a:p>
+            <a:pPr algn="l" indent="0" marL="0">
+              <a:lnSpc>
+                <a:spcPts val="1630"/>
+              </a:lnSpc>
+              <a:buNone/>
+            </a:pPr>
+            <a:r>
+              <a:rPr lang="en-US" sz="1200" dirty="0">
                 <a:solidFill>
                   <a:srgbClr val="2B2A27"/>
                 </a:solidFill>
@@ -10224,39 +11019,39 @@
               </a:rPr>
               <a:t>1853 жылы Омбы кадет корпусын бітірген.</a:t>
             </a:r>
-            <a:endParaRPr lang="en-US" sz="1300" dirty="0"/>
-          </a:p>
-        </p:txBody>
-      </p:sp>
-      <p:sp>
-        <p:nvSpPr>
-          <p:cNvPr id="12" name="text-11"/>
+            <a:endParaRPr lang="en-US" sz="1200" dirty="0"/>
+          </a:p>
+        </p:txBody>
+      </p:sp>
+      <p:sp>
+        <p:nvSpPr>
+          <p:cNvPr id="15" name="text-14"/>
           <p:cNvSpPr txBox="1"/>
           <p:nvPr/>
         </p:nvSpPr>
         <p:spPr>
           <a:xfrm rot="-48000">
-            <a:off x="841674" y="3837906"/>
-            <a:ext cx="5680964" cy="673100"/>
-          </a:xfrm>
-          <a:prstGeom prst="rect">
-            <a:avLst/>
-          </a:prstGeom>
-          <a:noFill/>
-          <a:ln/>
-        </p:spPr>
-        <p:txBody>
-          <a:bodyPr wrap="square" lIns="0" tIns="0" rIns="0" bIns="0" rtlCol="0" anchor="t"/>
-          <a:lstStyle/>
-          <a:p>
-            <a:pPr algn="l" indent="0" marL="0">
-              <a:lnSpc>
-                <a:spcPts val="1770"/>
-              </a:lnSpc>
-              <a:buNone/>
-            </a:pPr>
-            <a:r>
-              <a:rPr lang="en-US" sz="1300" dirty="0">
+            <a:off x="828941" y="4588248"/>
+            <a:ext cx="5707888" cy="622300"/>
+          </a:xfrm>
+          <a:prstGeom prst="rect">
+            <a:avLst/>
+          </a:prstGeom>
+          <a:noFill/>
+          <a:ln/>
+        </p:spPr>
+        <p:txBody>
+          <a:bodyPr wrap="square" lIns="0" tIns="0" rIns="0" bIns="0" rtlCol="0" anchor="t"/>
+          <a:lstStyle/>
+          <a:p>
+            <a:pPr algn="l" indent="0" marL="0">
+              <a:lnSpc>
+                <a:spcPts val="1630"/>
+              </a:lnSpc>
+              <a:buNone/>
+            </a:pPr>
+            <a:r>
+              <a:rPr lang="en-US" sz="1200" dirty="0">
                 <a:solidFill>
                   <a:srgbClr val="2B2A27"/>
                 </a:solidFill>
@@ -10266,24 +11061,24 @@
               </a:rPr>
               <a:t>1858–1859 жылдары көпес кейпінде Қашғарға барып, Шығыс Түркістан туралы материал жинаған. «Манас» жырының бір бөлігін алғаш жазып алған.</a:t>
             </a:r>
-            <a:endParaRPr lang="en-US" sz="1300" dirty="0"/>
-          </a:p>
-        </p:txBody>
-      </p:sp>
-      <p:sp>
-        <p:nvSpPr>
-          <p:cNvPr id="13" name="shape-12"/>
+            <a:endParaRPr lang="en-US" sz="1200" dirty="0"/>
+          </a:p>
+        </p:txBody>
+      </p:sp>
+      <p:sp>
+        <p:nvSpPr>
+          <p:cNvPr id="16" name="shape-15"/>
           <p:cNvSpPr/>
           <p:nvPr/>
         </p:nvSpPr>
         <p:spPr>
           <a:xfrm rot="48000">
-            <a:off x="457200" y="4815284"/>
-            <a:ext cx="5943600" cy="984250"/>
+            <a:off x="457200" y="5439569"/>
+            <a:ext cx="5943600" cy="850900"/>
           </a:xfrm>
           <a:prstGeom prst="roundRect">
             <a:avLst>
-              <a:gd name="adj" fmla="val 16774"/>
+              <a:gd name="adj" fmla="val 19403"/>
             </a:avLst>
           </a:prstGeom>
           <a:solidFill>
@@ -10299,14 +11094,14 @@
       </p:sp>
       <p:sp>
         <p:nvSpPr>
-          <p:cNvPr id="14" name="text-13"/>
+          <p:cNvPr id="17" name="text-16"/>
           <p:cNvSpPr txBox="1"/>
           <p:nvPr/>
         </p:nvSpPr>
         <p:spPr>
           <a:xfrm rot="48000">
-            <a:off x="676635" y="4981203"/>
-            <a:ext cx="5842508" cy="146050"/>
+            <a:off x="663559" y="5565797"/>
+            <a:ext cx="5869432" cy="146050"/>
           </a:xfrm>
           <a:prstGeom prst="rect">
             <a:avLst/>
@@ -10341,33 +11136,33 @@
       </p:sp>
       <p:sp>
         <p:nvSpPr>
-          <p:cNvPr id="15" name="text-14"/>
+          <p:cNvPr id="18" name="text-17"/>
           <p:cNvSpPr txBox="1"/>
           <p:nvPr/>
         </p:nvSpPr>
         <p:spPr>
           <a:xfrm rot="48000">
-            <a:off x="671726" y="5177225"/>
-            <a:ext cx="5842508" cy="457200"/>
-          </a:xfrm>
-          <a:prstGeom prst="rect">
-            <a:avLst/>
-          </a:prstGeom>
-          <a:noFill/>
-          <a:ln/>
-        </p:spPr>
-        <p:txBody>
-          <a:bodyPr wrap="square" lIns="0" tIns="0" rIns="0" bIns="0" rtlCol="0" anchor="t"/>
-          <a:lstStyle/>
-          <a:p>
-            <a:pPr algn="l" indent="0" marL="0">
-              <a:lnSpc>
-                <a:spcPts val="1790"/>
-              </a:lnSpc>
-              <a:buNone/>
-            </a:pPr>
-            <a:r>
-              <a:rPr lang="en-US" sz="1300" dirty="0">
+            <a:off x="659114" y="5750710"/>
+            <a:ext cx="5869432" cy="412750"/>
+          </a:xfrm>
+          <a:prstGeom prst="rect">
+            <a:avLst/>
+          </a:prstGeom>
+          <a:noFill/>
+          <a:ln/>
+        </p:spPr>
+        <p:txBody>
+          <a:bodyPr wrap="square" lIns="0" tIns="0" rIns="0" bIns="0" rtlCol="0" anchor="t"/>
+          <a:lstStyle/>
+          <a:p>
+            <a:pPr algn="l" indent="0" marL="0">
+              <a:lnSpc>
+                <a:spcPts val="1630"/>
+              </a:lnSpc>
+              <a:buNone/>
+            </a:pPr>
+            <a:r>
+              <a:rPr lang="en-US" sz="1200" dirty="0">
                 <a:solidFill>
                   <a:srgbClr val="0A0A0A"/>
                 </a:solidFill>
@@ -10377,24 +11172,24 @@
               </a:rPr>
               <a:t>Шын аты Мұхаммед-Қанафия, Шоқан бала кездегі есімі. Достоевскиймен дос болған, жазушы оны «бауырым» деп атаған.</a:t>
             </a:r>
-            <a:endParaRPr lang="en-US" sz="1300" dirty="0"/>
-          </a:p>
-        </p:txBody>
-      </p:sp>
-      <p:sp>
-        <p:nvSpPr>
-          <p:cNvPr id="16" name="shape-15"/>
+            <a:endParaRPr lang="en-US" sz="1200" dirty="0"/>
+          </a:p>
+        </p:txBody>
+      </p:sp>
+      <p:sp>
+        <p:nvSpPr>
+          <p:cNvPr id="19" name="shape-18"/>
           <p:cNvSpPr/>
           <p:nvPr/>
         </p:nvSpPr>
         <p:spPr>
           <a:xfrm rot="-36000">
-            <a:off x="457200" y="5938044"/>
-            <a:ext cx="5943600" cy="704850"/>
+            <a:off x="457200" y="6391672"/>
+            <a:ext cx="5943600" cy="596900"/>
           </a:xfrm>
           <a:prstGeom prst="roundRect">
             <a:avLst>
-              <a:gd name="adj" fmla="val 23423"/>
+              <a:gd name="adj" fmla="val 27660"/>
             </a:avLst>
           </a:prstGeom>
           <a:solidFill>
@@ -10405,14 +11200,14 @@
       </p:sp>
       <p:sp>
         <p:nvSpPr>
-          <p:cNvPr id="17" name="text-16"/>
+          <p:cNvPr id="20" name="text-19"/>
           <p:cNvSpPr txBox="1"/>
           <p:nvPr/>
         </p:nvSpPr>
         <p:spPr>
           <a:xfrm rot="-36000">
-            <a:off x="658941" y="6078148"/>
-            <a:ext cx="5869432" cy="146050"/>
+            <a:off x="646416" y="6494469"/>
+            <a:ext cx="5896356" cy="146050"/>
           </a:xfrm>
           <a:prstGeom prst="rect">
             <a:avLst/>
@@ -10447,33 +11242,33 @@
       </p:sp>
       <p:sp>
         <p:nvSpPr>
-          <p:cNvPr id="18" name="text-17"/>
+          <p:cNvPr id="21" name="text-20"/>
           <p:cNvSpPr txBox="1"/>
           <p:nvPr/>
         </p:nvSpPr>
         <p:spPr>
           <a:xfrm rot="-36000">
-            <a:off x="661431" y="6274588"/>
-            <a:ext cx="5869432" cy="228600"/>
-          </a:xfrm>
-          <a:prstGeom prst="rect">
-            <a:avLst/>
-          </a:prstGeom>
-          <a:noFill/>
-          <a:ln/>
-        </p:spPr>
-        <p:txBody>
-          <a:bodyPr wrap="square" lIns="0" tIns="0" rIns="0" bIns="0" rtlCol="0" anchor="t"/>
-          <a:lstStyle/>
-          <a:p>
-            <a:pPr algn="l" indent="0" marL="0">
-              <a:lnSpc>
-                <a:spcPts val="1790"/>
-              </a:lnSpc>
-              <a:buNone/>
-            </a:pPr>
-            <a:r>
-              <a:rPr lang="en-US" sz="1300" dirty="0">
+            <a:off x="648664" y="6677417"/>
+            <a:ext cx="5896356" cy="209550"/>
+          </a:xfrm>
+          <a:prstGeom prst="rect">
+            <a:avLst/>
+          </a:prstGeom>
+          <a:noFill/>
+          <a:ln/>
+        </p:spPr>
+        <p:txBody>
+          <a:bodyPr wrap="square" lIns="0" tIns="0" rIns="0" bIns="0" rtlCol="0" anchor="t"/>
+          <a:lstStyle/>
+          <a:p>
+            <a:pPr algn="l" indent="0" marL="0">
+              <a:lnSpc>
+                <a:spcPts val="1630"/>
+              </a:lnSpc>
+              <a:buNone/>
+            </a:pPr>
+            <a:r>
+              <a:rPr lang="en-US" sz="1200" dirty="0">
                 <a:solidFill>
                   <a:srgbClr val="FAF8F3"/>
                 </a:solidFill>
@@ -10481,15 +11276,15 @@
                 <a:ea typeface="Geist" pitchFamily="34" charset="-122"/>
                 <a:cs typeface="Geist" pitchFamily="34" charset="-120"/>
               </a:rPr>
-              <a:t>1865 жылы, 30 жасқа толмай қайтыс болған.</a:t>
-            </a:r>
-            <a:endParaRPr lang="en-US" sz="1300" dirty="0"/>
-          </a:p>
-        </p:txBody>
-      </p:sp>
-      <p:sp>
-        <p:nvSpPr>
-          <p:cNvPr id="19" name="text-18"/>
+              <a:t>«Аққан жұлдызымыз» 1865 жылы, 30 жасқа толмай қайтыс болған.</a:t>
+            </a:r>
+            <a:endParaRPr lang="en-US" sz="1200" dirty="0"/>
+          </a:p>
+        </p:txBody>
+      </p:sp>
+      <p:sp>
+        <p:nvSpPr>
+          <p:cNvPr id="22" name="text-21"/>
           <p:cNvSpPr txBox="1"/>
           <p:nvPr/>
         </p:nvSpPr>
@@ -10531,7 +11326,7 @@
       </p:sp>
       <p:sp>
         <p:nvSpPr>
-          <p:cNvPr id="20" name="shape-19"/>
+          <p:cNvPr id="23" name="shape-22"/>
           <p:cNvSpPr/>
           <p:nvPr/>
         </p:nvSpPr>
@@ -10553,7 +11348,7 @@
       </p:sp>
       <p:sp>
         <p:nvSpPr>
-          <p:cNvPr id="21" name="text-20"/>
+          <p:cNvPr id="24" name="text-23"/>
           <p:cNvSpPr txBox="1"/>
           <p:nvPr/>
         </p:nvSpPr>
@@ -10595,7 +11390,7 @@
       </p:sp>
       <p:pic>
         <p:nvPicPr>
-          <p:cNvPr id="22" name="svg-21" descr="preencoded.png">    </p:cNvPr>
+          <p:cNvPr id="25" name="svg-24" descr="preencoded.png">    </p:cNvPr>
           <p:cNvPicPr>
             <a:picLocks noChangeAspect="1"/>
           </p:cNvPicPr>
@@ -10619,7 +11414,7 @@
       </p:pic>
       <p:sp>
         <p:nvSpPr>
-          <p:cNvPr id="23" name="shape-22"/>
+          <p:cNvPr id="26" name="shape-25"/>
           <p:cNvSpPr/>
           <p:nvPr/>
         </p:nvSpPr>
@@ -10646,7 +11441,7 @@
       </p:sp>
       <p:sp>
         <p:nvSpPr>
-          <p:cNvPr id="24" name="shape-23"/>
+          <p:cNvPr id="27" name="shape-26"/>
           <p:cNvSpPr/>
           <p:nvPr/>
         </p:nvSpPr>
@@ -10668,7 +11463,7 @@
       </p:sp>
       <p:pic>
         <p:nvPicPr>
-          <p:cNvPr id="25" name="img-24" descr="preencoded.png">    </p:cNvPr>
+          <p:cNvPr id="28" name="img-27" descr="preencoded.png">    </p:cNvPr>
           <p:cNvPicPr>
             <a:picLocks noChangeAspect="1"/>
           </p:cNvPicPr>
@@ -10692,7 +11487,7 @@
       </p:pic>
       <p:sp>
         <p:nvSpPr>
-          <p:cNvPr id="26" name="text-25"/>
+          <p:cNvPr id="29" name="text-28"/>
           <p:cNvSpPr txBox="1"/>
           <p:nvPr/>
         </p:nvSpPr>
@@ -10734,7 +11529,7 @@
       </p:sp>
       <p:sp>
         <p:nvSpPr>
-          <p:cNvPr id="27" name="text-26"/>
+          <p:cNvPr id="30" name="text-29"/>
           <p:cNvSpPr txBox="1"/>
           <p:nvPr/>
         </p:nvSpPr>
@@ -11035,7 +11830,7 @@
         </p:nvSpPr>
         <p:spPr>
           <a:xfrm rot="-90000">
-            <a:off x="458143" y="2286000"/>
+            <a:off x="458143" y="1968500"/>
             <a:ext cx="2311400" cy="1117600"/>
           </a:xfrm>
           <a:prstGeom prst="roundRect">
@@ -11057,7 +11852,7 @@
         </p:nvSpPr>
         <p:spPr>
           <a:xfrm rot="-90000">
-            <a:off x="588783" y="2425819"/>
+            <a:off x="588783" y="2108319"/>
             <a:ext cx="2153920" cy="146050"/>
           </a:xfrm>
           <a:prstGeom prst="rect">
@@ -11099,7 +11894,7 @@
         </p:nvSpPr>
         <p:spPr>
           <a:xfrm rot="-90000">
-            <a:off x="598009" y="2609848"/>
+            <a:off x="598009" y="2292348"/>
             <a:ext cx="2153920" cy="482600"/>
           </a:xfrm>
           <a:prstGeom prst="rect">
@@ -11127,7 +11922,7 @@
                 <a:ea typeface="Noto Serif Display Light" pitchFamily="34" charset="-122"/>
                 <a:cs typeface="Noto Serif Display Light" pitchFamily="34" charset="-120"/>
               </a:rPr>
-              <a:t>1450</a:t>
+              <a:t>1480</a:t>
             </a:r>
             <a:endParaRPr lang="en-US" sz="3800" dirty="0"/>
           </a:p>
@@ -11141,7 +11936,7 @@
         </p:nvSpPr>
         <p:spPr>
           <a:xfrm rot="-90000">
-            <a:off x="607234" y="3130427"/>
+            <a:off x="607234" y="2812927"/>
             <a:ext cx="2153920" cy="146050"/>
           </a:xfrm>
           <a:prstGeom prst="rect">
@@ -11169,7 +11964,7 @@
                 <a:ea typeface="IBM Plex Mono" pitchFamily="34" charset="-122"/>
                 <a:cs typeface="IBM Plex Mono" pitchFamily="34" charset="-120"/>
               </a:rPr>
-              <a:t>RW 770 · Math 680</a:t>
+              <a:t>RW 770 · Math 710</a:t>
             </a:r>
             <a:endParaRPr lang="en-US" sz="900" dirty="0"/>
           </a:p>
@@ -11183,7 +11978,7 @@
         </p:nvSpPr>
         <p:spPr>
           <a:xfrm rot="60000">
-            <a:off x="2871589" y="2286000"/>
+            <a:off x="2871589" y="1968500"/>
             <a:ext cx="1714500" cy="1117600"/>
           </a:xfrm>
           <a:prstGeom prst="roundRect">
@@ -11205,7 +12000,7 @@
         </p:nvSpPr>
         <p:spPr>
           <a:xfrm rot="60000">
-            <a:off x="3017329" y="2425753"/>
+            <a:off x="3017329" y="2108253"/>
             <a:ext cx="1521206" cy="146050"/>
           </a:xfrm>
           <a:prstGeom prst="rect">
@@ -11247,7 +12042,7 @@
         </p:nvSpPr>
         <p:spPr>
           <a:xfrm rot="60000">
-            <a:off x="3011178" y="2609849"/>
+            <a:off x="3011178" y="2292349"/>
             <a:ext cx="1521206" cy="482600"/>
           </a:xfrm>
           <a:prstGeom prst="rect">
@@ -11275,7 +12070,7 @@
                 <a:ea typeface="Noto Serif Display Light" pitchFamily="34" charset="-122"/>
                 <a:cs typeface="Noto Serif Display Light" pitchFamily="34" charset="-120"/>
               </a:rPr>
-              <a:t>8.0</a:t>
+              <a:t>8.5</a:t>
             </a:r>
             <a:endParaRPr lang="en-US" sz="3800" dirty="0"/>
           </a:p>
@@ -11289,7 +12084,7 @@
         </p:nvSpPr>
         <p:spPr>
           <a:xfrm rot="60000">
-            <a:off x="3005028" y="3130495"/>
+            <a:off x="3005028" y="2812995"/>
             <a:ext cx="1521206" cy="146050"/>
           </a:xfrm>
           <a:prstGeom prst="rect">
@@ -11331,7 +12126,7 @@
         </p:nvSpPr>
         <p:spPr>
           <a:xfrm rot="-36000">
-            <a:off x="4686746" y="2286000"/>
+            <a:off x="4686746" y="1968500"/>
             <a:ext cx="1714500" cy="1117600"/>
           </a:xfrm>
           <a:prstGeom prst="roundRect">
@@ -11353,7 +12148,7 @@
         </p:nvSpPr>
         <p:spPr>
           <a:xfrm rot="-36000">
-            <a:off x="4822822" y="2425719"/>
+            <a:off x="4822822" y="2108219"/>
             <a:ext cx="1521206" cy="146050"/>
           </a:xfrm>
           <a:prstGeom prst="rect">
@@ -11395,7 +12190,7 @@
         </p:nvSpPr>
         <p:spPr>
           <a:xfrm rot="-36000">
-            <a:off x="4826513" y="2609850"/>
+            <a:off x="4826513" y="2292350"/>
             <a:ext cx="1521206" cy="482600"/>
           </a:xfrm>
           <a:prstGeom prst="rect">
@@ -11423,7 +12218,7 @@
                 <a:ea typeface="Noto Serif Display Light" pitchFamily="34" charset="-122"/>
                 <a:cs typeface="Noto Serif Display Light" pitchFamily="34" charset="-120"/>
               </a:rPr>
-              <a:t>4.4</a:t>
+              <a:t>4.9</a:t>
             </a:r>
             <a:endParaRPr lang="en-US" sz="3800" dirty="0"/>
           </a:p>
@@ -11437,7 +12232,7 @@
         </p:nvSpPr>
         <p:spPr>
           <a:xfrm rot="-36000">
-            <a:off x="4830203" y="3130530"/>
+            <a:off x="4830203" y="2813030"/>
             <a:ext cx="1521206" cy="146050"/>
           </a:xfrm>
           <a:prstGeom prst="rect">
@@ -11473,86 +12268,19 @@
       </p:sp>
       <p:sp>
         <p:nvSpPr>
-          <p:cNvPr id="20" name="text-19"/>
-          <p:cNvSpPr txBox="1"/>
+          <p:cNvPr id="20" name="shape-19"/>
+          <p:cNvSpPr/>
           <p:nvPr/>
         </p:nvSpPr>
         <p:spPr>
           <a:xfrm rot="-60000">
-            <a:off x="457200" y="3935710"/>
-            <a:ext cx="6300216" cy="520700"/>
-          </a:xfrm>
-          <a:prstGeom prst="rect">
-            <a:avLst/>
-          </a:prstGeom>
-          <a:noFill/>
-          <a:ln/>
-        </p:spPr>
-        <p:txBody>
-          <a:bodyPr wrap="square" lIns="0" tIns="0" rIns="0" bIns="0" rtlCol="0" anchor="t"/>
-          <a:lstStyle/>
-          <a:p>
-            <a:pPr algn="l" indent="0" marL="0">
-              <a:lnSpc>
-                <a:spcPts val="2040"/>
-              </a:lnSpc>
-              <a:buNone/>
-            </a:pPr>
-            <a:r>
-              <a:rPr lang="en-US" sz="1700" i="1" dirty="0">
-                <a:solidFill>
-                  <a:srgbClr val="0A0A0A"/>
-                </a:solidFill>
-                <a:latin typeface="Noto Serif Display Light" pitchFamily="34" charset="0"/>
-                <a:ea typeface="Noto Serif Display Light" pitchFamily="34" charset="-122"/>
-                <a:cs typeface="Noto Serif Display Light" pitchFamily="34" charset="-120"/>
-              </a:rPr>
-              <a:t>Тілдерге бейім. Дәл ғылымдардан гөрі тарих пен саяхатты жақсы көрер еді.</a:t>
-            </a:r>
-            <a:endParaRPr lang="en-US" sz="1700" dirty="0"/>
-          </a:p>
-        </p:txBody>
-      </p:sp>
-      <p:sp>
-        <p:nvSpPr>
-          <p:cNvPr id="21" name="shape-20"/>
-          <p:cNvSpPr/>
-          <p:nvPr/>
-        </p:nvSpPr>
-        <p:spPr>
-          <a:xfrm rot="48000">
-            <a:off x="457200" y="5208389"/>
-            <a:ext cx="5943600" cy="1600200"/>
-          </a:xfrm>
-          <a:prstGeom prst="rect">
-            <a:avLst/>
-          </a:prstGeom>
-          <a:solidFill>
-            <a:srgbClr val="FFFFFF"/>
-          </a:solidFill>
-          <a:ln/>
-          <a:effectLst>
-            <a:outerShdw sx="100000" sy="100000" kx="0" ky="0" algn="bl" rotWithShape="0" blurRad="177800" dist="76200" dir="5400000">
-              <a:srgbClr val="000000">
-                <a:alpha val="22000"/>
-              </a:srgbClr>
-            </a:outerShdw>
-          </a:effectLst>
-        </p:spPr>
-      </p:sp>
-      <p:sp>
-        <p:nvSpPr>
-          <p:cNvPr id="22" name="shape-21"/>
-          <p:cNvSpPr/>
-          <p:nvPr/>
-        </p:nvSpPr>
-        <p:spPr>
-          <a:xfrm rot="-432000">
-            <a:off x="5712179" y="5052035"/>
-            <a:ext cx="533400" cy="533400"/>
-          </a:xfrm>
-          <a:prstGeom prst="ellipse">
-            <a:avLst/>
+            <a:off x="456208" y="3302000"/>
+            <a:ext cx="4908550" cy="419100"/>
+          </a:xfrm>
+          <a:prstGeom prst="roundRect">
+            <a:avLst>
+              <a:gd name="adj" fmla="val 50000"/>
+            </a:avLst>
           </a:prstGeom>
           <a:solidFill>
             <a:srgbClr val="FAF8F3"/>
@@ -11565,9 +12293,187 @@
           </a:ln>
         </p:spPr>
       </p:sp>
+      <p:sp>
+        <p:nvSpPr>
+          <p:cNvPr id="21" name="text-20"/>
+          <p:cNvSpPr txBox="1"/>
+          <p:nvPr/>
+        </p:nvSpPr>
+        <p:spPr>
+          <a:xfrm rot="-60000">
+            <a:off x="622135" y="3489025"/>
+            <a:ext cx="646176" cy="146050"/>
+          </a:xfrm>
+          <a:prstGeom prst="rect">
+            <a:avLst/>
+          </a:prstGeom>
+          <a:noFill/>
+          <a:ln/>
+        </p:spPr>
+        <p:txBody>
+          <a:bodyPr wrap="square" lIns="0" tIns="0" rIns="0" bIns="0" rtlCol="0" anchor="t"/>
+          <a:lstStyle/>
+          <a:p>
+            <a:pPr algn="l" indent="0" marL="0">
+              <a:lnSpc>
+                <a:spcPts val="1080"/>
+              </a:lnSpc>
+              <a:buNone/>
+            </a:pPr>
+            <a:r>
+              <a:rPr lang="en-US" sz="900" spc="140" kern="0" dirty="0">
+                <a:solidFill>
+                  <a:srgbClr val="1B6676"/>
+                </a:solidFill>
+                <a:latin typeface="IBM Plex Mono" pitchFamily="34" charset="0"/>
+                <a:ea typeface="IBM Plex Mono" pitchFamily="34" charset="-122"/>
+                <a:cs typeface="IBM Plex Mono" pitchFamily="34" charset="-120"/>
+              </a:rPr>
+              <a:t>МЕКТЕБІ</a:t>
+            </a:r>
+            <a:endParaRPr lang="en-US" sz="900" dirty="0"/>
+          </a:p>
+        </p:txBody>
+      </p:sp>
+      <p:sp>
+        <p:nvSpPr>
+          <p:cNvPr id="22" name="text-21"/>
+          <p:cNvSpPr txBox="1"/>
+          <p:nvPr/>
+        </p:nvSpPr>
+        <p:spPr>
+          <a:xfrm rot="-60000">
+            <a:off x="1344409" y="3397296"/>
+            <a:ext cx="4085717" cy="215900"/>
+          </a:xfrm>
+          <a:prstGeom prst="rect">
+            <a:avLst/>
+          </a:prstGeom>
+          <a:noFill/>
+          <a:ln/>
+        </p:spPr>
+        <p:txBody>
+          <a:bodyPr wrap="square" lIns="0" tIns="0" rIns="0" bIns="0" rtlCol="0" anchor="t"/>
+          <a:lstStyle/>
+          <a:p>
+            <a:pPr algn="l" indent="0" marL="0">
+              <a:lnSpc>
+                <a:spcPts val="1560"/>
+              </a:lnSpc>
+              <a:buNone/>
+            </a:pPr>
+            <a:r>
+              <a:rPr lang="en-US" sz="1300" b="1" dirty="0">
+                <a:solidFill>
+                  <a:srgbClr val="0A0A0A"/>
+                </a:solidFill>
+                <a:latin typeface="Geist" pitchFamily="34" charset="0"/>
+                <a:ea typeface="Geist" pitchFamily="34" charset="-122"/>
+                <a:cs typeface="Geist" pitchFamily="34" charset="-120"/>
+              </a:rPr>
+              <a:t>Қостанайдағы Назарбаев Зияткерлік мектебі</a:t>
+            </a:r>
+            <a:endParaRPr lang="en-US" sz="1300" dirty="0"/>
+          </a:p>
+        </p:txBody>
+      </p:sp>
+      <p:sp>
+        <p:nvSpPr>
+          <p:cNvPr id="23" name="text-22"/>
+          <p:cNvSpPr txBox="1"/>
+          <p:nvPr/>
+        </p:nvSpPr>
+        <p:spPr>
+          <a:xfrm rot="-60000">
+            <a:off x="457200" y="3936305"/>
+            <a:ext cx="6300216" cy="488950"/>
+          </a:xfrm>
+          <a:prstGeom prst="rect">
+            <a:avLst/>
+          </a:prstGeom>
+          <a:noFill/>
+          <a:ln/>
+        </p:spPr>
+        <p:txBody>
+          <a:bodyPr wrap="square" lIns="0" tIns="0" rIns="0" bIns="0" rtlCol="0" anchor="t"/>
+          <a:lstStyle/>
+          <a:p>
+            <a:pPr algn="l" indent="0" marL="0">
+              <a:lnSpc>
+                <a:spcPts val="1920"/>
+              </a:lnSpc>
+              <a:buNone/>
+            </a:pPr>
+            <a:r>
+              <a:rPr lang="en-US" sz="1600" i="1" dirty="0">
+                <a:solidFill>
+                  <a:srgbClr val="0A0A0A"/>
+                </a:solidFill>
+                <a:latin typeface="Noto Serif Display Light" pitchFamily="34" charset="0"/>
+                <a:ea typeface="Noto Serif Display Light" pitchFamily="34" charset="-122"/>
+                <a:cs typeface="Noto Serif Display Light" pitchFamily="34" charset="-120"/>
+              </a:rPr>
+              <a:t>Тілдерге өте бейім. Жаратылыстанудан гөрі тарих пен саяхатты жақсы көрер еді.</a:t>
+            </a:r>
+            <a:endParaRPr lang="en-US" sz="1600" dirty="0"/>
+          </a:p>
+        </p:txBody>
+      </p:sp>
+      <p:sp>
+        <p:nvSpPr>
+          <p:cNvPr id="24" name="shape-23"/>
+          <p:cNvSpPr/>
+          <p:nvPr/>
+        </p:nvSpPr>
+        <p:spPr>
+          <a:xfrm rot="48000">
+            <a:off x="457200" y="4762798"/>
+            <a:ext cx="5943600" cy="2095500"/>
+          </a:xfrm>
+          <a:prstGeom prst="rect">
+            <a:avLst/>
+          </a:prstGeom>
+          <a:solidFill>
+            <a:srgbClr val="FFFFFF"/>
+          </a:solidFill>
+          <a:ln/>
+          <a:effectLst>
+            <a:outerShdw sx="100000" sy="100000" kx="0" ky="0" algn="bl" rotWithShape="0" blurRad="177800" dist="76200" dir="5400000">
+              <a:srgbClr val="000000">
+                <a:alpha val="22000"/>
+              </a:srgbClr>
+            </a:outerShdw>
+          </a:effectLst>
+        </p:spPr>
+      </p:sp>
+      <p:sp>
+        <p:nvSpPr>
+          <p:cNvPr id="25" name="shape-24"/>
+          <p:cNvSpPr/>
+          <p:nvPr/>
+        </p:nvSpPr>
+        <p:spPr>
+          <a:xfrm rot="-432000">
+            <a:off x="5715622" y="4607559"/>
+            <a:ext cx="533400" cy="533400"/>
+          </a:xfrm>
+          <a:prstGeom prst="ellipse">
+            <a:avLst/>
+          </a:prstGeom>
+          <a:solidFill>
+            <a:srgbClr val="FAF8F3"/>
+          </a:solidFill>
+          <a:ln w="12700">
+            <a:solidFill>
+              <a:srgbClr val="1B6676"/>
+            </a:solidFill>
+            <a:prstDash val="solid"/>
+          </a:ln>
+        </p:spPr>
+      </p:sp>
       <p:pic>
         <p:nvPicPr>
-          <p:cNvPr id="23" name="svg-22" descr="preencoded.png">    </p:cNvPr>
+          <p:cNvPr id="26" name="svg-25" descr="preencoded.png">    </p:cNvPr>
           <p:cNvPicPr>
             <a:picLocks noChangeAspect="1"/>
           </p:cNvPicPr>
@@ -11581,7 +12487,7 @@
         </p:blipFill>
         <p:spPr>
           <a:xfrm rot="-432000">
-            <a:off x="5832829" y="5172685"/>
+            <a:off x="5836271" y="4728209"/>
             <a:ext cx="292100" cy="292100"/>
           </a:xfrm>
           <a:prstGeom prst="rect">
@@ -11591,14 +12497,14 @@
       </p:pic>
       <p:sp>
         <p:nvSpPr>
-          <p:cNvPr id="24" name="text-23"/>
+          <p:cNvPr id="27" name="text-26"/>
           <p:cNvSpPr txBox="1"/>
           <p:nvPr/>
         </p:nvSpPr>
         <p:spPr>
           <a:xfrm rot="48000">
-            <a:off x="680788" y="5384854"/>
-            <a:ext cx="5842508" cy="146050"/>
+            <a:off x="659186" y="4914980"/>
+            <a:ext cx="5896356" cy="146050"/>
           </a:xfrm>
           <a:prstGeom prst="rect">
             <a:avLst/>
@@ -11633,7 +12539,7 @@
       </p:sp>
       <p:pic>
         <p:nvPicPr>
-          <p:cNvPr id="25" name="svg-24" descr="preencoded.png">    </p:cNvPr>
+          <p:cNvPr id="28" name="svg-27" descr="preencoded.png">    </p:cNvPr>
           <p:cNvPicPr>
             <a:picLocks noChangeAspect="1"/>
           </p:cNvPicPr>
@@ -11647,7 +12553,7 @@
         </p:blipFill>
         <p:spPr>
           <a:xfrm rot="48000">
-            <a:off x="677723" y="5563582"/>
+            <a:off x="656123" y="5093354"/>
             <a:ext cx="190500" cy="190500"/>
           </a:xfrm>
           <a:prstGeom prst="rect">
@@ -11657,33 +12563,33 @@
       </p:pic>
       <p:sp>
         <p:nvSpPr>
-          <p:cNvPr id="26" name="text-25"/>
+          <p:cNvPr id="29" name="text-28"/>
           <p:cNvSpPr txBox="1"/>
           <p:nvPr/>
         </p:nvSpPr>
         <p:spPr>
           <a:xfrm rot="48000">
-            <a:off x="931735" y="5592478"/>
-            <a:ext cx="5014595" cy="215900"/>
-          </a:xfrm>
-          <a:prstGeom prst="rect">
-            <a:avLst/>
-          </a:prstGeom>
-          <a:noFill/>
-          <a:ln/>
-        </p:spPr>
-        <p:txBody>
-          <a:bodyPr wrap="square" lIns="0" tIns="0" rIns="0" bIns="0" rtlCol="0" anchor="t"/>
-          <a:lstStyle/>
-          <a:p>
-            <a:pPr algn="l" indent="0" marL="0">
-              <a:lnSpc>
-                <a:spcPts val="1770"/>
-              </a:lnSpc>
-              <a:buNone/>
-            </a:pPr>
-            <a:r>
-              <a:rPr lang="en-US" sz="1300" dirty="0">
+            <a:off x="911384" y="5118720"/>
+            <a:ext cx="4476115" cy="196850"/>
+          </a:xfrm>
+          <a:prstGeom prst="rect">
+            <a:avLst/>
+          </a:prstGeom>
+          <a:noFill/>
+          <a:ln/>
+        </p:spPr>
+        <p:txBody>
+          <a:bodyPr wrap="square" lIns="0" tIns="0" rIns="0" bIns="0" rtlCol="0" anchor="t"/>
+          <a:lstStyle/>
+          <a:p>
+            <a:pPr algn="l" indent="0" marL="0">
+              <a:lnSpc>
+                <a:spcPts val="1610"/>
+              </a:lnSpc>
+              <a:buNone/>
+            </a:pPr>
+            <a:r>
+              <a:rPr lang="en-US" sz="1200" dirty="0">
                 <a:solidFill>
                   <a:srgbClr val="2B2A27"/>
                 </a:solidFill>
@@ -11691,41 +12597,41 @@
                 <a:ea typeface="Geist" pitchFamily="34" charset="-122"/>
                 <a:cs typeface="Geist" pitchFamily="34" charset="-120"/>
               </a:rPr>
-              <a:t>Халықаралық география олимпиадасы (iGeo): күміс медаль.</a:t>
-            </a:r>
-            <a:endParaRPr lang="en-US" sz="1300" dirty="0"/>
-          </a:p>
-        </p:txBody>
-      </p:sp>
-      <p:sp>
-        <p:nvSpPr>
-          <p:cNvPr id="27" name="text-26"/>
+              <a:t>Халықаралық лингвистика олимпиадасы (IOL) жеңімпазы.</a:t>
+            </a:r>
+            <a:endParaRPr lang="en-US" sz="1200" dirty="0"/>
+          </a:p>
+        </p:txBody>
+      </p:sp>
+      <p:sp>
+        <p:nvSpPr>
+          <p:cNvPr id="30" name="text-29"/>
           <p:cNvSpPr txBox="1"/>
           <p:nvPr/>
         </p:nvSpPr>
         <p:spPr>
           <a:xfrm rot="48000">
-            <a:off x="851093" y="5883524"/>
-            <a:ext cx="5654040" cy="222250"/>
-          </a:xfrm>
-          <a:prstGeom prst="rect">
-            <a:avLst/>
-          </a:prstGeom>
-          <a:noFill/>
-          <a:ln/>
-        </p:spPr>
-        <p:txBody>
-          <a:bodyPr wrap="square" lIns="0" tIns="0" rIns="0" bIns="0" rtlCol="0" anchor="t"/>
-          <a:lstStyle/>
-          <a:p>
-            <a:pPr algn="l" indent="0" marL="0">
-              <a:lnSpc>
-                <a:spcPts val="1770"/>
-              </a:lnSpc>
-              <a:buNone/>
-            </a:pPr>
-            <a:r>
-              <a:rPr lang="en-US" sz="1300" dirty="0">
+            <a:off x="828668" y="5380456"/>
+            <a:ext cx="5707888" cy="406400"/>
+          </a:xfrm>
+          <a:prstGeom prst="rect">
+            <a:avLst/>
+          </a:prstGeom>
+          <a:noFill/>
+          <a:ln/>
+        </p:spPr>
+        <p:txBody>
+          <a:bodyPr wrap="square" lIns="0" tIns="0" rIns="0" bIns="0" rtlCol="0" anchor="t"/>
+          <a:lstStyle/>
+          <a:p>
+            <a:pPr algn="l" indent="0" marL="0">
+              <a:lnSpc>
+                <a:spcPts val="1610"/>
+              </a:lnSpc>
+              <a:buNone/>
+            </a:pPr>
+            <a:r>
+              <a:rPr lang="en-US" sz="1200" dirty="0">
                 <a:solidFill>
                   <a:srgbClr val="2B2A27"/>
                 </a:solidFill>
@@ -11733,57 +12639,99 @@
                 <a:ea typeface="Geist" pitchFamily="34" charset="-122"/>
                 <a:cs typeface="Geist" pitchFamily="34" charset="-120"/>
               </a:rPr>
-              <a:t>Қазақ және қырғыз ауыз әдебиетін жинайтын подкаст.</a:t>
-            </a:r>
-            <a:endParaRPr lang="en-US" sz="1300" dirty="0"/>
-          </a:p>
-        </p:txBody>
-      </p:sp>
-      <p:sp>
-        <p:nvSpPr>
-          <p:cNvPr id="28" name="text-27"/>
+              <a:t>Қазақ және қырғыз ауыз әдебиеті туралы подкасты бар, 200 000 тыңдаушысы бар танымал блогер.</a:t>
+            </a:r>
+            <a:endParaRPr lang="en-US" sz="1200" dirty="0"/>
+          </a:p>
+        </p:txBody>
+      </p:sp>
+      <p:sp>
+        <p:nvSpPr>
+          <p:cNvPr id="31" name="text-30"/>
           <p:cNvSpPr txBox="1"/>
           <p:nvPr/>
         </p:nvSpPr>
         <p:spPr>
           <a:xfrm rot="48000">
-            <a:off x="845504" y="6169483"/>
-            <a:ext cx="5654040" cy="450850"/>
-          </a:xfrm>
-          <a:prstGeom prst="rect">
-            <a:avLst/>
-          </a:prstGeom>
-          <a:noFill/>
-          <a:ln/>
-        </p:spPr>
-        <p:txBody>
-          <a:bodyPr wrap="square" lIns="0" tIns="0" rIns="0" bIns="0" rtlCol="0" anchor="t"/>
-          <a:lstStyle/>
-          <a:p>
-            <a:pPr algn="l" indent="0" marL="0">
-              <a:lnSpc>
-                <a:spcPts val="1770"/>
-              </a:lnSpc>
-              <a:buNone/>
-            </a:pPr>
-            <a:r>
-              <a:rPr lang="en-US" sz="1300" b="1" dirty="0">
-                <a:solidFill>
-                  <a:srgbClr val="0A0A0A"/>
+            <a:off x="820832" y="5840082"/>
+            <a:ext cx="5707888" cy="609600"/>
+          </a:xfrm>
+          <a:prstGeom prst="rect">
+            <a:avLst/>
+          </a:prstGeom>
+          <a:noFill/>
+          <a:ln/>
+        </p:spPr>
+        <p:txBody>
+          <a:bodyPr wrap="square" lIns="0" tIns="0" rIns="0" bIns="0" rtlCol="0" anchor="t"/>
+          <a:lstStyle/>
+          <a:p>
+            <a:pPr algn="l" indent="0" marL="0">
+              <a:lnSpc>
+                <a:spcPts val="1610"/>
+              </a:lnSpc>
+              <a:buNone/>
+            </a:pPr>
+            <a:r>
+              <a:rPr lang="en-US" sz="1200" dirty="0">
+                <a:solidFill>
+                  <a:srgbClr val="2B2A27"/>
                 </a:solidFill>
                 <a:latin typeface="Geist" pitchFamily="34" charset="0"/>
                 <a:ea typeface="Geist" pitchFamily="34" charset="-122"/>
                 <a:cs typeface="Geist" pitchFamily="34" charset="-120"/>
               </a:rPr>
+              <a:t>Арғы атасы Абылай ханның өмірбаянын жатқа біледі, ол туралы ағылшынша зерттеу жазып, журналдарға жіберген. PhD дәрежесін 22 жасында алуды мақсат етеді.</a:t>
+            </a:r>
+            <a:endParaRPr lang="en-US" sz="1200" dirty="0"/>
+          </a:p>
+        </p:txBody>
+      </p:sp>
+      <p:sp>
+        <p:nvSpPr>
+          <p:cNvPr id="32" name="text-31"/>
+          <p:cNvSpPr txBox="1"/>
+          <p:nvPr/>
+        </p:nvSpPr>
+        <p:spPr>
+          <a:xfrm rot="48000">
+            <a:off x="814420" y="6502422"/>
+            <a:ext cx="5707888" cy="203200"/>
+          </a:xfrm>
+          <a:prstGeom prst="rect">
+            <a:avLst/>
+          </a:prstGeom>
+          <a:noFill/>
+          <a:ln/>
+        </p:spPr>
+        <p:txBody>
+          <a:bodyPr wrap="square" lIns="0" tIns="0" rIns="0" bIns="0" rtlCol="0" anchor="t"/>
+          <a:lstStyle/>
+          <a:p>
+            <a:pPr algn="l" indent="0" marL="0">
+              <a:lnSpc>
+                <a:spcPts val="1610"/>
+              </a:lnSpc>
+              <a:buNone/>
+            </a:pPr>
+            <a:r>
+              <a:rPr lang="en-US" sz="1200" b="1" dirty="0">
+                <a:solidFill>
+                  <a:srgbClr val="0A0A0A"/>
+                </a:solidFill>
+                <a:latin typeface="Geist" pitchFamily="34" charset="0"/>
+                <a:ea typeface="Geist" pitchFamily="34" charset="-122"/>
+                <a:cs typeface="Geist" pitchFamily="34" charset="-120"/>
+              </a:rPr>
               <a:t>Оқитын мамандығы: антропология немесе Орталық Азияны зерттеу.</a:t>
             </a:r>
-            <a:endParaRPr lang="en-US" sz="1300" dirty="0"/>
-          </a:p>
-        </p:txBody>
-      </p:sp>
-      <p:sp>
-        <p:nvSpPr>
-          <p:cNvPr id="29" name="text-28"/>
+            <a:endParaRPr lang="en-US" sz="1200" dirty="0"/>
+          </a:p>
+        </p:txBody>
+      </p:sp>
+      <p:sp>
+        <p:nvSpPr>
+          <p:cNvPr id="33" name="text-32"/>
           <p:cNvSpPr txBox="1"/>
           <p:nvPr/>
         </p:nvSpPr>
@@ -11825,7 +12773,7 @@
       </p:sp>
       <p:sp>
         <p:nvSpPr>
-          <p:cNvPr id="30" name="shape-29"/>
+          <p:cNvPr id="34" name="shape-33"/>
           <p:cNvSpPr/>
           <p:nvPr/>
         </p:nvSpPr>
@@ -11847,7 +12795,7 @@
       </p:sp>
       <p:sp>
         <p:nvSpPr>
-          <p:cNvPr id="31" name="text-30"/>
+          <p:cNvPr id="35" name="text-34"/>
           <p:cNvSpPr txBox="1"/>
           <p:nvPr/>
         </p:nvSpPr>
@@ -11889,7 +12837,7 @@
       </p:sp>
       <p:pic>
         <p:nvPicPr>
-          <p:cNvPr id="32" name="svg-31" descr="preencoded.png">    </p:cNvPr>
+          <p:cNvPr id="36" name="svg-35" descr="preencoded.png">    </p:cNvPr>
           <p:cNvPicPr>
             <a:picLocks noChangeAspect="1"/>
           </p:cNvPicPr>
@@ -11913,7 +12861,7 @@
       </p:pic>
       <p:sp>
         <p:nvSpPr>
-          <p:cNvPr id="33" name="text-32"/>
+          <p:cNvPr id="37" name="text-36"/>
           <p:cNvSpPr txBox="1"/>
           <p:nvPr/>
         </p:nvSpPr>
@@ -12208,14 +13156,140 @@
       </p:sp>
       <p:sp>
         <p:nvSpPr>
-          <p:cNvPr id="8" name="shape-7"/>
+          <p:cNvPr id="8" name="text-7"/>
+          <p:cNvSpPr txBox="1"/>
+          <p:nvPr/>
+        </p:nvSpPr>
+        <p:spPr>
+          <a:xfrm>
+            <a:off x="457200" y="2281833"/>
+            <a:ext cx="3769360" cy="146050"/>
+          </a:xfrm>
+          <a:prstGeom prst="rect">
+            <a:avLst/>
+          </a:prstGeom>
+          <a:noFill/>
+          <a:ln/>
+        </p:spPr>
+        <p:txBody>
+          <a:bodyPr wrap="square" lIns="0" tIns="0" rIns="0" bIns="0" rtlCol="0" anchor="t"/>
+          <a:lstStyle/>
+          <a:p>
+            <a:pPr algn="l" indent="0" marL="0">
+              <a:lnSpc>
+                <a:spcPts val="1080"/>
+              </a:lnSpc>
+              <a:buNone/>
+            </a:pPr>
+            <a:r>
+              <a:rPr lang="en-US" sz="900" spc="140" kern="0" dirty="0">
+                <a:solidFill>
+                  <a:srgbClr val="5B2E91"/>
+                </a:solidFill>
+                <a:latin typeface="IBM Plex Mono" pitchFamily="34" charset="0"/>
+                <a:ea typeface="IBM Plex Mono" pitchFamily="34" charset="-122"/>
+                <a:cs typeface="IBM Plex Mono" pitchFamily="34" charset="-120"/>
+              </a:rPr>
+              <a:t>ТУҒАН ЖЕРІ</a:t>
+            </a:r>
+            <a:endParaRPr lang="en-US" sz="900" dirty="0"/>
+          </a:p>
+        </p:txBody>
+      </p:sp>
+      <p:sp>
+        <p:nvSpPr>
+          <p:cNvPr id="9" name="text-8"/>
+          <p:cNvSpPr txBox="1"/>
+          <p:nvPr/>
+        </p:nvSpPr>
+        <p:spPr>
+          <a:xfrm>
+            <a:off x="457200" y="2464693"/>
+            <a:ext cx="3769360" cy="431800"/>
+          </a:xfrm>
+          <a:prstGeom prst="rect">
+            <a:avLst/>
+          </a:prstGeom>
+          <a:noFill/>
+          <a:ln/>
+        </p:spPr>
+        <p:txBody>
+          <a:bodyPr wrap="square" lIns="0" tIns="0" rIns="0" bIns="0" rtlCol="0" anchor="t"/>
+          <a:lstStyle/>
+          <a:p>
+            <a:pPr algn="l" indent="0" marL="0">
+              <a:lnSpc>
+                <a:spcPts val="1690"/>
+              </a:lnSpc>
+              <a:buNone/>
+            </a:pPr>
+            <a:r>
+              <a:rPr lang="en-US" sz="1300" b="1" dirty="0">
+                <a:solidFill>
+                  <a:srgbClr val="0A0A0A"/>
+                </a:solidFill>
+                <a:latin typeface="Geist" pitchFamily="34" charset="0"/>
+                <a:ea typeface="Geist" pitchFamily="34" charset="-122"/>
+                <a:cs typeface="Geist" pitchFamily="34" charset="-120"/>
+              </a:rPr>
+              <a:t>1925 · Солтүстік Қазақстан, Бағанаты ауылы</a:t>
+            </a:r>
+            <a:endParaRPr lang="en-US" sz="1300" dirty="0"/>
+          </a:p>
+        </p:txBody>
+      </p:sp>
+      <p:sp>
+        <p:nvSpPr>
+          <p:cNvPr id="10" name="text-9"/>
+          <p:cNvSpPr txBox="1"/>
+          <p:nvPr/>
+        </p:nvSpPr>
+        <p:spPr>
+          <a:xfrm>
+            <a:off x="457200" y="2934692"/>
+            <a:ext cx="3769360" cy="838200"/>
+          </a:xfrm>
+          <a:prstGeom prst="rect">
+            <a:avLst/>
+          </a:prstGeom>
+          <a:noFill/>
+          <a:ln/>
+        </p:spPr>
+        <p:txBody>
+          <a:bodyPr wrap="square" lIns="0" tIns="0" rIns="0" bIns="0" rtlCol="0" anchor="t"/>
+          <a:lstStyle/>
+          <a:p>
+            <a:pPr algn="l" indent="0" marL="0">
+              <a:lnSpc>
+                <a:spcPts val="1660"/>
+              </a:lnSpc>
+              <a:buNone/>
+            </a:pPr>
+            <a:r>
+              <a:rPr lang="en-US" sz="1200" dirty="0">
+                <a:solidFill>
+                  <a:srgbClr val="2B2A27"/>
+                </a:solidFill>
+                <a:latin typeface="Geist" pitchFamily="34" charset="0"/>
+                <a:ea typeface="Geist" pitchFamily="34" charset="-122"/>
+                <a:cs typeface="Geist" pitchFamily="34" charset="-120"/>
+              </a:rPr>
+              <a:t>Қарапайым отбасында туған. 1920 жылдардың соңында отбасы ауылмен бірге туған жерінен көшіп кетіп, 1938 жылы ғана оралған. Оқуын аудан орталығы Марьевкада жалғастырған.</a:t>
+            </a:r>
+            <a:endParaRPr lang="en-US" sz="1200" dirty="0"/>
+          </a:p>
+        </p:txBody>
+      </p:sp>
+      <p:sp>
+        <p:nvSpPr>
+          <p:cNvPr id="11" name="shape-10"/>
           <p:cNvSpPr/>
           <p:nvPr/>
         </p:nvSpPr>
         <p:spPr>
           <a:xfrm rot="-48000">
-            <a:off x="457200" y="3176389"/>
-            <a:ext cx="5943600" cy="1498600"/>
+            <a:off x="457200" y="3967162"/>
+            <a:ext cx="5943600" cy="1371600"/>
           </a:xfrm>
           <a:prstGeom prst="rect">
             <a:avLst/>
@@ -12235,13 +13309,13 @@
       </p:sp>
       <p:sp>
         <p:nvSpPr>
-          <p:cNvPr id="9" name="shape-8"/>
+          <p:cNvPr id="12" name="shape-11"/>
           <p:cNvSpPr/>
           <p:nvPr/>
         </p:nvSpPr>
         <p:spPr>
           <a:xfrm rot="-228000">
-            <a:off x="2942623" y="3060771"/>
+            <a:off x="2943551" y="3854514"/>
             <a:ext cx="952500" cy="279400"/>
           </a:xfrm>
           <a:prstGeom prst="rect">
@@ -12257,14 +13331,14 @@
       </p:sp>
       <p:sp>
         <p:nvSpPr>
-          <p:cNvPr id="10" name="text-9"/>
+          <p:cNvPr id="13" name="text-12"/>
           <p:cNvSpPr txBox="1"/>
           <p:nvPr/>
         </p:nvSpPr>
         <p:spPr>
           <a:xfrm rot="-48000">
-            <a:off x="653243" y="3340150"/>
-            <a:ext cx="5869432" cy="146050"/>
+            <a:off x="641117" y="4108496"/>
+            <a:ext cx="5896356" cy="146050"/>
           </a:xfrm>
           <a:prstGeom prst="rect">
             <a:avLst/>
@@ -12299,33 +13373,33 @@
       </p:sp>
       <p:sp>
         <p:nvSpPr>
-          <p:cNvPr id="11" name="text-10"/>
+          <p:cNvPr id="14" name="text-13"/>
           <p:cNvSpPr txBox="1"/>
           <p:nvPr/>
         </p:nvSpPr>
         <p:spPr>
           <a:xfrm rot="-48000">
-            <a:off x="836084" y="3548772"/>
-            <a:ext cx="5680964" cy="450850"/>
-          </a:xfrm>
-          <a:prstGeom prst="rect">
-            <a:avLst/>
-          </a:prstGeom>
-          <a:noFill/>
-          <a:ln/>
-        </p:spPr>
-        <p:txBody>
-          <a:bodyPr wrap="square" lIns="0" tIns="0" rIns="0" bIns="0" rtlCol="0" anchor="t"/>
-          <a:lstStyle/>
-          <a:p>
-            <a:pPr algn="l" indent="0" marL="0">
-              <a:lnSpc>
-                <a:spcPts val="1770"/>
-              </a:lnSpc>
-              <a:buNone/>
-            </a:pPr>
-            <a:r>
-              <a:rPr lang="en-US" sz="1300" dirty="0">
+            <a:off x="823716" y="4318806"/>
+            <a:ext cx="5707888" cy="412750"/>
+          </a:xfrm>
+          <a:prstGeom prst="rect">
+            <a:avLst/>
+          </a:prstGeom>
+          <a:noFill/>
+          <a:ln/>
+        </p:spPr>
+        <p:txBody>
+          <a:bodyPr wrap="square" lIns="0" tIns="0" rIns="0" bIns="0" rtlCol="0" anchor="t"/>
+          <a:lstStyle/>
+          <a:p>
+            <a:pPr algn="l" indent="0" marL="0">
+              <a:lnSpc>
+                <a:spcPts val="1630"/>
+              </a:lnSpc>
+              <a:buNone/>
+            </a:pPr>
+            <a:r>
+              <a:rPr lang="en-US" sz="1200" dirty="0">
                 <a:solidFill>
                   <a:srgbClr val="2B2A27"/>
                 </a:solidFill>
@@ -12335,39 +13409,39 @@
               </a:rPr>
               <a:t>Химик-металлург, академик, КСРО Мемлекеттік сыйлығының лауреаты (1969).</a:t>
             </a:r>
-            <a:endParaRPr lang="en-US" sz="1300" dirty="0"/>
-          </a:p>
-        </p:txBody>
-      </p:sp>
-      <p:sp>
-        <p:nvSpPr>
-          <p:cNvPr id="12" name="text-11"/>
+            <a:endParaRPr lang="en-US" sz="1200" dirty="0"/>
+          </a:p>
+        </p:txBody>
+      </p:sp>
+      <p:sp>
+        <p:nvSpPr>
+          <p:cNvPr id="15" name="text-14"/>
           <p:cNvSpPr txBox="1"/>
           <p:nvPr/>
         </p:nvSpPr>
         <p:spPr>
           <a:xfrm rot="-48000">
-            <a:off x="843241" y="4061286"/>
-            <a:ext cx="5680964" cy="450850"/>
-          </a:xfrm>
-          <a:prstGeom prst="rect">
-            <a:avLst/>
-          </a:prstGeom>
-          <a:noFill/>
-          <a:ln/>
-        </p:spPr>
-        <p:txBody>
-          <a:bodyPr wrap="square" lIns="0" tIns="0" rIns="0" bIns="0" rtlCol="0" anchor="t"/>
-          <a:lstStyle/>
-          <a:p>
-            <a:pPr algn="l" indent="0" marL="0">
-              <a:lnSpc>
-                <a:spcPts val="1770"/>
-              </a:lnSpc>
-              <a:buNone/>
-            </a:pPr>
-            <a:r>
-              <a:rPr lang="en-US" sz="1300" dirty="0">
+            <a:off x="830387" y="4796597"/>
+            <a:ext cx="5707888" cy="412750"/>
+          </a:xfrm>
+          <a:prstGeom prst="rect">
+            <a:avLst/>
+          </a:prstGeom>
+          <a:noFill/>
+          <a:ln/>
+        </p:spPr>
+        <p:txBody>
+          <a:bodyPr wrap="square" lIns="0" tIns="0" rIns="0" bIns="0" rtlCol="0" anchor="t"/>
+          <a:lstStyle/>
+          <a:p>
+            <a:pPr algn="l" indent="0" marL="0">
+              <a:lnSpc>
+                <a:spcPts val="1630"/>
+              </a:lnSpc>
+              <a:buNone/>
+            </a:pPr>
+            <a:r>
+              <a:rPr lang="en-US" sz="1200" dirty="0">
                 <a:solidFill>
                   <a:srgbClr val="2B2A27"/>
                 </a:solidFill>
@@ -12377,24 +13451,24 @@
               </a:rPr>
               <a:t>Қарағанды мемлекеттік университетінің тұңғыш ректоры, Сәтбаевтың шәкірті.</a:t>
             </a:r>
-            <a:endParaRPr lang="en-US" sz="1300" dirty="0"/>
-          </a:p>
-        </p:txBody>
-      </p:sp>
-      <p:sp>
-        <p:nvSpPr>
-          <p:cNvPr id="13" name="shape-12"/>
+            <a:endParaRPr lang="en-US" sz="1200" dirty="0"/>
+          </a:p>
+        </p:txBody>
+      </p:sp>
+      <p:sp>
+        <p:nvSpPr>
+          <p:cNvPr id="16" name="shape-15"/>
           <p:cNvSpPr/>
           <p:nvPr/>
         </p:nvSpPr>
         <p:spPr>
           <a:xfrm rot="48000">
-            <a:off x="457200" y="4814888"/>
-            <a:ext cx="5943600" cy="1212850"/>
+            <a:off x="457200" y="5439569"/>
+            <a:ext cx="5943600" cy="850900"/>
           </a:xfrm>
           <a:prstGeom prst="roundRect">
             <a:avLst>
-              <a:gd name="adj" fmla="val 13613"/>
+              <a:gd name="adj" fmla="val 19403"/>
             </a:avLst>
           </a:prstGeom>
           <a:solidFill>
@@ -12410,14 +13484,14 @@
       </p:sp>
       <p:sp>
         <p:nvSpPr>
-          <p:cNvPr id="14" name="text-13"/>
+          <p:cNvPr id="17" name="text-16"/>
           <p:cNvSpPr txBox="1"/>
           <p:nvPr/>
         </p:nvSpPr>
         <p:spPr>
           <a:xfrm rot="48000">
-            <a:off x="678226" y="4981214"/>
-            <a:ext cx="5842508" cy="146050"/>
+            <a:off x="663559" y="5565797"/>
+            <a:ext cx="5869432" cy="146050"/>
           </a:xfrm>
           <a:prstGeom prst="rect">
             <a:avLst/>
@@ -12452,33 +13526,33 @@
       </p:sp>
       <p:sp>
         <p:nvSpPr>
-          <p:cNvPr id="15" name="text-14"/>
+          <p:cNvPr id="18" name="text-17"/>
           <p:cNvSpPr txBox="1"/>
           <p:nvPr/>
         </p:nvSpPr>
         <p:spPr>
           <a:xfrm rot="48000">
-            <a:off x="671726" y="5176828"/>
-            <a:ext cx="5842508" cy="685800"/>
-          </a:xfrm>
-          <a:prstGeom prst="rect">
-            <a:avLst/>
-          </a:prstGeom>
-          <a:noFill/>
-          <a:ln/>
-        </p:spPr>
-        <p:txBody>
-          <a:bodyPr wrap="square" lIns="0" tIns="0" rIns="0" bIns="0" rtlCol="0" anchor="t"/>
-          <a:lstStyle/>
-          <a:p>
-            <a:pPr algn="l" indent="0" marL="0">
-              <a:lnSpc>
-                <a:spcPts val="1790"/>
-              </a:lnSpc>
-              <a:buNone/>
-            </a:pPr>
-            <a:r>
-              <a:rPr lang="en-US" sz="1300" dirty="0">
+            <a:off x="659114" y="5750710"/>
+            <a:ext cx="5869432" cy="412750"/>
+          </a:xfrm>
+          <a:prstGeom prst="rect">
+            <a:avLst/>
+          </a:prstGeom>
+          <a:noFill/>
+          <a:ln/>
+        </p:spPr>
+        <p:txBody>
+          <a:bodyPr wrap="square" lIns="0" tIns="0" rIns="0" bIns="0" rtlCol="0" anchor="t"/>
+          <a:lstStyle/>
+          <a:p>
+            <a:pPr algn="l" indent="0" marL="0">
+              <a:lnSpc>
+                <a:spcPts val="1630"/>
+              </a:lnSpc>
+              <a:buNone/>
+            </a:pPr>
+            <a:r>
+              <a:rPr lang="en-US" sz="1200" dirty="0">
                 <a:solidFill>
                   <a:srgbClr val="0A0A0A"/>
                 </a:solidFill>
@@ -12488,24 +13562,24 @@
               </a:rPr>
               <a:t>Мектепте 7–8-сыныпта Пушкиннің «Тас қонақ» трагедиясын сахнаға қойып, Дон Гуанды өзі ойнаған. Кейін әлем әдебиетін қазақ тіліне аударған.</a:t>
             </a:r>
-            <a:endParaRPr lang="en-US" sz="1300" dirty="0"/>
-          </a:p>
-        </p:txBody>
-      </p:sp>
-      <p:sp>
-        <p:nvSpPr>
-          <p:cNvPr id="16" name="shape-15"/>
+            <a:endParaRPr lang="en-US" sz="1200" dirty="0"/>
+          </a:p>
+        </p:txBody>
+      </p:sp>
+      <p:sp>
+        <p:nvSpPr>
+          <p:cNvPr id="19" name="shape-18"/>
           <p:cNvSpPr/>
           <p:nvPr/>
         </p:nvSpPr>
         <p:spPr>
           <a:xfrm rot="-36000">
-            <a:off x="457200" y="6165453"/>
-            <a:ext cx="5943600" cy="933450"/>
+            <a:off x="457200" y="6391672"/>
+            <a:ext cx="5943600" cy="596900"/>
           </a:xfrm>
           <a:prstGeom prst="roundRect">
             <a:avLst>
-              <a:gd name="adj" fmla="val 17687"/>
+              <a:gd name="adj" fmla="val 27660"/>
             </a:avLst>
           </a:prstGeom>
           <a:solidFill>
@@ -12516,14 +13590,14 @@
       </p:sp>
       <p:sp>
         <p:nvSpPr>
-          <p:cNvPr id="17" name="text-16"/>
+          <p:cNvPr id="20" name="text-19"/>
           <p:cNvSpPr txBox="1"/>
           <p:nvPr/>
         </p:nvSpPr>
         <p:spPr>
           <a:xfrm rot="-36000">
-            <a:off x="657749" y="6305961"/>
-            <a:ext cx="5869432" cy="146050"/>
+            <a:off x="646416" y="6494469"/>
+            <a:ext cx="5896356" cy="146050"/>
           </a:xfrm>
           <a:prstGeom prst="rect">
             <a:avLst/>
@@ -12558,33 +13632,33 @@
       </p:sp>
       <p:sp>
         <p:nvSpPr>
-          <p:cNvPr id="18" name="text-17"/>
+          <p:cNvPr id="21" name="text-20"/>
           <p:cNvSpPr txBox="1"/>
           <p:nvPr/>
         </p:nvSpPr>
         <p:spPr>
           <a:xfrm rot="-36000">
-            <a:off x="661431" y="6501998"/>
-            <a:ext cx="5869432" cy="457200"/>
-          </a:xfrm>
-          <a:prstGeom prst="rect">
-            <a:avLst/>
-          </a:prstGeom>
-          <a:noFill/>
-          <a:ln/>
-        </p:spPr>
-        <p:txBody>
-          <a:bodyPr wrap="square" lIns="0" tIns="0" rIns="0" bIns="0" rtlCol="0" anchor="t"/>
-          <a:lstStyle/>
-          <a:p>
-            <a:pPr algn="l" indent="0" marL="0">
-              <a:lnSpc>
-                <a:spcPts val="1790"/>
-              </a:lnSpc>
-              <a:buNone/>
-            </a:pPr>
-            <a:r>
-              <a:rPr lang="en-US" sz="1300" dirty="0">
+            <a:off x="648664" y="6677417"/>
+            <a:ext cx="5896356" cy="209550"/>
+          </a:xfrm>
+          <a:prstGeom prst="rect">
+            <a:avLst/>
+          </a:prstGeom>
+          <a:noFill/>
+          <a:ln/>
+        </p:spPr>
+        <p:txBody>
+          <a:bodyPr wrap="square" lIns="0" tIns="0" rIns="0" bIns="0" rtlCol="0" anchor="t"/>
+          <a:lstStyle/>
+          <a:p>
+            <a:pPr algn="l" indent="0" marL="0">
+              <a:lnSpc>
+                <a:spcPts val="1630"/>
+              </a:lnSpc>
+              <a:buNone/>
+            </a:pPr>
+            <a:r>
+              <a:rPr lang="en-US" sz="1200" dirty="0">
                 <a:solidFill>
                   <a:srgbClr val="FAF8F3"/>
                 </a:solidFill>
@@ -12594,13 +13668,13 @@
               </a:rPr>
               <a:t>Аттестатты мектепті жай бітіріп емес, экстернмен емтихан тапсырып алған.</a:t>
             </a:r>
-            <a:endParaRPr lang="en-US" sz="1300" dirty="0"/>
-          </a:p>
-        </p:txBody>
-      </p:sp>
-      <p:sp>
-        <p:nvSpPr>
-          <p:cNvPr id="19" name="text-18"/>
+            <a:endParaRPr lang="en-US" sz="1200" dirty="0"/>
+          </a:p>
+        </p:txBody>
+      </p:sp>
+      <p:sp>
+        <p:nvSpPr>
+          <p:cNvPr id="22" name="text-21"/>
           <p:cNvSpPr txBox="1"/>
           <p:nvPr/>
         </p:nvSpPr>
@@ -12642,7 +13716,7 @@
       </p:sp>
       <p:sp>
         <p:nvSpPr>
-          <p:cNvPr id="20" name="shape-19"/>
+          <p:cNvPr id="23" name="shape-22"/>
           <p:cNvSpPr/>
           <p:nvPr/>
         </p:nvSpPr>
@@ -12664,7 +13738,7 @@
       </p:sp>
       <p:sp>
         <p:nvSpPr>
-          <p:cNvPr id="21" name="text-20"/>
+          <p:cNvPr id="24" name="text-23"/>
           <p:cNvSpPr txBox="1"/>
           <p:nvPr/>
         </p:nvSpPr>
@@ -12706,7 +13780,7 @@
       </p:sp>
       <p:pic>
         <p:nvPicPr>
-          <p:cNvPr id="22" name="svg-21" descr="preencoded.png">    </p:cNvPr>
+          <p:cNvPr id="25" name="svg-24" descr="preencoded.png">    </p:cNvPr>
           <p:cNvPicPr>
             <a:picLocks noChangeAspect="1"/>
           </p:cNvPicPr>
@@ -12730,7 +13804,7 @@
       </p:pic>
       <p:sp>
         <p:nvSpPr>
-          <p:cNvPr id="23" name="shape-22"/>
+          <p:cNvPr id="26" name="shape-25"/>
           <p:cNvSpPr/>
           <p:nvPr/>
         </p:nvSpPr>
@@ -12757,7 +13831,7 @@
       </p:sp>
       <p:sp>
         <p:nvSpPr>
-          <p:cNvPr id="24" name="shape-23"/>
+          <p:cNvPr id="27" name="shape-26"/>
           <p:cNvSpPr/>
           <p:nvPr/>
         </p:nvSpPr>
@@ -12779,7 +13853,7 @@
       </p:sp>
       <p:pic>
         <p:nvPicPr>
-          <p:cNvPr id="25" name="img-24" descr="preencoded.png">    </p:cNvPr>
+          <p:cNvPr id="28" name="img-27" descr="preencoded.png">    </p:cNvPr>
           <p:cNvPicPr>
             <a:picLocks noChangeAspect="1"/>
           </p:cNvPicPr>
@@ -12803,7 +13877,7 @@
       </p:pic>
       <p:sp>
         <p:nvSpPr>
-          <p:cNvPr id="26" name="text-25"/>
+          <p:cNvPr id="29" name="text-28"/>
           <p:cNvSpPr txBox="1"/>
           <p:nvPr/>
         </p:nvSpPr>
@@ -12845,7 +13919,7 @@
       </p:sp>
       <p:sp>
         <p:nvSpPr>
-          <p:cNvPr id="27" name="text-26"/>
+          <p:cNvPr id="30" name="text-29"/>
           <p:cNvSpPr txBox="1"/>
           <p:nvPr/>
         </p:nvSpPr>
@@ -13146,7 +14220,7 @@
         </p:nvSpPr>
         <p:spPr>
           <a:xfrm rot="-90000">
-            <a:off x="458143" y="2286000"/>
+            <a:off x="458143" y="1968500"/>
             <a:ext cx="2311400" cy="1117600"/>
           </a:xfrm>
           <a:prstGeom prst="roundRect">
@@ -13168,7 +14242,7 @@
         </p:nvSpPr>
         <p:spPr>
           <a:xfrm rot="-90000">
-            <a:off x="588783" y="2425819"/>
+            <a:off x="588783" y="2108319"/>
             <a:ext cx="2153920" cy="146050"/>
           </a:xfrm>
           <a:prstGeom prst="rect">
@@ -13210,7 +14284,7 @@
         </p:nvSpPr>
         <p:spPr>
           <a:xfrm rot="-90000">
-            <a:off x="598009" y="2609848"/>
+            <a:off x="598009" y="2292348"/>
             <a:ext cx="2153920" cy="482600"/>
           </a:xfrm>
           <a:prstGeom prst="rect">
@@ -13238,7 +14312,7 @@
                 <a:ea typeface="Noto Serif Display Light" pitchFamily="34" charset="-122"/>
                 <a:cs typeface="Noto Serif Display Light" pitchFamily="34" charset="-120"/>
               </a:rPr>
-              <a:t>1510</a:t>
+              <a:t>1570</a:t>
             </a:r>
             <a:endParaRPr lang="en-US" sz="3800" dirty="0"/>
           </a:p>
@@ -13252,7 +14326,7 @@
         </p:nvSpPr>
         <p:spPr>
           <a:xfrm rot="-90000">
-            <a:off x="607234" y="3130427"/>
+            <a:off x="607234" y="2812927"/>
             <a:ext cx="2153920" cy="146050"/>
           </a:xfrm>
           <a:prstGeom prst="rect">
@@ -13280,7 +14354,7 @@
                 <a:ea typeface="IBM Plex Mono" pitchFamily="34" charset="-122"/>
                 <a:cs typeface="IBM Plex Mono" pitchFamily="34" charset="-120"/>
               </a:rPr>
-              <a:t>Math 770 · RW 740</a:t>
+              <a:t>Math 800 · RW 770</a:t>
             </a:r>
             <a:endParaRPr lang="en-US" sz="900" dirty="0"/>
           </a:p>
@@ -13294,7 +14368,7 @@
         </p:nvSpPr>
         <p:spPr>
           <a:xfrm rot="60000">
-            <a:off x="2871589" y="2286000"/>
+            <a:off x="2871589" y="1968500"/>
             <a:ext cx="1714500" cy="1117600"/>
           </a:xfrm>
           <a:prstGeom prst="roundRect">
@@ -13316,7 +14390,7 @@
         </p:nvSpPr>
         <p:spPr>
           <a:xfrm rot="60000">
-            <a:off x="3017329" y="2425753"/>
+            <a:off x="3017329" y="2108253"/>
             <a:ext cx="1521206" cy="146050"/>
           </a:xfrm>
           <a:prstGeom prst="rect">
@@ -13358,7 +14432,7 @@
         </p:nvSpPr>
         <p:spPr>
           <a:xfrm rot="60000">
-            <a:off x="3011178" y="2609849"/>
+            <a:off x="3011178" y="2292349"/>
             <a:ext cx="1521206" cy="482600"/>
           </a:xfrm>
           <a:prstGeom prst="rect">
@@ -13386,7 +14460,7 @@
                 <a:ea typeface="Noto Serif Display Light" pitchFamily="34" charset="-122"/>
                 <a:cs typeface="Noto Serif Display Light" pitchFamily="34" charset="-120"/>
               </a:rPr>
-              <a:t>7.5</a:t>
+              <a:t>8.0</a:t>
             </a:r>
             <a:endParaRPr lang="en-US" sz="3800" dirty="0"/>
           </a:p>
@@ -13400,7 +14474,7 @@
         </p:nvSpPr>
         <p:spPr>
           <a:xfrm rot="60000">
-            <a:off x="3005028" y="3130495"/>
+            <a:off x="3005028" y="2812995"/>
             <a:ext cx="1521206" cy="146050"/>
           </a:xfrm>
           <a:prstGeom prst="rect">
@@ -13442,7 +14516,7 @@
         </p:nvSpPr>
         <p:spPr>
           <a:xfrm rot="-36000">
-            <a:off x="4686746" y="2286000"/>
+            <a:off x="4686746" y="1968500"/>
             <a:ext cx="1714500" cy="1117600"/>
           </a:xfrm>
           <a:prstGeom prst="roundRect">
@@ -13464,7 +14538,7 @@
         </p:nvSpPr>
         <p:spPr>
           <a:xfrm rot="-36000">
-            <a:off x="4822822" y="2425719"/>
+            <a:off x="4822822" y="2108219"/>
             <a:ext cx="1521206" cy="146050"/>
           </a:xfrm>
           <a:prstGeom prst="rect">
@@ -13506,7 +14580,7 @@
         </p:nvSpPr>
         <p:spPr>
           <a:xfrm rot="-36000">
-            <a:off x="4826513" y="2609850"/>
+            <a:off x="4826513" y="2292350"/>
             <a:ext cx="1521206" cy="482600"/>
           </a:xfrm>
           <a:prstGeom prst="rect">
@@ -13534,7 +14608,7 @@
                 <a:ea typeface="Noto Serif Display Light" pitchFamily="34" charset="-122"/>
                 <a:cs typeface="Noto Serif Display Light" pitchFamily="34" charset="-120"/>
               </a:rPr>
-              <a:t>4.8</a:t>
+              <a:t>5.0</a:t>
             </a:r>
             <a:endParaRPr lang="en-US" sz="3800" dirty="0"/>
           </a:p>
@@ -13548,7 +14622,7 @@
         </p:nvSpPr>
         <p:spPr>
           <a:xfrm rot="-36000">
-            <a:off x="4830203" y="3130530"/>
+            <a:off x="4830203" y="2813030"/>
             <a:ext cx="1521206" cy="146050"/>
           </a:xfrm>
           <a:prstGeom prst="rect">
@@ -13584,86 +14658,19 @@
       </p:sp>
       <p:sp>
         <p:nvSpPr>
-          <p:cNvPr id="20" name="text-19"/>
-          <p:cNvSpPr txBox="1"/>
+          <p:cNvPr id="20" name="shape-19"/>
+          <p:cNvSpPr/>
           <p:nvPr/>
         </p:nvSpPr>
         <p:spPr>
           <a:xfrm rot="-60000">
-            <a:off x="457200" y="3935710"/>
-            <a:ext cx="6300216" cy="520700"/>
-          </a:xfrm>
-          <a:prstGeom prst="rect">
-            <a:avLst/>
-          </a:prstGeom>
-          <a:noFill/>
-          <a:ln/>
-        </p:spPr>
-        <p:txBody>
-          <a:bodyPr wrap="square" lIns="0" tIns="0" rIns="0" bIns="0" rtlCol="0" anchor="t"/>
-          <a:lstStyle/>
-          <a:p>
-            <a:pPr algn="l" indent="0" marL="0">
-              <a:lnSpc>
-                <a:spcPts val="2040"/>
-              </a:lnSpc>
-              <a:buNone/>
-            </a:pPr>
-            <a:r>
-              <a:rPr lang="en-US" sz="1700" i="1" dirty="0">
-                <a:solidFill>
-                  <a:srgbClr val="0A0A0A"/>
-                </a:solidFill>
-                <a:latin typeface="Noto Serif Display Light" pitchFamily="34" charset="0"/>
-                <a:ea typeface="Noto Serif Display Light" pitchFamily="34" charset="-122"/>
-                <a:cs typeface="Noto Serif Display Light" pitchFamily="34" charset="-120"/>
-              </a:rPr>
-              <a:t>Химиямен қатар әдебиетті сүйген адамның екі секциясы да мықты болар еді.</a:t>
-            </a:r>
-            <a:endParaRPr lang="en-US" sz="1700" dirty="0"/>
-          </a:p>
-        </p:txBody>
-      </p:sp>
-      <p:sp>
-        <p:nvSpPr>
-          <p:cNvPr id="21" name="shape-20"/>
-          <p:cNvSpPr/>
-          <p:nvPr/>
-        </p:nvSpPr>
-        <p:spPr>
-          <a:xfrm rot="48000">
-            <a:off x="457200" y="5208389"/>
-            <a:ext cx="5943600" cy="1600200"/>
-          </a:xfrm>
-          <a:prstGeom prst="rect">
-            <a:avLst/>
-          </a:prstGeom>
-          <a:solidFill>
-            <a:srgbClr val="FFFFFF"/>
-          </a:solidFill>
-          <a:ln/>
-          <a:effectLst>
-            <a:outerShdw sx="100000" sy="100000" kx="0" ky="0" algn="bl" rotWithShape="0" blurRad="177800" dist="76200" dir="5400000">
-              <a:srgbClr val="000000">
-                <a:alpha val="22000"/>
-              </a:srgbClr>
-            </a:outerShdw>
-          </a:effectLst>
-        </p:spPr>
-      </p:sp>
-      <p:sp>
-        <p:nvSpPr>
-          <p:cNvPr id="22" name="shape-21"/>
-          <p:cNvSpPr/>
-          <p:nvPr/>
-        </p:nvSpPr>
-        <p:spPr>
-          <a:xfrm rot="-432000">
-            <a:off x="5712179" y="5052035"/>
-            <a:ext cx="533400" cy="533400"/>
-          </a:xfrm>
-          <a:prstGeom prst="ellipse">
-            <a:avLst/>
+            <a:off x="456158" y="3302000"/>
+            <a:ext cx="5016500" cy="419100"/>
+          </a:xfrm>
+          <a:prstGeom prst="roundRect">
+            <a:avLst>
+              <a:gd name="adj" fmla="val 50000"/>
+            </a:avLst>
           </a:prstGeom>
           <a:solidFill>
             <a:srgbClr val="FAF8F3"/>
@@ -13676,9 +14683,187 @@
           </a:ln>
         </p:spPr>
       </p:sp>
+      <p:sp>
+        <p:nvSpPr>
+          <p:cNvPr id="21" name="text-20"/>
+          <p:cNvSpPr txBox="1"/>
+          <p:nvPr/>
+        </p:nvSpPr>
+        <p:spPr>
+          <a:xfrm rot="-60000">
+            <a:off x="622143" y="3489966"/>
+            <a:ext cx="646176" cy="146050"/>
+          </a:xfrm>
+          <a:prstGeom prst="rect">
+            <a:avLst/>
+          </a:prstGeom>
+          <a:noFill/>
+          <a:ln/>
+        </p:spPr>
+        <p:txBody>
+          <a:bodyPr wrap="square" lIns="0" tIns="0" rIns="0" bIns="0" rtlCol="0" anchor="t"/>
+          <a:lstStyle/>
+          <a:p>
+            <a:pPr algn="l" indent="0" marL="0">
+              <a:lnSpc>
+                <a:spcPts val="1080"/>
+              </a:lnSpc>
+              <a:buNone/>
+            </a:pPr>
+            <a:r>
+              <a:rPr lang="en-US" sz="900" spc="140" kern="0" dirty="0">
+                <a:solidFill>
+                  <a:srgbClr val="5B2E91"/>
+                </a:solidFill>
+                <a:latin typeface="IBM Plex Mono" pitchFamily="34" charset="0"/>
+                <a:ea typeface="IBM Plex Mono" pitchFamily="34" charset="-122"/>
+                <a:cs typeface="IBM Plex Mono" pitchFamily="34" charset="-120"/>
+              </a:rPr>
+              <a:t>МЕКТЕБІ</a:t>
+            </a:r>
+            <a:endParaRPr lang="en-US" sz="900" dirty="0"/>
+          </a:p>
+        </p:txBody>
+      </p:sp>
+      <p:sp>
+        <p:nvSpPr>
+          <p:cNvPr id="22" name="text-21"/>
+          <p:cNvSpPr txBox="1"/>
+          <p:nvPr/>
+        </p:nvSpPr>
+        <p:spPr>
+          <a:xfrm rot="-60000">
+            <a:off x="1344359" y="3397296"/>
+            <a:ext cx="4200144" cy="215900"/>
+          </a:xfrm>
+          <a:prstGeom prst="rect">
+            <a:avLst/>
+          </a:prstGeom>
+          <a:noFill/>
+          <a:ln/>
+        </p:spPr>
+        <p:txBody>
+          <a:bodyPr wrap="square" lIns="0" tIns="0" rIns="0" bIns="0" rtlCol="0" anchor="t"/>
+          <a:lstStyle/>
+          <a:p>
+            <a:pPr algn="l" indent="0" marL="0">
+              <a:lnSpc>
+                <a:spcPts val="1560"/>
+              </a:lnSpc>
+              <a:buNone/>
+            </a:pPr>
+            <a:r>
+              <a:rPr lang="en-US" sz="1300" b="1" dirty="0">
+                <a:solidFill>
+                  <a:srgbClr val="0A0A0A"/>
+                </a:solidFill>
+                <a:latin typeface="Geist" pitchFamily="34" charset="0"/>
+                <a:ea typeface="Geist" pitchFamily="34" charset="-122"/>
+                <a:cs typeface="Geist" pitchFamily="34" charset="-120"/>
+              </a:rPr>
+              <a:t>Петропавлдағы Назарбаев Зияткерлік мектебі</a:t>
+            </a:r>
+            <a:endParaRPr lang="en-US" sz="1300" dirty="0"/>
+          </a:p>
+        </p:txBody>
+      </p:sp>
+      <p:sp>
+        <p:nvSpPr>
+          <p:cNvPr id="23" name="text-22"/>
+          <p:cNvSpPr txBox="1"/>
+          <p:nvPr/>
+        </p:nvSpPr>
+        <p:spPr>
+          <a:xfrm rot="-60000">
+            <a:off x="457200" y="3936305"/>
+            <a:ext cx="6300216" cy="488950"/>
+          </a:xfrm>
+          <a:prstGeom prst="rect">
+            <a:avLst/>
+          </a:prstGeom>
+          <a:noFill/>
+          <a:ln/>
+        </p:spPr>
+        <p:txBody>
+          <a:bodyPr wrap="square" lIns="0" tIns="0" rIns="0" bIns="0" rtlCol="0" anchor="t"/>
+          <a:lstStyle/>
+          <a:p>
+            <a:pPr algn="l" indent="0" marL="0">
+              <a:lnSpc>
+                <a:spcPts val="1920"/>
+              </a:lnSpc>
+              <a:buNone/>
+            </a:pPr>
+            <a:r>
+              <a:rPr lang="en-US" sz="1600" i="1" dirty="0">
+                <a:solidFill>
+                  <a:srgbClr val="0A0A0A"/>
+                </a:solidFill>
+                <a:latin typeface="Noto Serif Display Light" pitchFamily="34" charset="0"/>
+                <a:ea typeface="Noto Serif Display Light" pitchFamily="34" charset="-122"/>
+                <a:cs typeface="Noto Serif Display Light" pitchFamily="34" charset="-120"/>
+              </a:rPr>
+              <a:t>Химиямен қатар әдебиетті сүйген адамның екі секциясы да мықты болар еді.</a:t>
+            </a:r>
+            <a:endParaRPr lang="en-US" sz="1600" dirty="0"/>
+          </a:p>
+        </p:txBody>
+      </p:sp>
+      <p:sp>
+        <p:nvSpPr>
+          <p:cNvPr id="24" name="shape-23"/>
+          <p:cNvSpPr/>
+          <p:nvPr/>
+        </p:nvSpPr>
+        <p:spPr>
+          <a:xfrm rot="48000">
+            <a:off x="457200" y="4762798"/>
+            <a:ext cx="5943600" cy="2095500"/>
+          </a:xfrm>
+          <a:prstGeom prst="rect">
+            <a:avLst/>
+          </a:prstGeom>
+          <a:solidFill>
+            <a:srgbClr val="FFFFFF"/>
+          </a:solidFill>
+          <a:ln/>
+          <a:effectLst>
+            <a:outerShdw sx="100000" sy="100000" kx="0" ky="0" algn="bl" rotWithShape="0" blurRad="177800" dist="76200" dir="5400000">
+              <a:srgbClr val="000000">
+                <a:alpha val="22000"/>
+              </a:srgbClr>
+            </a:outerShdw>
+          </a:effectLst>
+        </p:spPr>
+      </p:sp>
+      <p:sp>
+        <p:nvSpPr>
+          <p:cNvPr id="25" name="shape-24"/>
+          <p:cNvSpPr/>
+          <p:nvPr/>
+        </p:nvSpPr>
+        <p:spPr>
+          <a:xfrm rot="-432000">
+            <a:off x="5715622" y="4607559"/>
+            <a:ext cx="533400" cy="533400"/>
+          </a:xfrm>
+          <a:prstGeom prst="ellipse">
+            <a:avLst/>
+          </a:prstGeom>
+          <a:solidFill>
+            <a:srgbClr val="FAF8F3"/>
+          </a:solidFill>
+          <a:ln w="12700">
+            <a:solidFill>
+              <a:srgbClr val="5B2E91"/>
+            </a:solidFill>
+            <a:prstDash val="solid"/>
+          </a:ln>
+        </p:spPr>
+      </p:sp>
       <p:pic>
         <p:nvPicPr>
-          <p:cNvPr id="23" name="svg-22" descr="preencoded.png">    </p:cNvPr>
+          <p:cNvPr id="26" name="svg-25" descr="preencoded.png">    </p:cNvPr>
           <p:cNvPicPr>
             <a:picLocks noChangeAspect="1"/>
           </p:cNvPicPr>
@@ -13692,7 +14877,7 @@
         </p:blipFill>
         <p:spPr>
           <a:xfrm rot="-432000">
-            <a:off x="5832829" y="5172685"/>
+            <a:off x="5836271" y="4728209"/>
             <a:ext cx="292100" cy="292100"/>
           </a:xfrm>
           <a:prstGeom prst="rect">
@@ -13702,14 +14887,14 @@
       </p:pic>
       <p:sp>
         <p:nvSpPr>
-          <p:cNvPr id="24" name="text-23"/>
+          <p:cNvPr id="27" name="text-26"/>
           <p:cNvSpPr txBox="1"/>
           <p:nvPr/>
         </p:nvSpPr>
         <p:spPr>
           <a:xfrm rot="48000">
-            <a:off x="680788" y="5384854"/>
-            <a:ext cx="5842508" cy="146050"/>
+            <a:off x="659186" y="4914980"/>
+            <a:ext cx="5896356" cy="146050"/>
           </a:xfrm>
           <a:prstGeom prst="rect">
             <a:avLst/>
@@ -13736,7 +14921,7 @@
                 <a:ea typeface="IBM Plex Mono" pitchFamily="34" charset="-122"/>
                 <a:cs typeface="IBM Plex Mono" pitchFamily="34" charset="-120"/>
               </a:rPr>
-              <a:t>ПОРТФОЛИО · 17 ЖАС</a:t>
+              <a:t>ПОРТФОЛИО · 18 ЖАС</a:t>
             </a:r>
             <a:endParaRPr lang="en-US" sz="900" dirty="0"/>
           </a:p>
@@ -13744,7 +14929,7 @@
       </p:sp>
       <p:pic>
         <p:nvPicPr>
-          <p:cNvPr id="25" name="svg-24" descr="preencoded.png">    </p:cNvPr>
+          <p:cNvPr id="28" name="svg-27" descr="preencoded.png">    </p:cNvPr>
           <p:cNvPicPr>
             <a:picLocks noChangeAspect="1"/>
           </p:cNvPicPr>
@@ -13758,7 +14943,7 @@
         </p:blipFill>
         <p:spPr>
           <a:xfrm rot="48000">
-            <a:off x="677723" y="5563582"/>
+            <a:off x="656123" y="5093354"/>
             <a:ext cx="190500" cy="190500"/>
           </a:xfrm>
           <a:prstGeom prst="rect">
@@ -13768,33 +14953,33 @@
       </p:pic>
       <p:sp>
         <p:nvSpPr>
-          <p:cNvPr id="26" name="text-25"/>
+          <p:cNvPr id="29" name="text-28"/>
           <p:cNvSpPr txBox="1"/>
           <p:nvPr/>
         </p:nvSpPr>
         <p:spPr>
           <a:xfrm rot="48000">
-            <a:off x="932243" y="5590801"/>
-            <a:ext cx="4758817" cy="215900"/>
-          </a:xfrm>
-          <a:prstGeom prst="rect">
-            <a:avLst/>
-          </a:prstGeom>
-          <a:noFill/>
-          <a:ln/>
-        </p:spPr>
-        <p:txBody>
-          <a:bodyPr wrap="square" lIns="0" tIns="0" rIns="0" bIns="0" rtlCol="0" anchor="t"/>
-          <a:lstStyle/>
-          <a:p>
-            <a:pPr algn="l" indent="0" marL="0">
-              <a:lnSpc>
-                <a:spcPts val="1770"/>
-              </a:lnSpc>
-              <a:buNone/>
-            </a:pPr>
-            <a:r>
-              <a:rPr lang="en-US" sz="1300" dirty="0">
+            <a:off x="909503" y="5118162"/>
+            <a:ext cx="4395343" cy="196850"/>
+          </a:xfrm>
+          <a:prstGeom prst="rect">
+            <a:avLst/>
+          </a:prstGeom>
+          <a:noFill/>
+          <a:ln/>
+        </p:spPr>
+        <p:txBody>
+          <a:bodyPr wrap="square" lIns="0" tIns="0" rIns="0" bIns="0" rtlCol="0" anchor="t"/>
+          <a:lstStyle/>
+          <a:p>
+            <a:pPr algn="l" indent="0" marL="0">
+              <a:lnSpc>
+                <a:spcPts val="1610"/>
+              </a:lnSpc>
+              <a:buNone/>
+            </a:pPr>
+            <a:r>
+              <a:rPr lang="en-US" sz="1200" dirty="0">
                 <a:solidFill>
                   <a:srgbClr val="2B2A27"/>
                 </a:solidFill>
@@ -13804,39 +14989,39 @@
               </a:rPr>
               <a:t>Халықаралық химия олимпиадасы (IChO): алтын медаль.</a:t>
             </a:r>
-            <a:endParaRPr lang="en-US" sz="1300" dirty="0"/>
-          </a:p>
-        </p:txBody>
-      </p:sp>
-      <p:sp>
-        <p:nvSpPr>
-          <p:cNvPr id="27" name="text-26"/>
+            <a:endParaRPr lang="en-US" sz="1200" dirty="0"/>
+          </a:p>
+        </p:txBody>
+      </p:sp>
+      <p:sp>
+        <p:nvSpPr>
+          <p:cNvPr id="30" name="text-29"/>
           <p:cNvSpPr txBox="1"/>
           <p:nvPr/>
         </p:nvSpPr>
         <p:spPr>
           <a:xfrm rot="48000">
-            <a:off x="851093" y="5883524"/>
-            <a:ext cx="5654040" cy="222250"/>
-          </a:xfrm>
-          <a:prstGeom prst="rect">
-            <a:avLst/>
-          </a:prstGeom>
-          <a:noFill/>
-          <a:ln/>
-        </p:spPr>
-        <p:txBody>
-          <a:bodyPr wrap="square" lIns="0" tIns="0" rIns="0" bIns="0" rtlCol="0" anchor="t"/>
-          <a:lstStyle/>
-          <a:p>
-            <a:pPr algn="l" indent="0" marL="0">
-              <a:lnSpc>
-                <a:spcPts val="1770"/>
-              </a:lnSpc>
-              <a:buNone/>
-            </a:pPr>
-            <a:r>
-              <a:rPr lang="en-US" sz="1300" dirty="0">
+            <a:off x="828668" y="5380456"/>
+            <a:ext cx="5707888" cy="406400"/>
+          </a:xfrm>
+          <a:prstGeom prst="rect">
+            <a:avLst/>
+          </a:prstGeom>
+          <a:noFill/>
+          <a:ln/>
+        </p:spPr>
+        <p:txBody>
+          <a:bodyPr wrap="square" lIns="0" tIns="0" rIns="0" bIns="0" rtlCol="0" anchor="t"/>
+          <a:lstStyle/>
+          <a:p>
+            <a:pPr algn="l" indent="0" marL="0">
+              <a:lnSpc>
+                <a:spcPts val="1610"/>
+              </a:lnSpc>
+              <a:buNone/>
+            </a:pPr>
+            <a:r>
+              <a:rPr lang="en-US" sz="1200" dirty="0">
                 <a:solidFill>
                   <a:srgbClr val="2B2A27"/>
                 </a:solidFill>
@@ -13844,57 +15029,99 @@
                 <a:ea typeface="Geist" pitchFamily="34" charset="-122"/>
                 <a:cs typeface="Geist" pitchFamily="34" charset="-120"/>
               </a:rPr>
-              <a:t>Металлургия бойынша зерттеу жобасымен ISEF жеңімпазы.</a:t>
-            </a:r>
-            <a:endParaRPr lang="en-US" sz="1300" dirty="0"/>
-          </a:p>
-        </p:txBody>
-      </p:sp>
-      <p:sp>
-        <p:nvSpPr>
-          <p:cNvPr id="28" name="text-27"/>
+              <a:t>Химия бойынша зерттеу жобасымен ISEF жеңімпазы, арнайы номинацияның иегері.</a:t>
+            </a:r>
+            <a:endParaRPr lang="en-US" sz="1200" dirty="0"/>
+          </a:p>
+        </p:txBody>
+      </p:sp>
+      <p:sp>
+        <p:nvSpPr>
+          <p:cNvPr id="31" name="text-30"/>
           <p:cNvSpPr txBox="1"/>
           <p:nvPr/>
         </p:nvSpPr>
         <p:spPr>
           <a:xfrm rot="48000">
-            <a:off x="845504" y="6169483"/>
-            <a:ext cx="5654040" cy="450850"/>
-          </a:xfrm>
-          <a:prstGeom prst="rect">
-            <a:avLst/>
-          </a:prstGeom>
-          <a:noFill/>
-          <a:ln/>
-        </p:spPr>
-        <p:txBody>
-          <a:bodyPr wrap="square" lIns="0" tIns="0" rIns="0" bIns="0" rtlCol="0" anchor="t"/>
-          <a:lstStyle/>
-          <a:p>
-            <a:pPr algn="l" indent="0" marL="0">
-              <a:lnSpc>
-                <a:spcPts val="1770"/>
-              </a:lnSpc>
-              <a:buNone/>
-            </a:pPr>
-            <a:r>
-              <a:rPr lang="en-US" sz="1300" b="1" dirty="0">
-                <a:solidFill>
-                  <a:srgbClr val="0A0A0A"/>
+            <a:off x="820832" y="5840082"/>
+            <a:ext cx="5707888" cy="609600"/>
+          </a:xfrm>
+          <a:prstGeom prst="rect">
+            <a:avLst/>
+          </a:prstGeom>
+          <a:noFill/>
+          <a:ln/>
+        </p:spPr>
+        <p:txBody>
+          <a:bodyPr wrap="square" lIns="0" tIns="0" rIns="0" bIns="0" rtlCol="0" anchor="t"/>
+          <a:lstStyle/>
+          <a:p>
+            <a:pPr algn="l" indent="0" marL="0">
+              <a:lnSpc>
+                <a:spcPts val="1610"/>
+              </a:lnSpc>
+              <a:buNone/>
+            </a:pPr>
+            <a:r>
+              <a:rPr lang="en-US" sz="1200" dirty="0">
+                <a:solidFill>
+                  <a:srgbClr val="2B2A27"/>
                 </a:solidFill>
                 <a:latin typeface="Geist" pitchFamily="34" charset="0"/>
                 <a:ea typeface="Geist" pitchFamily="34" charset="-122"/>
                 <a:cs typeface="Geist" pitchFamily="34" charset="-120"/>
               </a:rPr>
+              <a:t>NU зерттеушілерімен бірге жаңа өндіріс тәсілдерін ұсынған. MIT профессорымен үш зерттеу жазып жатыр. RSI және YYGS бағдарламаларының түлегі.</a:t>
+            </a:r>
+            <a:endParaRPr lang="en-US" sz="1200" dirty="0"/>
+          </a:p>
+        </p:txBody>
+      </p:sp>
+      <p:sp>
+        <p:nvSpPr>
+          <p:cNvPr id="32" name="text-31"/>
+          <p:cNvSpPr txBox="1"/>
+          <p:nvPr/>
+        </p:nvSpPr>
+        <p:spPr>
+          <a:xfrm rot="48000">
+            <a:off x="814420" y="6502422"/>
+            <a:ext cx="5707888" cy="203200"/>
+          </a:xfrm>
+          <a:prstGeom prst="rect">
+            <a:avLst/>
+          </a:prstGeom>
+          <a:noFill/>
+          <a:ln/>
+        </p:spPr>
+        <p:txBody>
+          <a:bodyPr wrap="square" lIns="0" tIns="0" rIns="0" bIns="0" rtlCol="0" anchor="t"/>
+          <a:lstStyle/>
+          <a:p>
+            <a:pPr algn="l" indent="0" marL="0">
+              <a:lnSpc>
+                <a:spcPts val="1610"/>
+              </a:lnSpc>
+              <a:buNone/>
+            </a:pPr>
+            <a:r>
+              <a:rPr lang="en-US" sz="1200" b="1" dirty="0">
+                <a:solidFill>
+                  <a:srgbClr val="0A0A0A"/>
+                </a:solidFill>
+                <a:latin typeface="Geist" pitchFamily="34" charset="0"/>
+                <a:ea typeface="Geist" pitchFamily="34" charset="-122"/>
+                <a:cs typeface="Geist" pitchFamily="34" charset="-120"/>
+              </a:rPr>
               <a:t>Оқитын мамандығы: химиялық инженерия немесе материалтану.</a:t>
             </a:r>
-            <a:endParaRPr lang="en-US" sz="1300" dirty="0"/>
-          </a:p>
-        </p:txBody>
-      </p:sp>
-      <p:sp>
-        <p:nvSpPr>
-          <p:cNvPr id="29" name="text-28"/>
+            <a:endParaRPr lang="en-US" sz="1200" dirty="0"/>
+          </a:p>
+        </p:txBody>
+      </p:sp>
+      <p:sp>
+        <p:nvSpPr>
+          <p:cNvPr id="33" name="text-32"/>
           <p:cNvSpPr txBox="1"/>
           <p:nvPr/>
         </p:nvSpPr>
@@ -13936,7 +15163,7 @@
       </p:sp>
       <p:sp>
         <p:nvSpPr>
-          <p:cNvPr id="30" name="shape-29"/>
+          <p:cNvPr id="34" name="shape-33"/>
           <p:cNvSpPr/>
           <p:nvPr/>
         </p:nvSpPr>
@@ -13958,7 +15185,7 @@
       </p:sp>
       <p:sp>
         <p:nvSpPr>
-          <p:cNvPr id="31" name="text-30"/>
+          <p:cNvPr id="35" name="text-34"/>
           <p:cNvSpPr txBox="1"/>
           <p:nvPr/>
         </p:nvSpPr>
@@ -14000,7 +15227,7 @@
       </p:sp>
       <p:pic>
         <p:nvPicPr>
-          <p:cNvPr id="32" name="svg-31" descr="preencoded.png">    </p:cNvPr>
+          <p:cNvPr id="36" name="svg-35" descr="preencoded.png">    </p:cNvPr>
           <p:cNvPicPr>
             <a:picLocks noChangeAspect="1"/>
           </p:cNvPicPr>
@@ -14024,7 +15251,7 @@
       </p:pic>
       <p:sp>
         <p:nvSpPr>
-          <p:cNvPr id="33" name="text-32"/>
+          <p:cNvPr id="37" name="text-36"/>
           <p:cNvSpPr txBox="1"/>
           <p:nvPr/>
         </p:nvSpPr>
@@ -14319,14 +15546,140 @@
       </p:sp>
       <p:sp>
         <p:nvSpPr>
-          <p:cNvPr id="8" name="shape-7"/>
+          <p:cNvPr id="8" name="text-7"/>
+          <p:cNvSpPr txBox="1"/>
+          <p:nvPr/>
+        </p:nvSpPr>
+        <p:spPr>
+          <a:xfrm>
+            <a:off x="457200" y="2076053"/>
+            <a:ext cx="3769360" cy="146050"/>
+          </a:xfrm>
+          <a:prstGeom prst="rect">
+            <a:avLst/>
+          </a:prstGeom>
+          <a:noFill/>
+          <a:ln/>
+        </p:spPr>
+        <p:txBody>
+          <a:bodyPr wrap="square" lIns="0" tIns="0" rIns="0" bIns="0" rtlCol="0" anchor="t"/>
+          <a:lstStyle/>
+          <a:p>
+            <a:pPr algn="l" indent="0" marL="0">
+              <a:lnSpc>
+                <a:spcPts val="1080"/>
+              </a:lnSpc>
+              <a:buNone/>
+            </a:pPr>
+            <a:r>
+              <a:rPr lang="en-US" sz="900" spc="140" kern="0" dirty="0">
+                <a:solidFill>
+                  <a:srgbClr val="2338A0"/>
+                </a:solidFill>
+                <a:latin typeface="IBM Plex Mono" pitchFamily="34" charset="0"/>
+                <a:ea typeface="IBM Plex Mono" pitchFamily="34" charset="-122"/>
+                <a:cs typeface="IBM Plex Mono" pitchFamily="34" charset="-120"/>
+              </a:rPr>
+              <a:t>ТУҒАН ЖЕРІ</a:t>
+            </a:r>
+            <a:endParaRPr lang="en-US" sz="900" dirty="0"/>
+          </a:p>
+        </p:txBody>
+      </p:sp>
+      <p:sp>
+        <p:nvSpPr>
+          <p:cNvPr id="9" name="text-8"/>
+          <p:cNvSpPr txBox="1"/>
+          <p:nvPr/>
+        </p:nvSpPr>
+        <p:spPr>
+          <a:xfrm>
+            <a:off x="457200" y="2259558"/>
+            <a:ext cx="3769360" cy="215900"/>
+          </a:xfrm>
+          <a:prstGeom prst="rect">
+            <a:avLst/>
+          </a:prstGeom>
+          <a:noFill/>
+          <a:ln/>
+        </p:spPr>
+        <p:txBody>
+          <a:bodyPr wrap="square" lIns="0" tIns="0" rIns="0" bIns="0" rtlCol="0" anchor="t"/>
+          <a:lstStyle/>
+          <a:p>
+            <a:pPr algn="l" indent="0" marL="0">
+              <a:lnSpc>
+                <a:spcPts val="1690"/>
+              </a:lnSpc>
+              <a:buNone/>
+            </a:pPr>
+            <a:r>
+              <a:rPr lang="en-US" sz="1300" b="1" dirty="0">
+                <a:solidFill>
+                  <a:srgbClr val="0A0A0A"/>
+                </a:solidFill>
+                <a:latin typeface="Geist" pitchFamily="34" charset="0"/>
+                <a:ea typeface="Geist" pitchFamily="34" charset="-122"/>
+                <a:cs typeface="Geist" pitchFamily="34" charset="-120"/>
+              </a:rPr>
+              <a:t>1936 · Қостанай облысы, Қараоба ауылы</a:t>
+            </a:r>
+            <a:endParaRPr lang="en-US" sz="1300" dirty="0"/>
+          </a:p>
+        </p:txBody>
+      </p:sp>
+      <p:sp>
+        <p:nvSpPr>
+          <p:cNvPr id="10" name="text-9"/>
+          <p:cNvSpPr txBox="1"/>
+          <p:nvPr/>
+        </p:nvSpPr>
+        <p:spPr>
+          <a:xfrm>
+            <a:off x="457200" y="2514302"/>
+            <a:ext cx="3769360" cy="838200"/>
+          </a:xfrm>
+          <a:prstGeom prst="rect">
+            <a:avLst/>
+          </a:prstGeom>
+          <a:noFill/>
+          <a:ln/>
+        </p:spPr>
+        <p:txBody>
+          <a:bodyPr wrap="square" lIns="0" tIns="0" rIns="0" bIns="0" rtlCol="0" anchor="t"/>
+          <a:lstStyle/>
+          <a:p>
+            <a:pPr algn="l" indent="0" marL="0">
+              <a:lnSpc>
+                <a:spcPts val="1660"/>
+              </a:lnSpc>
+              <a:buNone/>
+            </a:pPr>
+            <a:r>
+              <a:rPr lang="en-US" sz="1200" dirty="0">
+                <a:solidFill>
+                  <a:srgbClr val="2B2A27"/>
+                </a:solidFill>
+                <a:latin typeface="Geist" pitchFamily="34" charset="0"/>
+                <a:ea typeface="Geist" pitchFamily="34" charset="-122"/>
+                <a:cs typeface="Geist" pitchFamily="34" charset="-120"/>
+              </a:rPr>
+              <a:t>Ата-анасы колхозда таңнан кешке дейін жұмыс істеген, баланы сөзбен емес, өз үлгісімен тәрбиелеген. 1944–1953 жылдары ауыл мектебінде оқыған.</a:t>
+            </a:r>
+            <a:endParaRPr lang="en-US" sz="1200" dirty="0"/>
+          </a:p>
+        </p:txBody>
+      </p:sp>
+      <p:sp>
+        <p:nvSpPr>
+          <p:cNvPr id="11" name="shape-10"/>
           <p:cNvSpPr/>
           <p:nvPr/>
         </p:nvSpPr>
         <p:spPr>
           <a:xfrm rot="-48000">
-            <a:off x="457200" y="3175248"/>
-            <a:ext cx="5943600" cy="1276350"/>
+            <a:off x="457200" y="3968353"/>
+            <a:ext cx="5943600" cy="1162050"/>
           </a:xfrm>
           <a:prstGeom prst="rect">
             <a:avLst/>
@@ -14346,13 +15699,13 @@
       </p:sp>
       <p:sp>
         <p:nvSpPr>
-          <p:cNvPr id="9" name="shape-8"/>
+          <p:cNvPr id="12" name="shape-11"/>
           <p:cNvSpPr/>
           <p:nvPr/>
         </p:nvSpPr>
         <p:spPr>
           <a:xfrm rot="-228000">
-            <a:off x="2944191" y="3060760"/>
+            <a:off x="2944998" y="3854504"/>
             <a:ext cx="952500" cy="279400"/>
           </a:xfrm>
           <a:prstGeom prst="rect">
@@ -14368,14 +15721,14 @@
       </p:sp>
       <p:sp>
         <p:nvSpPr>
-          <p:cNvPr id="10" name="text-9"/>
+          <p:cNvPr id="13" name="text-12"/>
           <p:cNvSpPr txBox="1"/>
           <p:nvPr/>
         </p:nvSpPr>
         <p:spPr>
           <a:xfrm rot="-48000">
-            <a:off x="654811" y="3340139"/>
-            <a:ext cx="5869432" cy="146050"/>
+            <a:off x="642563" y="4108486"/>
+            <a:ext cx="5896356" cy="146050"/>
           </a:xfrm>
           <a:prstGeom prst="rect">
             <a:avLst/>
@@ -14410,33 +15763,33 @@
       </p:sp>
       <p:sp>
         <p:nvSpPr>
-          <p:cNvPr id="11" name="text-10"/>
+          <p:cNvPr id="14" name="text-13"/>
           <p:cNvSpPr txBox="1"/>
           <p:nvPr/>
         </p:nvSpPr>
         <p:spPr>
           <a:xfrm rot="-48000">
-            <a:off x="836085" y="3550806"/>
-            <a:ext cx="5680964" cy="222250"/>
-          </a:xfrm>
-          <a:prstGeom prst="rect">
-            <a:avLst/>
-          </a:prstGeom>
-          <a:noFill/>
-          <a:ln/>
-        </p:spPr>
-        <p:txBody>
-          <a:bodyPr wrap="square" lIns="0" tIns="0" rIns="0" bIns="0" rtlCol="0" anchor="t"/>
-          <a:lstStyle/>
-          <a:p>
-            <a:pPr algn="l" indent="0" marL="0">
-              <a:lnSpc>
-                <a:spcPts val="1770"/>
-              </a:lnSpc>
-              <a:buNone/>
-            </a:pPr>
-            <a:r>
-              <a:rPr lang="en-US" sz="1300" dirty="0">
+            <a:off x="823716" y="4316822"/>
+            <a:ext cx="5707888" cy="209550"/>
+          </a:xfrm>
+          <a:prstGeom prst="rect">
+            <a:avLst/>
+          </a:prstGeom>
+          <a:noFill/>
+          <a:ln/>
+        </p:spPr>
+        <p:txBody>
+          <a:bodyPr wrap="square" lIns="0" tIns="0" rIns="0" bIns="0" rtlCol="0" anchor="t"/>
+          <a:lstStyle/>
+          <a:p>
+            <a:pPr algn="l" indent="0" marL="0">
+              <a:lnSpc>
+                <a:spcPts val="1630"/>
+              </a:lnSpc>
+              <a:buNone/>
+            </a:pPr>
+            <a:r>
+              <a:rPr lang="en-US" sz="1200" dirty="0">
                 <a:solidFill>
                   <a:srgbClr val="2B2A27"/>
                 </a:solidFill>
@@ -14446,39 +15799,39 @@
               </a:rPr>
               <a:t>ҚазМУ-дың механика-математика факультетін бітірген.</a:t>
             </a:r>
-            <a:endParaRPr lang="en-US" sz="1300" dirty="0"/>
-          </a:p>
-        </p:txBody>
-      </p:sp>
-      <p:sp>
-        <p:nvSpPr>
-          <p:cNvPr id="12" name="text-11"/>
+            <a:endParaRPr lang="en-US" sz="1200" dirty="0"/>
+          </a:p>
+        </p:txBody>
+      </p:sp>
+      <p:sp>
+        <p:nvSpPr>
+          <p:cNvPr id="15" name="text-14"/>
           <p:cNvSpPr txBox="1"/>
           <p:nvPr/>
         </p:nvSpPr>
         <p:spPr>
           <a:xfrm rot="-48000">
-            <a:off x="841674" y="3836765"/>
-            <a:ext cx="5680964" cy="450850"/>
-          </a:xfrm>
-          <a:prstGeom prst="rect">
-            <a:avLst/>
-          </a:prstGeom>
-          <a:noFill/>
-          <a:ln/>
-        </p:spPr>
-        <p:txBody>
-          <a:bodyPr wrap="square" lIns="0" tIns="0" rIns="0" bIns="0" rtlCol="0" anchor="t"/>
-          <a:lstStyle/>
-          <a:p>
-            <a:pPr algn="l" indent="0" marL="0">
-              <a:lnSpc>
-                <a:spcPts val="1770"/>
-              </a:lnSpc>
-              <a:buNone/>
-            </a:pPr>
-            <a:r>
-              <a:rPr lang="en-US" sz="1300" dirty="0">
+            <a:off x="828941" y="4589438"/>
+            <a:ext cx="5707888" cy="412750"/>
+          </a:xfrm>
+          <a:prstGeom prst="rect">
+            <a:avLst/>
+          </a:prstGeom>
+          <a:noFill/>
+          <a:ln/>
+        </p:spPr>
+        <p:txBody>
+          <a:bodyPr wrap="square" lIns="0" tIns="0" rIns="0" bIns="0" rtlCol="0" anchor="t"/>
+          <a:lstStyle/>
+          <a:p>
+            <a:pPr algn="l" indent="0" marL="0">
+              <a:lnSpc>
+                <a:spcPts val="1630"/>
+              </a:lnSpc>
+              <a:buNone/>
+            </a:pPr>
+            <a:r>
+              <a:rPr lang="en-US" sz="1200" dirty="0">
                 <a:solidFill>
                   <a:srgbClr val="2B2A27"/>
                 </a:solidFill>
@@ -14488,24 +15841,24 @@
               </a:rPr>
               <a:t>1988–1994 жылдары Ғылым академиясының президенті, 1991 жылдан Ғарыштық зерттеулер институтының директоры.</a:t>
             </a:r>
-            <a:endParaRPr lang="en-US" sz="1300" dirty="0"/>
-          </a:p>
-        </p:txBody>
-      </p:sp>
-      <p:sp>
-        <p:nvSpPr>
-          <p:cNvPr id="13" name="shape-12"/>
+            <a:endParaRPr lang="en-US" sz="1200" dirty="0"/>
+          </a:p>
+        </p:txBody>
+      </p:sp>
+      <p:sp>
+        <p:nvSpPr>
+          <p:cNvPr id="16" name="shape-15"/>
           <p:cNvSpPr/>
           <p:nvPr/>
         </p:nvSpPr>
         <p:spPr>
           <a:xfrm rot="48000">
-            <a:off x="457200" y="4589959"/>
-            <a:ext cx="5943600" cy="1441450"/>
+            <a:off x="457200" y="5231209"/>
+            <a:ext cx="5943600" cy="1060450"/>
           </a:xfrm>
           <a:prstGeom prst="roundRect">
             <a:avLst>
-              <a:gd name="adj" fmla="val 11454"/>
+              <a:gd name="adj" fmla="val 15569"/>
             </a:avLst>
           </a:prstGeom>
           <a:solidFill>
@@ -14521,14 +15874,14 @@
       </p:sp>
       <p:sp>
         <p:nvSpPr>
-          <p:cNvPr id="14" name="text-13"/>
+          <p:cNvPr id="17" name="text-16"/>
           <p:cNvSpPr txBox="1"/>
           <p:nvPr/>
         </p:nvSpPr>
         <p:spPr>
           <a:xfrm rot="48000">
-            <a:off x="679816" y="4756693"/>
-            <a:ext cx="5842508" cy="146050"/>
+            <a:off x="665005" y="5358638"/>
+            <a:ext cx="5869432" cy="146050"/>
           </a:xfrm>
           <a:prstGeom prst="rect">
             <a:avLst/>
@@ -14563,33 +15916,33 @@
       </p:sp>
       <p:sp>
         <p:nvSpPr>
-          <p:cNvPr id="15" name="text-14"/>
+          <p:cNvPr id="18" name="text-17"/>
           <p:cNvSpPr txBox="1"/>
           <p:nvPr/>
         </p:nvSpPr>
         <p:spPr>
           <a:xfrm rot="48000">
-            <a:off x="671726" y="4951899"/>
-            <a:ext cx="5842508" cy="914400"/>
-          </a:xfrm>
-          <a:prstGeom prst="rect">
-            <a:avLst/>
-          </a:prstGeom>
-          <a:noFill/>
-          <a:ln/>
-        </p:spPr>
-        <p:txBody>
-          <a:bodyPr wrap="square" lIns="0" tIns="0" rIns="0" bIns="0" rtlCol="0" anchor="t"/>
-          <a:lstStyle/>
-          <a:p>
-            <a:pPr algn="l" indent="0" marL="0">
-              <a:lnSpc>
-                <a:spcPts val="1790"/>
-              </a:lnSpc>
-              <a:buNone/>
-            </a:pPr>
-            <a:r>
-              <a:rPr lang="en-US" sz="1300" dirty="0">
+            <a:off x="659114" y="5542350"/>
+            <a:ext cx="5869432" cy="622300"/>
+          </a:xfrm>
+          <a:prstGeom prst="rect">
+            <a:avLst/>
+          </a:prstGeom>
+          <a:noFill/>
+          <a:ln/>
+        </p:spPr>
+        <p:txBody>
+          <a:bodyPr wrap="square" lIns="0" tIns="0" rIns="0" bIns="0" rtlCol="0" anchor="t"/>
+          <a:lstStyle/>
+          <a:p>
+            <a:pPr algn="l" indent="0" marL="0">
+              <a:lnSpc>
+                <a:spcPts val="1630"/>
+              </a:lnSpc>
+              <a:buNone/>
+            </a:pPr>
+            <a:r>
+              <a:rPr lang="en-US" sz="1200" dirty="0">
                 <a:solidFill>
                   <a:srgbClr val="0A0A0A"/>
                 </a:solidFill>
@@ -14597,26 +15950,26 @@
                 <a:ea typeface="Geist" pitchFamily="34" charset="-122"/>
                 <a:cs typeface="Geist" pitchFamily="34" charset="-120"/>
               </a:rPr>
-              <a:t>Қараоба ауылының мектебінде мұғалімі, Берлин түбінде ауыр жараланған майдангер Мырзағали Қарсақбаев, қабілетті оқушылармен сабақтан кейін есеп шығарған. Сол мектептен 5 академик шыққан.</a:t>
-            </a:r>
-            <a:endParaRPr lang="en-US" sz="1300" dirty="0"/>
-          </a:p>
-        </p:txBody>
-      </p:sp>
-      <p:sp>
-        <p:nvSpPr>
-          <p:cNvPr id="16" name="shape-15"/>
+              <a:t>Мұғалімі, Берлин түбінде ауыр жараланған майдангер Мырзағали Қарсақбаев, қабілетті оқушылармен сабақтан кейін есеп шығарған. Сол мектептен 5 академик шыққан.</a:t>
+            </a:r>
+            <a:endParaRPr lang="en-US" sz="1200" dirty="0"/>
+          </a:p>
+        </p:txBody>
+      </p:sp>
+      <p:sp>
+        <p:nvSpPr>
+          <p:cNvPr id="19" name="shape-18"/>
           <p:cNvSpPr/>
           <p:nvPr/>
         </p:nvSpPr>
         <p:spPr>
           <a:xfrm rot="-36000">
-            <a:off x="457200" y="6168727"/>
-            <a:ext cx="5943600" cy="933450"/>
+            <a:off x="457200" y="6391672"/>
+            <a:ext cx="5943600" cy="596900"/>
           </a:xfrm>
           <a:prstGeom prst="roundRect">
             <a:avLst>
-              <a:gd name="adj" fmla="val 17687"/>
+              <a:gd name="adj" fmla="val 27660"/>
             </a:avLst>
           </a:prstGeom>
           <a:solidFill>
@@ -14627,14 +15980,14 @@
       </p:sp>
       <p:sp>
         <p:nvSpPr>
-          <p:cNvPr id="17" name="text-16"/>
+          <p:cNvPr id="20" name="text-19"/>
           <p:cNvSpPr txBox="1"/>
           <p:nvPr/>
         </p:nvSpPr>
         <p:spPr>
           <a:xfrm rot="-36000">
-            <a:off x="657749" y="6309235"/>
-            <a:ext cx="5869432" cy="146050"/>
+            <a:off x="646416" y="6494469"/>
+            <a:ext cx="5896356" cy="146050"/>
           </a:xfrm>
           <a:prstGeom prst="rect">
             <a:avLst/>
@@ -14669,33 +16022,33 @@
       </p:sp>
       <p:sp>
         <p:nvSpPr>
-          <p:cNvPr id="18" name="text-17"/>
+          <p:cNvPr id="21" name="text-20"/>
           <p:cNvSpPr txBox="1"/>
           <p:nvPr/>
         </p:nvSpPr>
         <p:spPr>
           <a:xfrm rot="-36000">
-            <a:off x="661431" y="6505272"/>
-            <a:ext cx="5869432" cy="457200"/>
-          </a:xfrm>
-          <a:prstGeom prst="rect">
-            <a:avLst/>
-          </a:prstGeom>
-          <a:noFill/>
-          <a:ln/>
-        </p:spPr>
-        <p:txBody>
-          <a:bodyPr wrap="square" lIns="0" tIns="0" rIns="0" bIns="0" rtlCol="0" anchor="t"/>
-          <a:lstStyle/>
-          <a:p>
-            <a:pPr algn="l" indent="0" marL="0">
-              <a:lnSpc>
-                <a:spcPts val="1790"/>
-              </a:lnSpc>
-              <a:buNone/>
-            </a:pPr>
-            <a:r>
-              <a:rPr lang="en-US" sz="1300" dirty="0">
+            <a:off x="648664" y="6677417"/>
+            <a:ext cx="5896356" cy="209550"/>
+          </a:xfrm>
+          <a:prstGeom prst="rect">
+            <a:avLst/>
+          </a:prstGeom>
+          <a:noFill/>
+          <a:ln/>
+        </p:spPr>
+        <p:txBody>
+          <a:bodyPr wrap="square" lIns="0" tIns="0" rIns="0" bIns="0" rtlCol="0" anchor="t"/>
+          <a:lstStyle/>
+          <a:p>
+            <a:pPr algn="l" indent="0" marL="0">
+              <a:lnSpc>
+                <a:spcPts val="1630"/>
+              </a:lnSpc>
+              <a:buNone/>
+            </a:pPr>
+            <a:r>
+              <a:rPr lang="en-US" sz="1200" dirty="0">
                 <a:solidFill>
                   <a:srgbClr val="FAF8F3"/>
                 </a:solidFill>
@@ -14703,15 +16056,15 @@
                 <a:ea typeface="Geist" pitchFamily="34" charset="-122"/>
                 <a:cs typeface="Geist" pitchFamily="34" charset="-120"/>
               </a:rPr>
-              <a:t>Балалығы соғыстан кейінгі ауыр жылдарға тап келген. Ата-анасы колхозда таңнан кешке дейін жұмыс істеген.</a:t>
-            </a:r>
-            <a:endParaRPr lang="en-US" sz="1300" dirty="0"/>
-          </a:p>
-        </p:txBody>
-      </p:sp>
-      <p:sp>
-        <p:nvSpPr>
-          <p:cNvPr id="19" name="text-18"/>
+              <a:t>Балалығы соғыс және соғыстан кейінгі ауыр жылдарға тап келген.</a:t>
+            </a:r>
+            <a:endParaRPr lang="en-US" sz="1200" dirty="0"/>
+          </a:p>
+        </p:txBody>
+      </p:sp>
+      <p:sp>
+        <p:nvSpPr>
+          <p:cNvPr id="22" name="text-21"/>
           <p:cNvSpPr txBox="1"/>
           <p:nvPr/>
         </p:nvSpPr>
@@ -14753,7 +16106,7 @@
       </p:sp>
       <p:sp>
         <p:nvSpPr>
-          <p:cNvPr id="20" name="shape-19"/>
+          <p:cNvPr id="23" name="shape-22"/>
           <p:cNvSpPr/>
           <p:nvPr/>
         </p:nvSpPr>
@@ -14775,7 +16128,7 @@
       </p:sp>
       <p:sp>
         <p:nvSpPr>
-          <p:cNvPr id="21" name="text-20"/>
+          <p:cNvPr id="24" name="text-23"/>
           <p:cNvSpPr txBox="1"/>
           <p:nvPr/>
         </p:nvSpPr>
@@ -14817,7 +16170,7 @@
       </p:sp>
       <p:pic>
         <p:nvPicPr>
-          <p:cNvPr id="22" name="svg-21" descr="preencoded.png">    </p:cNvPr>
+          <p:cNvPr id="25" name="svg-24" descr="preencoded.png">    </p:cNvPr>
           <p:cNvPicPr>
             <a:picLocks noChangeAspect="1"/>
           </p:cNvPicPr>
@@ -14841,7 +16194,7 @@
       </p:pic>
       <p:sp>
         <p:nvSpPr>
-          <p:cNvPr id="23" name="shape-22"/>
+          <p:cNvPr id="26" name="shape-25"/>
           <p:cNvSpPr/>
           <p:nvPr/>
         </p:nvSpPr>
@@ -14868,7 +16221,7 @@
       </p:sp>
       <p:sp>
         <p:nvSpPr>
-          <p:cNvPr id="24" name="shape-23"/>
+          <p:cNvPr id="27" name="shape-26"/>
           <p:cNvSpPr/>
           <p:nvPr/>
         </p:nvSpPr>
@@ -14890,7 +16243,7 @@
       </p:sp>
       <p:pic>
         <p:nvPicPr>
-          <p:cNvPr id="25" name="img-24" descr="preencoded.png">    </p:cNvPr>
+          <p:cNvPr id="28" name="img-27" descr="preencoded.png">    </p:cNvPr>
           <p:cNvPicPr>
             <a:picLocks noChangeAspect="1"/>
           </p:cNvPicPr>
@@ -14914,7 +16267,7 @@
       </p:pic>
       <p:sp>
         <p:nvSpPr>
-          <p:cNvPr id="26" name="text-25"/>
+          <p:cNvPr id="29" name="text-28"/>
           <p:cNvSpPr txBox="1"/>
           <p:nvPr/>
         </p:nvSpPr>
@@ -14956,7 +16309,7 @@
       </p:sp>
       <p:sp>
         <p:nvSpPr>
-          <p:cNvPr id="27" name="text-26"/>
+          <p:cNvPr id="30" name="text-29"/>
           <p:cNvSpPr txBox="1"/>
           <p:nvPr/>
         </p:nvSpPr>
